--- a/APIM-Target-Architecture.pptx
+++ b/APIM-Target-Architecture.pptx
@@ -16,9 +16,9 @@
     <p:sldId id="260" r:id="rId7"/>
     <p:sldId id="261" r:id="rId8"/>
     <p:sldId id="265" r:id="rId9"/>
-    <p:sldId id="262" r:id="rId10"/>
-    <p:sldId id="263" r:id="rId11"/>
-    <p:sldId id="264" r:id="rId12"/>
+    <p:sldId id="263" r:id="rId10"/>
+    <p:sldId id="264" r:id="rId11"/>
+    <p:sldId id="262" r:id="rId12"/>
   </p:sldIdLst>
   <p:sldSz cx="12192000" cy="6858000"/>
   <p:notesSz cx="6858000" cy="12192000"/>
@@ -117,22 +117,1264 @@
       </a:defRPr>
     </a:lvl9pPr>
   </p:defaultTextStyle>
-  <p:extLst>
-    <p:ext uri="{EFAFB233-063F-42B5-8137-9DF3F51BA10A}">
-      <p15:sldGuideLst xmlns:p15="http://schemas.microsoft.com/office/powerpoint/2012/main"/>
-    </p:ext>
-  </p:extLst>
 </p:presentation>
 </file>
 
 <file path=ppt/revisionInfo.xml><?xml version="1.0" encoding="utf-8"?>
 <p1510:revInfo xmlns:a="http://schemas.openxmlformats.org/drawingml/2006/main" xmlns:r="http://schemas.openxmlformats.org/officeDocument/2006/relationships" xmlns:p1510="http://schemas.microsoft.com/office/powerpoint/2015/10/main">
   <p1510:revLst>
-    <p1510:client id="{2212EBE8-5CAC-B1C3-4280-693B2DB146A5}" v="41" dt="2026-09-22T17:56:52.623"/>
-    <p1510:client id="{6F564A72-6055-41CE-A404-23964EFAFFF2}" v="2031" dt="2026-09-22T16:16:29.644"/>
-    <p1510:client id="{815FA138-CA79-4562-8F6D-58E85FC7DA3A}" v="114" dt="2026-09-22T18:00:27.263"/>
+    <p1510:client id="{6F564A72-6055-41CE-A404-23964EFAFFF2}" v="2139" dt="2026-09-24T09:20:50.815"/>
+    <p1510:client id="{BBC2368C-76DC-4A2E-B659-1D1C72B721A9}" v="51" dt="2026-09-23T08:45:31.322"/>
   </p1510:revLst>
 </p1510:revInfo>
+</file>
+
+<file path=ppt/changesInfos/changesInfo1.xml><?xml version="1.0" encoding="utf-8"?>
+<pc:chgInfo xmlns:a="http://schemas.openxmlformats.org/drawingml/2006/main" xmlns:r="http://schemas.openxmlformats.org/officeDocument/2006/relationships" xmlns:ac="http://schemas.microsoft.com/office/drawing/2013/main/command" xmlns:pc="http://schemas.microsoft.com/office/powerpoint/2013/main/command">
+  <pc:docChgLst>
+    <pc:chgData name="Nikhil Rokade - Chaucer" userId="25fe8af0-bad5-4ed7-9395-1cf3269e2cf8" providerId="ADAL" clId="{2018398A-FD1D-4015-8C2C-832A22CC8DF5}"/>
+    <pc:docChg chg="undo custSel modSld">
+      <pc:chgData name="Nikhil Rokade - Chaucer" userId="25fe8af0-bad5-4ed7-9395-1cf3269e2cf8" providerId="ADAL" clId="{2018398A-FD1D-4015-8C2C-832A22CC8DF5}" dt="2026-09-23T08:45:31.322" v="50" actId="22"/>
+      <pc:docMkLst>
+        <pc:docMk/>
+      </pc:docMkLst>
+      <pc:sldChg chg="modSp mod">
+        <pc:chgData name="Nikhil Rokade - Chaucer" userId="25fe8af0-bad5-4ed7-9395-1cf3269e2cf8" providerId="ADAL" clId="{2018398A-FD1D-4015-8C2C-832A22CC8DF5}" dt="2026-09-23T08:42:09.026" v="48" actId="20577"/>
+        <pc:sldMkLst>
+          <pc:docMk/>
+          <pc:sldMk cId="0" sldId="261"/>
+        </pc:sldMkLst>
+        <pc:spChg chg="mod">
+          <ac:chgData name="Nikhil Rokade - Chaucer" userId="25fe8af0-bad5-4ed7-9395-1cf3269e2cf8" providerId="ADAL" clId="{2018398A-FD1D-4015-8C2C-832A22CC8DF5}" dt="2026-09-23T08:41:06.008" v="20" actId="20577"/>
+          <ac:spMkLst>
+            <pc:docMk/>
+            <pc:sldMk cId="0" sldId="261"/>
+            <ac:spMk id="20" creationId="{00000000-0000-0000-0000-000000000000}"/>
+          </ac:spMkLst>
+        </pc:spChg>
+        <pc:spChg chg="mod">
+          <ac:chgData name="Nikhil Rokade - Chaucer" userId="25fe8af0-bad5-4ed7-9395-1cf3269e2cf8" providerId="ADAL" clId="{2018398A-FD1D-4015-8C2C-832A22CC8DF5}" dt="2026-09-23T08:42:09.026" v="48" actId="20577"/>
+          <ac:spMkLst>
+            <pc:docMk/>
+            <pc:sldMk cId="0" sldId="261"/>
+            <ac:spMk id="60" creationId="{06393D4B-63A7-D7DD-6C0D-7F762FA1375B}"/>
+          </ac:spMkLst>
+        </pc:spChg>
+      </pc:sldChg>
+      <pc:sldChg chg="addSp delSp mod">
+        <pc:chgData name="Nikhil Rokade - Chaucer" userId="25fe8af0-bad5-4ed7-9395-1cf3269e2cf8" providerId="ADAL" clId="{2018398A-FD1D-4015-8C2C-832A22CC8DF5}" dt="2026-09-23T08:45:31.322" v="50" actId="22"/>
+        <pc:sldMkLst>
+          <pc:docMk/>
+          <pc:sldMk cId="0" sldId="262"/>
+        </pc:sldMkLst>
+        <pc:spChg chg="add del">
+          <ac:chgData name="Nikhil Rokade - Chaucer" userId="25fe8af0-bad5-4ed7-9395-1cf3269e2cf8" providerId="ADAL" clId="{2018398A-FD1D-4015-8C2C-832A22CC8DF5}" dt="2026-09-23T08:45:31.322" v="50" actId="22"/>
+          <ac:spMkLst>
+            <pc:docMk/>
+            <pc:sldMk cId="0" sldId="262"/>
+            <ac:spMk id="28" creationId="{EE395846-0D8E-A286-7157-9CB54FEAA243}"/>
+          </ac:spMkLst>
+        </pc:spChg>
+      </pc:sldChg>
+    </pc:docChg>
+  </pc:docChgLst>
+  <pc:docChgLst>
+    <pc:chgData name="Puneet Kumar - Chaucer" userId="090bd223-6cda-4aec-ba5f-32ca554a1dde" providerId="ADAL" clId="{ABBA0AF5-969F-4EB8-A190-2918F757DA66}"/>
+    <pc:docChg chg="undo custSel addSld delSld modSld sldOrd">
+      <pc:chgData name="Puneet Kumar - Chaucer" userId="090bd223-6cda-4aec-ba5f-32ca554a1dde" providerId="ADAL" clId="{ABBA0AF5-969F-4EB8-A190-2918F757DA66}" dt="2026-09-24T09:20:50.815" v="2204" actId="20577"/>
+      <pc:docMkLst>
+        <pc:docMk/>
+      </pc:docMkLst>
+      <pc:sldChg chg="modSp mod">
+        <pc:chgData name="Puneet Kumar - Chaucer" userId="090bd223-6cda-4aec-ba5f-32ca554a1dde" providerId="ADAL" clId="{ABBA0AF5-969F-4EB8-A190-2918F757DA66}" dt="2026-09-24T09:20:50.815" v="2204" actId="20577"/>
+        <pc:sldMkLst>
+          <pc:docMk/>
+          <pc:sldMk cId="0" sldId="256"/>
+        </pc:sldMkLst>
+        <pc:spChg chg="mod">
+          <ac:chgData name="Puneet Kumar - Chaucer" userId="090bd223-6cda-4aec-ba5f-32ca554a1dde" providerId="ADAL" clId="{ABBA0AF5-969F-4EB8-A190-2918F757DA66}" dt="2026-09-24T09:19:15.450" v="2185" actId="1076"/>
+          <ac:spMkLst>
+            <pc:docMk/>
+            <pc:sldMk cId="0" sldId="256"/>
+            <ac:spMk id="3" creationId="{00000000-0000-0000-0000-000000000000}"/>
+          </ac:spMkLst>
+        </pc:spChg>
+        <pc:spChg chg="mod">
+          <ac:chgData name="Puneet Kumar - Chaucer" userId="090bd223-6cda-4aec-ba5f-32ca554a1dde" providerId="ADAL" clId="{ABBA0AF5-969F-4EB8-A190-2918F757DA66}" dt="2026-09-24T09:20:50.815" v="2204" actId="20577"/>
+          <ac:spMkLst>
+            <pc:docMk/>
+            <pc:sldMk cId="0" sldId="256"/>
+            <ac:spMk id="4" creationId="{00000000-0000-0000-0000-000000000000}"/>
+          </ac:spMkLst>
+        </pc:spChg>
+      </pc:sldChg>
+      <pc:sldChg chg="addSp delSp modSp mod">
+        <pc:chgData name="Puneet Kumar - Chaucer" userId="090bd223-6cda-4aec-ba5f-32ca554a1dde" providerId="ADAL" clId="{ABBA0AF5-969F-4EB8-A190-2918F757DA66}" dt="2026-09-23T06:20:57.926" v="2100" actId="20577"/>
+        <pc:sldMkLst>
+          <pc:docMk/>
+          <pc:sldMk cId="0" sldId="258"/>
+        </pc:sldMkLst>
+        <pc:spChg chg="mod">
+          <ac:chgData name="Puneet Kumar - Chaucer" userId="090bd223-6cda-4aec-ba5f-32ca554a1dde" providerId="ADAL" clId="{ABBA0AF5-969F-4EB8-A190-2918F757DA66}" dt="2026-09-23T06:20:57.926" v="2100" actId="20577"/>
+          <ac:spMkLst>
+            <pc:docMk/>
+            <pc:sldMk cId="0" sldId="258"/>
+            <ac:spMk id="6" creationId="{00000000-0000-0000-0000-000000000000}"/>
+          </ac:spMkLst>
+        </pc:spChg>
+        <pc:spChg chg="mod">
+          <ac:chgData name="Puneet Kumar - Chaucer" userId="090bd223-6cda-4aec-ba5f-32ca554a1dde" providerId="ADAL" clId="{ABBA0AF5-969F-4EB8-A190-2918F757DA66}" dt="2026-09-23T06:20:33.535" v="2099"/>
+          <ac:spMkLst>
+            <pc:docMk/>
+            <pc:sldMk cId="0" sldId="258"/>
+            <ac:spMk id="13" creationId="{00000000-0000-0000-0000-000000000000}"/>
+          </ac:spMkLst>
+        </pc:spChg>
+        <pc:spChg chg="mod">
+          <ac:chgData name="Puneet Kumar - Chaucer" userId="090bd223-6cda-4aec-ba5f-32ca554a1dde" providerId="ADAL" clId="{ABBA0AF5-969F-4EB8-A190-2918F757DA66}" dt="2026-09-22T16:13:53.972" v="2025" actId="255"/>
+          <ac:spMkLst>
+            <pc:docMk/>
+            <pc:sldMk cId="0" sldId="258"/>
+            <ac:spMk id="14" creationId="{00000000-0000-0000-0000-000000000000}"/>
+          </ac:spMkLst>
+        </pc:spChg>
+        <pc:spChg chg="mod">
+          <ac:chgData name="Puneet Kumar - Chaucer" userId="090bd223-6cda-4aec-ba5f-32ca554a1dde" providerId="ADAL" clId="{ABBA0AF5-969F-4EB8-A190-2918F757DA66}" dt="2026-09-22T16:17:20.178" v="2042" actId="14100"/>
+          <ac:spMkLst>
+            <pc:docMk/>
+            <pc:sldMk cId="0" sldId="258"/>
+            <ac:spMk id="15" creationId="{00000000-0000-0000-0000-000000000000}"/>
+          </ac:spMkLst>
+        </pc:spChg>
+        <pc:spChg chg="mod">
+          <ac:chgData name="Puneet Kumar - Chaucer" userId="090bd223-6cda-4aec-ba5f-32ca554a1dde" providerId="ADAL" clId="{ABBA0AF5-969F-4EB8-A190-2918F757DA66}" dt="2026-09-22T16:17:15.712" v="2041" actId="14100"/>
+          <ac:spMkLst>
+            <pc:docMk/>
+            <pc:sldMk cId="0" sldId="258"/>
+            <ac:spMk id="16" creationId="{00000000-0000-0000-0000-000000000000}"/>
+          </ac:spMkLst>
+        </pc:spChg>
+        <pc:spChg chg="mod">
+          <ac:chgData name="Puneet Kumar - Chaucer" userId="090bd223-6cda-4aec-ba5f-32ca554a1dde" providerId="ADAL" clId="{ABBA0AF5-969F-4EB8-A190-2918F757DA66}" dt="2026-09-22T16:16:49.620" v="2034" actId="1076"/>
+          <ac:spMkLst>
+            <pc:docMk/>
+            <pc:sldMk cId="0" sldId="258"/>
+            <ac:spMk id="22" creationId="{00000000-0000-0000-0000-000000000000}"/>
+          </ac:spMkLst>
+        </pc:spChg>
+        <pc:spChg chg="mod">
+          <ac:chgData name="Puneet Kumar - Chaucer" userId="090bd223-6cda-4aec-ba5f-32ca554a1dde" providerId="ADAL" clId="{ABBA0AF5-969F-4EB8-A190-2918F757DA66}" dt="2026-09-22T16:16:54.042" v="2035" actId="1076"/>
+          <ac:spMkLst>
+            <pc:docMk/>
+            <pc:sldMk cId="0" sldId="258"/>
+            <ac:spMk id="23" creationId="{00000000-0000-0000-0000-000000000000}"/>
+          </ac:spMkLst>
+        </pc:spChg>
+        <pc:spChg chg="mod">
+          <ac:chgData name="Puneet Kumar - Chaucer" userId="090bd223-6cda-4aec-ba5f-32ca554a1dde" providerId="ADAL" clId="{ABBA0AF5-969F-4EB8-A190-2918F757DA66}" dt="2026-09-22T16:16:34.988" v="2031" actId="14100"/>
+          <ac:spMkLst>
+            <pc:docMk/>
+            <pc:sldMk cId="0" sldId="258"/>
+            <ac:spMk id="24" creationId="{00000000-0000-0000-0000-000000000000}"/>
+          </ac:spMkLst>
+        </pc:spChg>
+        <pc:spChg chg="mod">
+          <ac:chgData name="Puneet Kumar - Chaucer" userId="090bd223-6cda-4aec-ba5f-32ca554a1dde" providerId="ADAL" clId="{ABBA0AF5-969F-4EB8-A190-2918F757DA66}" dt="2026-09-22T16:16:43.308" v="2033" actId="14100"/>
+          <ac:spMkLst>
+            <pc:docMk/>
+            <pc:sldMk cId="0" sldId="258"/>
+            <ac:spMk id="25" creationId="{00000000-0000-0000-0000-000000000000}"/>
+          </ac:spMkLst>
+        </pc:spChg>
+        <pc:spChg chg="mod">
+          <ac:chgData name="Puneet Kumar - Chaucer" userId="090bd223-6cda-4aec-ba5f-32ca554a1dde" providerId="ADAL" clId="{ABBA0AF5-969F-4EB8-A190-2918F757DA66}" dt="2026-09-22T16:16:37.917" v="2032" actId="1076"/>
+          <ac:spMkLst>
+            <pc:docMk/>
+            <pc:sldMk cId="0" sldId="258"/>
+            <ac:spMk id="26" creationId="{00000000-0000-0000-0000-000000000000}"/>
+          </ac:spMkLst>
+        </pc:spChg>
+        <pc:spChg chg="mod">
+          <ac:chgData name="Puneet Kumar - Chaucer" userId="090bd223-6cda-4aec-ba5f-32ca554a1dde" providerId="ADAL" clId="{ABBA0AF5-969F-4EB8-A190-2918F757DA66}" dt="2026-09-22T16:11:19.096" v="2014" actId="20577"/>
+          <ac:spMkLst>
+            <pc:docMk/>
+            <pc:sldMk cId="0" sldId="258"/>
+            <ac:spMk id="34" creationId="{00000000-0000-0000-0000-000000000000}"/>
+          </ac:spMkLst>
+        </pc:spChg>
+        <pc:spChg chg="mod">
+          <ac:chgData name="Puneet Kumar - Chaucer" userId="090bd223-6cda-4aec-ba5f-32ca554a1dde" providerId="ADAL" clId="{ABBA0AF5-969F-4EB8-A190-2918F757DA66}" dt="2026-09-22T16:12:11.846" v="2023" actId="6549"/>
+          <ac:spMkLst>
+            <pc:docMk/>
+            <pc:sldMk cId="0" sldId="258"/>
+            <ac:spMk id="36" creationId="{00000000-0000-0000-0000-000000000000}"/>
+          </ac:spMkLst>
+        </pc:spChg>
+      </pc:sldChg>
+      <pc:sldChg chg="modSp mod">
+        <pc:chgData name="Puneet Kumar - Chaucer" userId="090bd223-6cda-4aec-ba5f-32ca554a1dde" providerId="ADAL" clId="{ABBA0AF5-969F-4EB8-A190-2918F757DA66}" dt="2026-09-22T16:09:02.158" v="2000" actId="14100"/>
+        <pc:sldMkLst>
+          <pc:docMk/>
+          <pc:sldMk cId="0" sldId="259"/>
+        </pc:sldMkLst>
+        <pc:spChg chg="mod">
+          <ac:chgData name="Puneet Kumar - Chaucer" userId="090bd223-6cda-4aec-ba5f-32ca554a1dde" providerId="ADAL" clId="{ABBA0AF5-969F-4EB8-A190-2918F757DA66}" dt="2026-09-22T16:03:48.192" v="1851" actId="14100"/>
+          <ac:spMkLst>
+            <pc:docMk/>
+            <pc:sldMk cId="0" sldId="259"/>
+            <ac:spMk id="7" creationId="{00000000-0000-0000-0000-000000000000}"/>
+          </ac:spMkLst>
+        </pc:spChg>
+        <pc:spChg chg="mod">
+          <ac:chgData name="Puneet Kumar - Chaucer" userId="090bd223-6cda-4aec-ba5f-32ca554a1dde" providerId="ADAL" clId="{ABBA0AF5-969F-4EB8-A190-2918F757DA66}" dt="2026-09-22T16:03:28.091" v="1848" actId="1037"/>
+          <ac:spMkLst>
+            <pc:docMk/>
+            <pc:sldMk cId="0" sldId="259"/>
+            <ac:spMk id="9" creationId="{00000000-0000-0000-0000-000000000000}"/>
+          </ac:spMkLst>
+        </pc:spChg>
+        <pc:spChg chg="mod">
+          <ac:chgData name="Puneet Kumar - Chaucer" userId="090bd223-6cda-4aec-ba5f-32ca554a1dde" providerId="ADAL" clId="{ABBA0AF5-969F-4EB8-A190-2918F757DA66}" dt="2026-09-22T16:03:28.091" v="1848" actId="1037"/>
+          <ac:spMkLst>
+            <pc:docMk/>
+            <pc:sldMk cId="0" sldId="259"/>
+            <ac:spMk id="10" creationId="{00000000-0000-0000-0000-000000000000}"/>
+          </ac:spMkLst>
+        </pc:spChg>
+        <pc:spChg chg="mod">
+          <ac:chgData name="Puneet Kumar - Chaucer" userId="090bd223-6cda-4aec-ba5f-32ca554a1dde" providerId="ADAL" clId="{ABBA0AF5-969F-4EB8-A190-2918F757DA66}" dt="2026-09-22T16:03:28.091" v="1848" actId="1037"/>
+          <ac:spMkLst>
+            <pc:docMk/>
+            <pc:sldMk cId="0" sldId="259"/>
+            <ac:spMk id="11" creationId="{00000000-0000-0000-0000-000000000000}"/>
+          </ac:spMkLst>
+        </pc:spChg>
+        <pc:spChg chg="mod">
+          <ac:chgData name="Puneet Kumar - Chaucer" userId="090bd223-6cda-4aec-ba5f-32ca554a1dde" providerId="ADAL" clId="{ABBA0AF5-969F-4EB8-A190-2918F757DA66}" dt="2026-09-22T16:03:14.665" v="1784" actId="14100"/>
+          <ac:spMkLst>
+            <pc:docMk/>
+            <pc:sldMk cId="0" sldId="259"/>
+            <ac:spMk id="12" creationId="{00000000-0000-0000-0000-000000000000}"/>
+          </ac:spMkLst>
+        </pc:spChg>
+        <pc:spChg chg="mod">
+          <ac:chgData name="Puneet Kumar - Chaucer" userId="090bd223-6cda-4aec-ba5f-32ca554a1dde" providerId="ADAL" clId="{ABBA0AF5-969F-4EB8-A190-2918F757DA66}" dt="2026-09-22T16:03:07.138" v="1782" actId="1038"/>
+          <ac:spMkLst>
+            <pc:docMk/>
+            <pc:sldMk cId="0" sldId="259"/>
+            <ac:spMk id="13" creationId="{00000000-0000-0000-0000-000000000000}"/>
+          </ac:spMkLst>
+        </pc:spChg>
+        <pc:spChg chg="mod">
+          <ac:chgData name="Puneet Kumar - Chaucer" userId="090bd223-6cda-4aec-ba5f-32ca554a1dde" providerId="ADAL" clId="{ABBA0AF5-969F-4EB8-A190-2918F757DA66}" dt="2026-09-22T16:03:07.138" v="1782" actId="1038"/>
+          <ac:spMkLst>
+            <pc:docMk/>
+            <pc:sldMk cId="0" sldId="259"/>
+            <ac:spMk id="14" creationId="{00000000-0000-0000-0000-000000000000}"/>
+          </ac:spMkLst>
+        </pc:spChg>
+        <pc:spChg chg="mod">
+          <ac:chgData name="Puneet Kumar - Chaucer" userId="090bd223-6cda-4aec-ba5f-32ca554a1dde" providerId="ADAL" clId="{ABBA0AF5-969F-4EB8-A190-2918F757DA66}" dt="2026-09-22T16:03:07.138" v="1782" actId="1038"/>
+          <ac:spMkLst>
+            <pc:docMk/>
+            <pc:sldMk cId="0" sldId="259"/>
+            <ac:spMk id="15" creationId="{00000000-0000-0000-0000-000000000000}"/>
+          </ac:spMkLst>
+        </pc:spChg>
+        <pc:spChg chg="mod">
+          <ac:chgData name="Puneet Kumar - Chaucer" userId="090bd223-6cda-4aec-ba5f-32ca554a1dde" providerId="ADAL" clId="{ABBA0AF5-969F-4EB8-A190-2918F757DA66}" dt="2026-09-22T16:02:57.441" v="1731" actId="14100"/>
+          <ac:spMkLst>
+            <pc:docMk/>
+            <pc:sldMk cId="0" sldId="259"/>
+            <ac:spMk id="16" creationId="{00000000-0000-0000-0000-000000000000}"/>
+          </ac:spMkLst>
+        </pc:spChg>
+        <pc:spChg chg="mod">
+          <ac:chgData name="Puneet Kumar - Chaucer" userId="090bd223-6cda-4aec-ba5f-32ca554a1dde" providerId="ADAL" clId="{ABBA0AF5-969F-4EB8-A190-2918F757DA66}" dt="2026-09-22T16:02:42.289" v="1728" actId="1038"/>
+          <ac:spMkLst>
+            <pc:docMk/>
+            <pc:sldMk cId="0" sldId="259"/>
+            <ac:spMk id="17" creationId="{00000000-0000-0000-0000-000000000000}"/>
+          </ac:spMkLst>
+        </pc:spChg>
+        <pc:spChg chg="mod">
+          <ac:chgData name="Puneet Kumar - Chaucer" userId="090bd223-6cda-4aec-ba5f-32ca554a1dde" providerId="ADAL" clId="{ABBA0AF5-969F-4EB8-A190-2918F757DA66}" dt="2026-09-22T16:02:42.289" v="1728" actId="1038"/>
+          <ac:spMkLst>
+            <pc:docMk/>
+            <pc:sldMk cId="0" sldId="259"/>
+            <ac:spMk id="18" creationId="{00000000-0000-0000-0000-000000000000}"/>
+          </ac:spMkLst>
+        </pc:spChg>
+        <pc:spChg chg="mod">
+          <ac:chgData name="Puneet Kumar - Chaucer" userId="090bd223-6cda-4aec-ba5f-32ca554a1dde" providerId="ADAL" clId="{ABBA0AF5-969F-4EB8-A190-2918F757DA66}" dt="2026-09-22T16:02:42.289" v="1728" actId="1038"/>
+          <ac:spMkLst>
+            <pc:docMk/>
+            <pc:sldMk cId="0" sldId="259"/>
+            <ac:spMk id="19" creationId="{00000000-0000-0000-0000-000000000000}"/>
+          </ac:spMkLst>
+        </pc:spChg>
+        <pc:spChg chg="mod">
+          <ac:chgData name="Puneet Kumar - Chaucer" userId="090bd223-6cda-4aec-ba5f-32ca554a1dde" providerId="ADAL" clId="{ABBA0AF5-969F-4EB8-A190-2918F757DA66}" dt="2026-09-22T16:02:32.100" v="1657" actId="14100"/>
+          <ac:spMkLst>
+            <pc:docMk/>
+            <pc:sldMk cId="0" sldId="259"/>
+            <ac:spMk id="20" creationId="{00000000-0000-0000-0000-000000000000}"/>
+          </ac:spMkLst>
+        </pc:spChg>
+        <pc:spChg chg="mod">
+          <ac:chgData name="Puneet Kumar - Chaucer" userId="090bd223-6cda-4aec-ba5f-32ca554a1dde" providerId="ADAL" clId="{ABBA0AF5-969F-4EB8-A190-2918F757DA66}" dt="2026-09-22T16:02:22.553" v="1655" actId="1038"/>
+          <ac:spMkLst>
+            <pc:docMk/>
+            <pc:sldMk cId="0" sldId="259"/>
+            <ac:spMk id="21" creationId="{00000000-0000-0000-0000-000000000000}"/>
+          </ac:spMkLst>
+        </pc:spChg>
+        <pc:spChg chg="mod">
+          <ac:chgData name="Puneet Kumar - Chaucer" userId="090bd223-6cda-4aec-ba5f-32ca554a1dde" providerId="ADAL" clId="{ABBA0AF5-969F-4EB8-A190-2918F757DA66}" dt="2026-09-22T16:02:22.553" v="1655" actId="1038"/>
+          <ac:spMkLst>
+            <pc:docMk/>
+            <pc:sldMk cId="0" sldId="259"/>
+            <ac:spMk id="22" creationId="{00000000-0000-0000-0000-000000000000}"/>
+          </ac:spMkLst>
+        </pc:spChg>
+        <pc:spChg chg="mod">
+          <ac:chgData name="Puneet Kumar - Chaucer" userId="090bd223-6cda-4aec-ba5f-32ca554a1dde" providerId="ADAL" clId="{ABBA0AF5-969F-4EB8-A190-2918F757DA66}" dt="2026-09-22T16:02:22.553" v="1655" actId="1038"/>
+          <ac:spMkLst>
+            <pc:docMk/>
+            <pc:sldMk cId="0" sldId="259"/>
+            <ac:spMk id="23" creationId="{00000000-0000-0000-0000-000000000000}"/>
+          </ac:spMkLst>
+        </pc:spChg>
+        <pc:spChg chg="mod">
+          <ac:chgData name="Puneet Kumar - Chaucer" userId="090bd223-6cda-4aec-ba5f-32ca554a1dde" providerId="ADAL" clId="{ABBA0AF5-969F-4EB8-A190-2918F757DA66}" dt="2026-09-22T16:02:07.579" v="1594" actId="14100"/>
+          <ac:spMkLst>
+            <pc:docMk/>
+            <pc:sldMk cId="0" sldId="259"/>
+            <ac:spMk id="24" creationId="{00000000-0000-0000-0000-000000000000}"/>
+          </ac:spMkLst>
+        </pc:spChg>
+        <pc:spChg chg="mod">
+          <ac:chgData name="Puneet Kumar - Chaucer" userId="090bd223-6cda-4aec-ba5f-32ca554a1dde" providerId="ADAL" clId="{ABBA0AF5-969F-4EB8-A190-2918F757DA66}" dt="2026-09-22T16:01:54.190" v="1591" actId="1037"/>
+          <ac:spMkLst>
+            <pc:docMk/>
+            <pc:sldMk cId="0" sldId="259"/>
+            <ac:spMk id="29" creationId="{00000000-0000-0000-0000-000000000000}"/>
+          </ac:spMkLst>
+        </pc:spChg>
+        <pc:spChg chg="mod">
+          <ac:chgData name="Puneet Kumar - Chaucer" userId="090bd223-6cda-4aec-ba5f-32ca554a1dde" providerId="ADAL" clId="{ABBA0AF5-969F-4EB8-A190-2918F757DA66}" dt="2026-09-22T16:01:54.190" v="1591" actId="1037"/>
+          <ac:spMkLst>
+            <pc:docMk/>
+            <pc:sldMk cId="0" sldId="259"/>
+            <ac:spMk id="30" creationId="{00000000-0000-0000-0000-000000000000}"/>
+          </ac:spMkLst>
+        </pc:spChg>
+        <pc:spChg chg="mod">
+          <ac:chgData name="Puneet Kumar - Chaucer" userId="090bd223-6cda-4aec-ba5f-32ca554a1dde" providerId="ADAL" clId="{ABBA0AF5-969F-4EB8-A190-2918F757DA66}" dt="2026-09-22T16:01:54.190" v="1591" actId="1037"/>
+          <ac:spMkLst>
+            <pc:docMk/>
+            <pc:sldMk cId="0" sldId="259"/>
+            <ac:spMk id="31" creationId="{00000000-0000-0000-0000-000000000000}"/>
+          </ac:spMkLst>
+        </pc:spChg>
+        <pc:spChg chg="mod">
+          <ac:chgData name="Puneet Kumar - Chaucer" userId="090bd223-6cda-4aec-ba5f-32ca554a1dde" providerId="ADAL" clId="{ABBA0AF5-969F-4EB8-A190-2918F757DA66}" dt="2026-09-22T16:01:58.697" v="1592" actId="14100"/>
+          <ac:spMkLst>
+            <pc:docMk/>
+            <pc:sldMk cId="0" sldId="259"/>
+            <ac:spMk id="32" creationId="{00000000-0000-0000-0000-000000000000}"/>
+          </ac:spMkLst>
+        </pc:spChg>
+        <pc:spChg chg="mod">
+          <ac:chgData name="Puneet Kumar - Chaucer" userId="090bd223-6cda-4aec-ba5f-32ca554a1dde" providerId="ADAL" clId="{ABBA0AF5-969F-4EB8-A190-2918F757DA66}" dt="2026-09-22T16:07:23.716" v="1953" actId="14100"/>
+          <ac:spMkLst>
+            <pc:docMk/>
+            <pc:sldMk cId="0" sldId="259"/>
+            <ac:spMk id="36" creationId="{00000000-0000-0000-0000-000000000000}"/>
+          </ac:spMkLst>
+        </pc:spChg>
+        <pc:spChg chg="mod">
+          <ac:chgData name="Puneet Kumar - Chaucer" userId="090bd223-6cda-4aec-ba5f-32ca554a1dde" providerId="ADAL" clId="{ABBA0AF5-969F-4EB8-A190-2918F757DA66}" dt="2026-09-22T16:04:03.332" v="1892" actId="1037"/>
+          <ac:spMkLst>
+            <pc:docMk/>
+            <pc:sldMk cId="0" sldId="259"/>
+            <ac:spMk id="37" creationId="{00000000-0000-0000-0000-000000000000}"/>
+          </ac:spMkLst>
+        </pc:spChg>
+        <pc:spChg chg="mod">
+          <ac:chgData name="Puneet Kumar - Chaucer" userId="090bd223-6cda-4aec-ba5f-32ca554a1dde" providerId="ADAL" clId="{ABBA0AF5-969F-4EB8-A190-2918F757DA66}" dt="2026-09-22T16:06:02.158" v="1949" actId="1037"/>
+          <ac:spMkLst>
+            <pc:docMk/>
+            <pc:sldMk cId="0" sldId="259"/>
+            <ac:spMk id="38" creationId="{00000000-0000-0000-0000-000000000000}"/>
+          </ac:spMkLst>
+        </pc:spChg>
+        <pc:spChg chg="mod">
+          <ac:chgData name="Puneet Kumar - Chaucer" userId="090bd223-6cda-4aec-ba5f-32ca554a1dde" providerId="ADAL" clId="{ABBA0AF5-969F-4EB8-A190-2918F757DA66}" dt="2026-09-22T16:06:02.158" v="1949" actId="1037"/>
+          <ac:spMkLst>
+            <pc:docMk/>
+            <pc:sldMk cId="0" sldId="259"/>
+            <ac:spMk id="39" creationId="{00000000-0000-0000-0000-000000000000}"/>
+          </ac:spMkLst>
+        </pc:spChg>
+        <pc:spChg chg="mod">
+          <ac:chgData name="Puneet Kumar - Chaucer" userId="090bd223-6cda-4aec-ba5f-32ca554a1dde" providerId="ADAL" clId="{ABBA0AF5-969F-4EB8-A190-2918F757DA66}" dt="2026-09-22T16:07:34.952" v="1956" actId="1076"/>
+          <ac:spMkLst>
+            <pc:docMk/>
+            <pc:sldMk cId="0" sldId="259"/>
+            <ac:spMk id="40" creationId="{00000000-0000-0000-0000-000000000000}"/>
+          </ac:spMkLst>
+        </pc:spChg>
+        <pc:spChg chg="mod">
+          <ac:chgData name="Puneet Kumar - Chaucer" userId="090bd223-6cda-4aec-ba5f-32ca554a1dde" providerId="ADAL" clId="{ABBA0AF5-969F-4EB8-A190-2918F757DA66}" dt="2026-09-22T16:08:47.002" v="1998" actId="1037"/>
+          <ac:spMkLst>
+            <pc:docMk/>
+            <pc:sldMk cId="0" sldId="259"/>
+            <ac:spMk id="46" creationId="{00000000-0000-0000-0000-000000000000}"/>
+          </ac:spMkLst>
+        </pc:spChg>
+        <pc:spChg chg="mod">
+          <ac:chgData name="Puneet Kumar - Chaucer" userId="090bd223-6cda-4aec-ba5f-32ca554a1dde" providerId="ADAL" clId="{ABBA0AF5-969F-4EB8-A190-2918F757DA66}" dt="2026-09-22T16:08:47.002" v="1998" actId="1037"/>
+          <ac:spMkLst>
+            <pc:docMk/>
+            <pc:sldMk cId="0" sldId="259"/>
+            <ac:spMk id="47" creationId="{00000000-0000-0000-0000-000000000000}"/>
+          </ac:spMkLst>
+        </pc:spChg>
+        <pc:spChg chg="mod">
+          <ac:chgData name="Puneet Kumar - Chaucer" userId="090bd223-6cda-4aec-ba5f-32ca554a1dde" providerId="ADAL" clId="{ABBA0AF5-969F-4EB8-A190-2918F757DA66}" dt="2026-09-22T16:08:47.002" v="1998" actId="1037"/>
+          <ac:spMkLst>
+            <pc:docMk/>
+            <pc:sldMk cId="0" sldId="259"/>
+            <ac:spMk id="48" creationId="{00000000-0000-0000-0000-000000000000}"/>
+          </ac:spMkLst>
+        </pc:spChg>
+        <pc:spChg chg="mod">
+          <ac:chgData name="Puneet Kumar - Chaucer" userId="090bd223-6cda-4aec-ba5f-32ca554a1dde" providerId="ADAL" clId="{ABBA0AF5-969F-4EB8-A190-2918F757DA66}" dt="2026-09-22T16:08:47.002" v="1998" actId="1037"/>
+          <ac:spMkLst>
+            <pc:docMk/>
+            <pc:sldMk cId="0" sldId="259"/>
+            <ac:spMk id="49" creationId="{00000000-0000-0000-0000-000000000000}"/>
+          </ac:spMkLst>
+        </pc:spChg>
+        <pc:spChg chg="mod">
+          <ac:chgData name="Puneet Kumar - Chaucer" userId="090bd223-6cda-4aec-ba5f-32ca554a1dde" providerId="ADAL" clId="{ABBA0AF5-969F-4EB8-A190-2918F757DA66}" dt="2026-09-22T16:08:47.002" v="1998" actId="1037"/>
+          <ac:spMkLst>
+            <pc:docMk/>
+            <pc:sldMk cId="0" sldId="259"/>
+            <ac:spMk id="50" creationId="{00000000-0000-0000-0000-000000000000}"/>
+          </ac:spMkLst>
+        </pc:spChg>
+        <pc:spChg chg="mod">
+          <ac:chgData name="Puneet Kumar - Chaucer" userId="090bd223-6cda-4aec-ba5f-32ca554a1dde" providerId="ADAL" clId="{ABBA0AF5-969F-4EB8-A190-2918F757DA66}" dt="2026-09-22T16:08:58.711" v="1999" actId="14100"/>
+          <ac:spMkLst>
+            <pc:docMk/>
+            <pc:sldMk cId="0" sldId="259"/>
+            <ac:spMk id="54" creationId="{00000000-0000-0000-0000-000000000000}"/>
+          </ac:spMkLst>
+        </pc:spChg>
+        <pc:spChg chg="mod">
+          <ac:chgData name="Puneet Kumar - Chaucer" userId="090bd223-6cda-4aec-ba5f-32ca554a1dde" providerId="ADAL" clId="{ABBA0AF5-969F-4EB8-A190-2918F757DA66}" dt="2026-09-22T16:05:35.064" v="1917" actId="1038"/>
+          <ac:spMkLst>
+            <pc:docMk/>
+            <pc:sldMk cId="0" sldId="259"/>
+            <ac:spMk id="55" creationId="{00000000-0000-0000-0000-000000000000}"/>
+          </ac:spMkLst>
+        </pc:spChg>
+        <pc:spChg chg="mod">
+          <ac:chgData name="Puneet Kumar - Chaucer" userId="090bd223-6cda-4aec-ba5f-32ca554a1dde" providerId="ADAL" clId="{ABBA0AF5-969F-4EB8-A190-2918F757DA66}" dt="2026-09-22T16:05:35.064" v="1917" actId="1038"/>
+          <ac:spMkLst>
+            <pc:docMk/>
+            <pc:sldMk cId="0" sldId="259"/>
+            <ac:spMk id="56" creationId="{00000000-0000-0000-0000-000000000000}"/>
+          </ac:spMkLst>
+        </pc:spChg>
+        <pc:spChg chg="mod">
+          <ac:chgData name="Puneet Kumar - Chaucer" userId="090bd223-6cda-4aec-ba5f-32ca554a1dde" providerId="ADAL" clId="{ABBA0AF5-969F-4EB8-A190-2918F757DA66}" dt="2026-09-22T16:09:02.158" v="2000" actId="14100"/>
+          <ac:spMkLst>
+            <pc:docMk/>
+            <pc:sldMk cId="0" sldId="259"/>
+            <ac:spMk id="57" creationId="{00000000-0000-0000-0000-000000000000}"/>
+          </ac:spMkLst>
+        </pc:spChg>
+        <pc:spChg chg="mod">
+          <ac:chgData name="Puneet Kumar - Chaucer" userId="090bd223-6cda-4aec-ba5f-32ca554a1dde" providerId="ADAL" clId="{ABBA0AF5-969F-4EB8-A190-2918F757DA66}" dt="2026-09-22T16:05:42.568" v="1919" actId="1076"/>
+          <ac:spMkLst>
+            <pc:docMk/>
+            <pc:sldMk cId="0" sldId="259"/>
+            <ac:spMk id="58" creationId="{00000000-0000-0000-0000-000000000000}"/>
+          </ac:spMkLst>
+        </pc:spChg>
+      </pc:sldChg>
+      <pc:sldChg chg="addSp delSp modSp mod">
+        <pc:chgData name="Puneet Kumar - Chaucer" userId="090bd223-6cda-4aec-ba5f-32ca554a1dde" providerId="ADAL" clId="{ABBA0AF5-969F-4EB8-A190-2918F757DA66}" dt="2026-09-22T16:01:36.920" v="1572" actId="20577"/>
+        <pc:sldMkLst>
+          <pc:docMk/>
+          <pc:sldMk cId="0" sldId="260"/>
+        </pc:sldMkLst>
+        <pc:spChg chg="mod">
+          <ac:chgData name="Puneet Kumar - Chaucer" userId="090bd223-6cda-4aec-ba5f-32ca554a1dde" providerId="ADAL" clId="{ABBA0AF5-969F-4EB8-A190-2918F757DA66}" dt="2026-09-22T15:57:29.373" v="1378" actId="1037"/>
+          <ac:spMkLst>
+            <pc:docMk/>
+            <pc:sldMk cId="0" sldId="260"/>
+            <ac:spMk id="7" creationId="{00000000-0000-0000-0000-000000000000}"/>
+          </ac:spMkLst>
+        </pc:spChg>
+        <pc:spChg chg="mod">
+          <ac:chgData name="Puneet Kumar - Chaucer" userId="090bd223-6cda-4aec-ba5f-32ca554a1dde" providerId="ADAL" clId="{ABBA0AF5-969F-4EB8-A190-2918F757DA66}" dt="2026-09-22T15:58:43.689" v="1430" actId="14100"/>
+          <ac:spMkLst>
+            <pc:docMk/>
+            <pc:sldMk cId="0" sldId="260"/>
+            <ac:spMk id="12" creationId="{00000000-0000-0000-0000-000000000000}"/>
+          </ac:spMkLst>
+        </pc:spChg>
+        <pc:spChg chg="mod">
+          <ac:chgData name="Puneet Kumar - Chaucer" userId="090bd223-6cda-4aec-ba5f-32ca554a1dde" providerId="ADAL" clId="{ABBA0AF5-969F-4EB8-A190-2918F757DA66}" dt="2026-09-22T15:58:52.748" v="1458" actId="1037"/>
+          <ac:spMkLst>
+            <pc:docMk/>
+            <pc:sldMk cId="0" sldId="260"/>
+            <ac:spMk id="17" creationId="{00000000-0000-0000-0000-000000000000}"/>
+          </ac:spMkLst>
+        </pc:spChg>
+        <pc:spChg chg="mod">
+          <ac:chgData name="Puneet Kumar - Chaucer" userId="090bd223-6cda-4aec-ba5f-32ca554a1dde" providerId="ADAL" clId="{ABBA0AF5-969F-4EB8-A190-2918F757DA66}" dt="2026-09-22T15:58:52.748" v="1458" actId="1037"/>
+          <ac:spMkLst>
+            <pc:docMk/>
+            <pc:sldMk cId="0" sldId="260"/>
+            <ac:spMk id="18" creationId="{00000000-0000-0000-0000-000000000000}"/>
+          </ac:spMkLst>
+        </pc:spChg>
+        <pc:spChg chg="mod">
+          <ac:chgData name="Puneet Kumar - Chaucer" userId="090bd223-6cda-4aec-ba5f-32ca554a1dde" providerId="ADAL" clId="{ABBA0AF5-969F-4EB8-A190-2918F757DA66}" dt="2026-09-22T15:58:52.748" v="1458" actId="1037"/>
+          <ac:spMkLst>
+            <pc:docMk/>
+            <pc:sldMk cId="0" sldId="260"/>
+            <ac:spMk id="19" creationId="{00000000-0000-0000-0000-000000000000}"/>
+          </ac:spMkLst>
+        </pc:spChg>
+        <pc:spChg chg="mod">
+          <ac:chgData name="Puneet Kumar - Chaucer" userId="090bd223-6cda-4aec-ba5f-32ca554a1dde" providerId="ADAL" clId="{ABBA0AF5-969F-4EB8-A190-2918F757DA66}" dt="2026-09-22T15:59:07.258" v="1509" actId="1037"/>
+          <ac:spMkLst>
+            <pc:docMk/>
+            <pc:sldMk cId="0" sldId="260"/>
+            <ac:spMk id="21" creationId="{00000000-0000-0000-0000-000000000000}"/>
+          </ac:spMkLst>
+        </pc:spChg>
+        <pc:spChg chg="mod">
+          <ac:chgData name="Puneet Kumar - Chaucer" userId="090bd223-6cda-4aec-ba5f-32ca554a1dde" providerId="ADAL" clId="{ABBA0AF5-969F-4EB8-A190-2918F757DA66}" dt="2026-09-22T15:59:07.258" v="1509" actId="1037"/>
+          <ac:spMkLst>
+            <pc:docMk/>
+            <pc:sldMk cId="0" sldId="260"/>
+            <ac:spMk id="22" creationId="{00000000-0000-0000-0000-000000000000}"/>
+          </ac:spMkLst>
+        </pc:spChg>
+        <pc:spChg chg="mod">
+          <ac:chgData name="Puneet Kumar - Chaucer" userId="090bd223-6cda-4aec-ba5f-32ca554a1dde" providerId="ADAL" clId="{ABBA0AF5-969F-4EB8-A190-2918F757DA66}" dt="2026-09-22T15:59:07.258" v="1509" actId="1037"/>
+          <ac:spMkLst>
+            <pc:docMk/>
+            <pc:sldMk cId="0" sldId="260"/>
+            <ac:spMk id="23" creationId="{00000000-0000-0000-0000-000000000000}"/>
+          </ac:spMkLst>
+        </pc:spChg>
+        <pc:spChg chg="mod">
+          <ac:chgData name="Puneet Kumar - Chaucer" userId="090bd223-6cda-4aec-ba5f-32ca554a1dde" providerId="ADAL" clId="{ABBA0AF5-969F-4EB8-A190-2918F757DA66}" dt="2026-09-22T15:59:15.567" v="1511" actId="14100"/>
+          <ac:spMkLst>
+            <pc:docMk/>
+            <pc:sldMk cId="0" sldId="260"/>
+            <ac:spMk id="24" creationId="{00000000-0000-0000-0000-000000000000}"/>
+          </ac:spMkLst>
+        </pc:spChg>
+        <pc:spChg chg="mod">
+          <ac:chgData name="Puneet Kumar - Chaucer" userId="090bd223-6cda-4aec-ba5f-32ca554a1dde" providerId="ADAL" clId="{ABBA0AF5-969F-4EB8-A190-2918F757DA66}" dt="2026-09-22T15:59:27.660" v="1559" actId="1037"/>
+          <ac:spMkLst>
+            <pc:docMk/>
+            <pc:sldMk cId="0" sldId="260"/>
+            <ac:spMk id="25" creationId="{00000000-0000-0000-0000-000000000000}"/>
+          </ac:spMkLst>
+        </pc:spChg>
+        <pc:spChg chg="mod">
+          <ac:chgData name="Puneet Kumar - Chaucer" userId="090bd223-6cda-4aec-ba5f-32ca554a1dde" providerId="ADAL" clId="{ABBA0AF5-969F-4EB8-A190-2918F757DA66}" dt="2026-09-22T15:59:27.660" v="1559" actId="1037"/>
+          <ac:spMkLst>
+            <pc:docMk/>
+            <pc:sldMk cId="0" sldId="260"/>
+            <ac:spMk id="26" creationId="{00000000-0000-0000-0000-000000000000}"/>
+          </ac:spMkLst>
+        </pc:spChg>
+        <pc:spChg chg="mod">
+          <ac:chgData name="Puneet Kumar - Chaucer" userId="090bd223-6cda-4aec-ba5f-32ca554a1dde" providerId="ADAL" clId="{ABBA0AF5-969F-4EB8-A190-2918F757DA66}" dt="2026-09-22T15:59:27.660" v="1559" actId="1037"/>
+          <ac:spMkLst>
+            <pc:docMk/>
+            <pc:sldMk cId="0" sldId="260"/>
+            <ac:spMk id="27" creationId="{00000000-0000-0000-0000-000000000000}"/>
+          </ac:spMkLst>
+        </pc:spChg>
+        <pc:spChg chg="mod">
+          <ac:chgData name="Puneet Kumar - Chaucer" userId="090bd223-6cda-4aec-ba5f-32ca554a1dde" providerId="ADAL" clId="{ABBA0AF5-969F-4EB8-A190-2918F757DA66}" dt="2026-09-22T15:59:33.199" v="1560" actId="14100"/>
+          <ac:spMkLst>
+            <pc:docMk/>
+            <pc:sldMk cId="0" sldId="260"/>
+            <ac:spMk id="28" creationId="{00000000-0000-0000-0000-000000000000}"/>
+          </ac:spMkLst>
+        </pc:spChg>
+        <pc:spChg chg="mod">
+          <ac:chgData name="Puneet Kumar - Chaucer" userId="090bd223-6cda-4aec-ba5f-32ca554a1dde" providerId="ADAL" clId="{ABBA0AF5-969F-4EB8-A190-2918F757DA66}" dt="2026-09-22T15:59:50.686" v="1562" actId="6549"/>
+          <ac:spMkLst>
+            <pc:docMk/>
+            <pc:sldMk cId="0" sldId="260"/>
+            <ac:spMk id="35" creationId="{00000000-0000-0000-0000-000000000000}"/>
+          </ac:spMkLst>
+        </pc:spChg>
+        <pc:spChg chg="mod">
+          <ac:chgData name="Puneet Kumar - Chaucer" userId="090bd223-6cda-4aec-ba5f-32ca554a1dde" providerId="ADAL" clId="{ABBA0AF5-969F-4EB8-A190-2918F757DA66}" dt="2026-09-22T16:01:13.246" v="1566"/>
+          <ac:spMkLst>
+            <pc:docMk/>
+            <pc:sldMk cId="0" sldId="260"/>
+            <ac:spMk id="46" creationId="{00000000-0000-0000-0000-000000000000}"/>
+          </ac:spMkLst>
+        </pc:spChg>
+        <pc:spChg chg="mod">
+          <ac:chgData name="Puneet Kumar - Chaucer" userId="090bd223-6cda-4aec-ba5f-32ca554a1dde" providerId="ADAL" clId="{ABBA0AF5-969F-4EB8-A190-2918F757DA66}" dt="2026-09-22T16:00:38.539" v="1565" actId="1076"/>
+          <ac:spMkLst>
+            <pc:docMk/>
+            <pc:sldMk cId="0" sldId="260"/>
+            <ac:spMk id="47" creationId="{00000000-0000-0000-0000-000000000000}"/>
+          </ac:spMkLst>
+        </pc:spChg>
+        <pc:spChg chg="mod">
+          <ac:chgData name="Puneet Kumar - Chaucer" userId="090bd223-6cda-4aec-ba5f-32ca554a1dde" providerId="ADAL" clId="{ABBA0AF5-969F-4EB8-A190-2918F757DA66}" dt="2026-09-22T16:00:37.507" v="1564" actId="255"/>
+          <ac:spMkLst>
+            <pc:docMk/>
+            <pc:sldMk cId="0" sldId="260"/>
+            <ac:spMk id="49" creationId="{00000000-0000-0000-0000-000000000000}"/>
+          </ac:spMkLst>
+        </pc:spChg>
+        <pc:spChg chg="mod">
+          <ac:chgData name="Puneet Kumar - Chaucer" userId="090bd223-6cda-4aec-ba5f-32ca554a1dde" providerId="ADAL" clId="{ABBA0AF5-969F-4EB8-A190-2918F757DA66}" dt="2026-09-22T16:01:36.920" v="1572" actId="20577"/>
+          <ac:spMkLst>
+            <pc:docMk/>
+            <pc:sldMk cId="0" sldId="260"/>
+            <ac:spMk id="51" creationId="{00000000-0000-0000-0000-000000000000}"/>
+          </ac:spMkLst>
+        </pc:spChg>
+        <pc:spChg chg="add mod">
+          <ac:chgData name="Puneet Kumar - Chaucer" userId="090bd223-6cda-4aec-ba5f-32ca554a1dde" providerId="ADAL" clId="{ABBA0AF5-969F-4EB8-A190-2918F757DA66}" dt="2026-09-22T15:58:59.331" v="1460" actId="14100"/>
+          <ac:spMkLst>
+            <pc:docMk/>
+            <pc:sldMk cId="0" sldId="260"/>
+            <ac:spMk id="53" creationId="{B28A5521-101C-62F0-DB64-5D46229AE4AA}"/>
+          </ac:spMkLst>
+        </pc:spChg>
+      </pc:sldChg>
+      <pc:sldChg chg="addSp delSp modSp add del mod ord">
+        <pc:chgData name="Puneet Kumar - Chaucer" userId="090bd223-6cda-4aec-ba5f-32ca554a1dde" providerId="ADAL" clId="{ABBA0AF5-969F-4EB8-A190-2918F757DA66}" dt="2026-09-23T06:20:06.351" v="2098"/>
+        <pc:sldMkLst>
+          <pc:docMk/>
+          <pc:sldMk cId="0" sldId="261"/>
+        </pc:sldMkLst>
+        <pc:spChg chg="mod">
+          <ac:chgData name="Puneet Kumar - Chaucer" userId="090bd223-6cda-4aec-ba5f-32ca554a1dde" providerId="ADAL" clId="{ABBA0AF5-969F-4EB8-A190-2918F757DA66}" dt="2026-09-22T15:34:54.928" v="49" actId="20577"/>
+          <ac:spMkLst>
+            <pc:docMk/>
+            <pc:sldMk cId="0" sldId="261"/>
+            <ac:spMk id="5" creationId="{00000000-0000-0000-0000-000000000000}"/>
+          </ac:spMkLst>
+        </pc:spChg>
+        <pc:spChg chg="mod">
+          <ac:chgData name="Puneet Kumar - Chaucer" userId="090bd223-6cda-4aec-ba5f-32ca554a1dde" providerId="ADAL" clId="{ABBA0AF5-969F-4EB8-A190-2918F757DA66}" dt="2026-09-22T15:52:37.138" v="1017" actId="1076"/>
+          <ac:spMkLst>
+            <pc:docMk/>
+            <pc:sldMk cId="0" sldId="261"/>
+            <ac:spMk id="7" creationId="{00000000-0000-0000-0000-000000000000}"/>
+          </ac:spMkLst>
+        </pc:spChg>
+        <pc:spChg chg="mod">
+          <ac:chgData name="Puneet Kumar - Chaucer" userId="090bd223-6cda-4aec-ba5f-32ca554a1dde" providerId="ADAL" clId="{ABBA0AF5-969F-4EB8-A190-2918F757DA66}" dt="2026-09-22T15:48:53.303" v="759" actId="1076"/>
+          <ac:spMkLst>
+            <pc:docMk/>
+            <pc:sldMk cId="0" sldId="261"/>
+            <ac:spMk id="8" creationId="{00000000-0000-0000-0000-000000000000}"/>
+          </ac:spMkLst>
+        </pc:spChg>
+        <pc:spChg chg="mod">
+          <ac:chgData name="Puneet Kumar - Chaucer" userId="090bd223-6cda-4aec-ba5f-32ca554a1dde" providerId="ADAL" clId="{ABBA0AF5-969F-4EB8-A190-2918F757DA66}" dt="2026-09-22T15:49:02.078" v="762" actId="1076"/>
+          <ac:spMkLst>
+            <pc:docMk/>
+            <pc:sldMk cId="0" sldId="261"/>
+            <ac:spMk id="9" creationId="{00000000-0000-0000-0000-000000000000}"/>
+          </ac:spMkLst>
+        </pc:spChg>
+        <pc:spChg chg="mod">
+          <ac:chgData name="Puneet Kumar - Chaucer" userId="090bd223-6cda-4aec-ba5f-32ca554a1dde" providerId="ADAL" clId="{ABBA0AF5-969F-4EB8-A190-2918F757DA66}" dt="2026-09-22T15:49:08.125" v="763" actId="1076"/>
+          <ac:spMkLst>
+            <pc:docMk/>
+            <pc:sldMk cId="0" sldId="261"/>
+            <ac:spMk id="10" creationId="{00000000-0000-0000-0000-000000000000}"/>
+          </ac:spMkLst>
+        </pc:spChg>
+        <pc:spChg chg="add del mod ord">
+          <ac:chgData name="Puneet Kumar - Chaucer" userId="090bd223-6cda-4aec-ba5f-32ca554a1dde" providerId="ADAL" clId="{ABBA0AF5-969F-4EB8-A190-2918F757DA66}" dt="2026-09-22T15:52:07.823" v="1000" actId="1038"/>
+          <ac:spMkLst>
+            <pc:docMk/>
+            <pc:sldMk cId="0" sldId="261"/>
+            <ac:spMk id="12" creationId="{00000000-0000-0000-0000-000000000000}"/>
+          </ac:spMkLst>
+        </pc:spChg>
+        <pc:spChg chg="add del mod ord">
+          <ac:chgData name="Puneet Kumar - Chaucer" userId="090bd223-6cda-4aec-ba5f-32ca554a1dde" providerId="ADAL" clId="{ABBA0AF5-969F-4EB8-A190-2918F757DA66}" dt="2026-09-22T15:52:07.823" v="1000" actId="1038"/>
+          <ac:spMkLst>
+            <pc:docMk/>
+            <pc:sldMk cId="0" sldId="261"/>
+            <ac:spMk id="13" creationId="{00000000-0000-0000-0000-000000000000}"/>
+          </ac:spMkLst>
+        </pc:spChg>
+        <pc:spChg chg="mod">
+          <ac:chgData name="Puneet Kumar - Chaucer" userId="090bd223-6cda-4aec-ba5f-32ca554a1dde" providerId="ADAL" clId="{ABBA0AF5-969F-4EB8-A190-2918F757DA66}" dt="2026-09-22T15:55:39.186" v="1192" actId="1076"/>
+          <ac:spMkLst>
+            <pc:docMk/>
+            <pc:sldMk cId="0" sldId="261"/>
+            <ac:spMk id="16" creationId="{00000000-0000-0000-0000-000000000000}"/>
+          </ac:spMkLst>
+        </pc:spChg>
+        <pc:spChg chg="mod">
+          <ac:chgData name="Puneet Kumar - Chaucer" userId="090bd223-6cda-4aec-ba5f-32ca554a1dde" providerId="ADAL" clId="{ABBA0AF5-969F-4EB8-A190-2918F757DA66}" dt="2026-09-22T15:39:44.203" v="83" actId="1076"/>
+          <ac:spMkLst>
+            <pc:docMk/>
+            <pc:sldMk cId="0" sldId="261"/>
+            <ac:spMk id="17" creationId="{00000000-0000-0000-0000-000000000000}"/>
+          </ac:spMkLst>
+        </pc:spChg>
+        <pc:spChg chg="mod">
+          <ac:chgData name="Puneet Kumar - Chaucer" userId="090bd223-6cda-4aec-ba5f-32ca554a1dde" providerId="ADAL" clId="{ABBA0AF5-969F-4EB8-A190-2918F757DA66}" dt="2026-09-22T15:39:18.958" v="76" actId="1076"/>
+          <ac:spMkLst>
+            <pc:docMk/>
+            <pc:sldMk cId="0" sldId="261"/>
+            <ac:spMk id="18" creationId="{00000000-0000-0000-0000-000000000000}"/>
+          </ac:spMkLst>
+        </pc:spChg>
+        <pc:spChg chg="mod">
+          <ac:chgData name="Puneet Kumar - Chaucer" userId="090bd223-6cda-4aec-ba5f-32ca554a1dde" providerId="ADAL" clId="{ABBA0AF5-969F-4EB8-A190-2918F757DA66}" dt="2026-09-22T15:56:16.120" v="1198" actId="14100"/>
+          <ac:spMkLst>
+            <pc:docMk/>
+            <pc:sldMk cId="0" sldId="261"/>
+            <ac:spMk id="20" creationId="{00000000-0000-0000-0000-000000000000}"/>
+          </ac:spMkLst>
+        </pc:spChg>
+        <pc:spChg chg="add mod ord">
+          <ac:chgData name="Puneet Kumar - Chaucer" userId="090bd223-6cda-4aec-ba5f-32ca554a1dde" providerId="ADAL" clId="{ABBA0AF5-969F-4EB8-A190-2918F757DA66}" dt="2026-09-22T16:20:33.462" v="2080" actId="207"/>
+          <ac:spMkLst>
+            <pc:docMk/>
+            <pc:sldMk cId="0" sldId="261"/>
+            <ac:spMk id="28" creationId="{32EEDF85-88ED-3CF0-9738-E72455560E8F}"/>
+          </ac:spMkLst>
+        </pc:spChg>
+        <pc:spChg chg="add mod">
+          <ac:chgData name="Puneet Kumar - Chaucer" userId="090bd223-6cda-4aec-ba5f-32ca554a1dde" providerId="ADAL" clId="{ABBA0AF5-969F-4EB8-A190-2918F757DA66}" dt="2026-09-22T16:20:38.814" v="2081" actId="207"/>
+          <ac:spMkLst>
+            <pc:docMk/>
+            <pc:sldMk cId="0" sldId="261"/>
+            <ac:spMk id="30" creationId="{B4A25D50-9BB3-8986-F384-F08A4C5532D0}"/>
+          </ac:spMkLst>
+        </pc:spChg>
+        <pc:spChg chg="add mod">
+          <ac:chgData name="Puneet Kumar - Chaucer" userId="090bd223-6cda-4aec-ba5f-32ca554a1dde" providerId="ADAL" clId="{ABBA0AF5-969F-4EB8-A190-2918F757DA66}" dt="2026-09-22T15:51:49.083" v="990" actId="1038"/>
+          <ac:spMkLst>
+            <pc:docMk/>
+            <pc:sldMk cId="0" sldId="261"/>
+            <ac:spMk id="32" creationId="{FA3E06F5-1943-D903-4CA2-DE8B6DA7D20B}"/>
+          </ac:spMkLst>
+        </pc:spChg>
+        <pc:spChg chg="add mod">
+          <ac:chgData name="Puneet Kumar - Chaucer" userId="090bd223-6cda-4aec-ba5f-32ca554a1dde" providerId="ADAL" clId="{ABBA0AF5-969F-4EB8-A190-2918F757DA66}" dt="2026-09-22T15:51:49.083" v="990" actId="1038"/>
+          <ac:spMkLst>
+            <pc:docMk/>
+            <pc:sldMk cId="0" sldId="261"/>
+            <ac:spMk id="34" creationId="{8D9F436F-13B7-3D18-0C21-C329B2C9D6B8}"/>
+          </ac:spMkLst>
+        </pc:spChg>
+        <pc:spChg chg="add mod">
+          <ac:chgData name="Puneet Kumar - Chaucer" userId="090bd223-6cda-4aec-ba5f-32ca554a1dde" providerId="ADAL" clId="{ABBA0AF5-969F-4EB8-A190-2918F757DA66}" dt="2026-09-22T15:54:56.633" v="1157" actId="1038"/>
+          <ac:spMkLst>
+            <pc:docMk/>
+            <pc:sldMk cId="0" sldId="261"/>
+            <ac:spMk id="36" creationId="{2A1312AE-3846-BEBF-FA82-05AD6E3CFF90}"/>
+          </ac:spMkLst>
+        </pc:spChg>
+        <pc:spChg chg="add mod">
+          <ac:chgData name="Puneet Kumar - Chaucer" userId="090bd223-6cda-4aec-ba5f-32ca554a1dde" providerId="ADAL" clId="{ABBA0AF5-969F-4EB8-A190-2918F757DA66}" dt="2026-09-22T15:54:56.633" v="1157" actId="1038"/>
+          <ac:spMkLst>
+            <pc:docMk/>
+            <pc:sldMk cId="0" sldId="261"/>
+            <ac:spMk id="38" creationId="{DB796042-A80D-F962-E435-526766287840}"/>
+          </ac:spMkLst>
+        </pc:spChg>
+        <pc:spChg chg="mod">
+          <ac:chgData name="Puneet Kumar - Chaucer" userId="090bd223-6cda-4aec-ba5f-32ca554a1dde" providerId="ADAL" clId="{ABBA0AF5-969F-4EB8-A190-2918F757DA66}" dt="2026-09-22T15:34:16.550" v="7" actId="692"/>
+          <ac:spMkLst>
+            <pc:docMk/>
+            <pc:sldMk cId="0" sldId="261"/>
+            <ac:spMk id="41" creationId="{C20E27B3-5993-1796-539E-46075210D5EA}"/>
+          </ac:spMkLst>
+        </pc:spChg>
+        <pc:spChg chg="mod">
+          <ac:chgData name="Puneet Kumar - Chaucer" userId="090bd223-6cda-4aec-ba5f-32ca554a1dde" providerId="ADAL" clId="{ABBA0AF5-969F-4EB8-A190-2918F757DA66}" dt="2026-09-22T15:39:41.790" v="82" actId="1076"/>
+          <ac:spMkLst>
+            <pc:docMk/>
+            <pc:sldMk cId="0" sldId="261"/>
+            <ac:spMk id="42" creationId="{A80B9F96-3B99-B108-32C2-4F15916783AE}"/>
+          </ac:spMkLst>
+        </pc:spChg>
+        <pc:spChg chg="mod">
+          <ac:chgData name="Puneet Kumar - Chaucer" userId="090bd223-6cda-4aec-ba5f-32ca554a1dde" providerId="ADAL" clId="{ABBA0AF5-969F-4EB8-A190-2918F757DA66}" dt="2026-09-22T15:41:40.155" v="219" actId="1035"/>
+          <ac:spMkLst>
+            <pc:docMk/>
+            <pc:sldMk cId="0" sldId="261"/>
+            <ac:spMk id="44" creationId="{838CD20B-3C07-EDCE-7826-67307D9F2B2F}"/>
+          </ac:spMkLst>
+        </pc:spChg>
+        <pc:spChg chg="add mod ord">
+          <ac:chgData name="Puneet Kumar - Chaucer" userId="090bd223-6cda-4aec-ba5f-32ca554a1dde" providerId="ADAL" clId="{ABBA0AF5-969F-4EB8-A190-2918F757DA66}" dt="2026-09-22T15:55:44.099" v="1195" actId="1036"/>
+          <ac:spMkLst>
+            <pc:docMk/>
+            <pc:sldMk cId="0" sldId="261"/>
+            <ac:spMk id="45" creationId="{39308141-443D-1D0C-6849-77C8A15D1135}"/>
+          </ac:spMkLst>
+        </pc:spChg>
+        <pc:spChg chg="add mod">
+          <ac:chgData name="Puneet Kumar - Chaucer" userId="090bd223-6cda-4aec-ba5f-32ca554a1dde" providerId="ADAL" clId="{ABBA0AF5-969F-4EB8-A190-2918F757DA66}" dt="2026-09-22T15:53:23.848" v="1050" actId="1036"/>
+          <ac:spMkLst>
+            <pc:docMk/>
+            <pc:sldMk cId="0" sldId="261"/>
+            <ac:spMk id="50" creationId="{AF47FA95-62CE-5036-80BD-E728AA5BA066}"/>
+          </ac:spMkLst>
+        </pc:spChg>
+        <pc:spChg chg="add del mod ord">
+          <ac:chgData name="Puneet Kumar - Chaucer" userId="090bd223-6cda-4aec-ba5f-32ca554a1dde" providerId="ADAL" clId="{ABBA0AF5-969F-4EB8-A190-2918F757DA66}" dt="2026-09-22T15:55:30.426" v="1191" actId="1037"/>
+          <ac:spMkLst>
+            <pc:docMk/>
+            <pc:sldMk cId="0" sldId="261"/>
+            <ac:spMk id="53" creationId="{E90FF846-B4AD-2720-B3D6-3E09069E5B71}"/>
+          </ac:spMkLst>
+        </pc:spChg>
+        <pc:spChg chg="add mod ord">
+          <ac:chgData name="Puneet Kumar - Chaucer" userId="090bd223-6cda-4aec-ba5f-32ca554a1dde" providerId="ADAL" clId="{ABBA0AF5-969F-4EB8-A190-2918F757DA66}" dt="2026-09-22T15:55:30.426" v="1191" actId="1037"/>
+          <ac:spMkLst>
+            <pc:docMk/>
+            <pc:sldMk cId="0" sldId="261"/>
+            <ac:spMk id="57" creationId="{1A293620-D5C5-D266-4ABC-D57A478BB5BB}"/>
+          </ac:spMkLst>
+        </pc:spChg>
+        <pc:spChg chg="mod">
+          <ac:chgData name="Puneet Kumar - Chaucer" userId="090bd223-6cda-4aec-ba5f-32ca554a1dde" providerId="ADAL" clId="{ABBA0AF5-969F-4EB8-A190-2918F757DA66}" dt="2026-09-22T15:56:12.358" v="1197" actId="14100"/>
+          <ac:spMkLst>
+            <pc:docMk/>
+            <pc:sldMk cId="0" sldId="261"/>
+            <ac:spMk id="60" creationId="{06393D4B-63A7-D7DD-6C0D-7F762FA1375B}"/>
+          </ac:spMkLst>
+        </pc:spChg>
+        <pc:spChg chg="add mod">
+          <ac:chgData name="Puneet Kumar - Chaucer" userId="090bd223-6cda-4aec-ba5f-32ca554a1dde" providerId="ADAL" clId="{ABBA0AF5-969F-4EB8-A190-2918F757DA66}" dt="2026-09-22T15:55:12.022" v="1161" actId="207"/>
+          <ac:spMkLst>
+            <pc:docMk/>
+            <pc:sldMk cId="0" sldId="261"/>
+            <ac:spMk id="61" creationId="{AA89BE25-0107-B66B-BE59-90117CE6A42E}"/>
+          </ac:spMkLst>
+        </pc:spChg>
+      </pc:sldChg>
+      <pc:sldChg chg="add ord">
+        <pc:chgData name="Puneet Kumar - Chaucer" userId="090bd223-6cda-4aec-ba5f-32ca554a1dde" providerId="ADAL" clId="{ABBA0AF5-969F-4EB8-A190-2918F757DA66}" dt="2026-09-23T06:18:40.621" v="2094"/>
+        <pc:sldMkLst>
+          <pc:docMk/>
+          <pc:sldMk cId="0" sldId="262"/>
+        </pc:sldMkLst>
+      </pc:sldChg>
+      <pc:sldChg chg="modSp add mod ord">
+        <pc:chgData name="Puneet Kumar - Chaucer" userId="090bd223-6cda-4aec-ba5f-32ca554a1dde" providerId="ADAL" clId="{ABBA0AF5-969F-4EB8-A190-2918F757DA66}" dt="2026-09-23T08:47:50.049" v="2108" actId="207"/>
+        <pc:sldMkLst>
+          <pc:docMk/>
+          <pc:sldMk cId="0" sldId="263"/>
+        </pc:sldMkLst>
+        <pc:spChg chg="mod">
+          <ac:chgData name="Puneet Kumar - Chaucer" userId="090bd223-6cda-4aec-ba5f-32ca554a1dde" providerId="ADAL" clId="{ABBA0AF5-969F-4EB8-A190-2918F757DA66}" dt="2026-09-23T08:47:50.049" v="2108" actId="207"/>
+          <ac:spMkLst>
+            <pc:docMk/>
+            <pc:sldMk cId="0" sldId="263"/>
+            <ac:spMk id="10" creationId="{00000000-0000-0000-0000-000000000000}"/>
+          </ac:spMkLst>
+        </pc:spChg>
+        <pc:spChg chg="mod">
+          <ac:chgData name="Puneet Kumar - Chaucer" userId="090bd223-6cda-4aec-ba5f-32ca554a1dde" providerId="ADAL" clId="{ABBA0AF5-969F-4EB8-A190-2918F757DA66}" dt="2026-09-23T08:47:41.437" v="2107" actId="207"/>
+          <ac:spMkLst>
+            <pc:docMk/>
+            <pc:sldMk cId="0" sldId="263"/>
+            <ac:spMk id="20" creationId="{00000000-0000-0000-0000-000000000000}"/>
+          </ac:spMkLst>
+        </pc:spChg>
+      </pc:sldChg>
+      <pc:sldChg chg="add ord">
+        <pc:chgData name="Puneet Kumar - Chaucer" userId="090bd223-6cda-4aec-ba5f-32ca554a1dde" providerId="ADAL" clId="{ABBA0AF5-969F-4EB8-A190-2918F757DA66}" dt="2026-09-23T06:18:40.621" v="2094"/>
+        <pc:sldMkLst>
+          <pc:docMk/>
+          <pc:sldMk cId="0" sldId="264"/>
+        </pc:sldMkLst>
+      </pc:sldChg>
+      <pc:sldChg chg="add ord">
+        <pc:chgData name="Puneet Kumar - Chaucer" userId="090bd223-6cda-4aec-ba5f-32ca554a1dde" providerId="ADAL" clId="{ABBA0AF5-969F-4EB8-A190-2918F757DA66}" dt="2026-09-23T06:18:22.697" v="2092"/>
+        <pc:sldMkLst>
+          <pc:docMk/>
+          <pc:sldMk cId="0" sldId="265"/>
+        </pc:sldMkLst>
+      </pc:sldChg>
+    </pc:docChg>
+  </pc:docChgLst>
+  <pc:docChgLst>
+    <pc:chgData name="Joycell Sundararaj - Chaucer" userId="45538bea-d8f3-45d1-86e6-6d63bacbf9c7" providerId="ADAL" clId="{9BC4F4FD-55AC-4BDE-B6C7-96A74690FA1B}"/>
+    <pc:docChg chg="undo custSel modSld">
+      <pc:chgData name="Joycell Sundararaj - Chaucer" userId="45538bea-d8f3-45d1-86e6-6d63bacbf9c7" providerId="ADAL" clId="{9BC4F4FD-55AC-4BDE-B6C7-96A74690FA1B}" dt="2026-09-22T18:27:49.299" v="545" actId="20577"/>
+      <pc:docMkLst>
+        <pc:docMk/>
+      </pc:docMkLst>
+      <pc:sldChg chg="modSp mod">
+        <pc:chgData name="Joycell Sundararaj - Chaucer" userId="45538bea-d8f3-45d1-86e6-6d63bacbf9c7" providerId="ADAL" clId="{9BC4F4FD-55AC-4BDE-B6C7-96A74690FA1B}" dt="2026-09-22T18:05:39.746" v="114" actId="20577"/>
+        <pc:sldMkLst>
+          <pc:docMk/>
+          <pc:sldMk cId="0" sldId="257"/>
+        </pc:sldMkLst>
+        <pc:spChg chg="mod">
+          <ac:chgData name="Joycell Sundararaj - Chaucer" userId="45538bea-d8f3-45d1-86e6-6d63bacbf9c7" providerId="ADAL" clId="{9BC4F4FD-55AC-4BDE-B6C7-96A74690FA1B}" dt="2026-09-22T18:05:39.746" v="114" actId="20577"/>
+          <ac:spMkLst>
+            <pc:docMk/>
+            <pc:sldMk cId="0" sldId="257"/>
+            <ac:spMk id="17" creationId="{00000000-0000-0000-0000-000000000000}"/>
+          </ac:spMkLst>
+        </pc:spChg>
+      </pc:sldChg>
+      <pc:sldChg chg="addSp modSp mod">
+        <pc:chgData name="Joycell Sundararaj - Chaucer" userId="45538bea-d8f3-45d1-86e6-6d63bacbf9c7" providerId="ADAL" clId="{9BC4F4FD-55AC-4BDE-B6C7-96A74690FA1B}" dt="2026-09-22T18:08:56.126" v="254" actId="20577"/>
+        <pc:sldMkLst>
+          <pc:docMk/>
+          <pc:sldMk cId="0" sldId="258"/>
+        </pc:sldMkLst>
+        <pc:spChg chg="mod">
+          <ac:chgData name="Joycell Sundararaj - Chaucer" userId="45538bea-d8f3-45d1-86e6-6d63bacbf9c7" providerId="ADAL" clId="{9BC4F4FD-55AC-4BDE-B6C7-96A74690FA1B}" dt="2026-09-22T18:08:56.126" v="254" actId="20577"/>
+          <ac:spMkLst>
+            <pc:docMk/>
+            <pc:sldMk cId="0" sldId="258"/>
+            <ac:spMk id="6" creationId="{00000000-0000-0000-0000-000000000000}"/>
+          </ac:spMkLst>
+        </pc:spChg>
+        <pc:spChg chg="mod">
+          <ac:chgData name="Joycell Sundararaj - Chaucer" userId="45538bea-d8f3-45d1-86e6-6d63bacbf9c7" providerId="ADAL" clId="{9BC4F4FD-55AC-4BDE-B6C7-96A74690FA1B}" dt="2026-09-22T17:57:45.472" v="5" actId="20577"/>
+          <ac:spMkLst>
+            <pc:docMk/>
+            <pc:sldMk cId="0" sldId="258"/>
+            <ac:spMk id="13" creationId="{00000000-0000-0000-0000-000000000000}"/>
+          </ac:spMkLst>
+        </pc:spChg>
+        <pc:spChg chg="mod">
+          <ac:chgData name="Joycell Sundararaj - Chaucer" userId="45538bea-d8f3-45d1-86e6-6d63bacbf9c7" providerId="ADAL" clId="{9BC4F4FD-55AC-4BDE-B6C7-96A74690FA1B}" dt="2026-09-22T18:00:27.263" v="112" actId="20577"/>
+          <ac:spMkLst>
+            <pc:docMk/>
+            <pc:sldMk cId="0" sldId="258"/>
+            <ac:spMk id="14" creationId="{00000000-0000-0000-0000-000000000000}"/>
+          </ac:spMkLst>
+        </pc:spChg>
+        <pc:spChg chg="mod">
+          <ac:chgData name="Joycell Sundararaj - Chaucer" userId="45538bea-d8f3-45d1-86e6-6d63bacbf9c7" providerId="ADAL" clId="{9BC4F4FD-55AC-4BDE-B6C7-96A74690FA1B}" dt="2026-09-22T18:08:08.342" v="250" actId="403"/>
+          <ac:spMkLst>
+            <pc:docMk/>
+            <pc:sldMk cId="0" sldId="258"/>
+            <ac:spMk id="16" creationId="{00000000-0000-0000-0000-000000000000}"/>
+          </ac:spMkLst>
+        </pc:spChg>
+        <pc:spChg chg="mod">
+          <ac:chgData name="Joycell Sundararaj - Chaucer" userId="45538bea-d8f3-45d1-86e6-6d63bacbf9c7" providerId="ADAL" clId="{9BC4F4FD-55AC-4BDE-B6C7-96A74690FA1B}" dt="2026-09-22T18:05:57.370" v="116" actId="20577"/>
+          <ac:spMkLst>
+            <pc:docMk/>
+            <pc:sldMk cId="0" sldId="258"/>
+            <ac:spMk id="20" creationId="{00000000-0000-0000-0000-000000000000}"/>
+          </ac:spMkLst>
+        </pc:spChg>
+        <pc:spChg chg="mod">
+          <ac:chgData name="Joycell Sundararaj - Chaucer" userId="45538bea-d8f3-45d1-86e6-6d63bacbf9c7" providerId="ADAL" clId="{9BC4F4FD-55AC-4BDE-B6C7-96A74690FA1B}" dt="2026-09-22T17:59:53.168" v="110" actId="14100"/>
+          <ac:spMkLst>
+            <pc:docMk/>
+            <pc:sldMk cId="0" sldId="258"/>
+            <ac:spMk id="34" creationId="{00000000-0000-0000-0000-000000000000}"/>
+          </ac:spMkLst>
+        </pc:spChg>
+        <pc:spChg chg="mod">
+          <ac:chgData name="Joycell Sundararaj - Chaucer" userId="45538bea-d8f3-45d1-86e6-6d63bacbf9c7" providerId="ADAL" clId="{9BC4F4FD-55AC-4BDE-B6C7-96A74690FA1B}" dt="2026-09-22T18:08:28.306" v="251" actId="20577"/>
+          <ac:spMkLst>
+            <pc:docMk/>
+            <pc:sldMk cId="0" sldId="258"/>
+            <ac:spMk id="36" creationId="{00000000-0000-0000-0000-000000000000}"/>
+          </ac:spMkLst>
+        </pc:spChg>
+        <pc:graphicFrameChg chg="add mod">
+          <ac:chgData name="Joycell Sundararaj - Chaucer" userId="45538bea-d8f3-45d1-86e6-6d63bacbf9c7" providerId="ADAL" clId="{9BC4F4FD-55AC-4BDE-B6C7-96A74690FA1B}" dt="2026-09-22T17:57:10.071" v="0"/>
+          <ac:graphicFrameMkLst>
+            <pc:docMk/>
+            <pc:sldMk cId="0" sldId="258"/>
+            <ac:graphicFrameMk id="37" creationId="{22E3AF8B-4B82-9556-62FC-96DD9795B7E7}"/>
+          </ac:graphicFrameMkLst>
+        </pc:graphicFrameChg>
+      </pc:sldChg>
+      <pc:sldChg chg="modSp mod">
+        <pc:chgData name="Joycell Sundararaj - Chaucer" userId="45538bea-d8f3-45d1-86e6-6d63bacbf9c7" providerId="ADAL" clId="{9BC4F4FD-55AC-4BDE-B6C7-96A74690FA1B}" dt="2026-09-22T18:10:57.338" v="281" actId="404"/>
+        <pc:sldMkLst>
+          <pc:docMk/>
+          <pc:sldMk cId="0" sldId="259"/>
+        </pc:sldMkLst>
+        <pc:spChg chg="mod">
+          <ac:chgData name="Joycell Sundararaj - Chaucer" userId="45538bea-d8f3-45d1-86e6-6d63bacbf9c7" providerId="ADAL" clId="{9BC4F4FD-55AC-4BDE-B6C7-96A74690FA1B}" dt="2026-09-22T18:09:47.820" v="274" actId="6549"/>
+          <ac:spMkLst>
+            <pc:docMk/>
+            <pc:sldMk cId="0" sldId="259"/>
+            <ac:spMk id="6" creationId="{00000000-0000-0000-0000-000000000000}"/>
+          </ac:spMkLst>
+        </pc:spChg>
+        <pc:spChg chg="mod">
+          <ac:chgData name="Joycell Sundararaj - Chaucer" userId="45538bea-d8f3-45d1-86e6-6d63bacbf9c7" providerId="ADAL" clId="{9BC4F4FD-55AC-4BDE-B6C7-96A74690FA1B}" dt="2026-09-22T18:10:02.518" v="275" actId="14100"/>
+          <ac:spMkLst>
+            <pc:docMk/>
+            <pc:sldMk cId="0" sldId="259"/>
+            <ac:spMk id="39" creationId="{00000000-0000-0000-0000-000000000000}"/>
+          </ac:spMkLst>
+        </pc:spChg>
+        <pc:spChg chg="mod">
+          <ac:chgData name="Joycell Sundararaj - Chaucer" userId="45538bea-d8f3-45d1-86e6-6d63bacbf9c7" providerId="ADAL" clId="{9BC4F4FD-55AC-4BDE-B6C7-96A74690FA1B}" dt="2026-09-22T18:10:49.373" v="279" actId="404"/>
+          <ac:spMkLst>
+            <pc:docMk/>
+            <pc:sldMk cId="0" sldId="259"/>
+            <ac:spMk id="50" creationId="{00000000-0000-0000-0000-000000000000}"/>
+          </ac:spMkLst>
+        </pc:spChg>
+        <pc:spChg chg="mod">
+          <ac:chgData name="Joycell Sundararaj - Chaucer" userId="45538bea-d8f3-45d1-86e6-6d63bacbf9c7" providerId="ADAL" clId="{9BC4F4FD-55AC-4BDE-B6C7-96A74690FA1B}" dt="2026-09-22T18:10:57.338" v="281" actId="404"/>
+          <ac:spMkLst>
+            <pc:docMk/>
+            <pc:sldMk cId="0" sldId="259"/>
+            <ac:spMk id="56" creationId="{00000000-0000-0000-0000-000000000000}"/>
+          </ac:spMkLst>
+        </pc:spChg>
+      </pc:sldChg>
+      <pc:sldChg chg="modSp mod">
+        <pc:chgData name="Joycell Sundararaj - Chaucer" userId="45538bea-d8f3-45d1-86e6-6d63bacbf9c7" providerId="ADAL" clId="{9BC4F4FD-55AC-4BDE-B6C7-96A74690FA1B}" dt="2026-09-22T18:27:49.299" v="545" actId="20577"/>
+        <pc:sldMkLst>
+          <pc:docMk/>
+          <pc:sldMk cId="0" sldId="260"/>
+        </pc:sldMkLst>
+        <pc:spChg chg="mod">
+          <ac:chgData name="Joycell Sundararaj - Chaucer" userId="45538bea-d8f3-45d1-86e6-6d63bacbf9c7" providerId="ADAL" clId="{9BC4F4FD-55AC-4BDE-B6C7-96A74690FA1B}" dt="2026-09-22T18:18:01.149" v="341" actId="6549"/>
+          <ac:spMkLst>
+            <pc:docMk/>
+            <pc:sldMk cId="0" sldId="260"/>
+            <ac:spMk id="6" creationId="{00000000-0000-0000-0000-000000000000}"/>
+          </ac:spMkLst>
+        </pc:spChg>
+        <pc:spChg chg="mod">
+          <ac:chgData name="Joycell Sundararaj - Chaucer" userId="45538bea-d8f3-45d1-86e6-6d63bacbf9c7" providerId="ADAL" clId="{9BC4F4FD-55AC-4BDE-B6C7-96A74690FA1B}" dt="2026-09-22T18:15:42.454" v="320" actId="20577"/>
+          <ac:spMkLst>
+            <pc:docMk/>
+            <pc:sldMk cId="0" sldId="260"/>
+            <ac:spMk id="34" creationId="{00000000-0000-0000-0000-000000000000}"/>
+          </ac:spMkLst>
+        </pc:spChg>
+        <pc:spChg chg="mod">
+          <ac:chgData name="Joycell Sundararaj - Chaucer" userId="45538bea-d8f3-45d1-86e6-6d63bacbf9c7" providerId="ADAL" clId="{9BC4F4FD-55AC-4BDE-B6C7-96A74690FA1B}" dt="2026-09-22T18:16:15.514" v="321" actId="14100"/>
+          <ac:spMkLst>
+            <pc:docMk/>
+            <pc:sldMk cId="0" sldId="260"/>
+            <ac:spMk id="35" creationId="{00000000-0000-0000-0000-000000000000}"/>
+          </ac:spMkLst>
+        </pc:spChg>
+        <pc:spChg chg="mod">
+          <ac:chgData name="Joycell Sundararaj - Chaucer" userId="45538bea-d8f3-45d1-86e6-6d63bacbf9c7" providerId="ADAL" clId="{9BC4F4FD-55AC-4BDE-B6C7-96A74690FA1B}" dt="2026-09-22T18:21:45.006" v="344" actId="20577"/>
+          <ac:spMkLst>
+            <pc:docMk/>
+            <pc:sldMk cId="0" sldId="260"/>
+            <ac:spMk id="39" creationId="{00000000-0000-0000-0000-000000000000}"/>
+          </ac:spMkLst>
+        </pc:spChg>
+        <pc:spChg chg="mod">
+          <ac:chgData name="Joycell Sundararaj - Chaucer" userId="45538bea-d8f3-45d1-86e6-6d63bacbf9c7" providerId="ADAL" clId="{9BC4F4FD-55AC-4BDE-B6C7-96A74690FA1B}" dt="2026-09-22T18:19:14.140" v="343" actId="20577"/>
+          <ac:spMkLst>
+            <pc:docMk/>
+            <pc:sldMk cId="0" sldId="260"/>
+            <ac:spMk id="43" creationId="{00000000-0000-0000-0000-000000000000}"/>
+          </ac:spMkLst>
+        </pc:spChg>
+        <pc:spChg chg="mod">
+          <ac:chgData name="Joycell Sundararaj - Chaucer" userId="45538bea-d8f3-45d1-86e6-6d63bacbf9c7" providerId="ADAL" clId="{9BC4F4FD-55AC-4BDE-B6C7-96A74690FA1B}" dt="2026-09-22T18:27:49.299" v="545" actId="20577"/>
+          <ac:spMkLst>
+            <pc:docMk/>
+            <pc:sldMk cId="0" sldId="260"/>
+            <ac:spMk id="49" creationId="{00000000-0000-0000-0000-000000000000}"/>
+          </ac:spMkLst>
+        </pc:spChg>
+      </pc:sldChg>
+      <pc:sldChg chg="modSp mod">
+        <pc:chgData name="Joycell Sundararaj - Chaucer" userId="45538bea-d8f3-45d1-86e6-6d63bacbf9c7" providerId="ADAL" clId="{9BC4F4FD-55AC-4BDE-B6C7-96A74690FA1B}" dt="2026-09-22T18:14:17.139" v="318" actId="14100"/>
+        <pc:sldMkLst>
+          <pc:docMk/>
+          <pc:sldMk cId="0" sldId="261"/>
+        </pc:sldMkLst>
+        <pc:spChg chg="mod">
+          <ac:chgData name="Joycell Sundararaj - Chaucer" userId="45538bea-d8f3-45d1-86e6-6d63bacbf9c7" providerId="ADAL" clId="{9BC4F4FD-55AC-4BDE-B6C7-96A74690FA1B}" dt="2026-09-22T18:12:57.830" v="285" actId="108"/>
+          <ac:spMkLst>
+            <pc:docMk/>
+            <pc:sldMk cId="0" sldId="261"/>
+            <ac:spMk id="18" creationId="{00000000-0000-0000-0000-000000000000}"/>
+          </ac:spMkLst>
+        </pc:spChg>
+        <pc:spChg chg="mod">
+          <ac:chgData name="Joycell Sundararaj - Chaucer" userId="45538bea-d8f3-45d1-86e6-6d63bacbf9c7" providerId="ADAL" clId="{9BC4F4FD-55AC-4BDE-B6C7-96A74690FA1B}" dt="2026-09-22T18:13:19.868" v="309" actId="14100"/>
+          <ac:spMkLst>
+            <pc:docMk/>
+            <pc:sldMk cId="0" sldId="261"/>
+            <ac:spMk id="20" creationId="{00000000-0000-0000-0000-000000000000}"/>
+          </ac:spMkLst>
+        </pc:spChg>
+        <pc:spChg chg="mod">
+          <ac:chgData name="Joycell Sundararaj - Chaucer" userId="45538bea-d8f3-45d1-86e6-6d63bacbf9c7" providerId="ADAL" clId="{9BC4F4FD-55AC-4BDE-B6C7-96A74690FA1B}" dt="2026-09-22T18:14:03.069" v="314" actId="14100"/>
+          <ac:spMkLst>
+            <pc:docMk/>
+            <pc:sldMk cId="0" sldId="261"/>
+            <ac:spMk id="28" creationId="{32EEDF85-88ED-3CF0-9738-E72455560E8F}"/>
+          </ac:spMkLst>
+        </pc:spChg>
+        <pc:spChg chg="mod">
+          <ac:chgData name="Joycell Sundararaj - Chaucer" userId="45538bea-d8f3-45d1-86e6-6d63bacbf9c7" providerId="ADAL" clId="{9BC4F4FD-55AC-4BDE-B6C7-96A74690FA1B}" dt="2026-09-22T18:14:17.139" v="318" actId="14100"/>
+          <ac:spMkLst>
+            <pc:docMk/>
+            <pc:sldMk cId="0" sldId="261"/>
+            <ac:spMk id="30" creationId="{B4A25D50-9BB3-8986-F384-F08A4C5532D0}"/>
+          </ac:spMkLst>
+        </pc:spChg>
+        <pc:spChg chg="mod">
+          <ac:chgData name="Joycell Sundararaj - Chaucer" userId="45538bea-d8f3-45d1-86e6-6d63bacbf9c7" providerId="ADAL" clId="{9BC4F4FD-55AC-4BDE-B6C7-96A74690FA1B}" dt="2026-09-22T18:14:14.997" v="317" actId="1076"/>
+          <ac:spMkLst>
+            <pc:docMk/>
+            <pc:sldMk cId="0" sldId="261"/>
+            <ac:spMk id="38" creationId="{DB796042-A80D-F962-E435-526766287840}"/>
+          </ac:spMkLst>
+        </pc:spChg>
+        <pc:spChg chg="mod">
+          <ac:chgData name="Joycell Sundararaj - Chaucer" userId="45538bea-d8f3-45d1-86e6-6d63bacbf9c7" providerId="ADAL" clId="{9BC4F4FD-55AC-4BDE-B6C7-96A74690FA1B}" dt="2026-09-22T18:13:07.784" v="307" actId="20577"/>
+          <ac:spMkLst>
+            <pc:docMk/>
+            <pc:sldMk cId="0" sldId="261"/>
+            <ac:spMk id="44" creationId="{838CD20B-3C07-EDCE-7826-67307D9F2B2F}"/>
+          </ac:spMkLst>
+        </pc:spChg>
+        <pc:spChg chg="mod">
+          <ac:chgData name="Joycell Sundararaj - Chaucer" userId="45538bea-d8f3-45d1-86e6-6d63bacbf9c7" providerId="ADAL" clId="{9BC4F4FD-55AC-4BDE-B6C7-96A74690FA1B}" dt="2026-09-22T18:13:52.133" v="312" actId="20577"/>
+          <ac:spMkLst>
+            <pc:docMk/>
+            <pc:sldMk cId="0" sldId="261"/>
+            <ac:spMk id="60" creationId="{06393D4B-63A7-D7DD-6C0D-7F762FA1375B}"/>
+          </ac:spMkLst>
+        </pc:spChg>
+        <pc:spChg chg="mod">
+          <ac:chgData name="Joycell Sundararaj - Chaucer" userId="45538bea-d8f3-45d1-86e6-6d63bacbf9c7" providerId="ADAL" clId="{9BC4F4FD-55AC-4BDE-B6C7-96A74690FA1B}" dt="2026-09-22T18:14:06.196" v="315" actId="14100"/>
+          <ac:spMkLst>
+            <pc:docMk/>
+            <pc:sldMk cId="0" sldId="261"/>
+            <ac:spMk id="61" creationId="{AA89BE25-0107-B66B-BE59-90117CE6A42E}"/>
+          </ac:spMkLst>
+        </pc:spChg>
+      </pc:sldChg>
+    </pc:docChg>
+  </pc:docChgLst>
+  <pc:docChgLst>
+    <pc:chgData name="Joycell Sundararaj - Chaucer" userId="S::joycell.sundararaj@chaucergroup.com::45538bea-d8f3-45d1-86e6-6d63bacbf9c7" providerId="AD" clId="Web-{2212EBE8-5CAC-B1C3-4280-693B2DB146A5}"/>
+    <pc:docChg chg="modSld">
+      <pc:chgData name="Joycell Sundararaj - Chaucer" userId="S::joycell.sundararaj@chaucergroup.com::45538bea-d8f3-45d1-86e6-6d63bacbf9c7" providerId="AD" clId="Web-{2212EBE8-5CAC-B1C3-4280-693B2DB146A5}" dt="2026-09-22T17:56:52.623" v="39"/>
+      <pc:docMkLst>
+        <pc:docMk/>
+      </pc:docMkLst>
+      <pc:sldChg chg="addSp delSp modSp">
+        <pc:chgData name="Joycell Sundararaj - Chaucer" userId="S::joycell.sundararaj@chaucergroup.com::45538bea-d8f3-45d1-86e6-6d63bacbf9c7" providerId="AD" clId="Web-{2212EBE8-5CAC-B1C3-4280-693B2DB146A5}" dt="2026-09-22T17:56:52.623" v="39"/>
+        <pc:sldMkLst>
+          <pc:docMk/>
+          <pc:sldMk cId="0" sldId="258"/>
+        </pc:sldMkLst>
+        <pc:spChg chg="mod">
+          <ac:chgData name="Joycell Sundararaj - Chaucer" userId="S::joycell.sundararaj@chaucergroup.com::45538bea-d8f3-45d1-86e6-6d63bacbf9c7" providerId="AD" clId="Web-{2212EBE8-5CAC-B1C3-4280-693B2DB146A5}" dt="2026-09-22T17:55:47.011" v="4" actId="20577"/>
+          <ac:spMkLst>
+            <pc:docMk/>
+            <pc:sldMk cId="0" sldId="258"/>
+            <ac:spMk id="11" creationId="{00000000-0000-0000-0000-000000000000}"/>
+          </ac:spMkLst>
+        </pc:spChg>
+        <pc:spChg chg="mod">
+          <ac:chgData name="Joycell Sundararaj - Chaucer" userId="S::joycell.sundararaj@chaucergroup.com::45538bea-d8f3-45d1-86e6-6d63bacbf9c7" providerId="AD" clId="Web-{2212EBE8-5CAC-B1C3-4280-693B2DB146A5}" dt="2026-09-22T17:56:49.467" v="37" actId="20577"/>
+          <ac:spMkLst>
+            <pc:docMk/>
+            <pc:sldMk cId="0" sldId="258"/>
+            <ac:spMk id="14" creationId="{00000000-0000-0000-0000-000000000000}"/>
+          </ac:spMkLst>
+        </pc:spChg>
+        <pc:graphicFrameChg chg="add del mod">
+          <ac:chgData name="Joycell Sundararaj - Chaucer" userId="S::joycell.sundararaj@chaucergroup.com::45538bea-d8f3-45d1-86e6-6d63bacbf9c7" providerId="AD" clId="Web-{2212EBE8-5CAC-B1C3-4280-693B2DB146A5}" dt="2026-09-22T17:56:52.623" v="39"/>
+          <ac:graphicFrameMkLst>
+            <pc:docMk/>
+            <pc:sldMk cId="0" sldId="258"/>
+            <ac:graphicFrameMk id="38" creationId="{29DC6CFC-B79A-0038-98C0-5722BF0BE18D}"/>
+          </ac:graphicFrameMkLst>
+        </pc:graphicFrameChg>
+      </pc:sldChg>
+    </pc:docChg>
+  </pc:docChgLst>
+  <pc:docChgLst>
+    <pc:chgData name="Joycell Sundararaj - Chaucer" userId="S::joycell.sundararaj@chaucergroup.com::45538bea-d8f3-45d1-86e6-6d63bacbf9c7" providerId="AD" clId="Web-{1D0E2FD6-C0DF-565B-ABC8-1364AADDDBC4}"/>
+    <pc:docChg chg="modSld">
+      <pc:chgData name="Joycell Sundararaj - Chaucer" userId="S::joycell.sundararaj@chaucergroup.com::45538bea-d8f3-45d1-86e6-6d63bacbf9c7" providerId="AD" clId="Web-{1D0E2FD6-C0DF-565B-ABC8-1364AADDDBC4}" dt="2026-09-23T08:50:07.188" v="30" actId="1076"/>
+      <pc:docMkLst>
+        <pc:docMk/>
+      </pc:docMkLst>
+      <pc:sldChg chg="modSp">
+        <pc:chgData name="Joycell Sundararaj - Chaucer" userId="S::joycell.sundararaj@chaucergroup.com::45538bea-d8f3-45d1-86e6-6d63bacbf9c7" providerId="AD" clId="Web-{1D0E2FD6-C0DF-565B-ABC8-1364AADDDBC4}" dt="2026-09-23T08:50:07.188" v="30" actId="1076"/>
+        <pc:sldMkLst>
+          <pc:docMk/>
+          <pc:sldMk cId="0" sldId="262"/>
+        </pc:sldMkLst>
+        <pc:spChg chg="mod">
+          <ac:chgData name="Joycell Sundararaj - Chaucer" userId="S::joycell.sundararaj@chaucergroup.com::45538bea-d8f3-45d1-86e6-6d63bacbf9c7" providerId="AD" clId="Web-{1D0E2FD6-C0DF-565B-ABC8-1364AADDDBC4}" dt="2026-09-23T08:48:46.154" v="14"/>
+          <ac:spMkLst>
+            <pc:docMk/>
+            <pc:sldMk cId="0" sldId="262"/>
+            <ac:spMk id="9" creationId="{00000000-0000-0000-0000-000000000000}"/>
+          </ac:spMkLst>
+        </pc:spChg>
+        <pc:spChg chg="mod">
+          <ac:chgData name="Joycell Sundararaj - Chaucer" userId="S::joycell.sundararaj@chaucergroup.com::45538bea-d8f3-45d1-86e6-6d63bacbf9c7" providerId="AD" clId="Web-{1D0E2FD6-C0DF-565B-ABC8-1364AADDDBC4}" dt="2026-09-23T08:49:08.076" v="22"/>
+          <ac:spMkLst>
+            <pc:docMk/>
+            <pc:sldMk cId="0" sldId="262"/>
+            <ac:spMk id="10" creationId="{00000000-0000-0000-0000-000000000000}"/>
+          </ac:spMkLst>
+        </pc:spChg>
+        <pc:spChg chg="mod">
+          <ac:chgData name="Joycell Sundararaj - Chaucer" userId="S::joycell.sundararaj@chaucergroup.com::45538bea-d8f3-45d1-86e6-6d63bacbf9c7" providerId="AD" clId="Web-{1D0E2FD6-C0DF-565B-ABC8-1364AADDDBC4}" dt="2026-09-23T08:48:49.857" v="18"/>
+          <ac:spMkLst>
+            <pc:docMk/>
+            <pc:sldMk cId="0" sldId="262"/>
+            <ac:spMk id="19" creationId="{00000000-0000-0000-0000-000000000000}"/>
+          </ac:spMkLst>
+        </pc:spChg>
+        <pc:spChg chg="mod">
+          <ac:chgData name="Joycell Sundararaj - Chaucer" userId="S::joycell.sundararaj@chaucergroup.com::45538bea-d8f3-45d1-86e6-6d63bacbf9c7" providerId="AD" clId="Web-{1D0E2FD6-C0DF-565B-ABC8-1364AADDDBC4}" dt="2026-09-23T08:50:07.188" v="30" actId="1076"/>
+          <ac:spMkLst>
+            <pc:docMk/>
+            <pc:sldMk cId="0" sldId="262"/>
+            <ac:spMk id="20" creationId="{00000000-0000-0000-0000-000000000000}"/>
+          </ac:spMkLst>
+        </pc:spChg>
+      </pc:sldChg>
+    </pc:docChg>
+  </pc:docChgLst>
+</pc:chgInfo>
 </file>
 
 <file path=ppt/notesMasters/notesMaster1.xml><?xml version="1.0" encoding="utf-8"?>
@@ -305,7 +1547,7 @@
           <a:lstStyle/>
           <a:p>
             <a:r>
-              <a:rPr lang="en-US" dirty="0"/>
+              <a:rPr lang="en-US"/>
               <a:t>Greenfield APIM build. Five decisions: reference architecture and edge, hosting model, ingress, egress, HA/DR.</a:t>
             </a:r>
           </a:p>
@@ -392,7 +1634,7 @@
           <a:lstStyle/>
           <a:p>
             <a:r>
-              <a:rPr lang="en-US" dirty="0"/>
+              <a:rPr lang="en-US"/>
               <a:t>APIM is the single control point for external APIs. Front Door is the only public surface; APIM sits private behind Private Link and aligns to the SIF layering.</a:t>
             </a:r>
           </a:p>
@@ -479,7 +1721,7 @@
           <a:lstStyle/>
           <a:p>
             <a:r>
-              <a:rPr lang="en-US" dirty="0"/>
+              <a:rPr lang="en-US"/>
               <a:t>Hosting model is Premium classic, managed gateway, VNet injection, Internal mode. Self-hosted gateway is an add-on for on-prem and data-residency backends only.</a:t>
             </a:r>
           </a:p>
@@ -566,7 +1808,7 @@
           <a:lstStyle/>
           <a:p>
             <a:r>
-              <a:rPr lang="en-US" dirty="0"/>
+              <a:rPr lang="en-US"/>
               <a:t>Single WAF at the edge, APIM for identity and quota. App Gateway only by exception. Palo Alto deliberately out of the HTTPS ingress path.</a:t>
             </a:r>
           </a:p>
@@ -653,7 +1895,7 @@
           <a:lstStyle/>
           <a:p>
             <a:r>
-              <a:rPr lang="en-US" dirty="0"/>
+              <a:rPr lang="en-US"/>
               <a:t>Routing intent removes per-spoke UDR management. Palo Alto inspects north-south egress and east-west. PaaS never hairpins through the hub or the internet.</a:t>
             </a:r>
           </a:p>
@@ -740,7 +1982,7 @@
           <a:lstStyle/>
           <a:p>
             <a:r>
-              <a:rPr lang="en-US" dirty="0"/>
+              <a:rPr lang="en-US"/>
               <a:t>2 units means 2 zones. Warm standby is billed as a full unit 24/7, so the cheapest credible DR is rebuild-on-demand from IaC plus backups, validated by a quarterly drill.</a:t>
             </a:r>
           </a:p>
@@ -896,7 +2138,7 @@
               <a:rPr lang="en-GB"/>
               <a:t>Click to edit Master title style</a:t>
             </a:r>
-            <a:endParaRPr lang="en-US" dirty="0"/>
+            <a:endParaRPr lang="en-US"/>
           </a:p>
         </p:txBody>
       </p:sp>
@@ -972,7 +2214,7 @@
               <a:rPr lang="en-GB"/>
               <a:t>Click to edit Master subtitle style</a:t>
             </a:r>
-            <a:endParaRPr lang="en-US" dirty="0"/>
+            <a:endParaRPr lang="en-US"/>
           </a:p>
         </p:txBody>
       </p:sp>
@@ -1113,11 +2355,6 @@
     <a:masterClrMapping/>
   </p:clrMapOvr>
   <p:hf sldNum="0" hdr="0" ftr="0" dt="0"/>
-  <p:extLst>
-    <p:ext uri="{DCECCB84-F9BA-43D5-87BE-67443E8EF086}">
-      <p15:sldGuideLst xmlns:p15="http://schemas.microsoft.com/office/powerpoint/2012/main"/>
-    </p:ext>
-  </p:extLst>
 </p:sldLayout>
 </file>
 
@@ -1168,7 +2405,7 @@
               <a:rPr lang="en-GB"/>
               <a:t>Click to edit Master title style</a:t>
             </a:r>
-            <a:endParaRPr lang="en-US" dirty="0"/>
+            <a:endParaRPr lang="en-US"/>
           </a:p>
         </p:txBody>
       </p:sp>
@@ -1231,7 +2468,7 @@
               <a:rPr lang="en-GB"/>
               <a:t>Fifth level</a:t>
             </a:r>
-            <a:endParaRPr lang="en-US" dirty="0"/>
+            <a:endParaRPr lang="en-US"/>
           </a:p>
         </p:txBody>
       </p:sp>
@@ -1429,7 +2666,7 @@
               <a:rPr lang="en-GB"/>
               <a:t>Click to edit Master title style</a:t>
             </a:r>
-            <a:endParaRPr lang="en-US" dirty="0"/>
+            <a:endParaRPr lang="en-US"/>
           </a:p>
         </p:txBody>
       </p:sp>
@@ -1474,7 +2711,7 @@
               <a:rPr lang="en-GB"/>
               <a:t>Click to edit Master subtitle style</a:t>
             </a:r>
-            <a:endParaRPr lang="en-US" dirty="0"/>
+            <a:endParaRPr lang="en-US"/>
           </a:p>
         </p:txBody>
       </p:sp>
@@ -1519,7 +2756,7 @@
           </a:lstStyle>
           <a:p>
             <a:r>
-              <a:rPr lang="en-US" dirty="0"/>
+              <a:rPr lang="en-US"/>
               <a:t> </a:t>
             </a:r>
           </a:p>
@@ -1735,7 +2972,7 @@
               <a:rPr lang="en-GB"/>
               <a:t>Click to edit Master title style</a:t>
             </a:r>
-            <a:endParaRPr lang="en-US" dirty="0"/>
+            <a:endParaRPr lang="en-US"/>
           </a:p>
         </p:txBody>
       </p:sp>
@@ -1780,7 +3017,7 @@
               <a:rPr lang="en-GB"/>
               <a:t>Click to edit Master subtitle style</a:t>
             </a:r>
-            <a:endParaRPr lang="en-US" dirty="0"/>
+            <a:endParaRPr lang="en-US"/>
           </a:p>
         </p:txBody>
       </p:sp>
@@ -1873,7 +3110,7 @@
           </a:lstStyle>
           <a:p>
             <a:r>
-              <a:rPr lang="en-US" dirty="0"/>
+              <a:rPr lang="en-US"/>
               <a:t> </a:t>
             </a:r>
           </a:p>
@@ -2066,7 +3303,7 @@
           </a:lstStyle>
           <a:p>
             <a:r>
-              <a:rPr lang="en-US" dirty="0"/>
+              <a:rPr lang="en-US"/>
               <a:t>Section header</a:t>
             </a:r>
           </a:p>
@@ -2233,11 +3470,6 @@
     <a:masterClrMapping/>
   </p:clrMapOvr>
   <p:hf sldNum="0" hdr="0" ftr="0" dt="0"/>
-  <p:extLst>
-    <p:ext uri="{DCECCB84-F9BA-43D5-87BE-67443E8EF086}">
-      <p15:sldGuideLst xmlns:p15="http://schemas.microsoft.com/office/powerpoint/2012/main"/>
-    </p:ext>
-  </p:extLst>
 </p:sldLayout>
 </file>
 
@@ -2291,7 +3523,7 @@
           </a:lstStyle>
           <a:p>
             <a:r>
-              <a:rPr lang="en-US" dirty="0"/>
+              <a:rPr lang="en-US"/>
               <a:t>Agenda</a:t>
             </a:r>
           </a:p>
@@ -2399,7 +3631,7 @@
               <a:rPr lang="en-GB"/>
               <a:t>Fifth level</a:t>
             </a:r>
-            <a:endParaRPr lang="en-US" dirty="0"/>
+            <a:endParaRPr lang="en-US"/>
           </a:p>
         </p:txBody>
       </p:sp>
@@ -2593,7 +3825,7 @@
           </a:lstStyle>
           <a:p>
             <a:r>
-              <a:rPr lang="en-US" dirty="0"/>
+              <a:rPr lang="en-US"/>
               <a:t>Agenda</a:t>
             </a:r>
           </a:p>
@@ -2693,7 +3925,7 @@
               <a:rPr lang="en-GB"/>
               <a:t>Fifth level</a:t>
             </a:r>
-            <a:endParaRPr lang="en-US" dirty="0"/>
+            <a:endParaRPr lang="en-US"/>
           </a:p>
         </p:txBody>
       </p:sp>
@@ -2832,7 +4064,7 @@
           </a:lstStyle>
           <a:p>
             <a:r>
-              <a:rPr lang="en-US" dirty="0"/>
+              <a:rPr lang="en-US"/>
               <a:t>  </a:t>
             </a:r>
           </a:p>
@@ -2951,7 +4183,7 @@
               <a:rPr lang="en-GB"/>
               <a:t>Click to edit Master title style</a:t>
             </a:r>
-            <a:endParaRPr lang="en-US" dirty="0"/>
+            <a:endParaRPr lang="en-US"/>
           </a:p>
         </p:txBody>
       </p:sp>
@@ -3047,7 +4279,7 @@
               <a:rPr lang="en-GB"/>
               <a:t>Fifth level</a:t>
             </a:r>
-            <a:endParaRPr lang="en-US" dirty="0"/>
+            <a:endParaRPr lang="en-US"/>
           </a:p>
         </p:txBody>
       </p:sp>
@@ -3244,7 +4476,7 @@
               <a:rPr lang="en-GB"/>
               <a:t>Click to edit Master title style</a:t>
             </a:r>
-            <a:endParaRPr lang="en-US" dirty="0"/>
+            <a:endParaRPr lang="en-US"/>
           </a:p>
         </p:txBody>
       </p:sp>
@@ -3340,7 +4572,7 @@
               <a:rPr lang="en-GB"/>
               <a:t>Fifth level</a:t>
             </a:r>
-            <a:endParaRPr lang="en-US" dirty="0"/>
+            <a:endParaRPr lang="en-US"/>
           </a:p>
         </p:txBody>
       </p:sp>
@@ -3586,10 +4818,10 @@
           </a:lstStyle>
           <a:p>
             <a:r>
-              <a:rPr lang="en-US" dirty="0"/>
+              <a:rPr lang="en-US"/>
               <a:t>Presentation title</a:t>
             </a:r>
-            <a:endParaRPr lang="en-GB" dirty="0"/>
+            <a:endParaRPr lang="en-GB"/>
           </a:p>
         </p:txBody>
       </p:sp>
@@ -3664,10 +4896,10 @@
           </a:lstStyle>
           <a:p>
             <a:r>
-              <a:rPr lang="en-US" dirty="0"/>
+              <a:rPr lang="en-US"/>
               <a:t>Subtitle</a:t>
             </a:r>
-            <a:endParaRPr lang="en-GB" dirty="0"/>
+            <a:endParaRPr lang="en-GB"/>
           </a:p>
         </p:txBody>
       </p:sp>
@@ -3753,7 +4985,7 @@
           <a:p>
             <a:pPr lvl="0"/>
             <a:r>
-              <a:rPr lang="en-GB" dirty="0"/>
+              <a:rPr lang="en-GB"/>
               <a:t>01 Month 2020</a:t>
             </a:r>
           </a:p>
@@ -3820,7 +5052,7 @@
               <a:rPr lang="en-GB"/>
               <a:t>Click to edit Master title style</a:t>
             </a:r>
-            <a:endParaRPr lang="en-US" dirty="0"/>
+            <a:endParaRPr lang="en-US"/>
           </a:p>
         </p:txBody>
       </p:sp>
@@ -3865,7 +5097,7 @@
           </a:lstStyle>
           <a:p>
             <a:r>
-              <a:rPr lang="en-US" dirty="0"/>
+              <a:rPr lang="en-US"/>
               <a:t>  </a:t>
             </a:r>
           </a:p>
@@ -3963,7 +5195,7 @@
               <a:rPr lang="en-GB"/>
               <a:t>Fifth level</a:t>
             </a:r>
-            <a:endParaRPr lang="en-US" dirty="0"/>
+            <a:endParaRPr lang="en-US"/>
           </a:p>
         </p:txBody>
       </p:sp>
@@ -4169,7 +5401,7 @@
               <a:rPr lang="en-GB"/>
               <a:t>Click to edit Master title style</a:t>
             </a:r>
-            <a:endParaRPr lang="en-US" dirty="0"/>
+            <a:endParaRPr lang="en-US"/>
           </a:p>
         </p:txBody>
       </p:sp>
@@ -4214,7 +5446,7 @@
           </a:lstStyle>
           <a:p>
             <a:r>
-              <a:rPr lang="en-US" dirty="0"/>
+              <a:rPr lang="en-US"/>
               <a:t>  </a:t>
             </a:r>
           </a:p>
@@ -4312,7 +5544,7 @@
               <a:rPr lang="en-GB"/>
               <a:t>Fifth level</a:t>
             </a:r>
-            <a:endParaRPr lang="en-US" dirty="0"/>
+            <a:endParaRPr lang="en-US"/>
           </a:p>
         </p:txBody>
       </p:sp>
@@ -4518,7 +5750,7 @@
               <a:rPr lang="en-GB"/>
               <a:t>Click to edit Master title style</a:t>
             </a:r>
-            <a:endParaRPr lang="en-US" dirty="0"/>
+            <a:endParaRPr lang="en-US"/>
           </a:p>
         </p:txBody>
       </p:sp>
@@ -4614,7 +5846,7 @@
               <a:rPr lang="en-GB"/>
               <a:t>Fifth level</a:t>
             </a:r>
-            <a:endParaRPr lang="en-US" dirty="0"/>
+            <a:endParaRPr lang="en-US"/>
           </a:p>
         </p:txBody>
       </p:sp>
@@ -4800,7 +6032,7 @@
           </a:lstStyle>
           <a:p>
             <a:r>
-              <a:rPr lang="en-US" dirty="0"/>
+              <a:rPr lang="en-US"/>
               <a:t>  </a:t>
             </a:r>
           </a:p>
@@ -4873,7 +6105,7 @@
               <a:rPr lang="en-GB"/>
               <a:t>Click to edit Master title style</a:t>
             </a:r>
-            <a:endParaRPr lang="en-US" dirty="0"/>
+            <a:endParaRPr lang="en-US"/>
           </a:p>
         </p:txBody>
       </p:sp>
@@ -4967,7 +6199,7 @@
               <a:rPr lang="en-GB"/>
               <a:t>Fifth level</a:t>
             </a:r>
-            <a:endParaRPr lang="en-US" dirty="0"/>
+            <a:endParaRPr lang="en-US"/>
           </a:p>
         </p:txBody>
       </p:sp>
@@ -5153,7 +6385,7 @@
           </a:lstStyle>
           <a:p>
             <a:r>
-              <a:rPr lang="en-US" dirty="0"/>
+              <a:rPr lang="en-US"/>
               <a:t>  </a:t>
             </a:r>
           </a:p>
@@ -5226,7 +6458,7 @@
               <a:rPr lang="en-GB"/>
               <a:t>Click to edit Master title style</a:t>
             </a:r>
-            <a:endParaRPr lang="en-US" dirty="0"/>
+            <a:endParaRPr lang="en-US"/>
           </a:p>
         </p:txBody>
       </p:sp>
@@ -5320,7 +6552,7 @@
               <a:rPr lang="en-GB"/>
               <a:t>Fifth level</a:t>
             </a:r>
-            <a:endParaRPr lang="en-US" dirty="0"/>
+            <a:endParaRPr lang="en-US"/>
           </a:p>
         </p:txBody>
       </p:sp>
@@ -5506,7 +6738,7 @@
           </a:lstStyle>
           <a:p>
             <a:r>
-              <a:rPr lang="en-US" dirty="0"/>
+              <a:rPr lang="en-US"/>
               <a:t>  </a:t>
             </a:r>
           </a:p>
@@ -5573,7 +6805,7 @@
               <a:rPr lang="en-GB"/>
               <a:t>Click to edit Master title style</a:t>
             </a:r>
-            <a:endParaRPr lang="en-US" dirty="0"/>
+            <a:endParaRPr lang="en-US"/>
           </a:p>
         </p:txBody>
       </p:sp>
@@ -5666,7 +6898,7 @@
           </a:lstStyle>
           <a:p>
             <a:r>
-              <a:rPr lang="en-US" dirty="0"/>
+              <a:rPr lang="en-US"/>
               <a:t>  </a:t>
             </a:r>
           </a:p>
@@ -5769,7 +7001,7 @@
               <a:rPr lang="en-GB"/>
               <a:t>Fifth level</a:t>
             </a:r>
-            <a:endParaRPr lang="en-US" dirty="0"/>
+            <a:endParaRPr lang="en-US"/>
           </a:p>
         </p:txBody>
       </p:sp>
@@ -5981,7 +7213,7 @@
               <a:rPr lang="en-GB"/>
               <a:t>Click to edit Master title style</a:t>
             </a:r>
-            <a:endParaRPr lang="en-US" dirty="0"/>
+            <a:endParaRPr lang="en-US"/>
           </a:p>
         </p:txBody>
       </p:sp>
@@ -6026,7 +7258,7 @@
           </a:lstStyle>
           <a:p>
             <a:r>
-              <a:rPr lang="en-US" dirty="0"/>
+              <a:rPr lang="en-US"/>
               <a:t>  </a:t>
             </a:r>
           </a:p>
@@ -6129,7 +7361,7 @@
               <a:rPr lang="en-GB"/>
               <a:t>Fifth level</a:t>
             </a:r>
-            <a:endParaRPr lang="en-US" dirty="0"/>
+            <a:endParaRPr lang="en-US"/>
           </a:p>
         </p:txBody>
       </p:sp>
@@ -6326,7 +7558,7 @@
               <a:rPr lang="en-GB"/>
               <a:t>Click to edit Master title style</a:t>
             </a:r>
-            <a:endParaRPr lang="en-US" dirty="0"/>
+            <a:endParaRPr lang="en-US"/>
           </a:p>
         </p:txBody>
       </p:sp>
@@ -6421,7 +7653,7 @@
               <a:buNone/>
             </a:pPr>
             <a:r>
-              <a:rPr lang="en-US" dirty="0"/>
+              <a:rPr lang="en-US"/>
               <a:t>  </a:t>
             </a:r>
           </a:p>
@@ -6517,7 +7749,7 @@
               <a:rPr lang="en-GB"/>
               <a:t>Fifth level</a:t>
             </a:r>
-            <a:endParaRPr lang="en-US" dirty="0"/>
+            <a:endParaRPr lang="en-US"/>
           </a:p>
         </p:txBody>
       </p:sp>
@@ -6719,7 +7951,7 @@
               <a:rPr lang="en-GB"/>
               <a:t>Click to edit Master title style</a:t>
             </a:r>
-            <a:endParaRPr lang="en-US" dirty="0"/>
+            <a:endParaRPr lang="en-US"/>
           </a:p>
         </p:txBody>
       </p:sp>
@@ -6764,7 +7996,7 @@
           </a:lstStyle>
           <a:p>
             <a:r>
-              <a:rPr lang="en-US" dirty="0"/>
+              <a:rPr lang="en-US"/>
               <a:t>  </a:t>
             </a:r>
           </a:p>
@@ -6860,7 +8092,7 @@
               <a:rPr lang="en-GB"/>
               <a:t>Fifth level</a:t>
             </a:r>
-            <a:endParaRPr lang="en-US" dirty="0"/>
+            <a:endParaRPr lang="en-US"/>
           </a:p>
         </p:txBody>
       </p:sp>
@@ -7114,7 +8346,7 @@
           <a:p>
             <a:pPr lvl="0"/>
             <a:r>
-              <a:rPr lang="en-US" dirty="0"/>
+              <a:rPr lang="en-US"/>
               <a:t>##%</a:t>
             </a:r>
           </a:p>
@@ -7355,10 +8587,10 @@
           </a:lstStyle>
           <a:p>
             <a:r>
-              <a:rPr lang="en-US" dirty="0"/>
+              <a:rPr lang="en-US"/>
               <a:t>Divider page title</a:t>
             </a:r>
-            <a:endParaRPr lang="en-GB" dirty="0"/>
+            <a:endParaRPr lang="en-GB"/>
           </a:p>
         </p:txBody>
       </p:sp>
@@ -7653,35 +8885,35 @@
           <a:p>
             <a:pPr lvl="0"/>
             <a:r>
-              <a:rPr lang="en-US" dirty="0"/>
+              <a:rPr lang="en-US"/>
               <a:t>Click to add Statement</a:t>
             </a:r>
           </a:p>
           <a:p>
             <a:pPr lvl="1"/>
             <a:r>
-              <a:rPr lang="en-US" dirty="0"/>
+              <a:rPr lang="en-US"/>
               <a:t>Second level</a:t>
             </a:r>
           </a:p>
           <a:p>
             <a:pPr lvl="2"/>
             <a:r>
-              <a:rPr lang="en-US" dirty="0"/>
+              <a:rPr lang="en-US"/>
               <a:t>Third level</a:t>
             </a:r>
           </a:p>
           <a:p>
             <a:pPr lvl="3"/>
             <a:r>
-              <a:rPr lang="en-US" dirty="0"/>
+              <a:rPr lang="en-US"/>
               <a:t>Fourth level</a:t>
             </a:r>
           </a:p>
           <a:p>
             <a:pPr lvl="4"/>
             <a:r>
-              <a:rPr lang="en-US" dirty="0"/>
+              <a:rPr lang="en-US"/>
               <a:t>Fifth level</a:t>
             </a:r>
           </a:p>
@@ -7880,7 +9112,7 @@
           </a:lstStyle>
           <a:p>
             <a:r>
-              <a:rPr lang="en-US" dirty="0"/>
+              <a:rPr lang="en-US"/>
               <a:t>Quote Author</a:t>
             </a:r>
           </a:p>
@@ -7927,7 +9159,7 @@
           <a:p>
             <a:pPr lvl="0"/>
             <a:r>
-              <a:rPr lang="en-US" dirty="0"/>
+              <a:rPr lang="en-US"/>
               <a:t>Click to add Quote</a:t>
             </a:r>
           </a:p>
@@ -8142,7 +9374,7 @@
               <a:rPr lang="en-GB"/>
               <a:t>Click to edit Master title style</a:t>
             </a:r>
-            <a:endParaRPr lang="en-US" dirty="0"/>
+            <a:endParaRPr lang="en-US"/>
           </a:p>
         </p:txBody>
       </p:sp>
@@ -8236,7 +9468,7 @@
               <a:rPr lang="en-GB"/>
               <a:t>Fifth level</a:t>
             </a:r>
-            <a:endParaRPr lang="en-US" dirty="0"/>
+            <a:endParaRPr lang="en-US"/>
           </a:p>
         </p:txBody>
       </p:sp>
@@ -8330,7 +9562,7 @@
               <a:rPr lang="en-GB"/>
               <a:t>Fifth level</a:t>
             </a:r>
-            <a:endParaRPr lang="en-US" dirty="0"/>
+            <a:endParaRPr lang="en-US"/>
           </a:p>
         </p:txBody>
       </p:sp>
@@ -8527,7 +9759,7 @@
               <a:rPr lang="en-GB"/>
               <a:t>Click to edit Master title style</a:t>
             </a:r>
-            <a:endParaRPr lang="en-US" dirty="0"/>
+            <a:endParaRPr lang="en-US"/>
           </a:p>
         </p:txBody>
       </p:sp>
@@ -8773,7 +10005,7 @@
               <a:rPr lang="en-GB"/>
               <a:t>Fifth level</a:t>
             </a:r>
-            <a:endParaRPr lang="en-US" dirty="0"/>
+            <a:endParaRPr lang="en-US"/>
           </a:p>
         </p:txBody>
       </p:sp>
@@ -8867,7 +10099,7 @@
               <a:rPr lang="en-GB"/>
               <a:t>Fifth level</a:t>
             </a:r>
-            <a:endParaRPr lang="en-US" dirty="0"/>
+            <a:endParaRPr lang="en-US"/>
           </a:p>
         </p:txBody>
       </p:sp>
@@ -9064,7 +10296,7 @@
               <a:rPr lang="en-GB"/>
               <a:t>Click to edit Master title style</a:t>
             </a:r>
-            <a:endParaRPr lang="en-US" dirty="0"/>
+            <a:endParaRPr lang="en-US"/>
           </a:p>
         </p:txBody>
       </p:sp>
@@ -9381,7 +10613,7 @@
               <a:rPr lang="en-GB"/>
               <a:t>Click to edit Master title style</a:t>
             </a:r>
-            <a:endParaRPr lang="en-US" dirty="0"/>
+            <a:endParaRPr lang="en-US"/>
           </a:p>
         </p:txBody>
       </p:sp>
@@ -9500,7 +10732,7 @@
               <a:rPr lang="en-GB"/>
               <a:t>Fifth level</a:t>
             </a:r>
-            <a:endParaRPr lang="en-US" dirty="0"/>
+            <a:endParaRPr lang="en-US"/>
           </a:p>
         </p:txBody>
       </p:sp>
@@ -9730,7 +10962,7 @@
               <a:rPr lang="en-GB"/>
               <a:t>Click to edit Master title style</a:t>
             </a:r>
-            <a:endParaRPr lang="en-US" dirty="0"/>
+            <a:endParaRPr lang="en-US"/>
           </a:p>
         </p:txBody>
       </p:sp>
@@ -9851,7 +11083,7 @@
               <a:rPr lang="en-GB"/>
               <a:t>Fifth level</a:t>
             </a:r>
-            <a:endParaRPr lang="en-US" dirty="0"/>
+            <a:endParaRPr lang="en-US"/>
           </a:p>
         </p:txBody>
       </p:sp>
@@ -10236,7 +11468,6 @@
               <a:rPr lang="en-GB"/>
               <a:t>Fifth level</a:t>
             </a:r>
-            <a:endParaRPr lang="en-GB" dirty="0"/>
           </a:p>
         </p:txBody>
       </p:sp>
@@ -10444,7 +11675,6 @@
               <a:rPr lang="en-GB"/>
               <a:t>Fifth level</a:t>
             </a:r>
-            <a:endParaRPr lang="en-GB" dirty="0"/>
           </a:p>
         </p:txBody>
       </p:sp>
@@ -10724,7 +11954,6 @@
               <a:rPr lang="en-GB"/>
               <a:t>Fifth level</a:t>
             </a:r>
-            <a:endParaRPr lang="en-GB" dirty="0"/>
           </a:p>
         </p:txBody>
       </p:sp>
@@ -11447,7 +12676,6 @@
               <a:rPr lang="en-GB"/>
               <a:t>Fifth level</a:t>
             </a:r>
-            <a:endParaRPr lang="en-GB" dirty="0"/>
           </a:p>
         </p:txBody>
       </p:sp>
@@ -11968,7 +13196,7 @@
               <a:rPr lang="en-GB"/>
               <a:t>Click to edit Master title style</a:t>
             </a:r>
-            <a:endParaRPr lang="en-US" dirty="0"/>
+            <a:endParaRPr lang="en-US"/>
           </a:p>
         </p:txBody>
       </p:sp>
@@ -12036,7 +13264,7 @@
               <a:rPr lang="en-GB"/>
               <a:t>Fifth level</a:t>
             </a:r>
-            <a:endParaRPr lang="en-US" dirty="0"/>
+            <a:endParaRPr lang="en-US"/>
           </a:p>
         </p:txBody>
       </p:sp>
@@ -12613,7 +13841,7 @@
               <a:buNone/>
             </a:pPr>
             <a:r>
-              <a:rPr lang="en-US" sz="1300" b="1" dirty="0">
+              <a:rPr lang="en-US" sz="1300" b="1">
                 <a:solidFill>
                   <a:srgbClr val="1B6FB3"/>
                 </a:solidFill>
@@ -12623,7 +13851,7 @@
               </a:rPr>
               <a:t>AZURE API MANAGEMENT</a:t>
             </a:r>
-            <a:endParaRPr lang="en-US" sz="1300" dirty="0"/>
+            <a:endParaRPr lang="en-US" sz="1300"/>
           </a:p>
         </p:txBody>
       </p:sp>
@@ -12635,7 +13863,7 @@
         </p:nvSpPr>
         <p:spPr>
           <a:xfrm>
-            <a:off x="1188720" y="1783080"/>
+            <a:off x="1234440" y="1760220"/>
             <a:ext cx="9601200" cy="1371600"/>
           </a:xfrm>
           <a:prstGeom prst="rect">
@@ -12655,7 +13883,7 @@
               <a:buNone/>
             </a:pPr>
             <a:r>
-              <a:rPr lang="en-US" sz="4200" b="1" dirty="0">
+              <a:rPr lang="en-US" sz="4200" b="1">
                 <a:solidFill>
                   <a:srgbClr val="1B2836"/>
                 </a:solidFill>
@@ -12665,7 +13893,7 @@
               </a:rPr>
               <a:t>Target Architecture</a:t>
             </a:r>
-            <a:endParaRPr lang="en-US" sz="4200" dirty="0"/>
+            <a:endParaRPr lang="en-US" sz="4200"/>
           </a:p>
           <a:p>
             <a:pPr marL="0" indent="0">
@@ -12675,7 +13903,7 @@
               <a:buNone/>
             </a:pPr>
             <a:r>
-              <a:rPr lang="en-US" sz="4200" b="1" dirty="0">
+              <a:rPr lang="en-US" sz="4200" b="1">
                 <a:solidFill>
                   <a:srgbClr val="1B2836"/>
                 </a:solidFill>
@@ -12685,7 +13913,7 @@
               </a:rPr>
               <a:t>&amp; Build-Out Design</a:t>
             </a:r>
-            <a:endParaRPr lang="en-US" sz="4200" dirty="0"/>
+            <a:endParaRPr lang="en-US" sz="4200"/>
           </a:p>
         </p:txBody>
       </p:sp>
@@ -12697,8 +13925,8 @@
         </p:nvSpPr>
         <p:spPr>
           <a:xfrm>
-            <a:off x="1234440" y="3154680"/>
-            <a:ext cx="9601200" cy="274320"/>
+            <a:off x="1295400" y="3154680"/>
+            <a:ext cx="9601200" cy="804672"/>
           </a:xfrm>
           <a:prstGeom prst="rect">
             <a:avLst/>
@@ -12709,22 +13937,35 @@
         <p:txBody>
           <a:bodyPr wrap="square" lIns="0" tIns="0" rIns="0" bIns="0" rtlCol="0" anchor="t"/>
           <a:lstStyle/>
+          <a:p>
+            <a:r>
+              <a:rPr lang="en-GB" sz="1400">
+                <a:solidFill>
+                  <a:srgbClr val="5A6B7D"/>
+                </a:solidFill>
+                <a:latin typeface="Calibri" pitchFamily="34" charset="0"/>
+                <a:ea typeface="Calibri" pitchFamily="34" charset="-122"/>
+                <a:cs typeface="Calibri" pitchFamily="34" charset="-120"/>
+              </a:rPr>
+              <a:t>This presentation has been prepared to support design discussions and decision-making. The proposed architecture and recommendations are presented for review for </a:t>
+            </a:r>
+            <a:r>
+              <a:rPr lang="en-US" sz="1400">
+                <a:solidFill>
+                  <a:srgbClr val="5A6B7D"/>
+                </a:solidFill>
+                <a:latin typeface="Calibri" pitchFamily="34" charset="0"/>
+                <a:ea typeface="Calibri" pitchFamily="34" charset="-122"/>
+                <a:cs typeface="Calibri" pitchFamily="34" charset="-120"/>
+              </a:rPr>
+              <a:t>Edge Service, APIM hosting, ingress, egress and resilience decisions</a:t>
+            </a:r>
+          </a:p>
           <a:p>
             <a:pPr marL="0" indent="0" algn="l">
               <a:buNone/>
             </a:pPr>
-            <a:r>
-              <a:rPr lang="en-US" sz="1400" dirty="0">
-                <a:solidFill>
-                  <a:srgbClr val="5A6B7D"/>
-                </a:solidFill>
-                <a:latin typeface="Calibri" pitchFamily="34" charset="0"/>
-                <a:ea typeface="Calibri" pitchFamily="34" charset="-122"/>
-                <a:cs typeface="Calibri" pitchFamily="34" charset="-120"/>
-              </a:rPr>
-              <a:t>Greenfield APIM deployment - edge, hosting, ingress, egress and resilience decisions</a:t>
-            </a:r>
-            <a:endParaRPr lang="en-US" sz="1400" dirty="0"/>
+            <a:endParaRPr lang="en-US" sz="1400"/>
           </a:p>
         </p:txBody>
       </p:sp>
@@ -12787,7 +14028,7 @@
               <a:buNone/>
             </a:pPr>
             <a:r>
-              <a:rPr lang="en-US" sz="1700" b="1" dirty="0">
+              <a:rPr lang="en-US" sz="1700" b="1">
                 <a:solidFill>
                   <a:srgbClr val="1B6FB3"/>
                 </a:solidFill>
@@ -12797,7 +14038,7 @@
               </a:rPr>
               <a:t>01</a:t>
             </a:r>
-            <a:endParaRPr lang="en-US" sz="1700" dirty="0"/>
+            <a:endParaRPr lang="en-US" sz="1700"/>
           </a:p>
         </p:txBody>
       </p:sp>
@@ -12829,7 +14070,7 @@
               <a:buNone/>
             </a:pPr>
             <a:r>
-              <a:rPr lang="en-US" sz="1250" b="1" dirty="0">
+              <a:rPr lang="en-US" sz="1250" b="1">
                 <a:solidFill>
                   <a:srgbClr val="1B2836"/>
                 </a:solidFill>
@@ -12839,7 +14080,7 @@
               </a:rPr>
               <a:t>Reference</a:t>
             </a:r>
-            <a:endParaRPr lang="en-US" sz="1250" dirty="0"/>
+            <a:endParaRPr lang="en-US" sz="1250"/>
           </a:p>
           <a:p>
             <a:pPr marL="0" indent="0" algn="l">
@@ -12849,7 +14090,7 @@
               <a:buNone/>
             </a:pPr>
             <a:r>
-              <a:rPr lang="en-US" sz="1250" b="1" dirty="0">
+              <a:rPr lang="en-US" sz="1250" b="1">
                 <a:solidFill>
                   <a:srgbClr val="1B2836"/>
                 </a:solidFill>
@@ -12859,7 +14100,7 @@
               </a:rPr>
               <a:t>Architecture</a:t>
             </a:r>
-            <a:endParaRPr lang="en-US" sz="1250" dirty="0"/>
+            <a:endParaRPr lang="en-US" sz="1250"/>
           </a:p>
         </p:txBody>
       </p:sp>
@@ -12922,7 +14163,7 @@
               <a:buNone/>
             </a:pPr>
             <a:r>
-              <a:rPr lang="en-US" sz="1700" b="1" dirty="0">
+              <a:rPr lang="en-US" sz="1700" b="1">
                 <a:solidFill>
                   <a:srgbClr val="1B6FB3"/>
                 </a:solidFill>
@@ -12932,7 +14173,7 @@
               </a:rPr>
               <a:t>02</a:t>
             </a:r>
-            <a:endParaRPr lang="en-US" sz="1700" dirty="0"/>
+            <a:endParaRPr lang="en-US" sz="1700"/>
           </a:p>
         </p:txBody>
       </p:sp>
@@ -12964,7 +14205,7 @@
               <a:buNone/>
             </a:pPr>
             <a:r>
-              <a:rPr lang="en-US" sz="1250" b="1" dirty="0">
+              <a:rPr lang="en-US" sz="1250" b="1">
                 <a:solidFill>
                   <a:srgbClr val="1B2836"/>
                 </a:solidFill>
@@ -12974,7 +14215,7 @@
               </a:rPr>
               <a:t>Hosting</a:t>
             </a:r>
-            <a:endParaRPr lang="en-US" sz="1250" dirty="0"/>
+            <a:endParaRPr lang="en-US" sz="1250"/>
           </a:p>
           <a:p>
             <a:pPr marL="0" indent="0" algn="l">
@@ -12984,7 +14225,7 @@
               <a:buNone/>
             </a:pPr>
             <a:r>
-              <a:rPr lang="en-US" sz="1250" b="1" dirty="0">
+              <a:rPr lang="en-US" sz="1250" b="1">
                 <a:solidFill>
                   <a:srgbClr val="1B2836"/>
                 </a:solidFill>
@@ -12994,7 +14235,7 @@
               </a:rPr>
               <a:t>Model</a:t>
             </a:r>
-            <a:endParaRPr lang="en-US" sz="1250" dirty="0"/>
+            <a:endParaRPr lang="en-US" sz="1250"/>
           </a:p>
         </p:txBody>
       </p:sp>
@@ -13057,7 +14298,7 @@
               <a:buNone/>
             </a:pPr>
             <a:r>
-              <a:rPr lang="en-US" sz="1700" b="1" dirty="0">
+              <a:rPr lang="en-US" sz="1700" b="1">
                 <a:solidFill>
                   <a:srgbClr val="1B6FB3"/>
                 </a:solidFill>
@@ -13067,7 +14308,7 @@
               </a:rPr>
               <a:t>03</a:t>
             </a:r>
-            <a:endParaRPr lang="en-US" sz="1700" dirty="0"/>
+            <a:endParaRPr lang="en-US" sz="1700"/>
           </a:p>
         </p:txBody>
       </p:sp>
@@ -13099,7 +14340,7 @@
               <a:buNone/>
             </a:pPr>
             <a:r>
-              <a:rPr lang="en-US" sz="1250" b="1" dirty="0">
+              <a:rPr lang="en-US" sz="1250" b="1">
                 <a:solidFill>
                   <a:srgbClr val="1B2836"/>
                 </a:solidFill>
@@ -13109,7 +14350,7 @@
               </a:rPr>
               <a:t>External</a:t>
             </a:r>
-            <a:endParaRPr lang="en-US" sz="1250" dirty="0"/>
+            <a:endParaRPr lang="en-US" sz="1250"/>
           </a:p>
           <a:p>
             <a:pPr marL="0" indent="0" algn="l">
@@ -13119,7 +14360,7 @@
               <a:buNone/>
             </a:pPr>
             <a:r>
-              <a:rPr lang="en-US" sz="1250" b="1" dirty="0">
+              <a:rPr lang="en-US" sz="1250" b="1">
                 <a:solidFill>
                   <a:srgbClr val="1B2836"/>
                 </a:solidFill>
@@ -13129,7 +14370,7 @@
               </a:rPr>
               <a:t>Ingress</a:t>
             </a:r>
-            <a:endParaRPr lang="en-US" sz="1250" dirty="0"/>
+            <a:endParaRPr lang="en-US" sz="1250"/>
           </a:p>
         </p:txBody>
       </p:sp>
@@ -13192,7 +14433,7 @@
               <a:buNone/>
             </a:pPr>
             <a:r>
-              <a:rPr lang="en-US" sz="1700" b="1" dirty="0">
+              <a:rPr lang="en-US" sz="1700" b="1">
                 <a:solidFill>
                   <a:srgbClr val="1B6FB3"/>
                 </a:solidFill>
@@ -13202,7 +14443,7 @@
               </a:rPr>
               <a:t>04</a:t>
             </a:r>
-            <a:endParaRPr lang="en-US" sz="1700" dirty="0"/>
+            <a:endParaRPr lang="en-US" sz="1700"/>
           </a:p>
         </p:txBody>
       </p:sp>
@@ -13234,7 +14475,7 @@
               <a:buNone/>
             </a:pPr>
             <a:r>
-              <a:rPr lang="en-US" sz="1250" b="1" dirty="0">
+              <a:rPr lang="en-US" sz="1250" b="1">
                 <a:solidFill>
                   <a:srgbClr val="1B2836"/>
                 </a:solidFill>
@@ -13244,7 +14485,7 @@
               </a:rPr>
               <a:t>External</a:t>
             </a:r>
-            <a:endParaRPr lang="en-US" sz="1250" dirty="0"/>
+            <a:endParaRPr lang="en-US" sz="1250"/>
           </a:p>
           <a:p>
             <a:pPr marL="0" indent="0" algn="l">
@@ -13254,7 +14495,7 @@
               <a:buNone/>
             </a:pPr>
             <a:r>
-              <a:rPr lang="en-US" sz="1250" b="1" dirty="0">
+              <a:rPr lang="en-US" sz="1250" b="1">
                 <a:solidFill>
                   <a:srgbClr val="1B2836"/>
                 </a:solidFill>
@@ -13264,7 +14505,7 @@
               </a:rPr>
               <a:t>Egress</a:t>
             </a:r>
-            <a:endParaRPr lang="en-US" sz="1250" dirty="0"/>
+            <a:endParaRPr lang="en-US" sz="1250"/>
           </a:p>
         </p:txBody>
       </p:sp>
@@ -13327,7 +14568,7 @@
               <a:buNone/>
             </a:pPr>
             <a:r>
-              <a:rPr lang="en-US" sz="1700" b="1" dirty="0">
+              <a:rPr lang="en-US" sz="1700" b="1">
                 <a:solidFill>
                   <a:srgbClr val="1B6FB3"/>
                 </a:solidFill>
@@ -13337,7 +14578,7 @@
               </a:rPr>
               <a:t>05</a:t>
             </a:r>
-            <a:endParaRPr lang="en-US" sz="1700" dirty="0"/>
+            <a:endParaRPr lang="en-US" sz="1700"/>
           </a:p>
         </p:txBody>
       </p:sp>
@@ -13369,7 +14610,7 @@
               <a:buNone/>
             </a:pPr>
             <a:r>
-              <a:rPr lang="en-US" sz="1250" b="1" dirty="0">
+              <a:rPr lang="en-US" sz="1250" b="1">
                 <a:solidFill>
                   <a:srgbClr val="1B2836"/>
                 </a:solidFill>
@@ -13379,7 +14620,7 @@
               </a:rPr>
               <a:t>HA &amp; DR</a:t>
             </a:r>
-            <a:endParaRPr lang="en-US" sz="1250" dirty="0"/>
+            <a:endParaRPr lang="en-US" sz="1250"/>
           </a:p>
           <a:p>
             <a:pPr marL="0" indent="0" algn="l">
@@ -13389,7 +14630,7 @@
               <a:buNone/>
             </a:pPr>
             <a:r>
-              <a:rPr lang="en-US" sz="1250" b="1" dirty="0">
+              <a:rPr lang="en-US" sz="1250" b="1">
                 <a:solidFill>
                   <a:srgbClr val="1B2836"/>
                 </a:solidFill>
@@ -13399,7 +14640,7 @@
               </a:rPr>
               <a:t>Strategy</a:t>
             </a:r>
-            <a:endParaRPr lang="en-US" sz="1250" dirty="0"/>
+            <a:endParaRPr lang="en-US" sz="1250"/>
           </a:p>
         </p:txBody>
       </p:sp>
@@ -13413,7 +14654,7 @@
 
 <file path=ppt/slides/slide10.xml><?xml version="1.0" encoding="utf-8"?>
 <p:sld xmlns:a="http://schemas.openxmlformats.org/drawingml/2006/main" xmlns:r="http://schemas.openxmlformats.org/officeDocument/2006/relationships" xmlns:p="http://schemas.openxmlformats.org/presentationml/2006/main">
-  <p:cSld name="Slide 3">
+  <p:cSld>
     <p:spTree>
       <p:nvGrpSpPr>
         <p:cNvPr id="1" name=""/>
@@ -13485,7 +14726,7 @@
               <a:buNone/>
             </a:pPr>
             <a:r>
-              <a:rPr lang="en-US" sz="1700" b="1" dirty="0">
+              <a:rPr lang="en-US" sz="1700" b="1">
                 <a:solidFill>
                   <a:srgbClr val="FFFFFF"/>
                 </a:solidFill>
@@ -13495,7 +14736,7 @@
               </a:rPr>
               <a:t>A</a:t>
             </a:r>
-            <a:endParaRPr lang="en-US" sz="1700" dirty="0"/>
+            <a:endParaRPr lang="en-US" sz="1700"/>
           </a:p>
         </p:txBody>
       </p:sp>
@@ -13524,7 +14765,7 @@
               <a:buNone/>
             </a:pPr>
             <a:r>
-              <a:rPr lang="en-US" sz="950" b="1" kern="0" spc="200" dirty="0">
+              <a:rPr lang="en-US" sz="950" b="1" kern="0" spc="200">
                 <a:solidFill>
                   <a:srgbClr val="1B6FB3"/>
                 </a:solidFill>
@@ -13532,9 +14773,9 @@
                 <a:ea typeface="Calibri" pitchFamily="34" charset="-122"/>
                 <a:cs typeface="Calibri" pitchFamily="34" charset="-120"/>
               </a:rPr>
-              <a:t>APPENDIX · APIM GATEWAY TIERS</a:t>
-            </a:r>
-            <a:endParaRPr lang="en-US" sz="950" dirty="0"/>
+              <a:t>APPENDIX · GLOBAL ROUTING</a:t>
+            </a:r>
+            <a:endParaRPr lang="en-US" sz="950"/>
           </a:p>
         </p:txBody>
       </p:sp>
@@ -13563,7 +14804,7 @@
               <a:buNone/>
             </a:pPr>
             <a:r>
-              <a:rPr lang="en-US" sz="2800" b="1" dirty="0">
+              <a:rPr lang="en-US" sz="2800" b="1">
                 <a:solidFill>
                   <a:srgbClr val="1B2836"/>
                 </a:solidFill>
@@ -13571,9 +14812,9 @@
                 <a:ea typeface="Calibri" pitchFamily="34" charset="-122"/>
                 <a:cs typeface="Calibri" pitchFamily="34" charset="-120"/>
               </a:rPr>
-              <a:t>APIM Gateway Tiers &amp; Offerings</a:t>
-            </a:r>
-            <a:endParaRPr lang="en-US" sz="2800" dirty="0"/>
+              <a:t>Azure Front Door vs Traffic Manager</a:t>
+            </a:r>
+            <a:endParaRPr lang="en-US" sz="2800"/>
           </a:p>
         </p:txBody>
       </p:sp>
@@ -13602,7 +14843,7 @@
               <a:buNone/>
             </a:pPr>
             <a:r>
-              <a:rPr lang="en-US" sz="1200" dirty="0">
+              <a:rPr lang="en-US" sz="1200">
                 <a:solidFill>
                   <a:srgbClr val="5A6B7D"/>
                 </a:solidFill>
@@ -13610,9 +14851,9 @@
                 <a:ea typeface="Calibri" pitchFamily="34" charset="-122"/>
                 <a:cs typeface="Calibri" pitchFamily="34" charset="-120"/>
               </a:rPr>
-              <a:t>APIM offers several tiers. Premium v2 provides the network isolation, scale and governance a strategic API platform needs.</a:t>
-            </a:r>
-            <a:endParaRPr lang="en-US" sz="1200" dirty="0"/>
+              <a:t>Both route across regions but at different layers. Azure Front Door is the chosen edge for HTTPS APIs; Traffic Manager only wins for non-HTTP or non-Azure routing.</a:t>
+            </a:r>
+            <a:endParaRPr lang="en-US" sz="1200"/>
           </a:p>
         </p:txBody>
       </p:sp>
@@ -13624,8 +14865,8 @@
         </p:nvSpPr>
         <p:spPr>
           <a:xfrm>
-            <a:off x="502920" y="1417320"/>
-            <a:ext cx="3544824" cy="3657600"/>
+            <a:off x="822960" y="1417320"/>
+            <a:ext cx="4933518" cy="3657600"/>
           </a:xfrm>
           <a:prstGeom prst="roundRect">
             <a:avLst>
@@ -13658,8 +14899,8 @@
         </p:nvSpPr>
         <p:spPr>
           <a:xfrm>
-            <a:off x="685800" y="1581912"/>
-            <a:ext cx="1463040" cy="228600"/>
+            <a:off x="1077484" y="1581912"/>
+            <a:ext cx="2036190" cy="228600"/>
           </a:xfrm>
           <a:prstGeom prst="rect">
             <a:avLst/>
@@ -13675,7 +14916,7 @@
               <a:buNone/>
             </a:pPr>
             <a:r>
-              <a:rPr lang="en-US" sz="900" b="1" kern="0" spc="120" dirty="0">
+              <a:rPr lang="en-US" sz="900" b="1" kern="0" spc="120">
                 <a:solidFill>
                   <a:srgbClr val="5A6B7D"/>
                 </a:solidFill>
@@ -13683,9 +14924,9 @@
                 <a:ea typeface="Calibri" pitchFamily="34" charset="-122"/>
                 <a:cs typeface="Calibri" pitchFamily="34" charset="-120"/>
               </a:rPr>
-              <a:t>ENTRY TIERS</a:t>
-            </a:r>
-            <a:endParaRPr lang="en-US" sz="900" dirty="0"/>
+              <a:t>OPTION A</a:t>
+            </a:r>
+            <a:endParaRPr lang="en-US" sz="900"/>
           </a:p>
         </p:txBody>
       </p:sp>
@@ -13697,8 +14938,8 @@
         </p:nvSpPr>
         <p:spPr>
           <a:xfrm>
-            <a:off x="2566416" y="1563624"/>
-            <a:ext cx="1298448" cy="237744"/>
+            <a:off x="3694836" y="1563624"/>
+            <a:ext cx="1807118" cy="237744"/>
           </a:xfrm>
           <a:prstGeom prst="roundRect">
             <a:avLst>
@@ -13731,13 +14972,15 @@
         </p:nvSpPr>
         <p:spPr>
           <a:xfrm>
-            <a:off x="2566416" y="1563624"/>
-            <a:ext cx="1298448" cy="237744"/>
+            <a:off x="3694836" y="1563624"/>
+            <a:ext cx="1807118" cy="237744"/>
           </a:xfrm>
           <a:prstGeom prst="rect">
             <a:avLst/>
           </a:prstGeom>
-          <a:noFill/>
+          <a:solidFill>
+            <a:schemeClr val="tx2"/>
+          </a:solidFill>
           <a:ln>
             <a:solidFill>
               <a:srgbClr val="002060"/>
@@ -13752,7 +14995,7 @@
               <a:buNone/>
             </a:pPr>
             <a:r>
-              <a:rPr lang="en-US" sz="850" b="1" kern="0" spc="80" dirty="0">
+              <a:rPr lang="en-US" sz="850" b="1" kern="0" spc="80">
                 <a:solidFill>
                   <a:srgbClr val="FFFFFF"/>
                 </a:solidFill>
@@ -13760,9 +15003,9 @@
                 <a:ea typeface="Calibri" pitchFamily="34" charset="-122"/>
                 <a:cs typeface="Calibri" pitchFamily="34" charset="-120"/>
               </a:rPr>
-              <a:t>NOT SUFFICIENT</a:t>
-            </a:r>
-            <a:endParaRPr lang="en-US" sz="850" dirty="0"/>
+              <a:t>CHOSEN</a:t>
+            </a:r>
+            <a:endParaRPr lang="en-US" sz="850"/>
           </a:p>
         </p:txBody>
       </p:sp>
@@ -13774,8 +15017,8 @@
         </p:nvSpPr>
         <p:spPr>
           <a:xfrm>
-            <a:off x="685800" y="1920240"/>
-            <a:ext cx="3179064" cy="457200"/>
+            <a:off x="1077484" y="1920240"/>
+            <a:ext cx="4424471" cy="457200"/>
           </a:xfrm>
           <a:prstGeom prst="rect">
             <a:avLst/>
@@ -13788,7 +15031,7 @@
           <a:lstStyle/>
           <a:p>
             <a:r>
-              <a:rPr lang="en-US" sz="1500" b="1" dirty="0">
+              <a:rPr lang="en-US" sz="1500" b="1">
                 <a:solidFill>
                   <a:srgbClr val="0E3F6E"/>
                 </a:solidFill>
@@ -13796,9 +15039,9 @@
                 <a:ea typeface="Calibri"/>
                 <a:cs typeface="Calibri"/>
               </a:rPr>
-              <a:t>Consumption / Developer / Basic / Standard</a:t>
-            </a:r>
-            <a:endParaRPr lang="en-US" sz="1500" dirty="0">
+              <a:t>Azure Front Door</a:t>
+            </a:r>
+            <a:endParaRPr lang="en-US" sz="1500">
               <a:solidFill>
                 <a:srgbClr val="000000"/>
               </a:solidFill>
@@ -13814,7 +15057,7 @@
               </a:lnSpc>
               <a:buNone/>
             </a:pPr>
-            <a:endParaRPr lang="en-US" sz="1500" b="1" dirty="0">
+            <a:endParaRPr lang="en-US" sz="1500" b="1">
               <a:solidFill>
                 <a:srgbClr val="0E3F6E"/>
               </a:solidFill>
@@ -13833,8 +15076,8 @@
         </p:nvSpPr>
         <p:spPr>
           <a:xfrm>
-            <a:off x="685800" y="2350008"/>
-            <a:ext cx="3179064" cy="228600"/>
+            <a:off x="1077484" y="2350008"/>
+            <a:ext cx="4424471" cy="228600"/>
           </a:xfrm>
           <a:prstGeom prst="rect">
             <a:avLst/>
@@ -13850,7 +15093,7 @@
               <a:buNone/>
             </a:pPr>
             <a:r>
-              <a:rPr lang="en-US" sz="800" b="1" kern="0" spc="120" dirty="0">
+              <a:rPr lang="en-US" sz="800" b="1" kern="0" spc="120">
                 <a:solidFill>
                   <a:srgbClr val="5A6B7D"/>
                 </a:solidFill>
@@ -13858,9 +15101,9 @@
                 <a:ea typeface="Calibri" pitchFamily="34" charset="-122"/>
                 <a:cs typeface="Calibri" pitchFamily="34" charset="-120"/>
               </a:rPr>
-              <a:t>TIER PROFILE</a:t>
-            </a:r>
-            <a:endParaRPr lang="en-US" sz="800" dirty="0"/>
+              <a:t>LAYER &amp; ROLE</a:t>
+            </a:r>
+            <a:endParaRPr lang="en-US" sz="800"/>
           </a:p>
         </p:txBody>
       </p:sp>
@@ -13872,8 +15115,8 @@
         </p:nvSpPr>
         <p:spPr>
           <a:xfrm>
-            <a:off x="685800" y="2551176"/>
-            <a:ext cx="3179064" cy="457200"/>
+            <a:off x="1077484" y="2551176"/>
+            <a:ext cx="4424471" cy="457200"/>
           </a:xfrm>
           <a:prstGeom prst="rect">
             <a:avLst/>
@@ -13891,7 +15134,7 @@
               </a:lnSpc>
             </a:pPr>
             <a:r>
-              <a:rPr lang="en-US" sz="1000" i="1" dirty="0">
+              <a:rPr lang="en-US" sz="1000" i="1">
                 <a:solidFill>
                   <a:srgbClr val="1B2836"/>
                 </a:solidFill>
@@ -13899,9 +15142,9 @@
                 <a:ea typeface="Calibri" pitchFamily="34" charset="-122"/>
                 <a:cs typeface="Calibri" pitchFamily="34" charset="-120"/>
               </a:rPr>
-              <a:t>serverless, non-production and entry production tiers</a:t>
-            </a:r>
-            <a:endParaRPr lang="en-US" sz="1000" dirty="0"/>
+              <a:t>Layer 7 · global anycast · edge WAF · Private Link origin</a:t>
+            </a:r>
+            <a:endParaRPr lang="en-US" sz="1000"/>
           </a:p>
         </p:txBody>
       </p:sp>
@@ -13913,8 +15156,8 @@
         </p:nvSpPr>
         <p:spPr>
           <a:xfrm>
-            <a:off x="685800" y="3026664"/>
-            <a:ext cx="3179064" cy="1207008"/>
+            <a:off x="1077484" y="3026664"/>
+            <a:ext cx="4424471" cy="1207008"/>
           </a:xfrm>
           <a:prstGeom prst="rect">
             <a:avLst/>
@@ -13934,12 +15177,12 @@
               <a:buChar char="•"/>
             </a:pPr>
             <a:r>
-              <a:rPr lang="en-GB" sz="1050" dirty="0">
+              <a:rPr lang="en-GB" sz="1050">
                 <a:latin typeface="Calibri" panose="020F0502020204030204" pitchFamily="34" charset="0"/>
                 <a:ea typeface="Calibri" panose="020F0502020204030204" pitchFamily="34" charset="0"/>
                 <a:cs typeface="Calibri" panose="020F0502020204030204" pitchFamily="34" charset="0"/>
               </a:rPr>
-              <a:t>Consumption is serverless and per-call; Developer has no SLA (non-prod only).</a:t>
+              <a:t>Built-in WAF, TLS termination, DDoS and caching at the Microsoft edge.</a:t>
             </a:r>
           </a:p>
           <a:p>
@@ -13950,7 +15193,7 @@
               <a:buFont typeface="Arial" panose="020B0604020202020204" pitchFamily="34" charset="0"/>
               <a:buChar char="•"/>
             </a:pPr>
-            <a:endParaRPr lang="en-GB" sz="1050" dirty="0">
+            <a:endParaRPr lang="en-GB" sz="1050">
               <a:latin typeface="Calibri" panose="020F0502020204030204" pitchFamily="34" charset="0"/>
               <a:ea typeface="Calibri" panose="020F0502020204030204" pitchFamily="34" charset="0"/>
               <a:cs typeface="Calibri" panose="020F0502020204030204" pitchFamily="34" charset="0"/>
@@ -13962,12 +15205,12 @@
               <a:buChar char="•"/>
             </a:pPr>
             <a:r>
-              <a:rPr lang="en-GB" sz="1050" dirty="0">
+              <a:rPr lang="en-GB" sz="1050">
                 <a:latin typeface="Calibri"/>
                 <a:ea typeface="Calibri"/>
                 <a:cs typeface="Calibri"/>
               </a:rPr>
-              <a:t>Basic and Standard carry a production SLA but no VNet injection.</a:t>
+              <a:t>Anycast routing with fast, sub-minute health-based regional failover.</a:t>
             </a:r>
           </a:p>
           <a:p>
@@ -13975,7 +15218,7 @@
               <a:buFont typeface="Arial" panose="020B0604020202020204" pitchFamily="34" charset="0"/>
               <a:buChar char="•"/>
             </a:pPr>
-            <a:endParaRPr lang="en-GB" sz="1050" dirty="0">
+            <a:endParaRPr lang="en-GB" sz="1050">
               <a:latin typeface="Calibri" panose="020F0502020204030204" pitchFamily="34" charset="0"/>
               <a:ea typeface="Calibri" panose="020F0502020204030204" pitchFamily="34" charset="0"/>
               <a:cs typeface="Calibri" panose="020F0502020204030204" pitchFamily="34" charset="0"/>
@@ -13990,14 +15233,14 @@
               <a:buChar char="•"/>
             </a:pPr>
             <a:r>
-              <a:rPr lang="en-GB" sz="1050" dirty="0">
+              <a:rPr lang="en-GB" sz="1050">
                 <a:latin typeface="Calibri"/>
                 <a:ea typeface="Calibri"/>
                 <a:cs typeface="Calibri"/>
               </a:rPr>
-              <a:t>None provide the private networking or isolation this design needs.</a:t>
-            </a:r>
-            <a:endParaRPr lang="en-GB" sz="1050" dirty="0">
+              <a:t>One global hostname; Private Link origin into internal-mode APIM.</a:t>
+            </a:r>
+            <a:endParaRPr lang="en-GB" sz="1050">
               <a:latin typeface="Calibri" panose="020F0502020204030204" pitchFamily="34" charset="0"/>
               <a:ea typeface="Calibri" panose="020F0502020204030204" pitchFamily="34" charset="0"/>
               <a:cs typeface="Calibri" panose="020F0502020204030204" pitchFamily="34" charset="0"/>
@@ -14013,8 +15256,8 @@
         </p:nvSpPr>
         <p:spPr>
           <a:xfrm>
-            <a:off x="685800" y="4416552"/>
-            <a:ext cx="3179064" cy="539496"/>
+            <a:off x="1077484" y="4416552"/>
+            <a:ext cx="4424471" cy="539496"/>
           </a:xfrm>
           <a:prstGeom prst="roundRect">
             <a:avLst>
@@ -14047,8 +15290,8 @@
         </p:nvSpPr>
         <p:spPr>
           <a:xfrm>
-            <a:off x="822960" y="4416552"/>
-            <a:ext cx="2904744" cy="539496"/>
+            <a:off x="1268376" y="4416552"/>
+            <a:ext cx="4042685" cy="539496"/>
           </a:xfrm>
           <a:prstGeom prst="rect">
             <a:avLst/>
@@ -14067,12 +15310,12 @@
               <a:buNone/>
             </a:pPr>
             <a:r>
-              <a:rPr lang="en-GB" sz="1050" b="1" dirty="0">
+              <a:rPr lang="en-GB" sz="1050" b="1">
                 <a:latin typeface="Calibri" panose="020F0502020204030204" pitchFamily="34" charset="0"/>
                 <a:ea typeface="Calibri" panose="020F0502020204030204" pitchFamily="34" charset="0"/>
                 <a:cs typeface="Calibri" panose="020F0502020204030204" pitchFamily="34" charset="0"/>
               </a:rPr>
-              <a:t>Not sufficient: no VNet injection or private isolation for the platform.</a:t>
+              <a:t>Chosen: every API is HTTPS and benefits from edge security and fast failover.</a:t>
             </a:r>
           </a:p>
         </p:txBody>
@@ -14085,8 +15328,8 @@
         </p:nvSpPr>
         <p:spPr>
           <a:xfrm>
-            <a:off x="4322064" y="1417320"/>
-            <a:ext cx="3544824" cy="3657600"/>
+            <a:off x="6423990" y="1417320"/>
+            <a:ext cx="4933518" cy="3657600"/>
           </a:xfrm>
           <a:prstGeom prst="roundRect">
             <a:avLst>
@@ -14119,8 +15362,8 @@
         </p:nvSpPr>
         <p:spPr>
           <a:xfrm>
-            <a:off x="4504944" y="1581912"/>
-            <a:ext cx="1463040" cy="228600"/>
+            <a:off x="6678514" y="1581912"/>
+            <a:ext cx="2036190" cy="228600"/>
           </a:xfrm>
           <a:prstGeom prst="rect">
             <a:avLst/>
@@ -14136,7 +15379,7 @@
               <a:buNone/>
             </a:pPr>
             <a:r>
-              <a:rPr lang="en-US" sz="900" b="1" kern="0" spc="120" dirty="0">
+              <a:rPr lang="en-US" sz="900" b="1" kern="0" spc="120">
                 <a:solidFill>
                   <a:srgbClr val="5A6B7D"/>
                 </a:solidFill>
@@ -14144,9 +15387,9 @@
                 <a:ea typeface="Calibri" pitchFamily="34" charset="-122"/>
                 <a:cs typeface="Calibri" pitchFamily="34" charset="-120"/>
               </a:rPr>
-              <a:t>TARGET TIER</a:t>
-            </a:r>
-            <a:endParaRPr lang="en-US" sz="900" dirty="0"/>
+              <a:t>OPTION B</a:t>
+            </a:r>
+            <a:endParaRPr lang="en-US" sz="900"/>
           </a:p>
         </p:txBody>
       </p:sp>
@@ -14158,8 +15401,8 @@
         </p:nvSpPr>
         <p:spPr>
           <a:xfrm>
-            <a:off x="6385560" y="1563624"/>
-            <a:ext cx="1298448" cy="237744"/>
+            <a:off x="9295866" y="1563624"/>
+            <a:ext cx="1807118" cy="237744"/>
           </a:xfrm>
           <a:prstGeom prst="roundRect">
             <a:avLst>
@@ -14192,13 +15435,17 @@
         </p:nvSpPr>
         <p:spPr>
           <a:xfrm>
-            <a:off x="6385560" y="1563624"/>
-            <a:ext cx="1298448" cy="237744"/>
+            <a:off x="9271285" y="1545188"/>
+            <a:ext cx="1850134" cy="274615"/>
           </a:xfrm>
           <a:prstGeom prst="rect">
             <a:avLst/>
           </a:prstGeom>
-          <a:noFill/>
+          <a:solidFill>
+            <a:schemeClr val="bg1">
+              <a:lumMod val="85000"/>
+            </a:schemeClr>
+          </a:solidFill>
           <a:ln/>
         </p:spPr>
         <p:txBody>
@@ -14209,7 +15456,7 @@
               <a:buNone/>
             </a:pPr>
             <a:r>
-              <a:rPr lang="en-US" sz="850" b="1" kern="0" spc="80" dirty="0">
+              <a:rPr lang="en-US" sz="850" b="1" kern="0" spc="80">
                 <a:solidFill>
                   <a:srgbClr val="FFFFFF"/>
                 </a:solidFill>
@@ -14217,9 +15464,9 @@
                 <a:ea typeface="Calibri" pitchFamily="34" charset="-122"/>
                 <a:cs typeface="Calibri" pitchFamily="34" charset="-120"/>
               </a:rPr>
-              <a:t>CHOSEN</a:t>
-            </a:r>
-            <a:endParaRPr lang="en-US" sz="850" dirty="0"/>
+              <a:t>NOT CHOSEN</a:t>
+            </a:r>
+            <a:endParaRPr lang="en-US" sz="850"/>
           </a:p>
         </p:txBody>
       </p:sp>
@@ -14231,8 +15478,8 @@
         </p:nvSpPr>
         <p:spPr>
           <a:xfrm>
-            <a:off x="4504944" y="1920240"/>
-            <a:ext cx="3179064" cy="457200"/>
+            <a:off x="6678514" y="1920240"/>
+            <a:ext cx="4424471" cy="457200"/>
           </a:xfrm>
           <a:prstGeom prst="rect">
             <a:avLst/>
@@ -14251,7 +15498,7 @@
               <a:buNone/>
             </a:pPr>
             <a:r>
-              <a:rPr lang="en-US" sz="1500" b="1" dirty="0">
+              <a:rPr lang="en-US" sz="1500" b="1">
                 <a:solidFill>
                   <a:srgbClr val="0E3F6E"/>
                 </a:solidFill>
@@ -14259,9 +15506,9 @@
                 <a:ea typeface="Calibri" pitchFamily="34" charset="-122"/>
                 <a:cs typeface="Calibri" pitchFamily="34" charset="-120"/>
               </a:rPr>
-              <a:t>Premium v2</a:t>
-            </a:r>
-            <a:endParaRPr lang="en-US" sz="1500" dirty="0"/>
+              <a:t>Azure Traffic Manager</a:t>
+            </a:r>
+            <a:endParaRPr lang="en-US" sz="1500"/>
           </a:p>
         </p:txBody>
       </p:sp>
@@ -14273,8 +15520,8 @@
         </p:nvSpPr>
         <p:spPr>
           <a:xfrm>
-            <a:off x="4504944" y="2253996"/>
-            <a:ext cx="3179064" cy="228600"/>
+            <a:off x="6678514" y="2253996"/>
+            <a:ext cx="4424471" cy="228600"/>
           </a:xfrm>
           <a:prstGeom prst="rect">
             <a:avLst/>
@@ -14290,7 +15537,7 @@
               <a:buNone/>
             </a:pPr>
             <a:r>
-              <a:rPr lang="en-US" sz="800" b="1" kern="0" spc="120" dirty="0">
+              <a:rPr lang="en-US" sz="800" b="1" kern="0" spc="120">
                 <a:solidFill>
                   <a:srgbClr val="5A6B7D"/>
                 </a:solidFill>
@@ -14298,9 +15545,9 @@
                 <a:ea typeface="Calibri" pitchFamily="34" charset="-122"/>
                 <a:cs typeface="Calibri" pitchFamily="34" charset="-120"/>
               </a:rPr>
-              <a:t>TIER PROFILE</a:t>
-            </a:r>
-            <a:endParaRPr lang="en-US" sz="800" dirty="0"/>
+              <a:t>LAYER &amp; ROLE</a:t>
+            </a:r>
+            <a:endParaRPr lang="en-US" sz="800"/>
           </a:p>
         </p:txBody>
       </p:sp>
@@ -14312,8 +15559,8 @@
         </p:nvSpPr>
         <p:spPr>
           <a:xfrm>
-            <a:off x="4504944" y="2433828"/>
-            <a:ext cx="3179064" cy="457200"/>
+            <a:off x="6678514" y="2433828"/>
+            <a:ext cx="4424471" cy="457200"/>
           </a:xfrm>
           <a:prstGeom prst="rect">
             <a:avLst/>
@@ -14332,7 +15579,7 @@
               <a:buNone/>
             </a:pPr>
             <a:r>
-              <a:rPr lang="en-US" sz="1000" i="1" dirty="0">
+              <a:rPr lang="en-US" sz="1000" i="1">
                 <a:solidFill>
                   <a:srgbClr val="1B2836"/>
                 </a:solidFill>
@@ -14340,9 +15587,9 @@
                 <a:ea typeface="Calibri" pitchFamily="34" charset="-122"/>
                 <a:cs typeface="Calibri" pitchFamily="34" charset="-120"/>
               </a:rPr>
-              <a:t>VNet injection · internal mode · zones · scale units</a:t>
-            </a:r>
-            <a:endParaRPr lang="en-US" sz="1000" dirty="0"/>
+              <a:t>DNS layer · protocol-agnostic · no inline inspection</a:t>
+            </a:r>
+            <a:endParaRPr lang="en-US" sz="1000"/>
           </a:p>
         </p:txBody>
       </p:sp>
@@ -14354,8 +15601,8 @@
         </p:nvSpPr>
         <p:spPr>
           <a:xfrm>
-            <a:off x="4504944" y="2807208"/>
-            <a:ext cx="3179064" cy="1426464"/>
+            <a:off x="6678514" y="2807208"/>
+            <a:ext cx="4424471" cy="1426464"/>
           </a:xfrm>
           <a:prstGeom prst="rect">
             <a:avLst/>
@@ -14375,7 +15622,7 @@
               <a:buChar char="•"/>
             </a:pPr>
             <a:r>
-              <a:rPr lang="en-GB" sz="1050" dirty="0">
+              <a:rPr lang="en-GB" sz="1050">
                 <a:solidFill>
                   <a:srgbClr val="1B2836"/>
                 </a:solidFill>
@@ -14383,7 +15630,7 @@
                 <a:ea typeface="Calibri" pitchFamily="34" charset="-122"/>
                 <a:cs typeface="Calibri" pitchFamily="34" charset="-120"/>
               </a:rPr>
-              <a:t>VNet injection in internal mode, with no public endpoint.</a:t>
+              <a:t>Resolves DNS to a healthy regional endpoint, then steps out of the path.</a:t>
             </a:r>
           </a:p>
           <a:p>
@@ -14395,7 +15642,7 @@
               <a:buChar char="•"/>
             </a:pPr>
             <a:r>
-              <a:rPr lang="en-GB" sz="1050" dirty="0">
+              <a:rPr lang="en-GB" sz="1050">
                 <a:solidFill>
                   <a:srgbClr val="1B2836"/>
                 </a:solidFill>
@@ -14403,7 +15650,7 @@
                 <a:ea typeface="Calibri" pitchFamily="34" charset="-122"/>
                 <a:cs typeface="Calibri" pitchFamily="34" charset="-120"/>
               </a:rPr>
-              <a:t>Inbound Private Link and availability-zone support.</a:t>
+              <a:t>Works for any protocol, including non-HTTP and non-Azure endpoints.</a:t>
             </a:r>
           </a:p>
           <a:p>
@@ -14415,7 +15662,7 @@
               <a:buChar char="•"/>
             </a:pPr>
             <a:r>
-              <a:rPr lang="en-GB" sz="1050" dirty="0">
+              <a:rPr lang="en-GB" sz="1050">
                 <a:solidFill>
                   <a:srgbClr val="1B2836"/>
                 </a:solidFill>
@@ -14423,7 +15670,7 @@
                 <a:ea typeface="Calibri" pitchFamily="34" charset="-122"/>
                 <a:cs typeface="Calibri" pitchFamily="34" charset="-120"/>
               </a:rPr>
-              <a:t>Simplified networking versus classic Premium.</a:t>
+              <a:t>No WAF, TLS offload or caching of its own.</a:t>
             </a:r>
           </a:p>
           <a:p>
@@ -14435,7 +15682,7 @@
               <a:buChar char="•"/>
             </a:pPr>
             <a:r>
-              <a:rPr lang="en-GB" sz="1050" dirty="0">
+              <a:rPr lang="en-GB" sz="1050">
                 <a:solidFill>
                   <a:srgbClr val="1B2836"/>
                 </a:solidFill>
@@ -14443,9 +15690,9 @@
                 <a:ea typeface="Calibri" pitchFamily="34" charset="-122"/>
                 <a:cs typeface="Calibri" pitchFamily="34" charset="-120"/>
               </a:rPr>
-              <a:t>Scale units, workspaces and full policy governance.</a:t>
-            </a:r>
-            <a:endParaRPr lang="en-US" sz="1050" dirty="0"/>
+              <a:t>Failover bounded by client DNS cache TTLs, so slower; cheaper per query.</a:t>
+            </a:r>
+            <a:endParaRPr lang="en-US" sz="1050"/>
           </a:p>
         </p:txBody>
       </p:sp>
@@ -14457,8 +15704,8 @@
         </p:nvSpPr>
         <p:spPr>
           <a:xfrm>
-            <a:off x="4504944" y="4416552"/>
-            <a:ext cx="3179064" cy="539496"/>
+            <a:off x="6678514" y="4416552"/>
+            <a:ext cx="4424471" cy="539496"/>
           </a:xfrm>
           <a:prstGeom prst="roundRect">
             <a:avLst>
@@ -14491,8 +15738,8 @@
         </p:nvSpPr>
         <p:spPr>
           <a:xfrm>
-            <a:off x="4642104" y="4416552"/>
-            <a:ext cx="2904744" cy="658368"/>
+            <a:off x="6869406" y="4416552"/>
+            <a:ext cx="4042685" cy="658368"/>
           </a:xfrm>
           <a:prstGeom prst="rect">
             <a:avLst/>
@@ -14510,7 +15757,7 @@
               </a:lnSpc>
             </a:pPr>
             <a:r>
-              <a:rPr lang="en-GB" sz="1050" b="1" dirty="0">
+              <a:rPr lang="en-GB" sz="1050" b="1">
                 <a:solidFill>
                   <a:srgbClr val="1B2836"/>
                 </a:solidFill>
@@ -14518,1014 +15765,9 @@
                 <a:ea typeface="Calibri" pitchFamily="34" charset="-122"/>
                 <a:cs typeface="Calibri" pitchFamily="34" charset="-120"/>
               </a:rPr>
-              <a:t>Chosen: the isolation, scale and governance a strategic platform needs.</a:t>
-            </a:r>
-            <a:endParaRPr lang="en-US" sz="1050" dirty="0"/>
-          </a:p>
-        </p:txBody>
-      </p:sp>
-      <p:sp>
-        <p:nvSpPr>
-          <p:cNvPr id="27" name="Shape 25"/>
-          <p:cNvSpPr/>
-          <p:nvPr/>
-        </p:nvSpPr>
-        <p:spPr>
-          <a:xfrm>
-            <a:off x="8141208" y="1417320"/>
-            <a:ext cx="3544824" cy="3657600"/>
-          </a:xfrm>
-          <a:prstGeom prst="roundRect">
-            <a:avLst>
-              <a:gd name="adj" fmla="val 1548"/>
-            </a:avLst>
-          </a:prstGeom>
-          <a:solidFill>
-            <a:srgbClr val="F7FAFC"/>
-          </a:solidFill>
-          <a:ln w="12700">
-            <a:solidFill>
-              <a:srgbClr val="3F6B8F"/>
-            </a:solidFill>
-            <a:prstDash val="solid"/>
-          </a:ln>
-        </p:spPr>
-        <p:txBody>
-          <a:bodyPr/>
-          <a:lstStyle/>
-          <a:p>
-            <a:endParaRPr lang="en-GB"/>
-          </a:p>
-        </p:txBody>
-      </p:sp>
-      <p:sp>
-        <p:nvSpPr>
-          <p:cNvPr id="28" name="Text 26"/>
-          <p:cNvSpPr txBox="1"/>
-          <p:nvPr/>
-        </p:nvSpPr>
-        <p:spPr>
-          <a:xfrm>
-            <a:off x="8324088" y="1581912"/>
-            <a:ext cx="1463040" cy="228600"/>
-          </a:xfrm>
-          <a:prstGeom prst="rect">
-            <a:avLst/>
-          </a:prstGeom>
-          <a:noFill/>
-          <a:ln/>
-        </p:spPr>
-        <p:txBody>
-          <a:bodyPr wrap="square" lIns="0" tIns="0" rIns="0" bIns="0" rtlCol="0" anchor="ctr"/>
-          <a:lstStyle/>
-          <a:p>
-            <a:pPr marL="0" indent="0" algn="l">
-              <a:buNone/>
-            </a:pPr>
-            <a:r>
-              <a:rPr lang="en-US" sz="900" b="1" kern="0" spc="120" dirty="0">
-                <a:solidFill>
-                  <a:srgbClr val="5A6B7D"/>
-                </a:solidFill>
-                <a:latin typeface="Calibri" pitchFamily="34" charset="0"/>
-                <a:ea typeface="Calibri" pitchFamily="34" charset="-122"/>
-                <a:cs typeface="Calibri" pitchFamily="34" charset="-120"/>
-              </a:rPr>
-              <a:t>ALTERNATIVE</a:t>
-            </a:r>
-            <a:endParaRPr lang="en-US" sz="900" dirty="0"/>
-          </a:p>
-        </p:txBody>
-      </p:sp>
-      <p:sp>
-        <p:nvSpPr>
-          <p:cNvPr id="29" name="Shape 27"/>
-          <p:cNvSpPr/>
-          <p:nvPr/>
-        </p:nvSpPr>
-        <p:spPr>
-          <a:xfrm>
-            <a:off x="10204704" y="1563624"/>
-            <a:ext cx="1298448" cy="237744"/>
-          </a:xfrm>
-          <a:prstGeom prst="roundRect">
-            <a:avLst>
-              <a:gd name="adj" fmla="val 50000"/>
-            </a:avLst>
-          </a:prstGeom>
-          <a:solidFill>
-            <a:srgbClr val="3F6B8F"/>
-          </a:solidFill>
-          <a:ln w="12700">
-            <a:solidFill>
-              <a:srgbClr val="002060"/>
-            </a:solidFill>
-            <a:prstDash val="solid"/>
-          </a:ln>
-        </p:spPr>
-        <p:txBody>
-          <a:bodyPr/>
-          <a:lstStyle/>
-          <a:p>
-            <a:endParaRPr lang="en-GB"/>
-          </a:p>
-        </p:txBody>
-      </p:sp>
-      <p:sp>
-        <p:nvSpPr>
-          <p:cNvPr id="30" name="Text 28"/>
-          <p:cNvSpPr txBox="1"/>
-          <p:nvPr/>
-        </p:nvSpPr>
-        <p:spPr>
-          <a:xfrm>
-            <a:off x="10204704" y="1563624"/>
-            <a:ext cx="1298448" cy="237744"/>
-          </a:xfrm>
-          <a:prstGeom prst="rect">
-            <a:avLst/>
-          </a:prstGeom>
-          <a:noFill/>
-          <a:ln/>
-        </p:spPr>
-        <p:txBody>
-          <a:bodyPr wrap="square" lIns="0" tIns="0" rIns="0" bIns="0" rtlCol="0" anchor="ctr"/>
-          <a:lstStyle/>
-          <a:p>
-            <a:pPr marL="0" indent="0" algn="ctr">
-              <a:buNone/>
-            </a:pPr>
-            <a:r>
-              <a:rPr lang="en-US" sz="850" b="1" kern="0" spc="80" dirty="0">
-                <a:solidFill>
-                  <a:srgbClr val="FFFFFF"/>
-                </a:solidFill>
-                <a:latin typeface="Calibri" pitchFamily="34" charset="0"/>
-                <a:ea typeface="Calibri" pitchFamily="34" charset="-122"/>
-                <a:cs typeface="Calibri" pitchFamily="34" charset="-120"/>
-              </a:rPr>
-              <a:t>IF MULTI-REGION</a:t>
-            </a:r>
-            <a:endParaRPr lang="en-US" sz="850" dirty="0"/>
-          </a:p>
-        </p:txBody>
-      </p:sp>
-      <p:sp>
-        <p:nvSpPr>
-          <p:cNvPr id="31" name="Text 29"/>
-          <p:cNvSpPr txBox="1"/>
-          <p:nvPr/>
-        </p:nvSpPr>
-        <p:spPr>
-          <a:xfrm>
-            <a:off x="8324088" y="1920240"/>
-            <a:ext cx="3179064" cy="457200"/>
-          </a:xfrm>
-          <a:prstGeom prst="rect">
-            <a:avLst/>
-          </a:prstGeom>
-          <a:noFill/>
-          <a:ln/>
-        </p:spPr>
-        <p:txBody>
-          <a:bodyPr wrap="square" lIns="0" tIns="0" rIns="0" bIns="0" rtlCol="0" anchor="t"/>
-          <a:lstStyle/>
-          <a:p>
-            <a:pPr marL="0" indent="0" algn="l">
-              <a:lnSpc>
-                <a:spcPts val="1900"/>
-              </a:lnSpc>
-              <a:buNone/>
-            </a:pPr>
-            <a:r>
-              <a:rPr lang="en-US" sz="1500" b="1" dirty="0">
-                <a:solidFill>
-                  <a:srgbClr val="0E3F6E"/>
-                </a:solidFill>
-                <a:latin typeface="Calibri" pitchFamily="34" charset="0"/>
-                <a:ea typeface="Calibri" pitchFamily="34" charset="-122"/>
-                <a:cs typeface="Calibri" pitchFamily="34" charset="-120"/>
-              </a:rPr>
-              <a:t>Classic Premium</a:t>
-            </a:r>
-            <a:endParaRPr lang="en-US" sz="1500" dirty="0"/>
-          </a:p>
-        </p:txBody>
-      </p:sp>
-      <p:sp>
-        <p:nvSpPr>
-          <p:cNvPr id="32" name="Text 30"/>
-          <p:cNvSpPr txBox="1"/>
-          <p:nvPr/>
-        </p:nvSpPr>
-        <p:spPr>
-          <a:xfrm>
-            <a:off x="8324088" y="2350008"/>
-            <a:ext cx="3179064" cy="228600"/>
-          </a:xfrm>
-          <a:prstGeom prst="rect">
-            <a:avLst/>
-          </a:prstGeom>
-          <a:noFill/>
-          <a:ln/>
-        </p:spPr>
-        <p:txBody>
-          <a:bodyPr wrap="square" lIns="0" tIns="0" rIns="0" bIns="0" rtlCol="0" anchor="ctr"/>
-          <a:lstStyle/>
-          <a:p>
-            <a:pPr marL="0" indent="0" algn="l">
-              <a:buNone/>
-            </a:pPr>
-            <a:r>
-              <a:rPr lang="en-US" sz="800" b="1" kern="0" spc="120" dirty="0">
-                <a:solidFill>
-                  <a:srgbClr val="5A6B7D"/>
-                </a:solidFill>
-                <a:latin typeface="Calibri" pitchFamily="34" charset="0"/>
-                <a:ea typeface="Calibri" pitchFamily="34" charset="-122"/>
-                <a:cs typeface="Calibri" pitchFamily="34" charset="-120"/>
-              </a:rPr>
-              <a:t>TIER PROFILE</a:t>
-            </a:r>
-            <a:endParaRPr lang="en-US" sz="800" dirty="0"/>
-          </a:p>
-        </p:txBody>
-      </p:sp>
-      <p:sp>
-        <p:nvSpPr>
-          <p:cNvPr id="33" name="Text 31"/>
-          <p:cNvSpPr txBox="1"/>
-          <p:nvPr/>
-        </p:nvSpPr>
-        <p:spPr>
-          <a:xfrm>
-            <a:off x="8324088" y="2551176"/>
-            <a:ext cx="3179064" cy="457200"/>
-          </a:xfrm>
-          <a:prstGeom prst="rect">
-            <a:avLst/>
-          </a:prstGeom>
-          <a:noFill/>
-          <a:ln/>
-        </p:spPr>
-        <p:txBody>
-          <a:bodyPr wrap="square" lIns="0" tIns="0" rIns="0" bIns="0" rtlCol="0" anchor="t"/>
-          <a:lstStyle/>
-          <a:p>
-            <a:pPr marL="0" indent="0" algn="l">
-              <a:lnSpc>
-                <a:spcPts val="1250"/>
-              </a:lnSpc>
-              <a:buNone/>
-            </a:pPr>
-            <a:r>
-              <a:rPr lang="en-US" sz="1000" i="1" dirty="0">
-                <a:solidFill>
-                  <a:srgbClr val="1B2836"/>
-                </a:solidFill>
-                <a:latin typeface="Calibri" pitchFamily="34" charset="0"/>
-                <a:ea typeface="Calibri" pitchFamily="34" charset="-122"/>
-                <a:cs typeface="Calibri" pitchFamily="34" charset="-120"/>
-              </a:rPr>
-              <a:t>established line · instance multi-region today</a:t>
-            </a:r>
-            <a:endParaRPr lang="en-US" sz="1000" dirty="0"/>
-          </a:p>
-        </p:txBody>
-      </p:sp>
-      <p:sp>
-        <p:nvSpPr>
-          <p:cNvPr id="34" name="Text 32"/>
-          <p:cNvSpPr txBox="1"/>
-          <p:nvPr/>
-        </p:nvSpPr>
-        <p:spPr>
-          <a:xfrm>
-            <a:off x="8324088" y="2891028"/>
-            <a:ext cx="3179064" cy="1342644"/>
-          </a:xfrm>
-          <a:prstGeom prst="rect">
-            <a:avLst/>
-          </a:prstGeom>
-          <a:noFill/>
-          <a:ln/>
-        </p:spPr>
-        <p:txBody>
-          <a:bodyPr wrap="square" lIns="0" tIns="0" rIns="0" bIns="0" rtlCol="0" anchor="t"/>
-          <a:lstStyle/>
-          <a:p>
-            <a:pPr marL="342900" indent="-342900">
-              <a:spcAft>
-                <a:spcPts val="600"/>
-              </a:spcAft>
-              <a:buSzPct val="100000"/>
-              <a:buChar char="•"/>
-            </a:pPr>
-            <a:r>
-              <a:rPr lang="en-US" sz="1050" dirty="0">
-                <a:solidFill>
-                  <a:srgbClr val="1B2836"/>
-                </a:solidFill>
-                <a:latin typeface="Calibri" pitchFamily="34" charset="0"/>
-                <a:ea typeface="Calibri" pitchFamily="34" charset="-122"/>
-                <a:cs typeface="Calibri" pitchFamily="34" charset="-120"/>
-              </a:rPr>
-              <a:t>The only tier with instance-level multi-region deployment today.</a:t>
-            </a:r>
-          </a:p>
-          <a:p>
-            <a:pPr marL="342900" indent="-342900">
-              <a:spcAft>
-                <a:spcPts val="600"/>
-              </a:spcAft>
-              <a:buSzPct val="100000"/>
-              <a:buChar char="•"/>
-            </a:pPr>
-            <a:r>
-              <a:rPr lang="en-US" sz="1050" dirty="0">
-                <a:solidFill>
-                  <a:srgbClr val="1B2836"/>
-                </a:solidFill>
-                <a:latin typeface="Calibri" pitchFamily="34" charset="0"/>
-                <a:ea typeface="Calibri" pitchFamily="34" charset="-122"/>
-                <a:cs typeface="Calibri" pitchFamily="34" charset="-120"/>
-              </a:rPr>
-              <a:t>VNet injection and workspaces; established and mature.</a:t>
-            </a:r>
-            <a:endParaRPr lang="en-US" sz="1050" dirty="0"/>
-          </a:p>
-          <a:p>
-            <a:pPr marL="342900" indent="-342900">
-              <a:spcAft>
-                <a:spcPts val="600"/>
-              </a:spcAft>
-              <a:buSzPct val="100000"/>
-              <a:buChar char="•"/>
-            </a:pPr>
-            <a:r>
-              <a:rPr lang="en-US" sz="1050" dirty="0">
-                <a:solidFill>
-                  <a:srgbClr val="1B2836"/>
-                </a:solidFill>
-                <a:latin typeface="Calibri" pitchFamily="34" charset="0"/>
-                <a:ea typeface="Calibri" pitchFamily="34" charset="-122"/>
-                <a:cs typeface="Calibri" pitchFamily="34" charset="-120"/>
-              </a:rPr>
-              <a:t>Needs the control-plane bypass route that v2 removes.</a:t>
-            </a:r>
-            <a:endParaRPr lang="en-US" sz="1050" dirty="0"/>
-          </a:p>
-          <a:p>
-            <a:pPr marL="342900" indent="-342900">
-              <a:spcAft>
-                <a:spcPts val="600"/>
-              </a:spcAft>
-              <a:buSzPct val="100000"/>
-              <a:buChar char="•"/>
-            </a:pPr>
-            <a:r>
-              <a:rPr lang="en-US" sz="1050" dirty="0">
-                <a:solidFill>
-                  <a:srgbClr val="1B2836"/>
-                </a:solidFill>
-                <a:latin typeface="Calibri" pitchFamily="34" charset="0"/>
-                <a:ea typeface="Calibri" pitchFamily="34" charset="-122"/>
-                <a:cs typeface="Calibri" pitchFamily="34" charset="-120"/>
-              </a:rPr>
-              <a:t>Use where multi-region is needed on day one.</a:t>
-            </a:r>
-            <a:endParaRPr lang="en-US" sz="1050" dirty="0"/>
-          </a:p>
-        </p:txBody>
-      </p:sp>
-      <p:sp>
-        <p:nvSpPr>
-          <p:cNvPr id="35" name="Shape 33"/>
-          <p:cNvSpPr/>
-          <p:nvPr/>
-        </p:nvSpPr>
-        <p:spPr>
-          <a:xfrm>
-            <a:off x="8324088" y="4297680"/>
-            <a:ext cx="3179064" cy="658368"/>
-          </a:xfrm>
-          <a:prstGeom prst="roundRect">
-            <a:avLst>
-              <a:gd name="adj" fmla="val 8333"/>
-            </a:avLst>
-          </a:prstGeom>
-          <a:solidFill>
-            <a:srgbClr val="EDF2F7"/>
-          </a:solidFill>
-          <a:ln w="12700">
-            <a:solidFill>
-              <a:srgbClr val="EDF2F7"/>
-            </a:solidFill>
-            <a:prstDash val="solid"/>
-          </a:ln>
-        </p:spPr>
-        <p:txBody>
-          <a:bodyPr/>
-          <a:lstStyle/>
-          <a:p>
-            <a:endParaRPr lang="en-GB"/>
-          </a:p>
-        </p:txBody>
-      </p:sp>
-      <p:sp>
-        <p:nvSpPr>
-          <p:cNvPr id="36" name="Text 34"/>
-          <p:cNvSpPr txBox="1"/>
-          <p:nvPr/>
-        </p:nvSpPr>
-        <p:spPr>
-          <a:xfrm>
-            <a:off x="8461248" y="4297680"/>
-            <a:ext cx="2904744" cy="658368"/>
-          </a:xfrm>
-          <a:prstGeom prst="rect">
-            <a:avLst/>
-          </a:prstGeom>
-          <a:noFill/>
-          <a:ln/>
-        </p:spPr>
-        <p:txBody>
-          <a:bodyPr wrap="square" lIns="0" tIns="0" rIns="0" bIns="0" rtlCol="0" anchor="ctr"/>
-          <a:lstStyle/>
-          <a:p>
-            <a:pPr fontAlgn="t">
-              <a:lnSpc>
-                <a:spcPct val="100000"/>
-              </a:lnSpc>
-              <a:buNone/>
-            </a:pPr>
-            <a:r>
-              <a:rPr lang="en-GB" sz="1050" b="1" dirty="0">
-                <a:latin typeface="Calibri" panose="020F0502020204030204" pitchFamily="34" charset="0"/>
-                <a:ea typeface="Calibri" panose="020F0502020204030204" pitchFamily="34" charset="0"/>
-                <a:cs typeface="Calibri" panose="020F0502020204030204" pitchFamily="34" charset="0"/>
-              </a:rPr>
-              <a:t>Alternative: use if instance multi-region is needed before v2 supports it.</a:t>
-            </a:r>
-          </a:p>
-        </p:txBody>
-      </p:sp>
-      <p:sp>
-        <p:nvSpPr>
-          <p:cNvPr id="300" name="envlabel"/>
-          <p:cNvSpPr txBox="1"/>
-          <p:nvPr/>
-        </p:nvSpPr>
-        <p:spPr>
-          <a:xfrm>
-            <a:off x="822960" y="5230368"/>
-            <a:ext cx="10515600" cy="274320"/>
-          </a:xfrm>
-          <a:prstGeom prst="rect">
-            <a:avLst/>
-          </a:prstGeom>
-          <a:noFill/>
-        </p:spPr>
-        <p:txBody>
-          <a:bodyPr wrap="square" anchor="ctr">
-            <a:normAutofit/>
-          </a:bodyPr>
-          <a:lstStyle/>
-          <a:p>
-            <a:pPr algn="l"/>
-            <a:r>
-              <a:rPr lang="en-US" sz="1100" b="1" dirty="0">
-                <a:solidFill>
-                  <a:srgbClr val="5A6B7D"/>
-                </a:solidFill>
-                <a:latin typeface="Calibri"/>
-              </a:rPr>
-              <a:t>ENVIRONMENT → TIER MAPPING</a:t>
-            </a:r>
-          </a:p>
-        </p:txBody>
-      </p:sp>
-      <p:sp>
-        <p:nvSpPr>
-          <p:cNvPr id="301" name="dev"/>
-          <p:cNvSpPr/>
-          <p:nvPr/>
-        </p:nvSpPr>
-        <p:spPr>
-          <a:xfrm>
-            <a:off x="868680" y="5596128"/>
-            <a:ext cx="1234440" cy="868680"/>
-          </a:xfrm>
-          <a:prstGeom prst="roundRect">
-            <a:avLst>
-              <a:gd name="adj" fmla="val 12000"/>
-            </a:avLst>
-          </a:prstGeom>
-          <a:solidFill>
-            <a:srgbClr val="E4ECF5"/>
-          </a:solidFill>
-          <a:ln w="12700">
-            <a:solidFill>
-              <a:srgbClr val="C9D4E0"/>
-            </a:solidFill>
-          </a:ln>
-        </p:spPr>
-        <p:txBody>
-          <a:bodyPr/>
-          <a:lstStyle/>
-          <a:p>
-            <a:endParaRPr/>
-          </a:p>
-        </p:txBody>
-      </p:sp>
-      <p:sp>
-        <p:nvSpPr>
-          <p:cNvPr id="302" name="devt"/>
-          <p:cNvSpPr txBox="1"/>
-          <p:nvPr/>
-        </p:nvSpPr>
-        <p:spPr>
-          <a:xfrm>
-            <a:off x="868680" y="5596128"/>
-            <a:ext cx="1234440" cy="868680"/>
-          </a:xfrm>
-          <a:prstGeom prst="rect">
-            <a:avLst/>
-          </a:prstGeom>
-          <a:noFill/>
-        </p:spPr>
-        <p:txBody>
-          <a:bodyPr wrap="square" anchor="ctr">
-            <a:normAutofit/>
-          </a:bodyPr>
-          <a:lstStyle/>
-          <a:p>
-            <a:pPr algn="ctr"/>
-            <a:r>
-              <a:rPr lang="en-US" sz="1500" b="1" dirty="0">
-                <a:solidFill>
-                  <a:srgbClr val="1B2836"/>
-                </a:solidFill>
-                <a:latin typeface="Calibri"/>
-              </a:rPr>
-              <a:t>DEV</a:t>
-            </a:r>
-          </a:p>
-          <a:p>
-            <a:pPr algn="ctr"/>
-            <a:r>
-              <a:rPr lang="en-US" sz="950" b="0" dirty="0">
-                <a:solidFill>
-                  <a:srgbClr val="5A6B7D"/>
-                </a:solidFill>
-                <a:latin typeface="Calibri"/>
-              </a:rPr>
-              <a:t>Non-prod</a:t>
-            </a:r>
-          </a:p>
-        </p:txBody>
-      </p:sp>
-      <p:sp>
-        <p:nvSpPr>
-          <p:cNvPr id="303" name="sit"/>
-          <p:cNvSpPr/>
-          <p:nvPr/>
-        </p:nvSpPr>
-        <p:spPr>
-          <a:xfrm>
-            <a:off x="2231136" y="5596128"/>
-            <a:ext cx="1234440" cy="868680"/>
-          </a:xfrm>
-          <a:prstGeom prst="roundRect">
-            <a:avLst>
-              <a:gd name="adj" fmla="val 12000"/>
-            </a:avLst>
-          </a:prstGeom>
-          <a:solidFill>
-            <a:srgbClr val="E4ECF5"/>
-          </a:solidFill>
-          <a:ln w="12700">
-            <a:solidFill>
-              <a:srgbClr val="C9D4E0"/>
-            </a:solidFill>
-          </a:ln>
-        </p:spPr>
-        <p:txBody>
-          <a:bodyPr/>
-          <a:lstStyle/>
-          <a:p>
-            <a:endParaRPr/>
-          </a:p>
-        </p:txBody>
-      </p:sp>
-      <p:sp>
-        <p:nvSpPr>
-          <p:cNvPr id="304" name="sitt"/>
-          <p:cNvSpPr txBox="1"/>
-          <p:nvPr/>
-        </p:nvSpPr>
-        <p:spPr>
-          <a:xfrm>
-            <a:off x="2231136" y="5596128"/>
-            <a:ext cx="1234440" cy="868680"/>
-          </a:xfrm>
-          <a:prstGeom prst="rect">
-            <a:avLst/>
-          </a:prstGeom>
-          <a:noFill/>
-        </p:spPr>
-        <p:txBody>
-          <a:bodyPr wrap="square" anchor="ctr">
-            <a:normAutofit/>
-          </a:bodyPr>
-          <a:lstStyle/>
-          <a:p>
-            <a:pPr algn="ctr"/>
-            <a:r>
-              <a:rPr lang="en-US" sz="1500" b="1" dirty="0">
-                <a:solidFill>
-                  <a:srgbClr val="1B2836"/>
-                </a:solidFill>
-                <a:latin typeface="Calibri"/>
-              </a:rPr>
-              <a:t>SIT</a:t>
-            </a:r>
-          </a:p>
-          <a:p>
-            <a:pPr algn="ctr"/>
-            <a:r>
-              <a:rPr lang="en-US" sz="950" b="0" dirty="0">
-                <a:solidFill>
-                  <a:srgbClr val="5A6B7D"/>
-                </a:solidFill>
-                <a:latin typeface="Calibri"/>
-              </a:rPr>
-              <a:t>Non-prod</a:t>
-            </a:r>
-          </a:p>
-        </p:txBody>
-      </p:sp>
-      <p:cxnSp>
-        <p:nvCxnSpPr>
-          <p:cNvPr id="305" name="arr1"/>
-          <p:cNvCxnSpPr/>
-          <p:nvPr/>
-        </p:nvCxnSpPr>
-        <p:spPr>
-          <a:xfrm>
-            <a:off x="3538728" y="6021324"/>
-            <a:ext cx="457200" cy="1"/>
-          </a:xfrm>
-          <a:prstGeom prst="straightConnector1">
-            <a:avLst/>
-          </a:prstGeom>
-          <a:ln w="19050">
-            <a:solidFill>
-              <a:srgbClr val="3F6B8F"/>
-            </a:solidFill>
-            <a:tailEnd type="triangle"/>
-          </a:ln>
-        </p:spPr>
-      </p:cxnSp>
-      <p:sp>
-        <p:nvSpPr>
-          <p:cNvPr id="306" name="devtier"/>
-          <p:cNvSpPr/>
-          <p:nvPr/>
-        </p:nvSpPr>
-        <p:spPr>
-          <a:xfrm>
-            <a:off x="4105656" y="5596128"/>
-            <a:ext cx="1828800" cy="868680"/>
-          </a:xfrm>
-          <a:prstGeom prst="roundRect">
-            <a:avLst>
-              <a:gd name="adj" fmla="val 12000"/>
-            </a:avLst>
-          </a:prstGeom>
-          <a:solidFill>
-            <a:srgbClr val="EDF2F7"/>
-          </a:solidFill>
-          <a:ln w="12700">
-            <a:solidFill>
-              <a:srgbClr val="3F6B8F"/>
-            </a:solidFill>
-          </a:ln>
-        </p:spPr>
-        <p:txBody>
-          <a:bodyPr/>
-          <a:lstStyle/>
-          <a:p>
-            <a:endParaRPr/>
-          </a:p>
-        </p:txBody>
-      </p:sp>
-      <p:sp>
-        <p:nvSpPr>
-          <p:cNvPr id="307" name="devtiert"/>
-          <p:cNvSpPr txBox="1"/>
-          <p:nvPr/>
-        </p:nvSpPr>
-        <p:spPr>
-          <a:xfrm>
-            <a:off x="4105656" y="5596128"/>
-            <a:ext cx="1828800" cy="868680"/>
-          </a:xfrm>
-          <a:prstGeom prst="rect">
-            <a:avLst/>
-          </a:prstGeom>
-          <a:noFill/>
-        </p:spPr>
-        <p:txBody>
-          <a:bodyPr wrap="square" anchor="ctr">
-            <a:normAutofit/>
-          </a:bodyPr>
-          <a:lstStyle/>
-          <a:p>
-            <a:pPr algn="ctr"/>
-            <a:r>
-              <a:rPr lang="en-US" sz="1300" b="1" dirty="0">
-                <a:solidFill>
-                  <a:srgbClr val="0E3F6E"/>
-                </a:solidFill>
-                <a:latin typeface="Calibri"/>
-              </a:rPr>
-              <a:t>Developer tier</a:t>
-            </a:r>
-          </a:p>
-          <a:p>
-            <a:pPr algn="ctr"/>
-            <a:r>
-              <a:rPr lang="en-US" sz="950" b="0" dirty="0">
-                <a:solidFill>
-                  <a:srgbClr val="5A6B7D"/>
-                </a:solidFill>
-                <a:latin typeface="Calibri"/>
-              </a:rPr>
-              <a:t>full features · no SLA</a:t>
-            </a:r>
-          </a:p>
-        </p:txBody>
-      </p:sp>
-      <p:sp>
-        <p:nvSpPr>
-          <p:cNvPr id="311" name="uat"/>
-          <p:cNvSpPr/>
-          <p:nvPr/>
-        </p:nvSpPr>
-        <p:spPr>
-          <a:xfrm>
-            <a:off x="6355080" y="5596128"/>
-            <a:ext cx="1234440" cy="868680"/>
-          </a:xfrm>
-          <a:prstGeom prst="roundRect">
-            <a:avLst>
-              <a:gd name="adj" fmla="val 12000"/>
-            </a:avLst>
-          </a:prstGeom>
-          <a:solidFill>
-            <a:srgbClr val="E4ECF5"/>
-          </a:solidFill>
-          <a:ln w="12700">
-            <a:solidFill>
-              <a:srgbClr val="C9D4E0"/>
-            </a:solidFill>
-          </a:ln>
-        </p:spPr>
-        <p:txBody>
-          <a:bodyPr/>
-          <a:lstStyle/>
-          <a:p>
-            <a:endParaRPr/>
-          </a:p>
-        </p:txBody>
-      </p:sp>
-      <p:sp>
-        <p:nvSpPr>
-          <p:cNvPr id="312" name="uatt"/>
-          <p:cNvSpPr txBox="1"/>
-          <p:nvPr/>
-        </p:nvSpPr>
-        <p:spPr>
-          <a:xfrm>
-            <a:off x="6355080" y="5596128"/>
-            <a:ext cx="1234440" cy="868680"/>
-          </a:xfrm>
-          <a:prstGeom prst="rect">
-            <a:avLst/>
-          </a:prstGeom>
-          <a:noFill/>
-        </p:spPr>
-        <p:txBody>
-          <a:bodyPr wrap="square" anchor="ctr">
-            <a:normAutofit/>
-          </a:bodyPr>
-          <a:lstStyle/>
-          <a:p>
-            <a:pPr algn="ctr"/>
-            <a:r>
-              <a:rPr lang="en-US" sz="1500" b="1" dirty="0">
-                <a:solidFill>
-                  <a:srgbClr val="1B2836"/>
-                </a:solidFill>
-                <a:latin typeface="Calibri"/>
-              </a:rPr>
-              <a:t>UAT</a:t>
-            </a:r>
-          </a:p>
-          <a:p>
-            <a:pPr algn="ctr"/>
-            <a:r>
-              <a:rPr lang="en-US" sz="950" b="0" dirty="0">
-                <a:solidFill>
-                  <a:srgbClr val="5A6B7D"/>
-                </a:solidFill>
-                <a:latin typeface="Calibri"/>
-              </a:rPr>
-              <a:t>Prod-like</a:t>
-            </a:r>
-          </a:p>
-        </p:txBody>
-      </p:sp>
-      <p:sp>
-        <p:nvSpPr>
-          <p:cNvPr id="313" name="prod"/>
-          <p:cNvSpPr/>
-          <p:nvPr/>
-        </p:nvSpPr>
-        <p:spPr>
-          <a:xfrm>
-            <a:off x="7717536" y="5596128"/>
-            <a:ext cx="1234440" cy="868680"/>
-          </a:xfrm>
-          <a:prstGeom prst="roundRect">
-            <a:avLst>
-              <a:gd name="adj" fmla="val 12000"/>
-            </a:avLst>
-          </a:prstGeom>
-          <a:solidFill>
-            <a:srgbClr val="E4ECF5"/>
-          </a:solidFill>
-          <a:ln w="12700">
-            <a:solidFill>
-              <a:srgbClr val="C9D4E0"/>
-            </a:solidFill>
-          </a:ln>
-        </p:spPr>
-        <p:txBody>
-          <a:bodyPr/>
-          <a:lstStyle/>
-          <a:p>
-            <a:endParaRPr/>
-          </a:p>
-        </p:txBody>
-      </p:sp>
-      <p:sp>
-        <p:nvSpPr>
-          <p:cNvPr id="314" name="prodt"/>
-          <p:cNvSpPr txBox="1"/>
-          <p:nvPr/>
-        </p:nvSpPr>
-        <p:spPr>
-          <a:xfrm>
-            <a:off x="7717536" y="5596128"/>
-            <a:ext cx="1234440" cy="868680"/>
-          </a:xfrm>
-          <a:prstGeom prst="rect">
-            <a:avLst/>
-          </a:prstGeom>
-          <a:noFill/>
-        </p:spPr>
-        <p:txBody>
-          <a:bodyPr wrap="square" anchor="ctr">
-            <a:normAutofit/>
-          </a:bodyPr>
-          <a:lstStyle/>
-          <a:p>
-            <a:pPr algn="ctr"/>
-            <a:r>
-              <a:rPr lang="en-US" sz="1500" b="1" dirty="0">
-                <a:solidFill>
-                  <a:srgbClr val="1B2836"/>
-                </a:solidFill>
-                <a:latin typeface="Calibri"/>
-              </a:rPr>
-              <a:t>PROD</a:t>
-            </a:r>
-          </a:p>
-          <a:p>
-            <a:pPr algn="ctr"/>
-            <a:r>
-              <a:rPr lang="en-US" sz="950" b="0" dirty="0">
-                <a:solidFill>
-                  <a:srgbClr val="5A6B7D"/>
-                </a:solidFill>
-                <a:latin typeface="Calibri"/>
-              </a:rPr>
-              <a:t>Production</a:t>
-            </a:r>
-          </a:p>
-        </p:txBody>
-      </p:sp>
-      <p:cxnSp>
-        <p:nvCxnSpPr>
-          <p:cNvPr id="315" name="arr2"/>
-          <p:cNvCxnSpPr/>
-          <p:nvPr/>
-        </p:nvCxnSpPr>
-        <p:spPr>
-          <a:xfrm>
-            <a:off x="9025128" y="6021324"/>
-            <a:ext cx="457200" cy="1"/>
-          </a:xfrm>
-          <a:prstGeom prst="straightConnector1">
-            <a:avLst/>
-          </a:prstGeom>
-          <a:ln w="19050">
-            <a:solidFill>
-              <a:srgbClr val="2E7D5B"/>
-            </a:solidFill>
-            <a:tailEnd type="triangle"/>
-          </a:ln>
-        </p:spPr>
-      </p:cxnSp>
-      <p:sp>
-        <p:nvSpPr>
-          <p:cNvPr id="316" name="premtier"/>
-          <p:cNvSpPr/>
-          <p:nvPr/>
-        </p:nvSpPr>
-        <p:spPr>
-          <a:xfrm>
-            <a:off x="9592056" y="5596128"/>
-            <a:ext cx="1828800" cy="868680"/>
-          </a:xfrm>
-          <a:prstGeom prst="roundRect">
-            <a:avLst>
-              <a:gd name="adj" fmla="val 12000"/>
-            </a:avLst>
-          </a:prstGeom>
-          <a:solidFill>
-            <a:srgbClr val="0E3F6E"/>
-          </a:solidFill>
-          <a:ln w="12700">
-            <a:solidFill>
-              <a:srgbClr val="0E3F6E"/>
-            </a:solidFill>
-          </a:ln>
-        </p:spPr>
-        <p:txBody>
-          <a:bodyPr/>
-          <a:lstStyle/>
-          <a:p>
-            <a:endParaRPr/>
-          </a:p>
-        </p:txBody>
-      </p:sp>
-      <p:sp>
-        <p:nvSpPr>
-          <p:cNvPr id="317" name="premtiert"/>
-          <p:cNvSpPr txBox="1"/>
-          <p:nvPr/>
-        </p:nvSpPr>
-        <p:spPr>
-          <a:xfrm>
-            <a:off x="9592056" y="5596128"/>
-            <a:ext cx="1828800" cy="868680"/>
-          </a:xfrm>
-          <a:prstGeom prst="rect">
-            <a:avLst/>
-          </a:prstGeom>
-          <a:noFill/>
-        </p:spPr>
-        <p:txBody>
-          <a:bodyPr wrap="square" anchor="ctr">
-            <a:normAutofit/>
-          </a:bodyPr>
-          <a:lstStyle/>
-          <a:p>
-            <a:pPr algn="ctr"/>
-            <a:r>
-              <a:rPr lang="en-US" sz="1300" b="1" dirty="0">
-                <a:solidFill>
-                  <a:srgbClr val="FFFFFF"/>
-                </a:solidFill>
-                <a:latin typeface="Calibri"/>
-              </a:rPr>
-              <a:t>Premium v2</a:t>
-            </a:r>
-          </a:p>
-          <a:p>
-            <a:pPr algn="ctr"/>
-            <a:r>
-              <a:rPr lang="en-US" sz="950" b="0" dirty="0">
-                <a:solidFill>
-                  <a:srgbClr val="CBD9EA"/>
-                </a:solidFill>
-                <a:latin typeface="Calibri"/>
-              </a:rPr>
-              <a:t>VNet · internal · SLA</a:t>
-            </a:r>
+              <a:t>Not chosen: no edge security and DNS-TTL failover is too slow for the RTO.</a:t>
+            </a:r>
+            <a:endParaRPr lang="en-US" sz="1050"/>
           </a:p>
         </p:txBody>
       </p:sp>
@@ -15611,7 +15853,7 @@
               <a:buNone/>
             </a:pPr>
             <a:r>
-              <a:rPr lang="en-US" sz="1700" b="1" dirty="0">
+              <a:rPr lang="en-US" sz="1700" b="1">
                 <a:solidFill>
                   <a:srgbClr val="FFFFFF"/>
                 </a:solidFill>
@@ -15621,7 +15863,7 @@
               </a:rPr>
               <a:t>1</a:t>
             </a:r>
-            <a:endParaRPr lang="en-US" sz="1700" dirty="0"/>
+            <a:endParaRPr lang="en-US" sz="1700"/>
           </a:p>
         </p:txBody>
       </p:sp>
@@ -15650,7 +15892,7 @@
               <a:buNone/>
             </a:pPr>
             <a:r>
-              <a:rPr lang="en-US" sz="950" b="1" kern="0" spc="200" dirty="0">
+              <a:rPr lang="en-US" sz="950" b="1" kern="0" spc="200">
                 <a:solidFill>
                   <a:srgbClr val="1B6FB3"/>
                 </a:solidFill>
@@ -15660,7 +15902,7 @@
               </a:rPr>
               <a:t>REFERENCE ARCHITECTURE</a:t>
             </a:r>
-            <a:endParaRPr lang="en-US" sz="950" dirty="0"/>
+            <a:endParaRPr lang="en-US" sz="950"/>
           </a:p>
         </p:txBody>
       </p:sp>
@@ -15689,7 +15931,7 @@
               <a:buNone/>
             </a:pPr>
             <a:r>
-              <a:rPr lang="en-US" sz="2800" b="1" dirty="0">
+              <a:rPr lang="en-US" sz="2800" b="1">
                 <a:solidFill>
                   <a:srgbClr val="1B2836"/>
                 </a:solidFill>
@@ -15699,7 +15941,7 @@
               </a:rPr>
               <a:t>Proposed APIM &amp; Edge Service Component Selection</a:t>
             </a:r>
-            <a:endParaRPr lang="en-US" sz="2800" dirty="0"/>
+            <a:endParaRPr lang="en-US" sz="2800"/>
           </a:p>
         </p:txBody>
       </p:sp>
@@ -15728,7 +15970,7 @@
               <a:buNone/>
             </a:pPr>
             <a:r>
-              <a:rPr lang="en-US" sz="1200" dirty="0">
+              <a:rPr lang="en-US" sz="1200">
                 <a:solidFill>
                   <a:srgbClr val="5A6B7D"/>
                 </a:solidFill>
@@ -15738,7 +15980,7 @@
               </a:rPr>
               <a:t>One policy-enforced front door for every external API. APIM itself holds no public endpoint.</a:t>
             </a:r>
-            <a:endParaRPr lang="en-US" sz="1200" dirty="0"/>
+            <a:endParaRPr lang="en-US" sz="1200"/>
           </a:p>
         </p:txBody>
       </p:sp>
@@ -15801,7 +16043,7 @@
               <a:buNone/>
             </a:pPr>
             <a:r>
-              <a:rPr lang="en-US" sz="900" b="1" kern="0" spc="120" dirty="0">
+              <a:rPr lang="en-US" sz="900" b="1" kern="0" spc="120">
                 <a:solidFill>
                   <a:srgbClr val="5A6B7D"/>
                 </a:solidFill>
@@ -15811,7 +16053,7 @@
               </a:rPr>
               <a:t>CONSUMERS</a:t>
             </a:r>
-            <a:endParaRPr lang="en-US" sz="900" dirty="0"/>
+            <a:endParaRPr lang="en-US" sz="900"/>
           </a:p>
         </p:txBody>
       </p:sp>
@@ -15843,7 +16085,7 @@
               <a:buNone/>
             </a:pPr>
             <a:r>
-              <a:rPr lang="en-US" sz="1250" b="1" dirty="0">
+              <a:rPr lang="en-US" sz="1250" b="1">
                 <a:solidFill>
                   <a:srgbClr val="1B2836"/>
                 </a:solidFill>
@@ -15853,7 +16095,7 @@
               </a:rPr>
               <a:t>External</a:t>
             </a:r>
-            <a:endParaRPr lang="en-US" sz="1250" dirty="0"/>
+            <a:endParaRPr lang="en-US" sz="1250"/>
           </a:p>
         </p:txBody>
       </p:sp>
@@ -15886,7 +16128,7 @@
               <a:buChar char="•"/>
             </a:pPr>
             <a:r>
-              <a:rPr lang="en-US" sz="1050" dirty="0">
+              <a:rPr lang="en-US" sz="1050">
                 <a:solidFill>
                   <a:srgbClr val="1B2836"/>
                 </a:solidFill>
@@ -15896,7 +16138,7 @@
               </a:rPr>
               <a:t>Partners / B2B</a:t>
             </a:r>
-            <a:endParaRPr lang="en-US" sz="1050" dirty="0"/>
+            <a:endParaRPr lang="en-US" sz="1050"/>
           </a:p>
           <a:p>
             <a:pPr marL="342900" indent="-342900">
@@ -15907,7 +16149,7 @@
               <a:buChar char="•"/>
             </a:pPr>
             <a:r>
-              <a:rPr lang="en-US" sz="1050" dirty="0">
+              <a:rPr lang="en-US" sz="1050">
                 <a:solidFill>
                   <a:srgbClr val="1B2836"/>
                 </a:solidFill>
@@ -15917,7 +16159,7 @@
               </a:rPr>
               <a:t>Third-party SaaS</a:t>
             </a:r>
-            <a:endParaRPr lang="en-US" sz="1050" dirty="0"/>
+            <a:endParaRPr lang="en-US" sz="1050"/>
           </a:p>
         </p:txBody>
       </p:sp>
@@ -15980,7 +16222,7 @@
               <a:buNone/>
             </a:pPr>
             <a:r>
-              <a:rPr lang="en-US" sz="900" b="1" kern="0" spc="120" dirty="0">
+              <a:rPr lang="en-US" sz="900" b="1" kern="0" spc="120">
                 <a:solidFill>
                   <a:srgbClr val="3F6B8F"/>
                 </a:solidFill>
@@ -15990,7 +16232,7 @@
               </a:rPr>
               <a:t>EDGE — PUBLIC</a:t>
             </a:r>
-            <a:endParaRPr lang="en-US" sz="900" dirty="0"/>
+            <a:endParaRPr lang="en-US" sz="900"/>
           </a:p>
         </p:txBody>
       </p:sp>
@@ -16022,7 +16264,7 @@
               <a:buNone/>
             </a:pPr>
             <a:r>
-              <a:rPr lang="en-US" sz="1250" b="1" dirty="0">
+              <a:rPr lang="en-US" sz="1250" b="1">
                 <a:solidFill>
                   <a:srgbClr val="1B2836"/>
                 </a:solidFill>
@@ -16032,7 +16274,7 @@
               </a:rPr>
               <a:t>Azure Front Door Premium</a:t>
             </a:r>
-            <a:endParaRPr lang="en-US" sz="1250" dirty="0"/>
+            <a:endParaRPr lang="en-US" sz="1250"/>
           </a:p>
         </p:txBody>
       </p:sp>
@@ -16065,7 +16307,7 @@
               <a:buChar char="•"/>
             </a:pPr>
             <a:r>
-              <a:rPr lang="en-US" sz="1050" dirty="0">
+              <a:rPr lang="en-US" sz="1050">
                 <a:solidFill>
                   <a:srgbClr val="1B2836"/>
                 </a:solidFill>
@@ -16075,7 +16317,7 @@
               </a:rPr>
               <a:t>WAF: managed DRS + bot rules</a:t>
             </a:r>
-            <a:endParaRPr lang="en-US" sz="1050" dirty="0"/>
+            <a:endParaRPr lang="en-US" sz="1050"/>
           </a:p>
           <a:p>
             <a:pPr marL="342900" indent="-342900">
@@ -16086,7 +16328,7 @@
               <a:buChar char="•"/>
             </a:pPr>
             <a:r>
-              <a:rPr lang="en-US" sz="1050" dirty="0">
+              <a:rPr lang="en-US" sz="1050">
                 <a:solidFill>
                   <a:srgbClr val="1B2836"/>
                 </a:solidFill>
@@ -16096,7 +16338,7 @@
               </a:rPr>
               <a:t>DDoS protection, TLS 1.2 / 1.3</a:t>
             </a:r>
-            <a:endParaRPr lang="en-US" sz="1050" dirty="0"/>
+            <a:endParaRPr lang="en-US" sz="1050"/>
           </a:p>
           <a:p>
             <a:pPr marL="342900" indent="-342900">
@@ -16107,7 +16349,7 @@
               <a:buChar char="•"/>
             </a:pPr>
             <a:r>
-              <a:rPr lang="en-US" sz="1050" dirty="0">
+              <a:rPr lang="en-US" sz="1050">
                 <a:solidFill>
                   <a:srgbClr val="1B2836"/>
                 </a:solidFill>
@@ -16117,7 +16359,7 @@
               </a:rPr>
               <a:t>Global anycast + caching</a:t>
             </a:r>
-            <a:endParaRPr lang="en-US" sz="1050" dirty="0"/>
+            <a:endParaRPr lang="en-US" sz="1050"/>
           </a:p>
           <a:p>
             <a:pPr marL="342900" indent="-342900">
@@ -16128,7 +16370,7 @@
               <a:buChar char="•"/>
             </a:pPr>
             <a:r>
-              <a:rPr lang="en-US" sz="1050" dirty="0">
+              <a:rPr lang="en-US" sz="1050">
                 <a:solidFill>
                   <a:srgbClr val="1B2836"/>
                 </a:solidFill>
@@ -16138,7 +16380,7 @@
               </a:rPr>
               <a:t>Only public entry point</a:t>
             </a:r>
-            <a:endParaRPr lang="en-US" sz="1050" dirty="0"/>
+            <a:endParaRPr lang="en-US" sz="1050"/>
           </a:p>
         </p:txBody>
       </p:sp>
@@ -16201,7 +16443,7 @@
               <a:buNone/>
             </a:pPr>
             <a:r>
-              <a:rPr lang="en-US" sz="900" b="1" kern="0" spc="120" dirty="0">
+              <a:rPr lang="en-US" sz="900" b="1" kern="0" spc="120">
                 <a:solidFill>
                   <a:srgbClr val="1B6FB3"/>
                 </a:solidFill>
@@ -16211,7 +16453,7 @@
               </a:rPr>
               <a:t>API GATEWAY — PRIVATE</a:t>
             </a:r>
-            <a:endParaRPr lang="en-US" sz="900" dirty="0"/>
+            <a:endParaRPr lang="en-US" sz="900"/>
           </a:p>
         </p:txBody>
       </p:sp>
@@ -16243,7 +16485,7 @@
               <a:buNone/>
             </a:pPr>
             <a:r>
-              <a:rPr lang="en-US" sz="1250" b="1" dirty="0">
+              <a:rPr lang="en-US" sz="1250" b="1">
                 <a:solidFill>
                   <a:srgbClr val="1B2836"/>
                 </a:solidFill>
@@ -16253,7 +16495,7 @@
               </a:rPr>
               <a:t>APIM Premium V2 · Internal VNet</a:t>
             </a:r>
-            <a:endParaRPr lang="en-US" sz="1250" dirty="0"/>
+            <a:endParaRPr lang="en-US" sz="1250"/>
           </a:p>
         </p:txBody>
       </p:sp>
@@ -16286,7 +16528,7 @@
               <a:buChar char="•"/>
             </a:pPr>
             <a:r>
-              <a:rPr lang="en-US" sz="1050" dirty="0">
+              <a:rPr lang="en-US" sz="1050">
                 <a:solidFill>
                   <a:srgbClr val="1B2836"/>
                 </a:solidFill>
@@ -16296,7 +16538,7 @@
               </a:rPr>
               <a:t>OAuth2 / JWT validation</a:t>
             </a:r>
-            <a:endParaRPr lang="en-US" sz="1050" dirty="0"/>
+            <a:endParaRPr lang="en-US" sz="1050"/>
           </a:p>
           <a:p>
             <a:pPr marL="342900" indent="-342900">
@@ -16307,7 +16549,7 @@
               <a:buChar char="•"/>
             </a:pPr>
             <a:r>
-              <a:rPr lang="en-US" sz="1050" dirty="0">
+              <a:rPr lang="en-US" sz="1050">
                 <a:solidFill>
                   <a:srgbClr val="1B2836"/>
                 </a:solidFill>
@@ -16317,7 +16559,7 @@
               </a:rPr>
               <a:t>Products, versions, revisions</a:t>
             </a:r>
-            <a:endParaRPr lang="en-US" sz="1050" dirty="0"/>
+            <a:endParaRPr lang="en-US" sz="1050"/>
           </a:p>
           <a:p>
             <a:pPr marL="342900" indent="-342900">
@@ -16328,7 +16570,7 @@
               <a:buChar char="•"/>
             </a:pPr>
             <a:r>
-              <a:rPr lang="en-US" sz="1050" dirty="0">
+              <a:rPr lang="en-US" sz="1050">
                 <a:solidFill>
                   <a:srgbClr val="1B2836"/>
                 </a:solidFill>
@@ -16338,7 +16580,7 @@
               </a:rPr>
               <a:t>Quota, throttle, schema checks</a:t>
             </a:r>
-            <a:endParaRPr lang="en-US" sz="1050" dirty="0"/>
+            <a:endParaRPr lang="en-US" sz="1050"/>
           </a:p>
           <a:p>
             <a:pPr marL="342900" indent="-342900">
@@ -16349,7 +16591,7 @@
               <a:buChar char="•"/>
             </a:pPr>
             <a:r>
-              <a:rPr lang="en-US" sz="1050" dirty="0">
+              <a:rPr lang="en-US" sz="1050">
                 <a:solidFill>
                   <a:srgbClr val="1B2836"/>
                 </a:solidFill>
@@ -16359,7 +16601,7 @@
               </a:rPr>
               <a:t>Request / response shaping</a:t>
             </a:r>
-            <a:endParaRPr lang="en-US" sz="1050" dirty="0"/>
+            <a:endParaRPr lang="en-US" sz="1050"/>
           </a:p>
         </p:txBody>
       </p:sp>
@@ -16422,7 +16664,7 @@
               <a:buNone/>
             </a:pPr>
             <a:r>
-              <a:rPr lang="en-US" sz="900" b="1" kern="0" spc="120" dirty="0">
+              <a:rPr lang="en-US" sz="900" b="1" kern="0" spc="120">
                 <a:solidFill>
                   <a:srgbClr val="0E3F6E"/>
                 </a:solidFill>
@@ -16432,7 +16674,7 @@
               </a:rPr>
               <a:t>BACKENDS — PRIVATE</a:t>
             </a:r>
-            <a:endParaRPr lang="en-US" sz="900" dirty="0"/>
+            <a:endParaRPr lang="en-US" sz="900"/>
           </a:p>
         </p:txBody>
       </p:sp>
@@ -16464,7 +16706,7 @@
               <a:buNone/>
             </a:pPr>
             <a:r>
-              <a:rPr lang="en-US" sz="1250" b="1" dirty="0">
+              <a:rPr lang="en-US" sz="1250" b="1">
                 <a:solidFill>
                   <a:srgbClr val="1B2836"/>
                 </a:solidFill>
@@ -16474,7 +16716,7 @@
               </a:rPr>
               <a:t>Systems of record &amp; services</a:t>
             </a:r>
-            <a:endParaRPr lang="en-US" sz="1250" dirty="0"/>
+            <a:endParaRPr lang="en-US" sz="1250"/>
           </a:p>
         </p:txBody>
       </p:sp>
@@ -16507,7 +16749,7 @@
               <a:buChar char="•"/>
             </a:pPr>
             <a:r>
-              <a:rPr lang="en-US" sz="1050" dirty="0">
+              <a:rPr lang="en-US" sz="1050">
                 <a:solidFill>
                   <a:srgbClr val="1B2836"/>
                 </a:solidFill>
@@ -16527,7 +16769,7 @@
               <a:buChar char="•"/>
             </a:pPr>
             <a:r>
-              <a:rPr lang="en-US" sz="1050" dirty="0">
+              <a:rPr lang="en-US" sz="1050">
                 <a:solidFill>
                   <a:srgbClr val="1B2836"/>
                 </a:solidFill>
@@ -16546,7 +16788,7 @@
               <a:buSzPct val="100000"/>
             </a:pPr>
             <a:r>
-              <a:rPr lang="en-US" sz="1050" dirty="0">
+              <a:rPr lang="en-US" sz="1050">
                 <a:solidFill>
                   <a:srgbClr val="1B2836"/>
                 </a:solidFill>
@@ -16556,7 +16798,7 @@
               </a:rPr>
               <a:t>             AKS / Container Apps</a:t>
             </a:r>
-            <a:endParaRPr lang="en-US" sz="1050" dirty="0"/>
+            <a:endParaRPr lang="en-US" sz="1050"/>
           </a:p>
           <a:p>
             <a:pPr>
@@ -16566,7 +16808,7 @@
               <a:buSzPct val="100000"/>
             </a:pPr>
             <a:r>
-              <a:rPr lang="en-US" sz="1050" dirty="0">
+              <a:rPr lang="en-US" sz="1050">
                 <a:solidFill>
                   <a:srgbClr val="1B2836"/>
                 </a:solidFill>
@@ -16585,7 +16827,7 @@
               <a:buSzPct val="100000"/>
               <a:buChar char="•"/>
             </a:pPr>
-            <a:endParaRPr lang="en-US" sz="1050" dirty="0"/>
+            <a:endParaRPr lang="en-US" sz="1050"/>
           </a:p>
         </p:txBody>
       </p:sp>
@@ -16648,7 +16890,7 @@
               <a:buNone/>
             </a:pPr>
             <a:r>
-              <a:rPr lang="en-US" sz="800" b="1" dirty="0">
+              <a:rPr lang="en-US" sz="800" b="1">
                 <a:solidFill>
                   <a:srgbClr val="1B6FB3"/>
                 </a:solidFill>
@@ -16658,7 +16900,7 @@
               </a:rPr>
               <a:t>HTTPS</a:t>
             </a:r>
-            <a:endParaRPr lang="en-US" sz="800" dirty="0"/>
+            <a:endParaRPr lang="en-US" sz="800"/>
           </a:p>
         </p:txBody>
       </p:sp>
@@ -16721,7 +16963,7 @@
               <a:buNone/>
             </a:pPr>
             <a:r>
-              <a:rPr lang="en-US" sz="800" b="1" dirty="0">
+              <a:rPr lang="en-US" sz="800" b="1">
                 <a:solidFill>
                   <a:srgbClr val="1B6FB3"/>
                 </a:solidFill>
@@ -16731,7 +16973,7 @@
               </a:rPr>
               <a:t>Private</a:t>
             </a:r>
-            <a:endParaRPr lang="en-US" sz="800" dirty="0"/>
+            <a:endParaRPr lang="en-US" sz="800"/>
           </a:p>
           <a:p>
             <a:pPr marL="0" indent="0" algn="ctr">
@@ -16741,7 +16983,7 @@
               <a:buNone/>
             </a:pPr>
             <a:r>
-              <a:rPr lang="en-US" sz="800" b="1" dirty="0">
+              <a:rPr lang="en-US" sz="800" b="1">
                 <a:solidFill>
                   <a:srgbClr val="1B6FB3"/>
                 </a:solidFill>
@@ -16751,7 +16993,7 @@
               </a:rPr>
               <a:t>Link</a:t>
             </a:r>
-            <a:endParaRPr lang="en-US" sz="800" dirty="0"/>
+            <a:endParaRPr lang="en-US" sz="800"/>
           </a:p>
         </p:txBody>
       </p:sp>
@@ -16814,7 +17056,7 @@
               <a:buNone/>
             </a:pPr>
             <a:r>
-              <a:rPr lang="en-US" sz="800" b="1" dirty="0">
+              <a:rPr lang="en-US" sz="800" b="1">
                 <a:solidFill>
                   <a:srgbClr val="1B6FB3"/>
                 </a:solidFill>
@@ -16824,7 +17066,7 @@
               </a:rPr>
               <a:t>VNet</a:t>
             </a:r>
-            <a:endParaRPr lang="en-US" sz="800" dirty="0"/>
+            <a:endParaRPr lang="en-US" sz="800"/>
           </a:p>
         </p:txBody>
       </p:sp>
@@ -16887,7 +17129,7 @@
               <a:buNone/>
             </a:pPr>
             <a:r>
-              <a:rPr lang="en-US" sz="1100" b="1" kern="0" spc="100" dirty="0">
+              <a:rPr lang="en-US" sz="1100" b="1" kern="0" spc="100">
                 <a:solidFill>
                   <a:srgbClr val="1B6FB3"/>
                 </a:solidFill>
@@ -16898,7 +17140,7 @@
               <a:t>EDGE DECISION  </a:t>
             </a:r>
             <a:r>
-              <a:rPr lang="en-US" sz="1100" dirty="0">
+              <a:rPr lang="en-US" sz="1100">
                 <a:solidFill>
                   <a:srgbClr val="1B2836"/>
                 </a:solidFill>
@@ -16911,7 +17153,7 @@
           </a:p>
           <a:p>
             <a:r>
-              <a:rPr lang="en-GB" sz="900" dirty="0"/>
+              <a:rPr lang="en-GB" sz="900"/>
               <a:t>Front Door Premium establishes a hardened security boundary in front of the API platform. WAF policies, DDoS protection, and centralised traffic control help ensure secure, reliable, and governed access to digital services</a:t>
             </a:r>
           </a:p>
@@ -16920,7 +17162,7 @@
               <a:buNone/>
             </a:pPr>
             <a:r>
-              <a:rPr lang="en-US" sz="1100" dirty="0">
+              <a:rPr lang="en-US" sz="1100">
                 <a:solidFill>
                   <a:srgbClr val="1B2836"/>
                 </a:solidFill>
@@ -16930,7 +17172,7 @@
               </a:rPr>
               <a:t> </a:t>
             </a:r>
-            <a:endParaRPr lang="en-US" sz="1100" dirty="0"/>
+            <a:endParaRPr lang="en-US" sz="1100"/>
           </a:p>
         </p:txBody>
       </p:sp>
@@ -17005,7 +17247,7 @@
               <a:buNone/>
             </a:pPr>
             <a:r>
-              <a:rPr lang="en-US" sz="1100" b="1" kern="0" spc="100" dirty="0">
+              <a:rPr lang="en-US" sz="1100" b="1" kern="0" spc="100">
                 <a:solidFill>
                   <a:srgbClr val="1B6FB3"/>
                 </a:solidFill>
@@ -17016,7 +17258,7 @@
               <a:t>APIM DECISION </a:t>
             </a:r>
             <a:r>
-              <a:rPr lang="en-US" sz="1100" dirty="0">
+              <a:rPr lang="en-US" sz="1100">
                 <a:solidFill>
                   <a:srgbClr val="1B2836"/>
                 </a:solidFill>
@@ -17031,7 +17273,7 @@
             <a:pPr marL="0" indent="0">
               <a:buNone/>
             </a:pPr>
-            <a:endParaRPr lang="en-US" sz="1100" dirty="0">
+            <a:endParaRPr lang="en-US" sz="1100">
               <a:solidFill>
                 <a:srgbClr val="1B2836"/>
               </a:solidFill>
@@ -17042,7 +17284,7 @@
           </a:p>
           <a:p>
             <a:r>
-              <a:rPr lang="en-GB" sz="1000" dirty="0"/>
+              <a:rPr lang="en-GB" sz="1000"/>
               <a:t>Premium V2 delivers the network isolation, performance, and governance controls required for strategic API management. It enables consistent policy enforcement, secure connectivity, and future growth without architectural redesign.</a:t>
             </a:r>
           </a:p>
@@ -17050,7 +17292,7 @@
             <a:pPr marL="0" indent="0">
               <a:buNone/>
             </a:pPr>
-            <a:endParaRPr lang="en-US" sz="1100" dirty="0"/>
+            <a:endParaRPr lang="en-US" sz="1100"/>
           </a:p>
         </p:txBody>
       </p:sp>
@@ -17136,7 +17378,7 @@
               <a:buNone/>
             </a:pPr>
             <a:r>
-              <a:rPr lang="en-US" sz="1700" b="1" dirty="0">
+              <a:rPr lang="en-US" sz="1700" b="1">
                 <a:solidFill>
                   <a:srgbClr val="FFFFFF"/>
                 </a:solidFill>
@@ -17146,7 +17388,7 @@
               </a:rPr>
               <a:t>2</a:t>
             </a:r>
-            <a:endParaRPr lang="en-US" sz="1700" dirty="0"/>
+            <a:endParaRPr lang="en-US" sz="1700"/>
           </a:p>
         </p:txBody>
       </p:sp>
@@ -17175,7 +17417,7 @@
               <a:buNone/>
             </a:pPr>
             <a:r>
-              <a:rPr lang="en-US" sz="950" b="1" kern="0" spc="200" dirty="0">
+              <a:rPr lang="en-US" sz="950" b="1" kern="0" spc="200">
                 <a:solidFill>
                   <a:srgbClr val="1B6FB3"/>
                 </a:solidFill>
@@ -17185,7 +17427,7 @@
               </a:rPr>
               <a:t>APIM HOSTING MODEL</a:t>
             </a:r>
-            <a:endParaRPr lang="en-US" sz="950" dirty="0"/>
+            <a:endParaRPr lang="en-US" sz="950"/>
           </a:p>
         </p:txBody>
       </p:sp>
@@ -17214,7 +17456,7 @@
               <a:buNone/>
             </a:pPr>
             <a:r>
-              <a:rPr lang="en-US" sz="2800" b="1" dirty="0">
+              <a:rPr lang="en-US" sz="2800" b="1">
                 <a:solidFill>
                   <a:srgbClr val="1B2836"/>
                 </a:solidFill>
@@ -17224,7 +17466,7 @@
               </a:rPr>
               <a:t>Managed, VNet-Injected or Self-Hosted</a:t>
             </a:r>
-            <a:endParaRPr lang="en-US" sz="2800" dirty="0"/>
+            <a:endParaRPr lang="en-US" sz="2800"/>
           </a:p>
         </p:txBody>
       </p:sp>
@@ -17253,7 +17495,7 @@
               <a:buNone/>
             </a:pPr>
             <a:r>
-              <a:rPr lang="en-US" sz="1200" dirty="0">
+              <a:rPr lang="en-US" sz="1200">
                 <a:solidFill>
                   <a:srgbClr val="5A6B7D"/>
                 </a:solidFill>
@@ -17261,9 +17503,9 @@
                 <a:ea typeface="Calibri" pitchFamily="34" charset="-122"/>
                 <a:cs typeface="Calibri" pitchFamily="34" charset="-120"/>
               </a:rPr>
-              <a:t>Hosting model = Premium V2, Managed gateway, VNet injection in Internal mode. Self-hosted gateway is a hybrid add-on</a:t>
-            </a:r>
-            <a:endParaRPr lang="en-US" sz="1200" dirty="0"/>
+              <a:t>Hosting model = Premium V2, Managed gateway, VNet injection in Internal mode. </a:t>
+            </a:r>
+            <a:endParaRPr lang="en-US" sz="1200"/>
           </a:p>
         </p:txBody>
       </p:sp>
@@ -17326,7 +17568,7 @@
               <a:buNone/>
             </a:pPr>
             <a:r>
-              <a:rPr lang="en-US" sz="900" b="1" kern="0" spc="120" dirty="0">
+              <a:rPr lang="en-US" sz="900" b="1" kern="0" spc="120">
                 <a:solidFill>
                   <a:srgbClr val="5A6B7D"/>
                 </a:solidFill>
@@ -17336,7 +17578,7 @@
               </a:rPr>
               <a:t>OPTION A</a:t>
             </a:r>
-            <a:endParaRPr lang="en-US" sz="900" dirty="0"/>
+            <a:endParaRPr lang="en-US" sz="900"/>
           </a:p>
         </p:txBody>
       </p:sp>
@@ -17403,7 +17645,7 @@
               <a:buNone/>
             </a:pPr>
             <a:r>
-              <a:rPr lang="en-US" sz="850" b="1" kern="0" spc="80" dirty="0">
+              <a:rPr lang="en-US" sz="850" b="1" kern="0" spc="80">
                 <a:solidFill>
                   <a:srgbClr val="FFFFFF"/>
                 </a:solidFill>
@@ -17413,7 +17655,7 @@
               </a:rPr>
               <a:t>NOT SUFFICIENT</a:t>
             </a:r>
-            <a:endParaRPr lang="en-US" sz="850" dirty="0"/>
+            <a:endParaRPr lang="en-US" sz="850"/>
           </a:p>
         </p:txBody>
       </p:sp>
@@ -17439,7 +17681,7 @@
           <a:lstStyle/>
           <a:p>
             <a:r>
-              <a:rPr lang="en-US" sz="1500" b="1" dirty="0">
+              <a:rPr lang="en-US" sz="1500" b="1">
                 <a:solidFill>
                   <a:srgbClr val="0E3F6E"/>
                 </a:solidFill>
@@ -17449,7 +17691,7 @@
               </a:rPr>
               <a:t>VNet Injection – External mode</a:t>
             </a:r>
-            <a:endParaRPr lang="en-US" sz="1500" dirty="0">
+            <a:endParaRPr lang="en-US" sz="1500">
               <a:solidFill>
                 <a:srgbClr val="000000"/>
               </a:solidFill>
@@ -17465,7 +17707,7 @@
               </a:lnSpc>
               <a:buNone/>
             </a:pPr>
-            <a:endParaRPr lang="en-US" sz="1500" b="1" dirty="0">
+            <a:endParaRPr lang="en-US" sz="1500" b="1">
               <a:solidFill>
                 <a:srgbClr val="0E3F6E"/>
               </a:solidFill>
@@ -17501,7 +17743,7 @@
               <a:buNone/>
             </a:pPr>
             <a:r>
-              <a:rPr lang="en-US" sz="800" b="1" kern="0" spc="120" dirty="0">
+              <a:rPr lang="en-US" sz="800" b="1" kern="0" spc="120">
                 <a:solidFill>
                   <a:srgbClr val="5A6B7D"/>
                 </a:solidFill>
@@ -17511,7 +17753,7 @@
               </a:rPr>
               <a:t>HOSTING MODEL</a:t>
             </a:r>
-            <a:endParaRPr lang="en-US" sz="800" dirty="0"/>
+            <a:endParaRPr lang="en-US" sz="800"/>
           </a:p>
         </p:txBody>
       </p:sp>
@@ -17542,7 +17784,7 @@
               </a:lnSpc>
             </a:pPr>
             <a:r>
-              <a:rPr lang="en-US" sz="1000" i="1" dirty="0">
+              <a:rPr lang="en-US" sz="1000" i="1">
                 <a:solidFill>
                   <a:srgbClr val="1B2836"/>
                 </a:solidFill>
@@ -17550,9 +17792,31 @@
                 <a:ea typeface="Calibri" pitchFamily="34" charset="-122"/>
                 <a:cs typeface="Calibri" pitchFamily="34" charset="-120"/>
               </a:rPr>
-              <a:t>Managed gateway injected into the VNet · External mode · public inbound VIP</a:t>
-            </a:r>
-            <a:endParaRPr lang="en-US" sz="1000" dirty="0"/>
+              <a:t>Managed gateway injected into the </a:t>
+            </a:r>
+            <a:r>
+              <a:rPr lang="en-US" sz="1000" i="1" err="1">
+                <a:solidFill>
+                  <a:srgbClr val="1B2836"/>
+                </a:solidFill>
+                <a:latin typeface="Calibri" pitchFamily="34" charset="0"/>
+                <a:ea typeface="Calibri" pitchFamily="34" charset="-122"/>
+                <a:cs typeface="Calibri" pitchFamily="34" charset="-120"/>
+              </a:rPr>
+              <a:t>VNet</a:t>
+            </a:r>
+            <a:r>
+              <a:rPr lang="en-US" sz="1000" i="1">
+                <a:solidFill>
+                  <a:srgbClr val="1B2836"/>
+                </a:solidFill>
+                <a:latin typeface="Calibri" pitchFamily="34" charset="0"/>
+                <a:ea typeface="Calibri" pitchFamily="34" charset="-122"/>
+                <a:cs typeface="Calibri" pitchFamily="34" charset="-120"/>
+              </a:rPr>
+              <a:t> · External mode · public inbound VIP</a:t>
+            </a:r>
+            <a:endParaRPr lang="en-US" sz="1000"/>
           </a:p>
         </p:txBody>
       </p:sp>
@@ -17585,7 +17849,7 @@
               <a:buChar char="•"/>
             </a:pPr>
             <a:r>
-              <a:rPr lang="en-GB" sz="1050" dirty="0">
+              <a:rPr lang="en-GB" sz="1050">
                 <a:latin typeface="Calibri" panose="020F0502020204030204" pitchFamily="34" charset="0"/>
                 <a:ea typeface="Calibri" panose="020F0502020204030204" pitchFamily="34" charset="0"/>
                 <a:cs typeface="Calibri" panose="020F0502020204030204" pitchFamily="34" charset="0"/>
@@ -17601,7 +17865,7 @@
               <a:buFont typeface="Arial" panose="020B0604020202020204" pitchFamily="34" charset="0"/>
               <a:buChar char="•"/>
             </a:pPr>
-            <a:endParaRPr lang="en-GB" sz="1050" dirty="0">
+            <a:endParaRPr lang="en-GB" sz="1050">
               <a:latin typeface="Calibri" panose="020F0502020204030204" pitchFamily="34" charset="0"/>
               <a:ea typeface="Calibri" panose="020F0502020204030204" pitchFamily="34" charset="0"/>
               <a:cs typeface="Calibri" panose="020F0502020204030204" pitchFamily="34" charset="0"/>
@@ -17613,7 +17877,7 @@
               <a:buChar char="•"/>
             </a:pPr>
             <a:r>
-              <a:rPr lang="en-GB" sz="1050" dirty="0">
+              <a:rPr lang="en-GB" sz="1050">
                 <a:latin typeface="Calibri"/>
                 <a:ea typeface="Calibri"/>
                 <a:cs typeface="Calibri"/>
@@ -17626,7 +17890,7 @@
               <a:buFont typeface="Arial" panose="020B0604020202020204" pitchFamily="34" charset="0"/>
               <a:buChar char="•"/>
             </a:pPr>
-            <a:endParaRPr lang="en-GB" sz="1050" dirty="0">
+            <a:endParaRPr lang="en-GB" sz="1050">
               <a:latin typeface="Calibri" panose="020F0502020204030204" pitchFamily="34" charset="0"/>
               <a:ea typeface="Calibri" panose="020F0502020204030204" pitchFamily="34" charset="0"/>
               <a:cs typeface="Calibri" panose="020F0502020204030204" pitchFamily="34" charset="0"/>
@@ -17641,14 +17905,14 @@
               <a:buChar char="•"/>
             </a:pPr>
             <a:r>
-              <a:rPr lang="en-GB" sz="1050" dirty="0">
+              <a:rPr lang="en-GB" sz="1050">
                 <a:latin typeface="Calibri"/>
                 <a:ea typeface="Calibri"/>
                 <a:cs typeface="Calibri"/>
               </a:rPr>
               <a:t>Suitable for Public-facing APIs that need direct, secure access to private database backends.</a:t>
             </a:r>
-            <a:endParaRPr lang="en-GB" sz="1050" dirty="0">
+            <a:endParaRPr lang="en-GB" sz="1050">
               <a:latin typeface="Calibri" panose="020F0502020204030204" pitchFamily="34" charset="0"/>
               <a:ea typeface="Calibri" panose="020F0502020204030204" pitchFamily="34" charset="0"/>
               <a:cs typeface="Calibri" panose="020F0502020204030204" pitchFamily="34" charset="0"/>
@@ -17718,7 +17982,7 @@
               <a:buNone/>
             </a:pPr>
             <a:r>
-              <a:rPr lang="en-GB" sz="1050" b="1" dirty="0">
+              <a:rPr lang="en-GB" sz="1050" b="1">
                 <a:latin typeface="Calibri" panose="020F0502020204030204" pitchFamily="34" charset="0"/>
                 <a:ea typeface="Calibri" panose="020F0502020204030204" pitchFamily="34" charset="0"/>
                 <a:cs typeface="Calibri" panose="020F0502020204030204" pitchFamily="34" charset="0"/>
@@ -17787,7 +18051,7 @@
               <a:buNone/>
             </a:pPr>
             <a:r>
-              <a:rPr lang="en-US" sz="900" b="1" kern="0" spc="120" dirty="0">
+              <a:rPr lang="en-US" sz="900" b="1" kern="0" spc="120">
                 <a:solidFill>
                   <a:srgbClr val="5A6B7D"/>
                 </a:solidFill>
@@ -17797,7 +18061,7 @@
               </a:rPr>
               <a:t>OPTION B</a:t>
             </a:r>
-            <a:endParaRPr lang="en-US" sz="900" dirty="0"/>
+            <a:endParaRPr lang="en-US" sz="900"/>
           </a:p>
         </p:txBody>
       </p:sp>
@@ -17860,7 +18124,7 @@
               <a:buNone/>
             </a:pPr>
             <a:r>
-              <a:rPr lang="en-US" sz="850" b="1" kern="0" spc="80" dirty="0">
+              <a:rPr lang="en-US" sz="850" b="1" kern="0" spc="80">
                 <a:solidFill>
                   <a:srgbClr val="FFFFFF"/>
                 </a:solidFill>
@@ -17870,7 +18134,7 @@
               </a:rPr>
               <a:t>TARGET MODEL</a:t>
             </a:r>
-            <a:endParaRPr lang="en-US" sz="850" dirty="0"/>
+            <a:endParaRPr lang="en-US" sz="850"/>
           </a:p>
         </p:txBody>
       </p:sp>
@@ -17902,7 +18166,7 @@
               <a:buNone/>
             </a:pPr>
             <a:r>
-              <a:rPr lang="en-US" sz="1500" b="1" dirty="0">
+              <a:rPr lang="en-US" sz="1500" b="1">
                 <a:solidFill>
                   <a:srgbClr val="0E3F6E"/>
                 </a:solidFill>
@@ -17912,7 +18176,7 @@
               </a:rPr>
               <a:t>VNet Injection - Internal mode</a:t>
             </a:r>
-            <a:endParaRPr lang="en-US" sz="1500" dirty="0"/>
+            <a:endParaRPr lang="en-US" sz="1500"/>
           </a:p>
         </p:txBody>
       </p:sp>
@@ -17941,7 +18205,7 @@
               <a:buNone/>
             </a:pPr>
             <a:r>
-              <a:rPr lang="en-US" sz="800" b="1" kern="0" spc="120" dirty="0">
+              <a:rPr lang="en-US" sz="800" b="1" kern="0" spc="120">
                 <a:solidFill>
                   <a:srgbClr val="5A6B7D"/>
                 </a:solidFill>
@@ -17951,7 +18215,7 @@
               </a:rPr>
               <a:t>HOSTING MODEL</a:t>
             </a:r>
-            <a:endParaRPr lang="en-US" sz="800" dirty="0"/>
+            <a:endParaRPr lang="en-US" sz="800"/>
           </a:p>
         </p:txBody>
       </p:sp>
@@ -17983,7 +18247,7 @@
               <a:buNone/>
             </a:pPr>
             <a:r>
-              <a:rPr lang="en-US" sz="1000" i="1" dirty="0">
+              <a:rPr lang="en-US" sz="1000" i="1">
                 <a:solidFill>
                   <a:srgbClr val="1B2836"/>
                 </a:solidFill>
@@ -17993,7 +18257,7 @@
               </a:rPr>
               <a:t>Managed gateway injected into the VNet · Internal mode ·  Premium V2</a:t>
             </a:r>
-            <a:endParaRPr lang="en-US" sz="1000" dirty="0"/>
+            <a:endParaRPr lang="en-US" sz="1000"/>
           </a:p>
         </p:txBody>
       </p:sp>
@@ -18026,7 +18290,7 @@
               <a:buChar char="•"/>
             </a:pPr>
             <a:r>
-              <a:rPr lang="en-GB" sz="1050" dirty="0">
+              <a:rPr lang="en-GB" sz="1050">
                 <a:solidFill>
                   <a:srgbClr val="1B2836"/>
                 </a:solidFill>
@@ -18046,7 +18310,7 @@
               <a:buChar char="•"/>
             </a:pPr>
             <a:r>
-              <a:rPr lang="en-GB" sz="1050" dirty="0">
+              <a:rPr lang="en-GB" sz="1050">
                 <a:solidFill>
                   <a:srgbClr val="1B2836"/>
                 </a:solidFill>
@@ -18066,7 +18330,7 @@
               <a:buChar char="•"/>
             </a:pPr>
             <a:r>
-              <a:rPr lang="en-GB" sz="1050" dirty="0">
+              <a:rPr lang="en-GB" sz="1050">
                 <a:solidFill>
                   <a:srgbClr val="1B2836"/>
                 </a:solidFill>
@@ -18086,7 +18350,7 @@
               <a:buChar char="•"/>
             </a:pPr>
             <a:r>
-              <a:rPr lang="en-GB" sz="1050" dirty="0">
+              <a:rPr lang="en-GB" sz="1050">
                 <a:solidFill>
                   <a:srgbClr val="1B2836"/>
                 </a:solidFill>
@@ -18096,7 +18360,7 @@
               </a:rPr>
               <a:t>Full control of routing, security policies, and outbound traffic flows.</a:t>
             </a:r>
-            <a:endParaRPr lang="en-US" sz="1050" dirty="0"/>
+            <a:endParaRPr lang="en-US" sz="1050"/>
           </a:p>
         </p:txBody>
       </p:sp>
@@ -18161,7 +18425,7 @@
               </a:lnSpc>
             </a:pPr>
             <a:r>
-              <a:rPr lang="en-GB" sz="1050" b="1" dirty="0">
+              <a:rPr lang="en-GB" sz="1050" b="1">
                 <a:solidFill>
                   <a:srgbClr val="1B2836"/>
                 </a:solidFill>
@@ -18171,7 +18435,7 @@
               </a:rPr>
               <a:t>Provides the required private connectivity, network control, and security posture</a:t>
             </a:r>
-            <a:endParaRPr lang="en-US" sz="1050" dirty="0"/>
+            <a:endParaRPr lang="en-US" sz="1050"/>
           </a:p>
         </p:txBody>
       </p:sp>
@@ -18234,7 +18498,7 @@
               <a:buNone/>
             </a:pPr>
             <a:r>
-              <a:rPr lang="en-US" sz="900" b="1" kern="0" spc="120" dirty="0">
+              <a:rPr lang="en-US" sz="900" b="1" kern="0" spc="120">
                 <a:solidFill>
                   <a:srgbClr val="5A6B7D"/>
                 </a:solidFill>
@@ -18244,7 +18508,7 @@
               </a:rPr>
               <a:t>OPTION C</a:t>
             </a:r>
-            <a:endParaRPr lang="en-US" sz="900" dirty="0"/>
+            <a:endParaRPr lang="en-US" sz="900"/>
           </a:p>
         </p:txBody>
       </p:sp>
@@ -18307,7 +18571,7 @@
               <a:buNone/>
             </a:pPr>
             <a:r>
-              <a:rPr lang="en-US" sz="850" b="1" kern="0" spc="80" dirty="0">
+              <a:rPr lang="en-US" sz="850" b="1" kern="0" spc="80">
                 <a:solidFill>
                   <a:srgbClr val="FFFFFF"/>
                 </a:solidFill>
@@ -18317,7 +18581,7 @@
               </a:rPr>
               <a:t>HYBRID ADD-ON</a:t>
             </a:r>
-            <a:endParaRPr lang="en-US" sz="850" dirty="0"/>
+            <a:endParaRPr lang="en-US" sz="850"/>
           </a:p>
         </p:txBody>
       </p:sp>
@@ -18349,7 +18613,7 @@
               <a:buNone/>
             </a:pPr>
             <a:r>
-              <a:rPr lang="en-US" sz="1500" b="1" dirty="0">
+              <a:rPr lang="en-US" sz="1500" b="1">
                 <a:solidFill>
                   <a:srgbClr val="0E3F6E"/>
                 </a:solidFill>
@@ -18359,7 +18623,7 @@
               </a:rPr>
               <a:t>Self-Hosted Gateway</a:t>
             </a:r>
-            <a:endParaRPr lang="en-US" sz="1500" dirty="0"/>
+            <a:endParaRPr lang="en-US" sz="1500"/>
           </a:p>
         </p:txBody>
       </p:sp>
@@ -18388,7 +18652,7 @@
               <a:buNone/>
             </a:pPr>
             <a:r>
-              <a:rPr lang="en-US" sz="800" b="1" kern="0" spc="120" dirty="0">
+              <a:rPr lang="en-US" sz="800" b="1" kern="0" spc="120">
                 <a:solidFill>
                   <a:srgbClr val="5A6B7D"/>
                 </a:solidFill>
@@ -18398,7 +18662,7 @@
               </a:rPr>
               <a:t>HOSTING MODEL</a:t>
             </a:r>
-            <a:endParaRPr lang="en-US" sz="800" dirty="0"/>
+            <a:endParaRPr lang="en-US" sz="800"/>
           </a:p>
         </p:txBody>
       </p:sp>
@@ -18430,7 +18694,7 @@
               <a:buNone/>
             </a:pPr>
             <a:r>
-              <a:rPr lang="en-US" sz="1000" i="1" dirty="0">
+              <a:rPr lang="en-US" sz="1000" i="1">
                 <a:solidFill>
                   <a:srgbClr val="1B2836"/>
                 </a:solidFill>
@@ -18440,7 +18704,7 @@
               </a:rPr>
               <a:t>Gateway container on AKS / on-prem · control plane stays in Azure APIM</a:t>
             </a:r>
-            <a:endParaRPr lang="en-US" sz="1000" dirty="0"/>
+            <a:endParaRPr lang="en-US" sz="1000"/>
           </a:p>
         </p:txBody>
       </p:sp>
@@ -18473,7 +18737,7 @@
               <a:buChar char="•"/>
             </a:pPr>
             <a:r>
-              <a:rPr lang="en-US" sz="1050" dirty="0">
+              <a:rPr lang="en-US" sz="1050">
                 <a:solidFill>
                   <a:srgbClr val="1B2836"/>
                 </a:solidFill>
@@ -18493,7 +18757,7 @@
               <a:buChar char="•"/>
             </a:pPr>
             <a:r>
-              <a:rPr lang="en-US" sz="1050" dirty="0">
+              <a:rPr lang="en-US" sz="1050">
                 <a:solidFill>
                   <a:srgbClr val="1B2836"/>
                 </a:solidFill>
@@ -18503,7 +18767,7 @@
               </a:rPr>
               <a:t>Local data plane next to the backend, removes hairpin round-trips</a:t>
             </a:r>
-            <a:endParaRPr lang="en-US" sz="1050" dirty="0"/>
+            <a:endParaRPr lang="en-US" sz="1050"/>
           </a:p>
           <a:p>
             <a:pPr marL="342900" indent="-342900">
@@ -18514,7 +18778,7 @@
               <a:buChar char="•"/>
             </a:pPr>
             <a:r>
-              <a:rPr lang="en-US" sz="1050" dirty="0">
+              <a:rPr lang="en-US" sz="1050">
                 <a:solidFill>
                   <a:srgbClr val="1B2836"/>
                 </a:solidFill>
@@ -18524,7 +18788,7 @@
               </a:rPr>
               <a:t>Keeps regulated traffic inside its own boundary</a:t>
             </a:r>
-            <a:endParaRPr lang="en-US" sz="1050" dirty="0"/>
+            <a:endParaRPr lang="en-US" sz="1050"/>
           </a:p>
           <a:p>
             <a:pPr marL="342900" indent="-342900">
@@ -18535,7 +18799,7 @@
               <a:buChar char="•"/>
             </a:pPr>
             <a:r>
-              <a:rPr lang="en-US" sz="1050" dirty="0">
+              <a:rPr lang="en-US" sz="1050">
                 <a:solidFill>
                   <a:srgbClr val="1B2836"/>
                 </a:solidFill>
@@ -18545,7 +18809,7 @@
               </a:rPr>
               <a:t>Managed as one logical APIM instance and policy set</a:t>
             </a:r>
-            <a:endParaRPr lang="en-US" sz="1050" dirty="0"/>
+            <a:endParaRPr lang="en-US" sz="1050"/>
           </a:p>
         </p:txBody>
       </p:sp>
@@ -18611,7 +18875,7 @@
               <a:buNone/>
             </a:pPr>
             <a:r>
-              <a:rPr lang="en-GB" sz="1050" b="1" dirty="0">
+              <a:rPr lang="en-GB" sz="1050" b="1">
                 <a:latin typeface="Calibri" panose="020F0502020204030204" pitchFamily="34" charset="0"/>
                 <a:ea typeface="Calibri" panose="020F0502020204030204" pitchFamily="34" charset="0"/>
                 <a:cs typeface="Calibri" panose="020F0502020204030204" pitchFamily="34" charset="0"/>
@@ -18703,7 +18967,7 @@
               <a:buNone/>
             </a:pPr>
             <a:r>
-              <a:rPr lang="en-US" sz="1700" b="1" dirty="0">
+              <a:rPr lang="en-US" sz="1700" b="1">
                 <a:solidFill>
                   <a:srgbClr val="FFFFFF"/>
                 </a:solidFill>
@@ -18713,7 +18977,7 @@
               </a:rPr>
               <a:t>3</a:t>
             </a:r>
-            <a:endParaRPr lang="en-US" sz="1700" dirty="0"/>
+            <a:endParaRPr lang="en-US" sz="1700"/>
           </a:p>
         </p:txBody>
       </p:sp>
@@ -18742,7 +19006,7 @@
               <a:buNone/>
             </a:pPr>
             <a:r>
-              <a:rPr lang="en-US" sz="950" b="1" kern="0" spc="200" dirty="0">
+              <a:rPr lang="en-US" sz="950" b="1" kern="0" spc="200">
                 <a:solidFill>
                   <a:srgbClr val="1B6FB3"/>
                 </a:solidFill>
@@ -18752,7 +19016,7 @@
               </a:rPr>
               <a:t>EXTERNAL API INGRESS</a:t>
             </a:r>
-            <a:endParaRPr lang="en-US" sz="950" dirty="0"/>
+            <a:endParaRPr lang="en-US" sz="950"/>
           </a:p>
         </p:txBody>
       </p:sp>
@@ -18781,7 +19045,7 @@
               <a:buNone/>
             </a:pPr>
             <a:r>
-              <a:rPr lang="en-US" sz="2800" b="1" dirty="0">
+              <a:rPr lang="en-US" sz="2800" b="1">
                 <a:solidFill>
                   <a:srgbClr val="1B2836"/>
                 </a:solidFill>
@@ -18791,7 +19055,7 @@
               </a:rPr>
               <a:t>Layered Ingress with WAF</a:t>
             </a:r>
-            <a:endParaRPr lang="en-US" sz="2800" dirty="0"/>
+            <a:endParaRPr lang="en-US" sz="2800"/>
           </a:p>
         </p:txBody>
       </p:sp>
@@ -18820,7 +19084,7 @@
               <a:buNone/>
             </a:pPr>
             <a:r>
-              <a:rPr lang="en-US" sz="1200" dirty="0">
+              <a:rPr lang="en-US" sz="1200">
                 <a:solidFill>
                   <a:srgbClr val="5A6B7D"/>
                 </a:solidFill>
@@ -18830,7 +19094,7 @@
               </a:rPr>
               <a:t>One L7 inspection point at the edge; every layer below adds identity and control, no secondary WAF.</a:t>
             </a:r>
-            <a:endParaRPr lang="en-US" sz="1200" dirty="0"/>
+            <a:endParaRPr lang="en-US" sz="1200"/>
           </a:p>
         </p:txBody>
       </p:sp>
@@ -18893,7 +19157,7 @@
               <a:buNone/>
             </a:pPr>
             <a:r>
-              <a:rPr lang="en-US" sz="900" b="1" kern="0" spc="120" dirty="0">
+              <a:rPr lang="en-US" sz="900" b="1" kern="0" spc="120">
                 <a:solidFill>
                   <a:srgbClr val="1B6FB3"/>
                 </a:solidFill>
@@ -18903,7 +19167,7 @@
               </a:rPr>
               <a:t>INBOUND REQUEST FLOW</a:t>
             </a:r>
-            <a:endParaRPr lang="en-US" sz="900" dirty="0"/>
+            <a:endParaRPr lang="en-US" sz="900"/>
           </a:p>
         </p:txBody>
       </p:sp>
@@ -18966,7 +19230,7 @@
               <a:buNone/>
             </a:pPr>
             <a:r>
-              <a:rPr lang="en-US" sz="850" b="1" dirty="0">
+              <a:rPr lang="en-US" sz="850" b="1">
                 <a:solidFill>
                   <a:srgbClr val="1B2836"/>
                 </a:solidFill>
@@ -18976,7 +19240,7 @@
               </a:rPr>
               <a:t>CLIENT</a:t>
             </a:r>
-            <a:endParaRPr lang="en-US" sz="850" dirty="0"/>
+            <a:endParaRPr lang="en-US" sz="850"/>
           </a:p>
         </p:txBody>
       </p:sp>
@@ -19008,7 +19272,7 @@
               <a:buNone/>
             </a:pPr>
             <a:r>
-              <a:rPr lang="en-US" sz="750" dirty="0">
+              <a:rPr lang="en-US" sz="750">
                 <a:solidFill>
                   <a:srgbClr val="5A6B7D"/>
                 </a:solidFill>
@@ -19018,7 +19282,7 @@
               </a:rPr>
               <a:t>external caller</a:t>
             </a:r>
-            <a:endParaRPr lang="en-US" sz="750" dirty="0"/>
+            <a:endParaRPr lang="en-US" sz="750"/>
           </a:p>
         </p:txBody>
       </p:sp>
@@ -19112,7 +19376,7 @@
               <a:buNone/>
             </a:pPr>
             <a:r>
-              <a:rPr lang="en-US" sz="850" b="1" dirty="0">
+              <a:rPr lang="en-US" sz="850" b="1">
                 <a:solidFill>
                   <a:srgbClr val="1B2836"/>
                 </a:solidFill>
@@ -19122,7 +19386,7 @@
               </a:rPr>
               <a:t>PUBLIC DNS</a:t>
             </a:r>
-            <a:endParaRPr lang="en-US" sz="850" dirty="0"/>
+            <a:endParaRPr lang="en-US" sz="850"/>
           </a:p>
         </p:txBody>
       </p:sp>
@@ -19154,7 +19418,7 @@
               <a:buNone/>
             </a:pPr>
             <a:r>
-              <a:rPr lang="en-US" sz="750" dirty="0">
+              <a:rPr lang="en-US" sz="750">
                 <a:solidFill>
                   <a:srgbClr val="5A6B7D"/>
                 </a:solidFill>
@@ -19164,7 +19428,7 @@
               </a:rPr>
               <a:t>CNAME → AFD</a:t>
             </a:r>
-            <a:endParaRPr lang="en-US" sz="750" dirty="0"/>
+            <a:endParaRPr lang="en-US" sz="750"/>
           </a:p>
         </p:txBody>
       </p:sp>
@@ -19258,7 +19522,7 @@
               <a:buNone/>
             </a:pPr>
             <a:r>
-              <a:rPr lang="en-US" sz="850" b="1" dirty="0">
+              <a:rPr lang="en-US" sz="850" b="1">
                 <a:solidFill>
                   <a:srgbClr val="1B6FB3"/>
                 </a:solidFill>
@@ -19268,7 +19532,7 @@
               </a:rPr>
               <a:t>FRONT DOOR</a:t>
             </a:r>
-            <a:endParaRPr lang="en-US" sz="850" dirty="0"/>
+            <a:endParaRPr lang="en-US" sz="850"/>
           </a:p>
         </p:txBody>
       </p:sp>
@@ -19300,7 +19564,7 @@
               <a:buNone/>
             </a:pPr>
             <a:r>
-              <a:rPr lang="en-US" sz="750" dirty="0">
+              <a:rPr lang="en-US" sz="750">
                 <a:solidFill>
                   <a:srgbClr val="5A6B7D"/>
                 </a:solidFill>
@@ -19310,7 +19574,7 @@
               </a:rPr>
               <a:t>WAF · TLS · DDoS</a:t>
             </a:r>
-            <a:endParaRPr lang="en-US" sz="750" dirty="0"/>
+            <a:endParaRPr lang="en-US" sz="750"/>
           </a:p>
         </p:txBody>
       </p:sp>
@@ -19404,7 +19668,7 @@
               <a:buNone/>
             </a:pPr>
             <a:r>
-              <a:rPr lang="en-US" sz="850" b="1" dirty="0">
+              <a:rPr lang="en-US" sz="850" b="1">
                 <a:solidFill>
                   <a:srgbClr val="1B2836"/>
                 </a:solidFill>
@@ -19414,7 +19678,7 @@
               </a:rPr>
               <a:t>PRIVATE LINK</a:t>
             </a:r>
-            <a:endParaRPr lang="en-US" sz="850" dirty="0"/>
+            <a:endParaRPr lang="en-US" sz="850"/>
           </a:p>
         </p:txBody>
       </p:sp>
@@ -19446,7 +19710,7 @@
               <a:buNone/>
             </a:pPr>
             <a:r>
-              <a:rPr lang="en-US" sz="750" dirty="0">
+              <a:rPr lang="en-US" sz="750">
                 <a:solidFill>
                   <a:srgbClr val="5A6B7D"/>
                 </a:solidFill>
@@ -19456,7 +19720,7 @@
               </a:rPr>
               <a:t>no public inbound</a:t>
             </a:r>
-            <a:endParaRPr lang="en-US" sz="750" dirty="0"/>
+            <a:endParaRPr lang="en-US" sz="750"/>
           </a:p>
         </p:txBody>
       </p:sp>
@@ -19550,7 +19814,7 @@
               <a:buNone/>
             </a:pPr>
             <a:r>
-              <a:rPr lang="en-US" sz="850" b="1" dirty="0">
+              <a:rPr lang="en-US" sz="850" b="1">
                 <a:solidFill>
                   <a:srgbClr val="0E3F6E"/>
                 </a:solidFill>
@@ -19560,7 +19824,7 @@
               </a:rPr>
               <a:t>APIM PREMIUM</a:t>
             </a:r>
-            <a:endParaRPr lang="en-US" sz="850" dirty="0"/>
+            <a:endParaRPr lang="en-US" sz="850"/>
           </a:p>
         </p:txBody>
       </p:sp>
@@ -19592,7 +19856,7 @@
               <a:buNone/>
             </a:pPr>
             <a:r>
-              <a:rPr lang="en-US" sz="750" dirty="0">
+              <a:rPr lang="en-US" sz="750">
                 <a:solidFill>
                   <a:srgbClr val="5A6B7D"/>
                 </a:solidFill>
@@ -19602,7 +19866,7 @@
               </a:rPr>
               <a:t>authN · quota · schema</a:t>
             </a:r>
-            <a:endParaRPr lang="en-US" sz="750" dirty="0"/>
+            <a:endParaRPr lang="en-US" sz="750"/>
           </a:p>
         </p:txBody>
       </p:sp>
@@ -19696,7 +19960,7 @@
               <a:buNone/>
             </a:pPr>
             <a:r>
-              <a:rPr lang="en-US" sz="850" b="1" dirty="0">
+              <a:rPr lang="en-US" sz="850" b="1">
                 <a:solidFill>
                   <a:srgbClr val="1B2836"/>
                 </a:solidFill>
@@ -19706,7 +19970,7 @@
               </a:rPr>
               <a:t>BACKEND</a:t>
             </a:r>
-            <a:endParaRPr lang="en-US" sz="850" dirty="0"/>
+            <a:endParaRPr lang="en-US" sz="850"/>
           </a:p>
         </p:txBody>
       </p:sp>
@@ -19738,7 +20002,7 @@
               <a:buNone/>
             </a:pPr>
             <a:r>
-              <a:rPr lang="en-US" sz="750" dirty="0">
+              <a:rPr lang="en-US" sz="750">
                 <a:solidFill>
                   <a:srgbClr val="5A6B7D"/>
                 </a:solidFill>
@@ -19748,7 +20012,7 @@
               </a:rPr>
               <a:t>private endpoint</a:t>
             </a:r>
-            <a:endParaRPr lang="en-US" sz="750" dirty="0"/>
+            <a:endParaRPr lang="en-US" sz="750"/>
           </a:p>
         </p:txBody>
       </p:sp>
@@ -19811,7 +20075,7 @@
               <a:buNone/>
             </a:pPr>
             <a:r>
-              <a:rPr lang="en-US" sz="1250" b="1" dirty="0">
+              <a:rPr lang="en-US" sz="1250" b="1">
                 <a:solidFill>
                   <a:srgbClr val="0E3F6E"/>
                 </a:solidFill>
@@ -19821,7 +20085,7 @@
               </a:rPr>
               <a:t>Front Door Premium</a:t>
             </a:r>
-            <a:endParaRPr lang="en-US" sz="1250" dirty="0"/>
+            <a:endParaRPr lang="en-US" sz="1250"/>
           </a:p>
         </p:txBody>
       </p:sp>
@@ -19884,7 +20148,7 @@
               <a:buNone/>
             </a:pPr>
             <a:r>
-              <a:rPr lang="en-US" sz="850" b="1" kern="0" spc="80" dirty="0">
+              <a:rPr lang="en-US" sz="850" b="1" kern="0" spc="80">
                 <a:solidFill>
                   <a:srgbClr val="FFFFFF"/>
                 </a:solidFill>
@@ -19894,7 +20158,7 @@
               </a:rPr>
               <a:t>PRIMARY WAF</a:t>
             </a:r>
-            <a:endParaRPr lang="en-US" sz="850" dirty="0"/>
+            <a:endParaRPr lang="en-US" sz="850"/>
           </a:p>
         </p:txBody>
       </p:sp>
@@ -19927,7 +20191,7 @@
               <a:buChar char="•"/>
             </a:pPr>
             <a:r>
-              <a:rPr lang="en-GB" sz="800" dirty="0">
+              <a:rPr lang="en-GB" sz="800">
                 <a:solidFill>
                   <a:srgbClr val="1B2836"/>
                 </a:solidFill>
@@ -19947,7 +20211,7 @@
               <a:buChar char="•"/>
             </a:pPr>
             <a:r>
-              <a:rPr lang="en-GB" sz="800" dirty="0">
+              <a:rPr lang="en-GB" sz="800">
                 <a:solidFill>
                   <a:srgbClr val="1B2836"/>
                 </a:solidFill>
@@ -19967,7 +20231,7 @@
               <a:buChar char="•"/>
             </a:pPr>
             <a:r>
-              <a:rPr lang="en-GB" sz="800" dirty="0">
+              <a:rPr lang="en-GB" sz="800">
                 <a:solidFill>
                   <a:srgbClr val="1B2836"/>
                 </a:solidFill>
@@ -19987,7 +20251,7 @@
               <a:buChar char="•"/>
             </a:pPr>
             <a:r>
-              <a:rPr lang="en-GB" sz="800" dirty="0">
+              <a:rPr lang="en-GB" sz="800">
                 <a:solidFill>
                   <a:srgbClr val="1B2836"/>
                 </a:solidFill>
@@ -20007,7 +20271,7 @@
               <a:buChar char="•"/>
             </a:pPr>
             <a:r>
-              <a:rPr lang="en-GB" sz="800" dirty="0">
+              <a:rPr lang="en-GB" sz="800">
                 <a:solidFill>
                   <a:srgbClr val="1B2836"/>
                 </a:solidFill>
@@ -20017,7 +20281,7 @@
               </a:rPr>
               <a:t>Centralised security and access controls before APIM.</a:t>
             </a:r>
-            <a:endParaRPr lang="en-US" sz="800" dirty="0"/>
+            <a:endParaRPr lang="en-US" sz="800"/>
           </a:p>
         </p:txBody>
       </p:sp>
@@ -20080,7 +20344,7 @@
               <a:buNone/>
             </a:pPr>
             <a:r>
-              <a:rPr lang="en-US" sz="1250" b="1" dirty="0">
+              <a:rPr lang="en-US" sz="1250" b="1">
                 <a:solidFill>
                   <a:srgbClr val="0E3F6E"/>
                 </a:solidFill>
@@ -20090,7 +20354,7 @@
               </a:rPr>
               <a:t>APIM Premium — Internal</a:t>
             </a:r>
-            <a:endParaRPr lang="en-US" sz="1250" dirty="0"/>
+            <a:endParaRPr lang="en-US" sz="1250"/>
           </a:p>
         </p:txBody>
       </p:sp>
@@ -20153,7 +20417,7 @@
               <a:buNone/>
             </a:pPr>
             <a:r>
-              <a:rPr lang="en-US" sz="850" b="1" kern="0" spc="80" dirty="0">
+              <a:rPr lang="en-US" sz="850" b="1" kern="0" spc="80">
                 <a:solidFill>
                   <a:srgbClr val="FFFFFF"/>
                 </a:solidFill>
@@ -20163,7 +20427,7 @@
               </a:rPr>
               <a:t>ALWAYS</a:t>
             </a:r>
-            <a:endParaRPr lang="en-US" sz="850" dirty="0"/>
+            <a:endParaRPr lang="en-US" sz="850"/>
           </a:p>
         </p:txBody>
       </p:sp>
@@ -20196,7 +20460,7 @@
               <a:buChar char="•"/>
             </a:pPr>
             <a:r>
-              <a:rPr lang="en-GB" sz="800" dirty="0">
+              <a:rPr lang="en-GB" sz="800">
                 <a:solidFill>
                   <a:srgbClr val="1B2836"/>
                 </a:solidFill>
@@ -20216,7 +20480,7 @@
               <a:buChar char="•"/>
             </a:pPr>
             <a:r>
-              <a:rPr lang="en-GB" sz="800" dirty="0">
+              <a:rPr lang="en-GB" sz="800">
                 <a:solidFill>
                   <a:srgbClr val="1B2836"/>
                 </a:solidFill>
@@ -20236,7 +20500,7 @@
               <a:buChar char="•"/>
             </a:pPr>
             <a:r>
-              <a:rPr lang="en-GB" sz="800" dirty="0">
+              <a:rPr lang="en-GB" sz="800">
                 <a:solidFill>
                   <a:srgbClr val="1B2836"/>
                 </a:solidFill>
@@ -20256,7 +20520,7 @@
               <a:buChar char="•"/>
             </a:pPr>
             <a:r>
-              <a:rPr lang="en-GB" sz="800" dirty="0">
+              <a:rPr lang="en-GB" sz="800">
                 <a:solidFill>
                   <a:srgbClr val="1B2836"/>
                 </a:solidFill>
@@ -20267,7 +20531,7 @@
               <a:t>Routes traffic securely to backend systems over private connectivity</a:t>
             </a:r>
             <a:r>
-              <a:rPr lang="en-GB" sz="1000" dirty="0">
+              <a:rPr lang="en-GB" sz="1000">
                 <a:solidFill>
                   <a:srgbClr val="1B2836"/>
                 </a:solidFill>
@@ -20277,7 +20541,7 @@
               </a:rPr>
               <a:t>.</a:t>
             </a:r>
-            <a:endParaRPr lang="en-US" sz="1000" dirty="0"/>
+            <a:endParaRPr lang="en-US" sz="1000"/>
           </a:p>
         </p:txBody>
       </p:sp>
@@ -20340,7 +20604,7 @@
               <a:buNone/>
             </a:pPr>
             <a:r>
-              <a:rPr lang="en-US" sz="950" b="1" kern="0" spc="120" dirty="0">
+              <a:rPr lang="en-US" sz="950" b="1" kern="0" spc="120">
                 <a:solidFill>
                   <a:srgbClr val="1B6FB3"/>
                 </a:solidFill>
@@ -20350,7 +20614,7 @@
               </a:rPr>
               <a:t>WAF SUFFICIENCY</a:t>
             </a:r>
-            <a:endParaRPr lang="en-US" sz="950" dirty="0"/>
+            <a:endParaRPr lang="en-US" sz="950"/>
           </a:p>
         </p:txBody>
       </p:sp>
@@ -20383,7 +20647,7 @@
               <a:buChar char="•"/>
             </a:pPr>
             <a:r>
-              <a:rPr lang="en-GB" sz="800" dirty="0">
+              <a:rPr lang="en-GB" sz="800">
                 <a:solidFill>
                   <a:srgbClr val="1B2836"/>
                 </a:solidFill>
@@ -20403,7 +20667,7 @@
               <a:buChar char="•"/>
             </a:pPr>
             <a:r>
-              <a:rPr lang="en-GB" sz="800" dirty="0">
+              <a:rPr lang="en-GB" sz="800">
                 <a:solidFill>
                   <a:srgbClr val="1B2836"/>
                 </a:solidFill>
@@ -20423,7 +20687,7 @@
               <a:buChar char="•"/>
             </a:pPr>
             <a:r>
-              <a:rPr lang="en-GB" sz="800" dirty="0">
+              <a:rPr lang="en-GB" sz="800">
                 <a:solidFill>
                   <a:srgbClr val="1B2836"/>
                 </a:solidFill>
@@ -20443,7 +20707,7 @@
               <a:buChar char="•"/>
             </a:pPr>
             <a:r>
-              <a:rPr lang="en-GB" sz="800" dirty="0">
+              <a:rPr lang="en-GB" sz="800">
                 <a:solidFill>
                   <a:srgbClr val="1B2836"/>
                 </a:solidFill>
@@ -20463,7 +20727,7 @@
               <a:buChar char="•"/>
             </a:pPr>
             <a:r>
-              <a:rPr lang="en-GB" sz="800" dirty="0">
+              <a:rPr lang="en-GB" sz="800">
                 <a:solidFill>
                   <a:srgbClr val="1B2836"/>
                 </a:solidFill>
@@ -20473,7 +20737,7 @@
               </a:rPr>
               <a:t>Enforces consistent security controls across all APIs.</a:t>
             </a:r>
-            <a:endParaRPr lang="en-US" sz="800" dirty="0"/>
+            <a:endParaRPr lang="en-US" sz="800"/>
           </a:p>
         </p:txBody>
       </p:sp>
@@ -20536,7 +20800,7 @@
               <a:buNone/>
             </a:pPr>
             <a:r>
-              <a:rPr lang="en-US" sz="1100" b="1" kern="0" spc="100" dirty="0">
+              <a:rPr lang="en-US" sz="1100" b="1" kern="0" spc="100">
                 <a:solidFill>
                   <a:srgbClr val="1B6FB3"/>
                 </a:solidFill>
@@ -20547,7 +20811,7 @@
               <a:t>INGRESS DECISION  </a:t>
             </a:r>
             <a:r>
-              <a:rPr lang="en-US" sz="1100" dirty="0">
+              <a:rPr lang="en-US" sz="1100">
                 <a:solidFill>
                   <a:srgbClr val="1B2836"/>
                 </a:solidFill>
@@ -20557,7 +20821,7 @@
               </a:rPr>
               <a:t>Front Door Premium WAF covers OWASP top-10 and bot protection for external APIs. </a:t>
             </a:r>
-            <a:endParaRPr lang="en-US" sz="1100" dirty="0"/>
+            <a:endParaRPr lang="en-US" sz="1100"/>
           </a:p>
         </p:txBody>
       </p:sp>
@@ -20643,7 +20907,7 @@
               <a:buNone/>
             </a:pPr>
             <a:r>
-              <a:rPr lang="en-US" sz="1700" b="1" dirty="0">
+              <a:rPr lang="en-US" sz="1700" b="1">
                 <a:solidFill>
                   <a:srgbClr val="FFFFFF"/>
                 </a:solidFill>
@@ -20653,7 +20917,7 @@
               </a:rPr>
               <a:t>4</a:t>
             </a:r>
-            <a:endParaRPr lang="en-US" sz="1700" dirty="0"/>
+            <a:endParaRPr lang="en-US" sz="1700"/>
           </a:p>
         </p:txBody>
       </p:sp>
@@ -20682,7 +20946,7 @@
               <a:buNone/>
             </a:pPr>
             <a:r>
-              <a:rPr lang="en-US" sz="950" b="1" kern="0" spc="200" dirty="0">
+              <a:rPr lang="en-US" sz="950" b="1" kern="0" spc="200">
                 <a:solidFill>
                   <a:srgbClr val="1B6FB3"/>
                 </a:solidFill>
@@ -20692,7 +20956,7 @@
               </a:rPr>
               <a:t>EXTERNAL API EGRESS</a:t>
             </a:r>
-            <a:endParaRPr lang="en-US" sz="950" dirty="0"/>
+            <a:endParaRPr lang="en-US" sz="950"/>
           </a:p>
         </p:txBody>
       </p:sp>
@@ -20721,7 +20985,7 @@
               <a:buNone/>
             </a:pPr>
             <a:r>
-              <a:rPr lang="en-US" sz="2800" b="1" dirty="0">
+              <a:rPr lang="en-US" sz="2800" b="1">
                 <a:solidFill>
                   <a:srgbClr val="1B2836"/>
                 </a:solidFill>
@@ -20731,7 +20995,7 @@
               </a:rPr>
               <a:t>Egress via Palo Alto</a:t>
             </a:r>
-            <a:endParaRPr lang="en-US" sz="2800" dirty="0"/>
+            <a:endParaRPr lang="en-US" sz="2800"/>
           </a:p>
         </p:txBody>
       </p:sp>
@@ -20760,7 +21024,7 @@
               <a:buNone/>
             </a:pPr>
             <a:r>
-              <a:rPr lang="en-US" sz="1200" dirty="0">
+              <a:rPr lang="en-US" sz="1200">
                 <a:solidFill>
                   <a:srgbClr val="5A6B7D"/>
                 </a:solidFill>
@@ -20770,7 +21034,7 @@
               </a:rPr>
               <a:t>Routing intent forces internet and private traffic through the NGFW; Azure PaaS stays on private endpoints.</a:t>
             </a:r>
-            <a:endParaRPr lang="en-US" sz="1200" dirty="0"/>
+            <a:endParaRPr lang="en-US" sz="1200"/>
           </a:p>
         </p:txBody>
       </p:sp>
@@ -20833,7 +21097,7 @@
               <a:buNone/>
             </a:pPr>
             <a:r>
-              <a:rPr lang="en-US" sz="900" b="1" kern="0" spc="120" dirty="0">
+              <a:rPr lang="en-US" sz="900" b="1" kern="0" spc="120">
                 <a:solidFill>
                   <a:srgbClr val="1B6FB3"/>
                 </a:solidFill>
@@ -20843,7 +21107,7 @@
               </a:rPr>
               <a:t>OUTBOUND REQUEST FLOW</a:t>
             </a:r>
-            <a:endParaRPr lang="en-US" sz="900" dirty="0"/>
+            <a:endParaRPr lang="en-US" sz="900"/>
           </a:p>
         </p:txBody>
       </p:sp>
@@ -20906,7 +21170,7 @@
               <a:buNone/>
             </a:pPr>
             <a:r>
-              <a:rPr lang="en-US" sz="850" b="1" dirty="0">
+              <a:rPr lang="en-US" sz="850" b="1">
                 <a:solidFill>
                   <a:srgbClr val="1B2836"/>
                 </a:solidFill>
@@ -20916,7 +21180,7 @@
               </a:rPr>
               <a:t>APIM GATEWAY</a:t>
             </a:r>
-            <a:endParaRPr lang="en-US" sz="850" dirty="0"/>
+            <a:endParaRPr lang="en-US" sz="850"/>
           </a:p>
         </p:txBody>
       </p:sp>
@@ -20948,7 +21212,7 @@
               <a:buNone/>
             </a:pPr>
             <a:r>
-              <a:rPr lang="en-US" sz="750" dirty="0">
+              <a:rPr lang="en-US" sz="750">
                 <a:solidFill>
                   <a:srgbClr val="5A6B7D"/>
                 </a:solidFill>
@@ -20958,7 +21222,7 @@
               </a:rPr>
               <a:t>spoke subnet</a:t>
             </a:r>
-            <a:endParaRPr lang="en-US" sz="750" dirty="0"/>
+            <a:endParaRPr lang="en-US" sz="750"/>
           </a:p>
         </p:txBody>
       </p:sp>
@@ -21052,7 +21316,7 @@
               <a:buNone/>
             </a:pPr>
             <a:r>
-              <a:rPr lang="en-US" sz="850" b="1" dirty="0">
+              <a:rPr lang="en-US" sz="850" b="1">
                 <a:solidFill>
                   <a:srgbClr val="1B2836"/>
                 </a:solidFill>
@@ -21062,7 +21326,7 @@
               </a:rPr>
               <a:t>vWAN HUB</a:t>
             </a:r>
-            <a:endParaRPr lang="en-US" sz="850" dirty="0"/>
+            <a:endParaRPr lang="en-US" sz="850"/>
           </a:p>
         </p:txBody>
       </p:sp>
@@ -21094,7 +21358,7 @@
               <a:buNone/>
             </a:pPr>
             <a:r>
-              <a:rPr lang="en-US" sz="750" dirty="0">
+              <a:rPr lang="en-US" sz="750">
                 <a:solidFill>
                   <a:srgbClr val="5A6B7D"/>
                 </a:solidFill>
@@ -21104,7 +21368,7 @@
               </a:rPr>
               <a:t>routing intent</a:t>
             </a:r>
-            <a:endParaRPr lang="en-US" sz="750" dirty="0"/>
+            <a:endParaRPr lang="en-US" sz="750"/>
           </a:p>
         </p:txBody>
       </p:sp>
@@ -21167,7 +21431,7 @@
               <a:buNone/>
             </a:pPr>
             <a:r>
-              <a:rPr lang="en-US" sz="850" b="1" dirty="0">
+              <a:rPr lang="en-US" sz="850" b="1">
                 <a:solidFill>
                   <a:srgbClr val="1B6FB3"/>
                 </a:solidFill>
@@ -21177,7 +21441,7 @@
               </a:rPr>
               <a:t>PALO ALTO NGFW</a:t>
             </a:r>
-            <a:endParaRPr lang="en-US" sz="850" dirty="0"/>
+            <a:endParaRPr lang="en-US" sz="850"/>
           </a:p>
         </p:txBody>
       </p:sp>
@@ -21209,7 +21473,7 @@
               <a:buNone/>
             </a:pPr>
             <a:r>
-              <a:rPr lang="en-US" sz="750" dirty="0">
+              <a:rPr lang="en-US" sz="750">
                 <a:solidFill>
                   <a:srgbClr val="5A6B7D"/>
                 </a:solidFill>
@@ -21219,7 +21483,7 @@
               </a:rPr>
               <a:t>TLS proxy · FQDN</a:t>
             </a:r>
-            <a:endParaRPr lang="en-US" sz="750" dirty="0"/>
+            <a:endParaRPr lang="en-US" sz="750"/>
           </a:p>
         </p:txBody>
       </p:sp>
@@ -21313,7 +21577,7 @@
               <a:buNone/>
             </a:pPr>
             <a:r>
-              <a:rPr lang="en-US" sz="850" b="1" dirty="0">
+              <a:rPr lang="en-US" sz="850" b="1">
                 <a:solidFill>
                   <a:srgbClr val="1B2836"/>
                 </a:solidFill>
@@ -21323,7 +21587,7 @@
               </a:rPr>
               <a:t>SNAT</a:t>
             </a:r>
-            <a:endParaRPr lang="en-US" sz="850" dirty="0"/>
+            <a:endParaRPr lang="en-US" sz="850"/>
           </a:p>
         </p:txBody>
       </p:sp>
@@ -21355,7 +21619,7 @@
               <a:buNone/>
             </a:pPr>
             <a:r>
-              <a:rPr lang="en-US" sz="750" dirty="0">
+              <a:rPr lang="en-US" sz="750">
                 <a:solidFill>
                   <a:srgbClr val="5A6B7D"/>
                 </a:solidFill>
@@ -21365,7 +21629,7 @@
               </a:rPr>
               <a:t>fixed egress IP</a:t>
             </a:r>
-            <a:endParaRPr lang="en-US" sz="750" dirty="0"/>
+            <a:endParaRPr lang="en-US" sz="750"/>
           </a:p>
         </p:txBody>
       </p:sp>
@@ -21459,7 +21723,7 @@
               <a:buNone/>
             </a:pPr>
             <a:r>
-              <a:rPr lang="en-US" sz="850" b="1" dirty="0">
+              <a:rPr lang="en-US" sz="850" b="1">
                 <a:solidFill>
                   <a:srgbClr val="1B2836"/>
                 </a:solidFill>
@@ -21467,9 +21731,9 @@
                 <a:ea typeface="Calibri" pitchFamily="34" charset="-122"/>
                 <a:cs typeface="Calibri" pitchFamily="34" charset="-120"/>
               </a:rPr>
-              <a:t>PARTNER / Third Party</a:t>
-            </a:r>
-            <a:endParaRPr lang="en-US" sz="850" dirty="0"/>
+              <a:t>PARTNER / SaaS</a:t>
+            </a:r>
+            <a:endParaRPr lang="en-US" sz="850"/>
           </a:p>
         </p:txBody>
       </p:sp>
@@ -21501,7 +21765,7 @@
               <a:buNone/>
             </a:pPr>
             <a:r>
-              <a:rPr lang="en-US" sz="750" dirty="0">
+              <a:rPr lang="en-US" sz="750">
                 <a:solidFill>
                   <a:srgbClr val="5A6B7D"/>
                 </a:solidFill>
@@ -21511,7 +21775,7 @@
               </a:rPr>
               <a:t>allow-listed</a:t>
             </a:r>
-            <a:endParaRPr lang="en-US" sz="750" dirty="0"/>
+            <a:endParaRPr lang="en-US" sz="750"/>
           </a:p>
         </p:txBody>
       </p:sp>
@@ -21574,7 +21838,7 @@
               <a:buNone/>
             </a:pPr>
             <a:r>
-              <a:rPr lang="en-US" sz="900" b="1" kern="0" spc="120" dirty="0">
+              <a:rPr lang="en-US" sz="900" b="1" kern="0" spc="120">
                 <a:solidFill>
                   <a:srgbClr val="5A6B7D"/>
                 </a:solidFill>
@@ -21584,7 +21848,7 @@
               </a:rPr>
               <a:t>SPOKE — APIM VNET</a:t>
             </a:r>
-            <a:endParaRPr lang="en-US" sz="900" dirty="0"/>
+            <a:endParaRPr lang="en-US" sz="900"/>
           </a:p>
         </p:txBody>
       </p:sp>
@@ -21613,7 +21877,7 @@
               <a:buNone/>
             </a:pPr>
             <a:r>
-              <a:rPr lang="en-US" sz="1200" b="1" dirty="0">
+              <a:rPr lang="en-US" sz="1200" b="1">
                 <a:solidFill>
                   <a:srgbClr val="1B2836"/>
                 </a:solidFill>
@@ -21623,7 +21887,7 @@
               </a:rPr>
               <a:t>Injected Gateway subnet</a:t>
             </a:r>
-            <a:endParaRPr lang="en-US" sz="1200" dirty="0"/>
+            <a:endParaRPr lang="en-US" sz="1200"/>
           </a:p>
         </p:txBody>
       </p:sp>
@@ -21656,7 +21920,7 @@
               <a:buChar char="•"/>
             </a:pPr>
             <a:r>
-              <a:rPr lang="en-US" sz="1000" dirty="0">
+              <a:rPr lang="en-US" sz="1000">
                 <a:solidFill>
                   <a:srgbClr val="1B2836"/>
                 </a:solidFill>
@@ -21666,7 +21930,7 @@
               </a:rPr>
               <a:t>No public IP, no NAT gateway</a:t>
             </a:r>
-            <a:endParaRPr lang="en-US" sz="1000" dirty="0"/>
+            <a:endParaRPr lang="en-US" sz="1000"/>
           </a:p>
           <a:p>
             <a:pPr marL="342900" indent="-342900">
@@ -21677,7 +21941,7 @@
               <a:buChar char="•"/>
             </a:pPr>
             <a:r>
-              <a:rPr lang="en-US" sz="1000" dirty="0">
+              <a:rPr lang="en-US" sz="1000">
                 <a:solidFill>
                   <a:srgbClr val="1B2836"/>
                 </a:solidFill>
@@ -21687,7 +21951,7 @@
               </a:rPr>
               <a:t>Service endpoints off - private endpoints only</a:t>
             </a:r>
-            <a:endParaRPr lang="en-US" sz="1000" dirty="0"/>
+            <a:endParaRPr lang="en-US" sz="1000"/>
           </a:p>
         </p:txBody>
       </p:sp>
@@ -21750,7 +22014,7 @@
               <a:buNone/>
             </a:pPr>
             <a:r>
-              <a:rPr lang="en-US" sz="900" b="1" kern="0" spc="120" dirty="0">
+              <a:rPr lang="en-US" sz="900" b="1" kern="0" spc="120">
                 <a:solidFill>
                   <a:srgbClr val="1B6FB3"/>
                 </a:solidFill>
@@ -21760,7 +22024,7 @@
               </a:rPr>
               <a:t>VIRTUAL WAN SECURED HUB</a:t>
             </a:r>
-            <a:endParaRPr lang="en-US" sz="900" dirty="0"/>
+            <a:endParaRPr lang="en-US" sz="900"/>
           </a:p>
         </p:txBody>
       </p:sp>
@@ -21789,7 +22053,7 @@
               <a:buNone/>
             </a:pPr>
             <a:r>
-              <a:rPr lang="en-US" sz="1200" b="1" dirty="0">
+              <a:rPr lang="en-US" sz="1200" b="1">
                 <a:solidFill>
                   <a:srgbClr val="1B2836"/>
                 </a:solidFill>
@@ -21799,7 +22063,7 @@
               </a:rPr>
               <a:t>Routing intent: Internet + Private</a:t>
             </a:r>
-            <a:endParaRPr lang="en-US" sz="1200" dirty="0"/>
+            <a:endParaRPr lang="en-US" sz="1200"/>
           </a:p>
         </p:txBody>
       </p:sp>
@@ -21832,7 +22096,7 @@
               <a:buChar char="•"/>
             </a:pPr>
             <a:r>
-              <a:rPr lang="en-US" sz="1000" dirty="0">
+              <a:rPr lang="en-US" sz="1000">
                 <a:solidFill>
                   <a:srgbClr val="1B2836"/>
                 </a:solidFill>
@@ -21842,7 +22106,7 @@
               </a:rPr>
               <a:t>Palo Alto Cloud NGFW (SaaS) or VM-Series in the hub</a:t>
             </a:r>
-            <a:endParaRPr lang="en-US" sz="1000" dirty="0"/>
+            <a:endParaRPr lang="en-US" sz="1000"/>
           </a:p>
           <a:p>
             <a:pPr marL="342900" indent="-342900">
@@ -21853,7 +22117,7 @@
               <a:buChar char="•"/>
             </a:pPr>
             <a:r>
-              <a:rPr lang="en-US" sz="1000" dirty="0">
+              <a:rPr lang="en-US" sz="1000">
                 <a:solidFill>
                   <a:srgbClr val="1B2836"/>
                 </a:solidFill>
@@ -21863,7 +22127,7 @@
               </a:rPr>
               <a:t>TLS forward proxy, FQDN allow-list</a:t>
             </a:r>
-            <a:endParaRPr lang="en-US" sz="1000" dirty="0"/>
+            <a:endParaRPr lang="en-US" sz="1000"/>
           </a:p>
           <a:p>
             <a:pPr marL="342900" indent="-342900">
@@ -21874,7 +22138,7 @@
               <a:buChar char="•"/>
             </a:pPr>
             <a:r>
-              <a:rPr lang="en-US" sz="1000" dirty="0">
+              <a:rPr lang="en-US" sz="1000">
                 <a:solidFill>
                   <a:srgbClr val="1B2836"/>
                 </a:solidFill>
@@ -21884,7 +22148,7 @@
               </a:rPr>
               <a:t>One routing policy</a:t>
             </a:r>
-            <a:endParaRPr lang="en-US" sz="1000" dirty="0"/>
+            <a:endParaRPr lang="en-US" sz="1000"/>
           </a:p>
         </p:txBody>
       </p:sp>
@@ -21947,7 +22211,7 @@
               <a:buNone/>
             </a:pPr>
             <a:r>
-              <a:rPr lang="en-US" sz="900" b="1" kern="0" spc="120" dirty="0">
+              <a:rPr lang="en-US" sz="900" b="1" kern="0" spc="120">
                 <a:solidFill>
                   <a:srgbClr val="0E3F6E"/>
                 </a:solidFill>
@@ -21957,7 +22221,7 @@
               </a:rPr>
               <a:t>DESTINATIONS</a:t>
             </a:r>
-            <a:endParaRPr lang="en-US" sz="900" dirty="0"/>
+            <a:endParaRPr lang="en-US" sz="900"/>
           </a:p>
         </p:txBody>
       </p:sp>
@@ -21986,7 +22250,7 @@
               <a:buNone/>
             </a:pPr>
             <a:r>
-              <a:rPr lang="en-US" sz="1200" b="1" dirty="0">
+              <a:rPr lang="en-US" sz="1200" b="1">
                 <a:solidFill>
                   <a:srgbClr val="1B2836"/>
                 </a:solidFill>
@@ -21996,7 +22260,7 @@
               </a:rPr>
               <a:t>Deny by default, allow by exception</a:t>
             </a:r>
-            <a:endParaRPr lang="en-US" sz="1200" dirty="0"/>
+            <a:endParaRPr lang="en-US" sz="1200"/>
           </a:p>
         </p:txBody>
       </p:sp>
@@ -22029,7 +22293,7 @@
               <a:buChar char="•"/>
             </a:pPr>
             <a:r>
-              <a:rPr lang="en-US" sz="1000" dirty="0">
+              <a:rPr lang="en-US" sz="1000">
                 <a:solidFill>
                   <a:srgbClr val="1B2836"/>
                 </a:solidFill>
@@ -22039,7 +22303,7 @@
               </a:rPr>
               <a:t>Partner / SaaS APIs over allow-listed FQDNs</a:t>
             </a:r>
-            <a:endParaRPr lang="en-US" sz="1000" dirty="0"/>
+            <a:endParaRPr lang="en-US" sz="1000"/>
           </a:p>
           <a:p>
             <a:pPr marL="342900" indent="-342900">
@@ -22050,7 +22314,7 @@
               <a:buChar char="•"/>
             </a:pPr>
             <a:r>
-              <a:rPr lang="en-US" sz="1000" dirty="0">
+              <a:rPr lang="en-US" sz="1000">
                 <a:solidFill>
                   <a:srgbClr val="1B2836"/>
                 </a:solidFill>
@@ -22060,7 +22324,7 @@
               </a:rPr>
               <a:t>On-premises systems via ExpressRoute</a:t>
             </a:r>
-            <a:endParaRPr lang="en-US" sz="1000" dirty="0"/>
+            <a:endParaRPr lang="en-US" sz="1000"/>
           </a:p>
           <a:p>
             <a:pPr marL="342900" indent="-342900">
@@ -22071,7 +22335,7 @@
               <a:buChar char="•"/>
             </a:pPr>
             <a:r>
-              <a:rPr lang="en-US" sz="1000" dirty="0">
+              <a:rPr lang="en-US" sz="1000">
                 <a:solidFill>
                   <a:srgbClr val="1B2836"/>
                 </a:solidFill>
@@ -22081,7 +22345,7 @@
               </a:rPr>
               <a:t>Azure PaaS via Private Endpoint</a:t>
             </a:r>
-            <a:endParaRPr lang="en-US" sz="1000" dirty="0"/>
+            <a:endParaRPr lang="en-US" sz="1000"/>
           </a:p>
         </p:txBody>
       </p:sp>
@@ -22144,7 +22408,7 @@
               <a:buNone/>
             </a:pPr>
             <a:r>
-              <a:rPr lang="en-US" sz="950" b="1" kern="0" spc="120" dirty="0">
+              <a:rPr lang="en-US" sz="950" b="1" kern="0" spc="120">
                 <a:solidFill>
                   <a:srgbClr val="1B6FB3"/>
                 </a:solidFill>
@@ -22154,7 +22418,7 @@
               </a:rPr>
               <a:t>DNS DESIGN</a:t>
             </a:r>
-            <a:endParaRPr lang="en-US" sz="950" dirty="0"/>
+            <a:endParaRPr lang="en-US" sz="950"/>
           </a:p>
         </p:txBody>
       </p:sp>
@@ -22187,7 +22451,7 @@
               <a:buChar char="•"/>
             </a:pPr>
             <a:r>
-              <a:rPr lang="en-GB" sz="1050" dirty="0">
+              <a:rPr lang="en-GB" sz="1050">
                 <a:solidFill>
                   <a:srgbClr val="1B2836"/>
                 </a:solidFill>
@@ -22207,7 +22471,7 @@
               <a:buChar char="•"/>
             </a:pPr>
             <a:r>
-              <a:rPr lang="en-GB" sz="1050" dirty="0">
+              <a:rPr lang="en-GB" sz="1050">
                 <a:solidFill>
                   <a:srgbClr val="1B2836"/>
                 </a:solidFill>
@@ -22227,7 +22491,7 @@
               <a:buChar char="•"/>
             </a:pPr>
             <a:r>
-              <a:rPr lang="en-GB" sz="1050" dirty="0">
+              <a:rPr lang="en-GB" sz="1050">
                 <a:solidFill>
                   <a:srgbClr val="1B2836"/>
                 </a:solidFill>
@@ -22237,7 +22501,7 @@
               </a:rPr>
               <a:t>Internal users resolve the API endpoint to the private APIM address.</a:t>
             </a:r>
-            <a:endParaRPr lang="en-US" sz="1050" dirty="0"/>
+            <a:endParaRPr lang="en-US" sz="1050"/>
           </a:p>
         </p:txBody>
       </p:sp>
@@ -22300,7 +22564,7 @@
               <a:buNone/>
             </a:pPr>
             <a:r>
-              <a:rPr lang="en-US" sz="950" b="1" kern="0" spc="120" dirty="0">
+              <a:rPr lang="en-US" sz="950" b="1" kern="0" spc="120">
                 <a:solidFill>
                   <a:srgbClr val="1B6FB3"/>
                 </a:solidFill>
@@ -22310,7 +22574,7 @@
               </a:rPr>
               <a:t>EGRESS CONTROLS</a:t>
             </a:r>
-            <a:endParaRPr lang="en-US" sz="950" dirty="0"/>
+            <a:endParaRPr lang="en-US" sz="950"/>
           </a:p>
         </p:txBody>
       </p:sp>
@@ -22343,7 +22607,7 @@
               <a:buChar char="•"/>
             </a:pPr>
             <a:r>
-              <a:rPr lang="en-GB" sz="1050" dirty="0">
+              <a:rPr lang="en-GB" sz="1050">
                 <a:latin typeface="Calibri" panose="020F0502020204030204" pitchFamily="34" charset="0"/>
                 <a:ea typeface="Calibri" panose="020F0502020204030204" pitchFamily="34" charset="0"/>
                 <a:cs typeface="Calibri" panose="020F0502020204030204" pitchFamily="34" charset="0"/>
@@ -22360,7 +22624,7 @@
               <a:buChar char="•"/>
             </a:pPr>
             <a:r>
-              <a:rPr lang="en-GB" sz="1050" dirty="0">
+              <a:rPr lang="en-GB" sz="1050">
                 <a:latin typeface="Calibri" panose="020F0502020204030204" pitchFamily="34" charset="0"/>
                 <a:ea typeface="Calibri" panose="020F0502020204030204" pitchFamily="34" charset="0"/>
                 <a:cs typeface="Calibri" panose="020F0502020204030204" pitchFamily="34" charset="0"/>
@@ -22377,22 +22641,14 @@
               <a:buChar char="•"/>
             </a:pPr>
             <a:r>
-              <a:rPr lang="en-GB" sz="1050" dirty="0">
-                <a:latin typeface="Calibri" panose="020F0502020204030204" pitchFamily="34" charset="0"/>
-                <a:ea typeface="Calibri" panose="020F0502020204030204" pitchFamily="34" charset="0"/>
-                <a:cs typeface="Calibri" panose="020F0502020204030204" pitchFamily="34" charset="0"/>
-              </a:rPr>
-              <a:t>Premium V2 isolates platform dependencies from Chaucer VNet and no firewall </a:t>
-            </a:r>
-            <a:r>
               <a:rPr lang="en-GB" sz="1050">
                 <a:latin typeface="Calibri" panose="020F0502020204030204" pitchFamily="34" charset="0"/>
                 <a:ea typeface="Calibri" panose="020F0502020204030204" pitchFamily="34" charset="0"/>
                 <a:cs typeface="Calibri" panose="020F0502020204030204" pitchFamily="34" charset="0"/>
               </a:rPr>
-              <a:t>exemptions required</a:t>
-            </a:r>
-            <a:endParaRPr lang="en-GB" sz="1000" dirty="0">
+              <a:t>Premium V2 isolates platform dependencies from Chaucer VNet and no firewall exemptions required</a:t>
+            </a:r>
+            <a:endParaRPr lang="en-GB" sz="1000">
               <a:latin typeface="Calibri" panose="020F0502020204030204" pitchFamily="34" charset="0"/>
               <a:ea typeface="Calibri" panose="020F0502020204030204" pitchFamily="34" charset="0"/>
               <a:cs typeface="Calibri" panose="020F0502020204030204" pitchFamily="34" charset="0"/>
@@ -22459,7 +22715,7 @@
               <a:buNone/>
             </a:pPr>
             <a:r>
-              <a:rPr lang="en-US" sz="1100" b="1" kern="0" spc="100" dirty="0">
+              <a:rPr lang="en-US" sz="1100" b="1" kern="0" spc="100">
                 <a:solidFill>
                   <a:srgbClr val="1B6FB3"/>
                 </a:solidFill>
@@ -22470,7 +22726,7 @@
               <a:t>EGRESS DECISION  </a:t>
             </a:r>
             <a:r>
-              <a:rPr lang="en-US" sz="1100" dirty="0">
+              <a:rPr lang="en-US" sz="1100">
                 <a:solidFill>
                   <a:srgbClr val="1B2836"/>
                 </a:solidFill>
@@ -22480,7 +22736,7 @@
               </a:rPr>
               <a:t>Virtual WAN routing intent with Palo Alto in the secured hub.</a:t>
             </a:r>
-            <a:endParaRPr lang="en-US" sz="1100" dirty="0"/>
+            <a:endParaRPr lang="en-US" sz="1100"/>
           </a:p>
         </p:txBody>
       </p:sp>
@@ -22531,7 +22787,7 @@
 
 <file path=ppt/slides/slide6.xml><?xml version="1.0" encoding="utf-8"?>
 <p:sld xmlns:a="http://schemas.openxmlformats.org/drawingml/2006/main" xmlns:r="http://schemas.openxmlformats.org/officeDocument/2006/relationships" xmlns:p="http://schemas.openxmlformats.org/presentationml/2006/main">
-  <p:cSld name="Slide 6">
+  <p:cSld>
     <p:spTree>
       <p:nvGrpSpPr>
         <p:cNvPr id="1" name=""/>
@@ -22603,7 +22859,7 @@
               <a:buNone/>
             </a:pPr>
             <a:r>
-              <a:rPr lang="en-US" sz="1700" b="1" dirty="0">
+              <a:rPr lang="en-US" sz="1700" b="1">
                 <a:solidFill>
                   <a:srgbClr val="FFFFFF"/>
                 </a:solidFill>
@@ -22613,7 +22869,7 @@
               </a:rPr>
               <a:t>5</a:t>
             </a:r>
-            <a:endParaRPr lang="en-US" sz="1700" dirty="0"/>
+            <a:endParaRPr lang="en-US" sz="1700"/>
           </a:p>
         </p:txBody>
       </p:sp>
@@ -22642,7 +22898,7 @@
               <a:buNone/>
             </a:pPr>
             <a:r>
-              <a:rPr lang="en-US" sz="950" b="1" kern="0" spc="200" dirty="0">
+              <a:rPr lang="en-US" sz="950" b="1" kern="0" spc="200">
                 <a:solidFill>
                   <a:srgbClr val="1B6FB3"/>
                 </a:solidFill>
@@ -22652,7 +22908,7 @@
               </a:rPr>
               <a:t>HIGH AVAILABILITY &amp; DISASTER RECOVERY</a:t>
             </a:r>
-            <a:endParaRPr lang="en-US" sz="950" dirty="0"/>
+            <a:endParaRPr lang="en-US" sz="950"/>
           </a:p>
         </p:txBody>
       </p:sp>
@@ -22681,7 +22937,7 @@
               <a:buNone/>
             </a:pPr>
             <a:r>
-              <a:rPr lang="en-US" sz="2800" b="1" dirty="0">
+              <a:rPr lang="en-US" sz="2800" b="1">
                 <a:solidFill>
                   <a:srgbClr val="1B2836"/>
                 </a:solidFill>
@@ -22691,7 +22947,7 @@
               </a:rPr>
               <a:t>High Availability and DR Strategy</a:t>
             </a:r>
-            <a:endParaRPr lang="en-US" sz="2800" dirty="0"/>
+            <a:endParaRPr lang="en-US" sz="2800"/>
           </a:p>
         </p:txBody>
       </p:sp>
@@ -22720,7 +22976,7 @@
               <a:buNone/>
             </a:pPr>
             <a:r>
-              <a:rPr lang="en-US" sz="1200" dirty="0">
+              <a:rPr lang="en-US" sz="1200">
                 <a:solidFill>
                   <a:srgbClr val="5A6B7D"/>
                 </a:solidFill>
@@ -22730,7 +22986,7 @@
               </a:rPr>
               <a:t>2 units across 2 zones in the primary region. Secondary-region cost is a straight trade against RTO.</a:t>
             </a:r>
-            <a:endParaRPr lang="en-US" sz="1200" dirty="0"/>
+            <a:endParaRPr lang="en-US" sz="1200"/>
           </a:p>
         </p:txBody>
       </p:sp>
@@ -22795,7 +23051,7 @@
               <a:buNone/>
             </a:pPr>
             <a:r>
-              <a:rPr lang="en-US" sz="950" b="1" kern="0" spc="120" dirty="0">
+              <a:rPr lang="en-US" sz="950" b="1" kern="0" spc="120">
                 <a:solidFill>
                   <a:srgbClr val="0E3F6E"/>
                 </a:solidFill>
@@ -22805,7 +23061,7 @@
               </a:rPr>
               <a:t>MULTIPLE REGION – MULTIPLE UNITS</a:t>
             </a:r>
-            <a:endParaRPr lang="en-US" sz="950" dirty="0"/>
+            <a:endParaRPr lang="en-US" sz="950"/>
           </a:p>
         </p:txBody>
       </p:sp>
@@ -22866,7 +23122,7 @@
           <a:p>
             <a:pPr algn="ctr"/>
             <a:r>
-              <a:rPr lang="en-US" sz="850" b="1" kern="0" spc="80" dirty="0">
+              <a:rPr lang="en-US" sz="850" b="1" kern="0" spc="80">
                 <a:solidFill>
                   <a:srgbClr val="FFFFFF"/>
                 </a:solidFill>
@@ -22876,7 +23132,7 @@
               </a:rPr>
               <a:t>GOLD</a:t>
             </a:r>
-            <a:endParaRPr lang="en-US" sz="850" dirty="0"/>
+            <a:endParaRPr lang="en-US" sz="850"/>
           </a:p>
         </p:txBody>
       </p:sp>
@@ -22910,7 +23166,7 @@
               <a:buChar char="•"/>
             </a:pPr>
             <a:r>
-              <a:rPr lang="en-GB" sz="800" dirty="0">
+              <a:rPr lang="en-GB" sz="800">
                 <a:solidFill>
                   <a:srgbClr val="1B2836"/>
                 </a:solidFill>
@@ -22931,7 +23187,7 @@
               <a:buChar char="•"/>
             </a:pPr>
             <a:r>
-              <a:rPr lang="en-GB" sz="800" dirty="0">
+              <a:rPr lang="en-GB" sz="800">
                 <a:solidFill>
                   <a:srgbClr val="1B2836"/>
                 </a:solidFill>
@@ -22952,7 +23208,7 @@
               <a:buChar char="•"/>
             </a:pPr>
             <a:r>
-              <a:rPr lang="en-GB" sz="800" dirty="0">
+              <a:rPr lang="en-GB" sz="800">
                 <a:solidFill>
                   <a:srgbClr val="1B2836"/>
                 </a:solidFill>
@@ -22973,7 +23229,7 @@
               <a:buChar char="•"/>
             </a:pPr>
             <a:r>
-              <a:rPr lang="en-GB" sz="800" dirty="0">
+              <a:rPr lang="en-GB" sz="800">
                 <a:solidFill>
                   <a:srgbClr val="1B2836"/>
                 </a:solidFill>
@@ -22983,7 +23239,7 @@
               </a:rPr>
               <a:t>This approach represents the highest resilience tier, combining backup, zonal resilience, and cross-region redundancy for business-critical production services.</a:t>
             </a:r>
-            <a:endParaRPr lang="en-US" sz="800" dirty="0"/>
+            <a:endParaRPr lang="en-US" sz="800"/>
           </a:p>
         </p:txBody>
       </p:sp>
@@ -23019,7 +23275,7 @@
           <a:bodyPr/>
           <a:lstStyle/>
           <a:p>
-            <a:endParaRPr lang="en-GB" b="1" dirty="0"/>
+            <a:endParaRPr lang="en-GB" b="1"/>
           </a:p>
         </p:txBody>
       </p:sp>
@@ -23045,7 +23301,7 @@
           <a:lstStyle/>
           <a:p>
             <a:r>
-              <a:rPr lang="en-US" sz="950" b="1" kern="0" spc="120" dirty="0">
+              <a:rPr lang="en-US" sz="950" b="1" kern="0" spc="120">
                 <a:solidFill>
                   <a:srgbClr val="0E3F6E"/>
                 </a:solidFill>
@@ -23087,7 +23343,7 @@
               <a:buChar char="•"/>
             </a:pPr>
             <a:r>
-              <a:rPr lang="en-GB" sz="800" dirty="0">
+              <a:rPr lang="en-GB" sz="800">
                 <a:latin typeface="Calibri" panose="020F0502020204030204" pitchFamily="34" charset="0"/>
                 <a:ea typeface="Calibri" panose="020F0502020204030204" pitchFamily="34" charset="0"/>
                 <a:cs typeface="Calibri" panose="020F0502020204030204" pitchFamily="34" charset="0"/>
@@ -23104,12 +23360,12 @@
               <a:buChar char="•"/>
             </a:pPr>
             <a:r>
-              <a:rPr lang="en-GB" sz="800" dirty="0">
+              <a:rPr lang="en-GB" sz="800">
                 <a:latin typeface="Calibri" panose="020F0502020204030204" pitchFamily="34" charset="0"/>
                 <a:ea typeface="Calibri" panose="020F0502020204030204" pitchFamily="34" charset="0"/>
                 <a:cs typeface="Calibri" panose="020F0502020204030204" pitchFamily="34" charset="0"/>
               </a:rPr>
-              <a:t>Service resilience relies on Azure platform recovery and standard restoration processes rather than cross-region failover.</a:t>
+              <a:t>Service resilience relies on Azure platform recovery and standard restoration processes rather than cross-region or cross-zone failover.</a:t>
             </a:r>
           </a:p>
           <a:p>
@@ -23121,7 +23377,7 @@
               <a:buChar char="•"/>
             </a:pPr>
             <a:r>
-              <a:rPr lang="en-GB" sz="800" dirty="0">
+              <a:rPr lang="en-GB" sz="800">
                 <a:latin typeface="Calibri" panose="020F0502020204030204" pitchFamily="34" charset="0"/>
                 <a:ea typeface="Calibri" panose="020F0502020204030204" pitchFamily="34" charset="0"/>
                 <a:cs typeface="Calibri" panose="020F0502020204030204" pitchFamily="34" charset="0"/>
@@ -23138,7 +23394,7 @@
               <a:buChar char="•"/>
             </a:pPr>
             <a:r>
-              <a:rPr lang="en-GB" sz="800" dirty="0">
+              <a:rPr lang="en-GB" sz="800">
                 <a:latin typeface="Calibri" panose="020F0502020204030204" pitchFamily="34" charset="0"/>
                 <a:ea typeface="Calibri" panose="020F0502020204030204" pitchFamily="34" charset="0"/>
                 <a:cs typeface="Calibri" panose="020F0502020204030204" pitchFamily="34" charset="0"/>
@@ -23186,7 +23442,7 @@
           <a:p>
             <a:pPr algn="ctr"/>
             <a:r>
-              <a:rPr lang="en-GB" sz="850" b="1" dirty="0">
+              <a:rPr lang="en-GB" sz="850" b="1">
                 <a:solidFill>
                   <a:schemeClr val="bg1"/>
                 </a:solidFill>
@@ -23272,7 +23528,7 @@
               <a:buNone/>
             </a:pPr>
             <a:r>
-              <a:rPr lang="en-US" sz="950" b="1" kern="0" spc="120" dirty="0">
+              <a:rPr lang="en-US" sz="950" b="1" kern="0" spc="120">
                 <a:solidFill>
                   <a:srgbClr val="0E3F6E"/>
                 </a:solidFill>
@@ -23282,7 +23538,7 @@
               </a:rPr>
               <a:t>SINGLE REGION – MORE THAN 1 UNIT</a:t>
             </a:r>
-            <a:endParaRPr lang="en-US" sz="950" dirty="0"/>
+            <a:endParaRPr lang="en-US" sz="950"/>
           </a:p>
         </p:txBody>
       </p:sp>
@@ -23355,7 +23611,7 @@
           <a:p>
             <a:pPr algn="ctr"/>
             <a:r>
-              <a:rPr lang="en-US" sz="850" b="1" kern="0" spc="80" dirty="0">
+              <a:rPr lang="en-US" sz="850" b="1" kern="0" spc="80">
                 <a:solidFill>
                   <a:srgbClr val="FFFFFF"/>
                 </a:solidFill>
@@ -23365,7 +23621,7 @@
               </a:rPr>
               <a:t>SILVER</a:t>
             </a:r>
-            <a:endParaRPr lang="en-US" sz="850" dirty="0"/>
+            <a:endParaRPr lang="en-US" sz="850"/>
           </a:p>
         </p:txBody>
       </p:sp>
@@ -23404,7 +23660,7 @@
               <a:buChar char="•"/>
             </a:pPr>
             <a:r>
-              <a:rPr lang="en-GB" sz="800" dirty="0">
+              <a:rPr lang="en-GB" sz="800">
                 <a:solidFill>
                   <a:srgbClr val="1B2836"/>
                 </a:solidFill>
@@ -23424,7 +23680,7 @@
               <a:buChar char="•"/>
             </a:pPr>
             <a:r>
-              <a:rPr lang="en-GB" sz="800" dirty="0">
+              <a:rPr lang="en-GB" sz="800">
                 <a:solidFill>
                   <a:srgbClr val="1B2836"/>
                 </a:solidFill>
@@ -23432,7 +23688,7 @@
                 <a:ea typeface="Calibri" pitchFamily="34" charset="-122"/>
                 <a:cs typeface="Calibri" pitchFamily="34" charset="-120"/>
               </a:rPr>
-              <a:t>Multiple units reduce the impact of underlying infrastructure failures and support continued service availability during platform maintenance events.</a:t>
+              <a:t>Multiple units reduce the impact of underlying infrastructure failures and support continued service availability during platform maintenance events by using availability zones.</a:t>
             </a:r>
           </a:p>
           <a:p>
@@ -23444,7 +23700,7 @@
               <a:buChar char="•"/>
             </a:pPr>
             <a:r>
-              <a:rPr lang="en-GB" sz="800" dirty="0">
+              <a:rPr lang="en-GB" sz="800">
                 <a:solidFill>
                   <a:srgbClr val="1B2836"/>
                 </a:solidFill>
@@ -23464,7 +23720,7 @@
               <a:buChar char="•"/>
             </a:pPr>
             <a:r>
-              <a:rPr lang="en-GB" sz="800" dirty="0">
+              <a:rPr lang="en-GB" sz="800">
                 <a:solidFill>
                   <a:srgbClr val="1B2836"/>
                 </a:solidFill>
@@ -23475,7 +23731,7 @@
               <a:t>This approach aligns with the Silver resilience tier, delivering enhanced availability for production services without the additional cost and complexity of cross-region deployment</a:t>
             </a:r>
             <a:r>
-              <a:rPr lang="en-GB" sz="1000" dirty="0">
+              <a:rPr lang="en-GB" sz="1000">
                 <a:solidFill>
                   <a:srgbClr val="1B2836"/>
                 </a:solidFill>
@@ -23485,7 +23741,7 @@
               </a:rPr>
               <a:t>.</a:t>
             </a:r>
-            <a:endParaRPr lang="en-US" sz="1000" dirty="0"/>
+            <a:endParaRPr lang="en-US" sz="1000"/>
           </a:p>
         </p:txBody>
       </p:sp>
@@ -23630,7 +23886,7 @@
               <a:buNone/>
             </a:pPr>
             <a:r>
-              <a:rPr lang="en-US" sz="900" b="1" kern="0" spc="80" dirty="0">
+              <a:rPr lang="en-US" sz="900" b="1" kern="0" spc="80">
                 <a:solidFill>
                   <a:srgbClr val="0E3F6E"/>
                 </a:solidFill>
@@ -23640,7 +23896,7 @@
               </a:rPr>
               <a:t>ZONE 1</a:t>
             </a:r>
-            <a:endParaRPr lang="en-US" sz="900" dirty="0"/>
+            <a:endParaRPr lang="en-US" sz="900"/>
           </a:p>
         </p:txBody>
       </p:sp>
@@ -23715,7 +23971,7 @@
               <a:buNone/>
             </a:pPr>
             <a:r>
-              <a:rPr lang="en-US" sz="900" b="1" kern="0" spc="80" dirty="0">
+              <a:rPr lang="en-US" sz="900" b="1" kern="0" spc="80">
                 <a:solidFill>
                   <a:srgbClr val="0E3F6E"/>
                 </a:solidFill>
@@ -23725,7 +23981,7 @@
               </a:rPr>
               <a:t>ZONE 2</a:t>
             </a:r>
-            <a:endParaRPr lang="en-US" sz="900" dirty="0"/>
+            <a:endParaRPr lang="en-US" sz="900"/>
           </a:p>
         </p:txBody>
       </p:sp>
@@ -23800,7 +24056,7 @@
               <a:buNone/>
             </a:pPr>
             <a:r>
-              <a:rPr lang="en-US" sz="900" b="1" kern="0" spc="80" dirty="0">
+              <a:rPr lang="en-US" sz="900" b="1" kern="0" spc="80">
                 <a:solidFill>
                   <a:srgbClr val="0E3F6E"/>
                 </a:solidFill>
@@ -23810,7 +24066,7 @@
               </a:rPr>
               <a:t>ZONE 1</a:t>
             </a:r>
-            <a:endParaRPr lang="en-US" sz="900" dirty="0"/>
+            <a:endParaRPr lang="en-US" sz="900"/>
           </a:p>
         </p:txBody>
       </p:sp>
@@ -23897,7 +24153,7 @@
               <a:buNone/>
             </a:pPr>
             <a:r>
-              <a:rPr lang="en-US" sz="900" b="1" kern="0" spc="80" dirty="0">
+              <a:rPr lang="en-US" sz="900" b="1" kern="0" spc="80">
                 <a:solidFill>
                   <a:srgbClr val="0E3F6E"/>
                 </a:solidFill>
@@ -23907,7 +24163,7 @@
               </a:rPr>
               <a:t>Region 1</a:t>
             </a:r>
-            <a:endParaRPr lang="en-US" sz="900" dirty="0"/>
+            <a:endParaRPr lang="en-US" sz="900"/>
           </a:p>
         </p:txBody>
       </p:sp>
@@ -23994,7 +24250,7 @@
               <a:buNone/>
             </a:pPr>
             <a:r>
-              <a:rPr lang="en-US" sz="900" b="1" kern="0" spc="80" dirty="0">
+              <a:rPr lang="en-US" sz="900" b="1" kern="0" spc="80">
                 <a:solidFill>
                   <a:srgbClr val="0E3F6E"/>
                 </a:solidFill>
@@ -24004,7 +24260,7 @@
               </a:rPr>
               <a:t>Region 2</a:t>
             </a:r>
-            <a:endParaRPr lang="en-US" sz="900" dirty="0"/>
+            <a:endParaRPr lang="en-US" sz="900"/>
           </a:p>
         </p:txBody>
       </p:sp>
@@ -24089,7 +24345,7 @@
               <a:buNone/>
             </a:pPr>
             <a:r>
-              <a:rPr lang="en-US" sz="900" b="1" spc="60" dirty="0">
+              <a:rPr lang="en-US" sz="900" b="1" spc="60">
                 <a:solidFill>
                   <a:srgbClr val="0E3F6E"/>
                 </a:solidFill>
@@ -24168,7 +24424,7 @@
               <a:buNone/>
             </a:pPr>
             <a:r>
-              <a:rPr lang="en-US" sz="900" b="1" spc="80" dirty="0">
+              <a:rPr lang="en-US" sz="900" b="1" spc="80">
                 <a:solidFill>
                   <a:srgbClr val="0E3F6E"/>
                 </a:solidFill>
@@ -24208,7 +24464,7 @@
               <a:buNone/>
             </a:pPr>
             <a:r>
-              <a:rPr lang="en-US" sz="900" b="1" spc="60" dirty="0">
+              <a:rPr lang="en-US" sz="900" b="1" spc="60">
                 <a:solidFill>
                   <a:srgbClr val="0E3F6E"/>
                 </a:solidFill>
@@ -24287,7 +24543,7 @@
               <a:buNone/>
             </a:pPr>
             <a:r>
-              <a:rPr lang="en-US" sz="850" b="1" spc="40" dirty="0">
+              <a:rPr lang="en-US" sz="850" b="1" spc="40">
                 <a:solidFill>
                   <a:srgbClr val="0E3F6E"/>
                 </a:solidFill>
@@ -24331,7 +24587,7 @@
               <a:buNone/>
             </a:pPr>
             <a:r>
-              <a:rPr lang="en-US" sz="850" b="1" spc="40" dirty="0">
+              <a:rPr lang="en-US" sz="850" b="1" spc="40">
                 <a:solidFill>
                   <a:srgbClr val="0E3F6E"/>
                 </a:solidFill>
@@ -24352,7 +24608,7 @@
 
 <file path=ppt/slides/slide7.xml><?xml version="1.0" encoding="utf-8"?>
 <p:sld xmlns:a="http://schemas.openxmlformats.org/drawingml/2006/main" xmlns:r="http://schemas.openxmlformats.org/officeDocument/2006/relationships" xmlns:p="http://schemas.openxmlformats.org/presentationml/2006/main">
-  <p:cSld name="Slide 6">
+  <p:cSld>
     <p:spTree>
       <p:nvGrpSpPr>
         <p:cNvPr id="1" name=""/>
@@ -24424,7 +24680,7 @@
               <a:buNone/>
             </a:pPr>
             <a:r>
-              <a:rPr lang="en-US" sz="1700" b="1" dirty="0">
+              <a:rPr lang="en-US" sz="1700" b="1">
                 <a:solidFill>
                   <a:srgbClr val="FFFFFF"/>
                 </a:solidFill>
@@ -24434,7 +24690,7 @@
               </a:rPr>
               <a:t>6</a:t>
             </a:r>
-            <a:endParaRPr lang="en-US" sz="1700" dirty="0"/>
+            <a:endParaRPr lang="en-US" sz="1700"/>
           </a:p>
         </p:txBody>
       </p:sp>
@@ -24463,7 +24719,7 @@
               <a:buNone/>
             </a:pPr>
             <a:r>
-              <a:rPr lang="en-US" sz="950" b="1" kern="0" spc="200" dirty="0">
+              <a:rPr lang="en-US" sz="950" b="1" kern="0" spc="200">
                 <a:solidFill>
                   <a:srgbClr val="1B6FB3"/>
                 </a:solidFill>
@@ -24473,7 +24729,7 @@
               </a:rPr>
               <a:t>HIGH AVAILABILITY &amp; DISASTER RECOVERY</a:t>
             </a:r>
-            <a:endParaRPr lang="en-US" sz="950" dirty="0"/>
+            <a:endParaRPr lang="en-US" sz="950"/>
           </a:p>
         </p:txBody>
       </p:sp>
@@ -24502,7 +24758,7 @@
               <a:buNone/>
             </a:pPr>
             <a:r>
-              <a:rPr lang="en-US" sz="2800" b="1" dirty="0">
+              <a:rPr lang="en-US" sz="2800" b="1">
                 <a:solidFill>
                   <a:srgbClr val="1B2836"/>
                 </a:solidFill>
@@ -24512,7 +24768,7 @@
               </a:rPr>
               <a:t>Resilience Topology — Bronze, Silver, Gold</a:t>
             </a:r>
-            <a:endParaRPr lang="en-US" sz="2800" dirty="0"/>
+            <a:endParaRPr lang="en-US" sz="2800"/>
           </a:p>
         </p:txBody>
       </p:sp>
@@ -24541,7 +24797,7 @@
               <a:buNone/>
             </a:pPr>
             <a:r>
-              <a:rPr lang="en-US" sz="1200" dirty="0">
+              <a:rPr lang="en-US" sz="1200">
                 <a:solidFill>
                   <a:srgbClr val="5A6B7D"/>
                 </a:solidFill>
@@ -24551,7 +24807,7 @@
               </a:rPr>
               <a:t>Bronze and Silver run the primary region only, standing up the secondary on DR via IaC to keep cost minimal. Gold runs active-active across both regions.</a:t>
             </a:r>
-            <a:endParaRPr lang="en-US" sz="1200" dirty="0"/>
+            <a:endParaRPr lang="en-US" sz="1200"/>
           </a:p>
         </p:txBody>
       </p:sp>
@@ -24589,7 +24845,7 @@
 
 <file path=ppt/slides/slide8.xml><?xml version="1.0" encoding="utf-8"?>
 <p:sld xmlns:a="http://schemas.openxmlformats.org/drawingml/2006/main" xmlns:r="http://schemas.openxmlformats.org/officeDocument/2006/relationships" xmlns:p="http://schemas.openxmlformats.org/presentationml/2006/main">
-  <p:cSld name="Slide 3">
+  <p:cSld>
     <p:spTree>
       <p:nvGrpSpPr>
         <p:cNvPr id="1" name=""/>
@@ -24661,7 +24917,7 @@
               <a:buNone/>
             </a:pPr>
             <a:r>
-              <a:rPr lang="en-US" sz="1700" b="1" dirty="0">
+              <a:rPr lang="en-US" sz="1700" b="1">
                 <a:solidFill>
                   <a:srgbClr val="FFFFFF"/>
                 </a:solidFill>
@@ -24671,7 +24927,7 @@
               </a:rPr>
               <a:t>A</a:t>
             </a:r>
-            <a:endParaRPr lang="en-US" sz="1700" dirty="0"/>
+            <a:endParaRPr lang="en-US" sz="1700"/>
           </a:p>
         </p:txBody>
       </p:sp>
@@ -24700,7 +24956,7 @@
               <a:buNone/>
             </a:pPr>
             <a:r>
-              <a:rPr lang="en-US" sz="950" b="1" kern="0" spc="200" dirty="0">
+              <a:rPr lang="en-US" sz="950" b="1" kern="0" spc="200">
                 <a:solidFill>
                   <a:srgbClr val="1B6FB3"/>
                 </a:solidFill>
@@ -24708,9 +24964,9 @@
                 <a:ea typeface="Calibri" pitchFamily="34" charset="-122"/>
                 <a:cs typeface="Calibri" pitchFamily="34" charset="-120"/>
               </a:rPr>
-              <a:t>APPENDIX · GLOBAL ROUTING</a:t>
-            </a:r>
-            <a:endParaRPr lang="en-US" sz="950" dirty="0"/>
+              <a:t>APPENDIX · EDGE SERVICE OPTIONS</a:t>
+            </a:r>
+            <a:endParaRPr lang="en-US" sz="950"/>
           </a:p>
         </p:txBody>
       </p:sp>
@@ -24739,7 +24995,7 @@
               <a:buNone/>
             </a:pPr>
             <a:r>
-              <a:rPr lang="en-US" sz="2800" b="1" dirty="0">
+              <a:rPr lang="en-US" sz="2800" b="1">
                 <a:solidFill>
                   <a:srgbClr val="1B2836"/>
                 </a:solidFill>
@@ -24747,9 +25003,9 @@
                 <a:ea typeface="Calibri" pitchFamily="34" charset="-122"/>
                 <a:cs typeface="Calibri" pitchFamily="34" charset="-120"/>
               </a:rPr>
-              <a:t>Azure Front Door vs Traffic Manager</a:t>
-            </a:r>
-            <a:endParaRPr lang="en-US" sz="2800" dirty="0"/>
+              <a:t>Azure Front Door Tiers &amp; Offerings</a:t>
+            </a:r>
+            <a:endParaRPr lang="en-US" sz="2800"/>
           </a:p>
         </p:txBody>
       </p:sp>
@@ -24778,7 +25034,7 @@
               <a:buNone/>
             </a:pPr>
             <a:r>
-              <a:rPr lang="en-US" sz="1200" dirty="0">
+              <a:rPr lang="en-US" sz="1200">
                 <a:solidFill>
                   <a:srgbClr val="5A6B7D"/>
                 </a:solidFill>
@@ -24786,9 +25042,9 @@
                 <a:ea typeface="Calibri" pitchFamily="34" charset="-122"/>
                 <a:cs typeface="Calibri" pitchFamily="34" charset="-120"/>
               </a:rPr>
-              <a:t>Both route across regions but at different layers. Azure Front Door is the chosen edge for HTTPS APIs; Traffic Manager only wins for non-HTTP or non-Azure routing.</a:t>
-            </a:r>
-            <a:endParaRPr lang="en-US" sz="1200" dirty="0"/>
+              <a:t>Front Door comes in several SKUs. Premium is the chosen tier because it adds the managed WAF and Private Link origin a governed API edge requires.</a:t>
+            </a:r>
+            <a:endParaRPr lang="en-US" sz="1200"/>
           </a:p>
         </p:txBody>
       </p:sp>
@@ -24851,7 +25107,7 @@
               <a:buNone/>
             </a:pPr>
             <a:r>
-              <a:rPr lang="en-US" sz="900" b="1" kern="0" spc="120" dirty="0">
+              <a:rPr lang="en-US" sz="900" b="1" kern="0" spc="120">
                 <a:solidFill>
                   <a:srgbClr val="5A6B7D"/>
                 </a:solidFill>
@@ -24861,7 +25117,7 @@
               </a:rPr>
               <a:t>OPTION A</a:t>
             </a:r>
-            <a:endParaRPr lang="en-US" sz="900" dirty="0"/>
+            <a:endParaRPr lang="en-US" sz="900"/>
           </a:p>
         </p:txBody>
       </p:sp>
@@ -24913,7 +25169,9 @@
           <a:prstGeom prst="rect">
             <a:avLst/>
           </a:prstGeom>
-          <a:noFill/>
+          <a:solidFill>
+            <a:srgbClr val="002060"/>
+          </a:solidFill>
           <a:ln>
             <a:solidFill>
               <a:srgbClr val="002060"/>
@@ -24928,7 +25186,7 @@
               <a:buNone/>
             </a:pPr>
             <a:r>
-              <a:rPr lang="en-US" sz="850" b="1" kern="0" spc="80" dirty="0">
+              <a:rPr lang="en-US" sz="850" b="1" kern="0" spc="80">
                 <a:solidFill>
                   <a:srgbClr val="FFFFFF"/>
                 </a:solidFill>
@@ -24936,9 +25194,9 @@
                 <a:ea typeface="Calibri" pitchFamily="34" charset="-122"/>
                 <a:cs typeface="Calibri" pitchFamily="34" charset="-120"/>
               </a:rPr>
-              <a:t>CHOSEN</a:t>
-            </a:r>
-            <a:endParaRPr lang="en-US" sz="850" dirty="0"/>
+              <a:t>BASELINE</a:t>
+            </a:r>
+            <a:endParaRPr lang="en-US" sz="850"/>
           </a:p>
         </p:txBody>
       </p:sp>
@@ -24964,7 +25222,7 @@
           <a:lstStyle/>
           <a:p>
             <a:r>
-              <a:rPr lang="en-US" sz="1500" b="1" dirty="0">
+              <a:rPr lang="en-US" sz="1500" b="1">
                 <a:solidFill>
                   <a:srgbClr val="0E3F6E"/>
                 </a:solidFill>
@@ -24972,9 +25230,9 @@
                 <a:ea typeface="Calibri"/>
                 <a:cs typeface="Calibri"/>
               </a:rPr>
-              <a:t>Azure Front Door</a:t>
-            </a:r>
-            <a:endParaRPr lang="en-US" sz="1500" dirty="0">
+              <a:t>Front Door Standard</a:t>
+            </a:r>
+            <a:endParaRPr lang="en-US" sz="1500">
               <a:solidFill>
                 <a:srgbClr val="000000"/>
               </a:solidFill>
@@ -24990,7 +25248,7 @@
               </a:lnSpc>
               <a:buNone/>
             </a:pPr>
-            <a:endParaRPr lang="en-US" sz="1500" b="1" dirty="0">
+            <a:endParaRPr lang="en-US" sz="1500" b="1">
               <a:solidFill>
                 <a:srgbClr val="0E3F6E"/>
               </a:solidFill>
@@ -25026,7 +25284,7 @@
               <a:buNone/>
             </a:pPr>
             <a:r>
-              <a:rPr lang="en-US" sz="800" b="1" kern="0" spc="120" dirty="0">
+              <a:rPr lang="en-US" sz="800" b="1" kern="0" spc="120">
                 <a:solidFill>
                   <a:srgbClr val="5A6B7D"/>
                 </a:solidFill>
@@ -25034,9 +25292,9 @@
                 <a:ea typeface="Calibri" pitchFamily="34" charset="-122"/>
                 <a:cs typeface="Calibri" pitchFamily="34" charset="-120"/>
               </a:rPr>
-              <a:t>LAYER &amp; ROLE</a:t>
-            </a:r>
-            <a:endParaRPr lang="en-US" sz="800" dirty="0"/>
+              <a:t>SKU PROFILE</a:t>
+            </a:r>
+            <a:endParaRPr lang="en-US" sz="800"/>
           </a:p>
         </p:txBody>
       </p:sp>
@@ -25067,7 +25325,7 @@
               </a:lnSpc>
             </a:pPr>
             <a:r>
-              <a:rPr lang="en-US" sz="1000" i="1" dirty="0">
+              <a:rPr lang="en-US" sz="1000" i="1">
                 <a:solidFill>
                   <a:srgbClr val="1B2836"/>
                 </a:solidFill>
@@ -25075,9 +25333,9 @@
                 <a:ea typeface="Calibri" pitchFamily="34" charset="-122"/>
                 <a:cs typeface="Calibri" pitchFamily="34" charset="-120"/>
               </a:rPr>
-              <a:t>Layer 7 · global anycast · edge WAF · Private Link origin</a:t>
-            </a:r>
-            <a:endParaRPr lang="en-US" sz="1000" dirty="0"/>
+              <a:t>CDN + global Layer 7 routing, no advanced security</a:t>
+            </a:r>
+            <a:endParaRPr lang="en-US" sz="1000"/>
           </a:p>
         </p:txBody>
       </p:sp>
@@ -25110,12 +25368,12 @@
               <a:buChar char="•"/>
             </a:pPr>
             <a:r>
-              <a:rPr lang="en-GB" sz="1050" dirty="0">
+              <a:rPr lang="en-GB" sz="1050">
                 <a:latin typeface="Calibri" panose="020F0502020204030204" pitchFamily="34" charset="0"/>
                 <a:ea typeface="Calibri" panose="020F0502020204030204" pitchFamily="34" charset="0"/>
                 <a:cs typeface="Calibri" panose="020F0502020204030204" pitchFamily="34" charset="0"/>
               </a:rPr>
-              <a:t>Built-in WAF, TLS termination, DDoS and caching at the Microsoft edge.</a:t>
+              <a:t>Anycast routing, caching, TLS termination and custom domains.</a:t>
             </a:r>
           </a:p>
           <a:p>
@@ -25126,7 +25384,7 @@
               <a:buFont typeface="Arial" panose="020B0604020202020204" pitchFamily="34" charset="0"/>
               <a:buChar char="•"/>
             </a:pPr>
-            <a:endParaRPr lang="en-GB" sz="1050" dirty="0">
+            <a:endParaRPr lang="en-GB" sz="1050">
               <a:latin typeface="Calibri" panose="020F0502020204030204" pitchFamily="34" charset="0"/>
               <a:ea typeface="Calibri" panose="020F0502020204030204" pitchFamily="34" charset="0"/>
               <a:cs typeface="Calibri" panose="020F0502020204030204" pitchFamily="34" charset="0"/>
@@ -25138,12 +25396,12 @@
               <a:buChar char="•"/>
             </a:pPr>
             <a:r>
-              <a:rPr lang="en-GB" sz="1050" dirty="0">
+              <a:rPr lang="en-GB" sz="1050">
                 <a:latin typeface="Calibri"/>
                 <a:ea typeface="Calibri"/>
                 <a:cs typeface="Calibri"/>
               </a:rPr>
-              <a:t>Anycast routing with fast, sub-minute health-based regional failover.</a:t>
+              <a:t>No managed WAF or bot protection, and no Private Link origin support.</a:t>
             </a:r>
           </a:p>
           <a:p>
@@ -25151,7 +25409,7 @@
               <a:buFont typeface="Arial" panose="020B0604020202020204" pitchFamily="34" charset="0"/>
               <a:buChar char="•"/>
             </a:pPr>
-            <a:endParaRPr lang="en-GB" sz="1050" dirty="0">
+            <a:endParaRPr lang="en-GB" sz="1050">
               <a:latin typeface="Calibri" panose="020F0502020204030204" pitchFamily="34" charset="0"/>
               <a:ea typeface="Calibri" panose="020F0502020204030204" pitchFamily="34" charset="0"/>
               <a:cs typeface="Calibri" panose="020F0502020204030204" pitchFamily="34" charset="0"/>
@@ -25166,14 +25424,14 @@
               <a:buChar char="•"/>
             </a:pPr>
             <a:r>
-              <a:rPr lang="en-GB" sz="1050" dirty="0">
+              <a:rPr lang="en-GB" sz="1050">
                 <a:latin typeface="Calibri"/>
                 <a:ea typeface="Calibri"/>
                 <a:cs typeface="Calibri"/>
               </a:rPr>
-              <a:t>One global hostname; Private Link origin into internal-mode APIM.</a:t>
-            </a:r>
-            <a:endParaRPr lang="en-GB" sz="1050" dirty="0">
+              <a:t>Lower cost; suited to content delivery, not a secured API edge.</a:t>
+            </a:r>
+            <a:endParaRPr lang="en-GB" sz="1050">
               <a:latin typeface="Calibri" panose="020F0502020204030204" pitchFamily="34" charset="0"/>
               <a:ea typeface="Calibri" panose="020F0502020204030204" pitchFamily="34" charset="0"/>
               <a:cs typeface="Calibri" panose="020F0502020204030204" pitchFamily="34" charset="0"/>
@@ -25243,12 +25501,12 @@
               <a:buNone/>
             </a:pPr>
             <a:r>
-              <a:rPr lang="en-GB" sz="1050" b="1" dirty="0">
+              <a:rPr lang="en-GB" sz="1050" b="1">
                 <a:latin typeface="Calibri" panose="020F0502020204030204" pitchFamily="34" charset="0"/>
                 <a:ea typeface="Calibri" panose="020F0502020204030204" pitchFamily="34" charset="0"/>
                 <a:cs typeface="Calibri" panose="020F0502020204030204" pitchFamily="34" charset="0"/>
               </a:rPr>
-              <a:t>Chosen: every API is HTTPS and benefits from edge security and fast failover.</a:t>
+              <a:t>Not sufficient: no WAF and no Private Link origin for internal APIM.</a:t>
             </a:r>
           </a:p>
         </p:txBody>
@@ -25312,7 +25570,7 @@
               <a:buNone/>
             </a:pPr>
             <a:r>
-              <a:rPr lang="en-US" sz="900" b="1" kern="0" spc="120" dirty="0">
+              <a:rPr lang="en-US" sz="900" b="1" kern="0" spc="120">
                 <a:solidFill>
                   <a:srgbClr val="5A6B7D"/>
                 </a:solidFill>
@@ -25322,7 +25580,7 @@
               </a:rPr>
               <a:t>OPTION B</a:t>
             </a:r>
-            <a:endParaRPr lang="en-US" sz="900" dirty="0"/>
+            <a:endParaRPr lang="en-US" sz="900"/>
           </a:p>
         </p:txBody>
       </p:sp>
@@ -25374,7 +25632,9 @@
           <a:prstGeom prst="rect">
             <a:avLst/>
           </a:prstGeom>
-          <a:noFill/>
+          <a:solidFill>
+            <a:srgbClr val="002060"/>
+          </a:solidFill>
           <a:ln/>
         </p:spPr>
         <p:txBody>
@@ -25385,7 +25645,7 @@
               <a:buNone/>
             </a:pPr>
             <a:r>
-              <a:rPr lang="en-US" sz="850" b="1" kern="0" spc="80" dirty="0">
+              <a:rPr lang="en-US" sz="850" b="1" kern="0" spc="80">
                 <a:solidFill>
                   <a:srgbClr val="FFFFFF"/>
                 </a:solidFill>
@@ -25393,9 +25653,9 @@
                 <a:ea typeface="Calibri" pitchFamily="34" charset="-122"/>
                 <a:cs typeface="Calibri" pitchFamily="34" charset="-120"/>
               </a:rPr>
-              <a:t>NOT CHOSEN</a:t>
-            </a:r>
-            <a:endParaRPr lang="en-US" sz="850" dirty="0"/>
+              <a:t>CHOSEN</a:t>
+            </a:r>
+            <a:endParaRPr lang="en-US" sz="850"/>
           </a:p>
         </p:txBody>
       </p:sp>
@@ -25427,7 +25687,7 @@
               <a:buNone/>
             </a:pPr>
             <a:r>
-              <a:rPr lang="en-US" sz="1500" b="1" dirty="0">
+              <a:rPr lang="en-US" sz="1500" b="1">
                 <a:solidFill>
                   <a:srgbClr val="0E3F6E"/>
                 </a:solidFill>
@@ -25435,9 +25695,9 @@
                 <a:ea typeface="Calibri" pitchFamily="34" charset="-122"/>
                 <a:cs typeface="Calibri" pitchFamily="34" charset="-120"/>
               </a:rPr>
-              <a:t>Azure Traffic Manager</a:t>
-            </a:r>
-            <a:endParaRPr lang="en-US" sz="1500" dirty="0"/>
+              <a:t>Front Door Premium</a:t>
+            </a:r>
+            <a:endParaRPr lang="en-US" sz="1500"/>
           </a:p>
         </p:txBody>
       </p:sp>
@@ -25466,7 +25726,7 @@
               <a:buNone/>
             </a:pPr>
             <a:r>
-              <a:rPr lang="en-US" sz="800" b="1" kern="0" spc="120" dirty="0">
+              <a:rPr lang="en-US" sz="800" b="1" kern="0" spc="120">
                 <a:solidFill>
                   <a:srgbClr val="5A6B7D"/>
                 </a:solidFill>
@@ -25474,9 +25734,9 @@
                 <a:ea typeface="Calibri" pitchFamily="34" charset="-122"/>
                 <a:cs typeface="Calibri" pitchFamily="34" charset="-120"/>
               </a:rPr>
-              <a:t>LAYER &amp; ROLE</a:t>
-            </a:r>
-            <a:endParaRPr lang="en-US" sz="800" dirty="0"/>
+              <a:t>SKU PROFILE</a:t>
+            </a:r>
+            <a:endParaRPr lang="en-US" sz="800"/>
           </a:p>
         </p:txBody>
       </p:sp>
@@ -25508,7 +25768,7 @@
               <a:buNone/>
             </a:pPr>
             <a:r>
-              <a:rPr lang="en-US" sz="1000" i="1" dirty="0">
+              <a:rPr lang="en-US" sz="1000" i="1">
                 <a:solidFill>
                   <a:srgbClr val="1B2836"/>
                 </a:solidFill>
@@ -25516,9 +25776,9 @@
                 <a:ea typeface="Calibri" pitchFamily="34" charset="-122"/>
                 <a:cs typeface="Calibri" pitchFamily="34" charset="-120"/>
               </a:rPr>
-              <a:t>DNS layer · protocol-agnostic · no inline inspection</a:t>
-            </a:r>
-            <a:endParaRPr lang="en-US" sz="1000" dirty="0"/>
+              <a:t>Standard + managed WAF + Private Link origin</a:t>
+            </a:r>
+            <a:endParaRPr lang="en-US" sz="1000"/>
           </a:p>
         </p:txBody>
       </p:sp>
@@ -25551,7 +25811,7 @@
               <a:buChar char="•"/>
             </a:pPr>
             <a:r>
-              <a:rPr lang="en-GB" sz="1050" dirty="0">
+              <a:rPr lang="en-GB" sz="1050">
                 <a:solidFill>
                   <a:srgbClr val="1B2836"/>
                 </a:solidFill>
@@ -25559,7 +25819,7 @@
                 <a:ea typeface="Calibri" pitchFamily="34" charset="-122"/>
                 <a:cs typeface="Calibri" pitchFamily="34" charset="-120"/>
               </a:rPr>
-              <a:t>Resolves DNS to a healthy regional endpoint, then steps out of the path.</a:t>
+              <a:t>Managed WAF (DRS 2.1) with bot protection and rate limiting.</a:t>
             </a:r>
           </a:p>
           <a:p>
@@ -25571,7 +25831,7 @@
               <a:buChar char="•"/>
             </a:pPr>
             <a:r>
-              <a:rPr lang="en-GB" sz="1050" dirty="0">
+              <a:rPr lang="en-GB" sz="1050">
                 <a:solidFill>
                   <a:srgbClr val="1B2836"/>
                 </a:solidFill>
@@ -25579,7 +25839,7 @@
                 <a:ea typeface="Calibri" pitchFamily="34" charset="-122"/>
                 <a:cs typeface="Calibri" pitchFamily="34" charset="-120"/>
               </a:rPr>
-              <a:t>Works for any protocol, including non-HTTP and non-Azure endpoints.</a:t>
+              <a:t>Private Link origin to an internal-mode APIM, so no public IP.</a:t>
             </a:r>
           </a:p>
           <a:p>
@@ -25591,7 +25851,7 @@
               <a:buChar char="•"/>
             </a:pPr>
             <a:r>
-              <a:rPr lang="en-GB" sz="1050" dirty="0">
+              <a:rPr lang="en-GB" sz="1050">
                 <a:solidFill>
                   <a:srgbClr val="1B2836"/>
                 </a:solidFill>
@@ -25599,7 +25859,7 @@
                 <a:ea typeface="Calibri" pitchFamily="34" charset="-122"/>
                 <a:cs typeface="Calibri" pitchFamily="34" charset="-120"/>
               </a:rPr>
-              <a:t>No WAF, TLS offload or caching of its own.</a:t>
+              <a:t>DDoS protection and enhanced security analytics.</a:t>
             </a:r>
           </a:p>
           <a:p>
@@ -25611,7 +25871,7 @@
               <a:buChar char="•"/>
             </a:pPr>
             <a:r>
-              <a:rPr lang="en-GB" sz="1050" dirty="0">
+              <a:rPr lang="en-GB" sz="1050">
                 <a:solidFill>
                   <a:srgbClr val="1B2836"/>
                 </a:solidFill>
@@ -25619,9 +25879,9 @@
                 <a:ea typeface="Calibri" pitchFamily="34" charset="-122"/>
                 <a:cs typeface="Calibri" pitchFamily="34" charset="-120"/>
               </a:rPr>
-              <a:t>Failover bounded by client DNS cache TTLs, so slower; cheaper per query.</a:t>
-            </a:r>
-            <a:endParaRPr lang="en-US" sz="1050" dirty="0"/>
+              <a:t>The hardened, governed edge this design requires.</a:t>
+            </a:r>
+            <a:endParaRPr lang="en-US" sz="1050"/>
           </a:p>
         </p:txBody>
       </p:sp>
@@ -25686,7 +25946,7 @@
               </a:lnSpc>
             </a:pPr>
             <a:r>
-              <a:rPr lang="en-GB" sz="1050" b="1" dirty="0">
+              <a:rPr lang="en-GB" sz="1050" b="1">
                 <a:solidFill>
                   <a:srgbClr val="1B2836"/>
                 </a:solidFill>
@@ -25694,9 +25954,9 @@
                 <a:ea typeface="Calibri" pitchFamily="34" charset="-122"/>
                 <a:cs typeface="Calibri" pitchFamily="34" charset="-120"/>
               </a:rPr>
-              <a:t>Not chosen: no edge security and DNS-TTL failover is too slow for the RTO.</a:t>
-            </a:r>
-            <a:endParaRPr lang="en-US" sz="1050" dirty="0"/>
+              <a:t>Chosen: WAF plus Private Link origin gives a secure, private API edge.</a:t>
+            </a:r>
+            <a:endParaRPr lang="en-US" sz="1050"/>
           </a:p>
         </p:txBody>
       </p:sp>
@@ -25710,7 +25970,7 @@
 
 <file path=ppt/slides/slide9.xml><?xml version="1.0" encoding="utf-8"?>
 <p:sld xmlns:a="http://schemas.openxmlformats.org/drawingml/2006/main" xmlns:r="http://schemas.openxmlformats.org/officeDocument/2006/relationships" xmlns:p="http://schemas.openxmlformats.org/presentationml/2006/main">
-  <p:cSld name="Slide 3">
+  <p:cSld>
     <p:spTree>
       <p:nvGrpSpPr>
         <p:cNvPr id="1" name=""/>
@@ -25782,7 +26042,7 @@
               <a:buNone/>
             </a:pPr>
             <a:r>
-              <a:rPr lang="en-US" sz="1700" b="1" dirty="0">
+              <a:rPr lang="en-US" sz="1700" b="1">
                 <a:solidFill>
                   <a:srgbClr val="FFFFFF"/>
                 </a:solidFill>
@@ -25792,7 +26052,7 @@
               </a:rPr>
               <a:t>A</a:t>
             </a:r>
-            <a:endParaRPr lang="en-US" sz="1700" dirty="0"/>
+            <a:endParaRPr lang="en-US" sz="1700"/>
           </a:p>
         </p:txBody>
       </p:sp>
@@ -25821,7 +26081,7 @@
               <a:buNone/>
             </a:pPr>
             <a:r>
-              <a:rPr lang="en-US" sz="950" b="1" kern="0" spc="200" dirty="0">
+              <a:rPr lang="en-US" sz="950" b="1" kern="0" spc="200">
                 <a:solidFill>
                   <a:srgbClr val="1B6FB3"/>
                 </a:solidFill>
@@ -25829,9 +26089,9 @@
                 <a:ea typeface="Calibri" pitchFamily="34" charset="-122"/>
                 <a:cs typeface="Calibri" pitchFamily="34" charset="-120"/>
               </a:rPr>
-              <a:t>APPENDIX · EDGE SERVICE OPTIONS</a:t>
-            </a:r>
-            <a:endParaRPr lang="en-US" sz="950" dirty="0"/>
+              <a:t>APPENDIX · APIM GATEWAY TIERS</a:t>
+            </a:r>
+            <a:endParaRPr lang="en-US" sz="950"/>
           </a:p>
         </p:txBody>
       </p:sp>
@@ -25860,7 +26120,7 @@
               <a:buNone/>
             </a:pPr>
             <a:r>
-              <a:rPr lang="en-US" sz="2800" b="1" dirty="0">
+              <a:rPr lang="en-US" sz="2800" b="1">
                 <a:solidFill>
                   <a:srgbClr val="1B2836"/>
                 </a:solidFill>
@@ -25868,9 +26128,9 @@
                 <a:ea typeface="Calibri" pitchFamily="34" charset="-122"/>
                 <a:cs typeface="Calibri" pitchFamily="34" charset="-120"/>
               </a:rPr>
-              <a:t>Azure Front Door Tiers &amp; Offerings</a:t>
-            </a:r>
-            <a:endParaRPr lang="en-US" sz="2800" dirty="0"/>
+              <a:t>APIM Gateway Tiers &amp; Offerings</a:t>
+            </a:r>
+            <a:endParaRPr lang="en-US" sz="2800"/>
           </a:p>
         </p:txBody>
       </p:sp>
@@ -25899,7 +26159,7 @@
               <a:buNone/>
             </a:pPr>
             <a:r>
-              <a:rPr lang="en-US" sz="1200" dirty="0">
+              <a:rPr lang="en-US" sz="1200">
                 <a:solidFill>
                   <a:srgbClr val="5A6B7D"/>
                 </a:solidFill>
@@ -25907,9 +26167,9 @@
                 <a:ea typeface="Calibri" pitchFamily="34" charset="-122"/>
                 <a:cs typeface="Calibri" pitchFamily="34" charset="-120"/>
               </a:rPr>
-              <a:t>Front Door comes in several SKUs. Premium is the chosen tier because it adds the managed WAF and Private Link origin a governed API edge requires.</a:t>
-            </a:r>
-            <a:endParaRPr lang="en-US" sz="1200" dirty="0"/>
+              <a:t>APIM offers several tiers. Premium v2 provides the network isolation, scale and governance a strategic API platform needs.</a:t>
+            </a:r>
+            <a:endParaRPr lang="en-US" sz="1200"/>
           </a:p>
         </p:txBody>
       </p:sp>
@@ -25921,8 +26181,8 @@
         </p:nvSpPr>
         <p:spPr>
           <a:xfrm>
-            <a:off x="822960" y="1417320"/>
-            <a:ext cx="4933518" cy="3657600"/>
+            <a:off x="502920" y="1417320"/>
+            <a:ext cx="3544824" cy="3657600"/>
           </a:xfrm>
           <a:prstGeom prst="roundRect">
             <a:avLst>
@@ -25955,8 +26215,8 @@
         </p:nvSpPr>
         <p:spPr>
           <a:xfrm>
-            <a:off x="1077484" y="1581912"/>
-            <a:ext cx="2036190" cy="228600"/>
+            <a:off x="685800" y="1581912"/>
+            <a:ext cx="1463040" cy="228600"/>
           </a:xfrm>
           <a:prstGeom prst="rect">
             <a:avLst/>
@@ -25972,7 +26232,7 @@
               <a:buNone/>
             </a:pPr>
             <a:r>
-              <a:rPr lang="en-US" sz="900" b="1" kern="0" spc="120" dirty="0">
+              <a:rPr lang="en-US" sz="900" b="1" kern="0" spc="120">
                 <a:solidFill>
                   <a:srgbClr val="5A6B7D"/>
                 </a:solidFill>
@@ -25980,9 +26240,9 @@
                 <a:ea typeface="Calibri" pitchFamily="34" charset="-122"/>
                 <a:cs typeface="Calibri" pitchFamily="34" charset="-120"/>
               </a:rPr>
-              <a:t>OPTION A</a:t>
-            </a:r>
-            <a:endParaRPr lang="en-US" sz="900" dirty="0"/>
+              <a:t>ENTRY TIERS</a:t>
+            </a:r>
+            <a:endParaRPr lang="en-US" sz="900"/>
           </a:p>
         </p:txBody>
       </p:sp>
@@ -25994,8 +26254,8 @@
         </p:nvSpPr>
         <p:spPr>
           <a:xfrm>
-            <a:off x="3694836" y="1563624"/>
-            <a:ext cx="1807118" cy="237744"/>
+            <a:off x="2566416" y="1563624"/>
+            <a:ext cx="1298448" cy="237744"/>
           </a:xfrm>
           <a:prstGeom prst="roundRect">
             <a:avLst>
@@ -26028,8 +26288,8 @@
         </p:nvSpPr>
         <p:spPr>
           <a:xfrm>
-            <a:off x="3694836" y="1563624"/>
-            <a:ext cx="1807118" cy="237744"/>
+            <a:off x="2566416" y="1563624"/>
+            <a:ext cx="1298448" cy="237744"/>
           </a:xfrm>
           <a:prstGeom prst="rect">
             <a:avLst/>
@@ -26049,7 +26309,7 @@
               <a:buNone/>
             </a:pPr>
             <a:r>
-              <a:rPr lang="en-US" sz="850" b="1" kern="0" spc="80" dirty="0">
+              <a:rPr lang="en-US" sz="850" b="1" kern="0" spc="80">
                 <a:solidFill>
                   <a:srgbClr val="FFFFFF"/>
                 </a:solidFill>
@@ -26057,9 +26317,9 @@
                 <a:ea typeface="Calibri" pitchFamily="34" charset="-122"/>
                 <a:cs typeface="Calibri" pitchFamily="34" charset="-120"/>
               </a:rPr>
-              <a:t>BASELINE</a:t>
-            </a:r>
-            <a:endParaRPr lang="en-US" sz="850" dirty="0"/>
+              <a:t>NOT SUFFICIENT</a:t>
+            </a:r>
+            <a:endParaRPr lang="en-US" sz="850"/>
           </a:p>
         </p:txBody>
       </p:sp>
@@ -26071,8 +26331,8 @@
         </p:nvSpPr>
         <p:spPr>
           <a:xfrm>
-            <a:off x="1077484" y="1920240"/>
-            <a:ext cx="4424471" cy="457200"/>
+            <a:off x="685800" y="1920240"/>
+            <a:ext cx="3179064" cy="457200"/>
           </a:xfrm>
           <a:prstGeom prst="rect">
             <a:avLst/>
@@ -26085,7 +26345,7 @@
           <a:lstStyle/>
           <a:p>
             <a:r>
-              <a:rPr lang="en-US" sz="1500" b="1" dirty="0">
+              <a:rPr lang="en-US" sz="1500" b="1">
                 <a:solidFill>
                   <a:srgbClr val="0E3F6E"/>
                 </a:solidFill>
@@ -26093,9 +26353,9 @@
                 <a:ea typeface="Calibri"/>
                 <a:cs typeface="Calibri"/>
               </a:rPr>
-              <a:t>Front Door Standard</a:t>
-            </a:r>
-            <a:endParaRPr lang="en-US" sz="1500" dirty="0">
+              <a:t>Consumption / Developer / Basic / Standard</a:t>
+            </a:r>
+            <a:endParaRPr lang="en-US" sz="1500">
               <a:solidFill>
                 <a:srgbClr val="000000"/>
               </a:solidFill>
@@ -26111,7 +26371,7 @@
               </a:lnSpc>
               <a:buNone/>
             </a:pPr>
-            <a:endParaRPr lang="en-US" sz="1500" b="1" dirty="0">
+            <a:endParaRPr lang="en-US" sz="1500" b="1">
               <a:solidFill>
                 <a:srgbClr val="0E3F6E"/>
               </a:solidFill>
@@ -26130,8 +26390,8 @@
         </p:nvSpPr>
         <p:spPr>
           <a:xfrm>
-            <a:off x="1077484" y="2350008"/>
-            <a:ext cx="4424471" cy="228600"/>
+            <a:off x="685800" y="2350008"/>
+            <a:ext cx="3179064" cy="228600"/>
           </a:xfrm>
           <a:prstGeom prst="rect">
             <a:avLst/>
@@ -26147,7 +26407,7 @@
               <a:buNone/>
             </a:pPr>
             <a:r>
-              <a:rPr lang="en-US" sz="800" b="1" kern="0" spc="120" dirty="0">
+              <a:rPr lang="en-US" sz="800" b="1" kern="0" spc="120">
                 <a:solidFill>
                   <a:srgbClr val="5A6B7D"/>
                 </a:solidFill>
@@ -26155,9 +26415,9 @@
                 <a:ea typeface="Calibri" pitchFamily="34" charset="-122"/>
                 <a:cs typeface="Calibri" pitchFamily="34" charset="-120"/>
               </a:rPr>
-              <a:t>SKU PROFILE</a:t>
-            </a:r>
-            <a:endParaRPr lang="en-US" sz="800" dirty="0"/>
+              <a:t>TIER PROFILE</a:t>
+            </a:r>
+            <a:endParaRPr lang="en-US" sz="800"/>
           </a:p>
         </p:txBody>
       </p:sp>
@@ -26169,8 +26429,8 @@
         </p:nvSpPr>
         <p:spPr>
           <a:xfrm>
-            <a:off x="1077484" y="2551176"/>
-            <a:ext cx="4424471" cy="457200"/>
+            <a:off x="685800" y="2551176"/>
+            <a:ext cx="3179064" cy="457200"/>
           </a:xfrm>
           <a:prstGeom prst="rect">
             <a:avLst/>
@@ -26188,7 +26448,7 @@
               </a:lnSpc>
             </a:pPr>
             <a:r>
-              <a:rPr lang="en-US" sz="1000" i="1" dirty="0">
+              <a:rPr lang="en-US" sz="1000" i="1">
                 <a:solidFill>
                   <a:srgbClr val="1B2836"/>
                 </a:solidFill>
@@ -26196,9 +26456,9 @@
                 <a:ea typeface="Calibri" pitchFamily="34" charset="-122"/>
                 <a:cs typeface="Calibri" pitchFamily="34" charset="-120"/>
               </a:rPr>
-              <a:t>CDN + global Layer 7 routing, no advanced security</a:t>
-            </a:r>
-            <a:endParaRPr lang="en-US" sz="1000" dirty="0"/>
+              <a:t>serverless, non-production and entry production tiers</a:t>
+            </a:r>
+            <a:endParaRPr lang="en-US" sz="1000"/>
           </a:p>
         </p:txBody>
       </p:sp>
@@ -26210,8 +26470,8 @@
         </p:nvSpPr>
         <p:spPr>
           <a:xfrm>
-            <a:off x="1077484" y="3026664"/>
-            <a:ext cx="4424471" cy="1207008"/>
+            <a:off x="685800" y="3026664"/>
+            <a:ext cx="3179064" cy="1207008"/>
           </a:xfrm>
           <a:prstGeom prst="rect">
             <a:avLst/>
@@ -26231,12 +26491,12 @@
               <a:buChar char="•"/>
             </a:pPr>
             <a:r>
-              <a:rPr lang="en-GB" sz="1050" dirty="0">
+              <a:rPr lang="en-GB" sz="1050">
                 <a:latin typeface="Calibri" panose="020F0502020204030204" pitchFamily="34" charset="0"/>
                 <a:ea typeface="Calibri" panose="020F0502020204030204" pitchFamily="34" charset="0"/>
                 <a:cs typeface="Calibri" panose="020F0502020204030204" pitchFamily="34" charset="0"/>
               </a:rPr>
-              <a:t>Anycast routing, caching, TLS termination and custom domains.</a:t>
+              <a:t>Consumption is serverless and per-call; Developer has no SLA (non-prod only).</a:t>
             </a:r>
           </a:p>
           <a:p>
@@ -26247,7 +26507,7 @@
               <a:buFont typeface="Arial" panose="020B0604020202020204" pitchFamily="34" charset="0"/>
               <a:buChar char="•"/>
             </a:pPr>
-            <a:endParaRPr lang="en-GB" sz="1050" dirty="0">
+            <a:endParaRPr lang="en-GB" sz="1050">
               <a:latin typeface="Calibri" panose="020F0502020204030204" pitchFamily="34" charset="0"/>
               <a:ea typeface="Calibri" panose="020F0502020204030204" pitchFamily="34" charset="0"/>
               <a:cs typeface="Calibri" panose="020F0502020204030204" pitchFamily="34" charset="0"/>
@@ -26259,12 +26519,12 @@
               <a:buChar char="•"/>
             </a:pPr>
             <a:r>
-              <a:rPr lang="en-GB" sz="1050" dirty="0">
+              <a:rPr lang="en-GB" sz="1050">
                 <a:latin typeface="Calibri"/>
                 <a:ea typeface="Calibri"/>
                 <a:cs typeface="Calibri"/>
               </a:rPr>
-              <a:t>No managed WAF or bot protection, and no Private Link origin support.</a:t>
+              <a:t>Basic and Standard carry a production SLA but no VNet injection.</a:t>
             </a:r>
           </a:p>
           <a:p>
@@ -26272,7 +26532,7 @@
               <a:buFont typeface="Arial" panose="020B0604020202020204" pitchFamily="34" charset="0"/>
               <a:buChar char="•"/>
             </a:pPr>
-            <a:endParaRPr lang="en-GB" sz="1050" dirty="0">
+            <a:endParaRPr lang="en-GB" sz="1050">
               <a:latin typeface="Calibri" panose="020F0502020204030204" pitchFamily="34" charset="0"/>
               <a:ea typeface="Calibri" panose="020F0502020204030204" pitchFamily="34" charset="0"/>
               <a:cs typeface="Calibri" panose="020F0502020204030204" pitchFamily="34" charset="0"/>
@@ -26287,14 +26547,14 @@
               <a:buChar char="•"/>
             </a:pPr>
             <a:r>
-              <a:rPr lang="en-GB" sz="1050" dirty="0">
+              <a:rPr lang="en-GB" sz="1050">
                 <a:latin typeface="Calibri"/>
                 <a:ea typeface="Calibri"/>
                 <a:cs typeface="Calibri"/>
               </a:rPr>
-              <a:t>Lower cost; suited to content delivery, not a secured API edge.</a:t>
-            </a:r>
-            <a:endParaRPr lang="en-GB" sz="1050" dirty="0">
+              <a:t>None provide the private networking or isolation this design needs.</a:t>
+            </a:r>
+            <a:endParaRPr lang="en-GB" sz="1050">
               <a:latin typeface="Calibri" panose="020F0502020204030204" pitchFamily="34" charset="0"/>
               <a:ea typeface="Calibri" panose="020F0502020204030204" pitchFamily="34" charset="0"/>
               <a:cs typeface="Calibri" panose="020F0502020204030204" pitchFamily="34" charset="0"/>
@@ -26310,8 +26570,8 @@
         </p:nvSpPr>
         <p:spPr>
           <a:xfrm>
-            <a:off x="1077484" y="4416552"/>
-            <a:ext cx="4424471" cy="539496"/>
+            <a:off x="685800" y="4416552"/>
+            <a:ext cx="3179064" cy="539496"/>
           </a:xfrm>
           <a:prstGeom prst="roundRect">
             <a:avLst>
@@ -26344,8 +26604,8 @@
         </p:nvSpPr>
         <p:spPr>
           <a:xfrm>
-            <a:off x="1268376" y="4416552"/>
-            <a:ext cx="4042685" cy="539496"/>
+            <a:off x="822960" y="4416552"/>
+            <a:ext cx="2904744" cy="539496"/>
           </a:xfrm>
           <a:prstGeom prst="rect">
             <a:avLst/>
@@ -26364,12 +26624,12 @@
               <a:buNone/>
             </a:pPr>
             <a:r>
-              <a:rPr lang="en-GB" sz="1050" b="1" dirty="0">
+              <a:rPr lang="en-GB" sz="1050" b="1">
                 <a:latin typeface="Calibri" panose="020F0502020204030204" pitchFamily="34" charset="0"/>
                 <a:ea typeface="Calibri" panose="020F0502020204030204" pitchFamily="34" charset="0"/>
                 <a:cs typeface="Calibri" panose="020F0502020204030204" pitchFamily="34" charset="0"/>
               </a:rPr>
-              <a:t>Not sufficient: no WAF and no Private Link origin for internal APIM.</a:t>
+              <a:t>Not sufficient: no VNet injection or private isolation for the platform.</a:t>
             </a:r>
           </a:p>
         </p:txBody>
@@ -26382,8 +26642,8 @@
         </p:nvSpPr>
         <p:spPr>
           <a:xfrm>
-            <a:off x="6423990" y="1417320"/>
-            <a:ext cx="4933518" cy="3657600"/>
+            <a:off x="4322064" y="1417320"/>
+            <a:ext cx="3544824" cy="3657600"/>
           </a:xfrm>
           <a:prstGeom prst="roundRect">
             <a:avLst>
@@ -26416,8 +26676,8 @@
         </p:nvSpPr>
         <p:spPr>
           <a:xfrm>
-            <a:off x="6678514" y="1581912"/>
-            <a:ext cx="2036190" cy="228600"/>
+            <a:off x="4504944" y="1581912"/>
+            <a:ext cx="1463040" cy="228600"/>
           </a:xfrm>
           <a:prstGeom prst="rect">
             <a:avLst/>
@@ -26433,7 +26693,7 @@
               <a:buNone/>
             </a:pPr>
             <a:r>
-              <a:rPr lang="en-US" sz="900" b="1" kern="0" spc="120" dirty="0">
+              <a:rPr lang="en-US" sz="900" b="1" kern="0" spc="120">
                 <a:solidFill>
                   <a:srgbClr val="5A6B7D"/>
                 </a:solidFill>
@@ -26441,9 +26701,9 @@
                 <a:ea typeface="Calibri" pitchFamily="34" charset="-122"/>
                 <a:cs typeface="Calibri" pitchFamily="34" charset="-120"/>
               </a:rPr>
-              <a:t>OPTION B</a:t>
-            </a:r>
-            <a:endParaRPr lang="en-US" sz="900" dirty="0"/>
+              <a:t>TARGET TIER</a:t>
+            </a:r>
+            <a:endParaRPr lang="en-US" sz="900"/>
           </a:p>
         </p:txBody>
       </p:sp>
@@ -26455,8 +26715,8 @@
         </p:nvSpPr>
         <p:spPr>
           <a:xfrm>
-            <a:off x="9295866" y="1563624"/>
-            <a:ext cx="1807118" cy="237744"/>
+            <a:off x="6385560" y="1563624"/>
+            <a:ext cx="1298448" cy="237744"/>
           </a:xfrm>
           <a:prstGeom prst="roundRect">
             <a:avLst>
@@ -26489,8 +26749,8 @@
         </p:nvSpPr>
         <p:spPr>
           <a:xfrm>
-            <a:off x="9295866" y="1563624"/>
-            <a:ext cx="1807118" cy="237744"/>
+            <a:off x="6385560" y="1563624"/>
+            <a:ext cx="1298448" cy="237744"/>
           </a:xfrm>
           <a:prstGeom prst="rect">
             <a:avLst/>
@@ -26506,7 +26766,7 @@
               <a:buNone/>
             </a:pPr>
             <a:r>
-              <a:rPr lang="en-US" sz="850" b="1" kern="0" spc="80" dirty="0">
+              <a:rPr lang="en-US" sz="850" b="1" kern="0" spc="80">
                 <a:solidFill>
                   <a:srgbClr val="FFFFFF"/>
                 </a:solidFill>
@@ -26516,7 +26776,7 @@
               </a:rPr>
               <a:t>CHOSEN</a:t>
             </a:r>
-            <a:endParaRPr lang="en-US" sz="850" dirty="0"/>
+            <a:endParaRPr lang="en-US" sz="850"/>
           </a:p>
         </p:txBody>
       </p:sp>
@@ -26528,8 +26788,8 @@
         </p:nvSpPr>
         <p:spPr>
           <a:xfrm>
-            <a:off x="6678514" y="1920240"/>
-            <a:ext cx="4424471" cy="457200"/>
+            <a:off x="4504944" y="1920240"/>
+            <a:ext cx="3179064" cy="457200"/>
           </a:xfrm>
           <a:prstGeom prst="rect">
             <a:avLst/>
@@ -26548,7 +26808,7 @@
               <a:buNone/>
             </a:pPr>
             <a:r>
-              <a:rPr lang="en-US" sz="1500" b="1" dirty="0">
+              <a:rPr lang="en-US" sz="1500" b="1">
                 <a:solidFill>
                   <a:srgbClr val="0E3F6E"/>
                 </a:solidFill>
@@ -26556,9 +26816,9 @@
                 <a:ea typeface="Calibri" pitchFamily="34" charset="-122"/>
                 <a:cs typeface="Calibri" pitchFamily="34" charset="-120"/>
               </a:rPr>
-              <a:t>Front Door Premium</a:t>
-            </a:r>
-            <a:endParaRPr lang="en-US" sz="1500" dirty="0"/>
+              <a:t>Premium v2</a:t>
+            </a:r>
+            <a:endParaRPr lang="en-US" sz="1500"/>
           </a:p>
         </p:txBody>
       </p:sp>
@@ -26570,8 +26830,8 @@
         </p:nvSpPr>
         <p:spPr>
           <a:xfrm>
-            <a:off x="6678514" y="2253996"/>
-            <a:ext cx="4424471" cy="228600"/>
+            <a:off x="4504944" y="2253996"/>
+            <a:ext cx="3179064" cy="228600"/>
           </a:xfrm>
           <a:prstGeom prst="rect">
             <a:avLst/>
@@ -26587,7 +26847,7 @@
               <a:buNone/>
             </a:pPr>
             <a:r>
-              <a:rPr lang="en-US" sz="800" b="1" kern="0" spc="120" dirty="0">
+              <a:rPr lang="en-US" sz="800" b="1" kern="0" spc="120">
                 <a:solidFill>
                   <a:srgbClr val="5A6B7D"/>
                 </a:solidFill>
@@ -26595,9 +26855,9 @@
                 <a:ea typeface="Calibri" pitchFamily="34" charset="-122"/>
                 <a:cs typeface="Calibri" pitchFamily="34" charset="-120"/>
               </a:rPr>
-              <a:t>SKU PROFILE</a:t>
-            </a:r>
-            <a:endParaRPr lang="en-US" sz="800" dirty="0"/>
+              <a:t>TIER PROFILE</a:t>
+            </a:r>
+            <a:endParaRPr lang="en-US" sz="800"/>
           </a:p>
         </p:txBody>
       </p:sp>
@@ -26609,8 +26869,8 @@
         </p:nvSpPr>
         <p:spPr>
           <a:xfrm>
-            <a:off x="6678514" y="2433828"/>
-            <a:ext cx="4424471" cy="457200"/>
+            <a:off x="4504944" y="2433828"/>
+            <a:ext cx="3179064" cy="457200"/>
           </a:xfrm>
           <a:prstGeom prst="rect">
             <a:avLst/>
@@ -26629,7 +26889,7 @@
               <a:buNone/>
             </a:pPr>
             <a:r>
-              <a:rPr lang="en-US" sz="1000" i="1" dirty="0">
+              <a:rPr lang="en-US" sz="1000" i="1">
                 <a:solidFill>
                   <a:srgbClr val="1B2836"/>
                 </a:solidFill>
@@ -26637,9 +26897,9 @@
                 <a:ea typeface="Calibri" pitchFamily="34" charset="-122"/>
                 <a:cs typeface="Calibri" pitchFamily="34" charset="-120"/>
               </a:rPr>
-              <a:t>Standard + managed WAF + Private Link origin</a:t>
-            </a:r>
-            <a:endParaRPr lang="en-US" sz="1000" dirty="0"/>
+              <a:t>VNet injection · internal mode · zones · scale units</a:t>
+            </a:r>
+            <a:endParaRPr lang="en-US" sz="1000"/>
           </a:p>
         </p:txBody>
       </p:sp>
@@ -26651,8 +26911,8 @@
         </p:nvSpPr>
         <p:spPr>
           <a:xfrm>
-            <a:off x="6678514" y="2807208"/>
-            <a:ext cx="4424471" cy="1426464"/>
+            <a:off x="4504944" y="2807208"/>
+            <a:ext cx="3179064" cy="1426464"/>
           </a:xfrm>
           <a:prstGeom prst="rect">
             <a:avLst/>
@@ -26672,7 +26932,7 @@
               <a:buChar char="•"/>
             </a:pPr>
             <a:r>
-              <a:rPr lang="en-GB" sz="1050" dirty="0">
+              <a:rPr lang="en-GB" sz="1050">
                 <a:solidFill>
                   <a:srgbClr val="1B2836"/>
                 </a:solidFill>
@@ -26680,7 +26940,7 @@
                 <a:ea typeface="Calibri" pitchFamily="34" charset="-122"/>
                 <a:cs typeface="Calibri" pitchFamily="34" charset="-120"/>
               </a:rPr>
-              <a:t>Managed WAF (DRS 2.1) with bot protection and rate limiting.</a:t>
+              <a:t>VNet injection in internal mode, with no public endpoint.</a:t>
             </a:r>
           </a:p>
           <a:p>
@@ -26692,7 +26952,7 @@
               <a:buChar char="•"/>
             </a:pPr>
             <a:r>
-              <a:rPr lang="en-GB" sz="1050" dirty="0">
+              <a:rPr lang="en-GB" sz="1050">
                 <a:solidFill>
                   <a:srgbClr val="1B2836"/>
                 </a:solidFill>
@@ -26700,7 +26960,7 @@
                 <a:ea typeface="Calibri" pitchFamily="34" charset="-122"/>
                 <a:cs typeface="Calibri" pitchFamily="34" charset="-120"/>
               </a:rPr>
-              <a:t>Private Link origin to an internal-mode APIM, so no public IP.</a:t>
+              <a:t>Inbound Private Link and availability-zone support.</a:t>
             </a:r>
           </a:p>
           <a:p>
@@ -26712,7 +26972,7 @@
               <a:buChar char="•"/>
             </a:pPr>
             <a:r>
-              <a:rPr lang="en-GB" sz="1050" dirty="0">
+              <a:rPr lang="en-GB" sz="1050">
                 <a:solidFill>
                   <a:srgbClr val="1B2836"/>
                 </a:solidFill>
@@ -26720,7 +26980,7 @@
                 <a:ea typeface="Calibri" pitchFamily="34" charset="-122"/>
                 <a:cs typeface="Calibri" pitchFamily="34" charset="-120"/>
               </a:rPr>
-              <a:t>DDoS protection and enhanced security analytics.</a:t>
+              <a:t>Simplified networking versus classic Premium.</a:t>
             </a:r>
           </a:p>
           <a:p>
@@ -26732,7 +26992,7 @@
               <a:buChar char="•"/>
             </a:pPr>
             <a:r>
-              <a:rPr lang="en-GB" sz="1050" dirty="0">
+              <a:rPr lang="en-GB" sz="1050">
                 <a:solidFill>
                   <a:srgbClr val="1B2836"/>
                 </a:solidFill>
@@ -26740,9 +27000,9 @@
                 <a:ea typeface="Calibri" pitchFamily="34" charset="-122"/>
                 <a:cs typeface="Calibri" pitchFamily="34" charset="-120"/>
               </a:rPr>
-              <a:t>The hardened, governed edge this design requires.</a:t>
-            </a:r>
-            <a:endParaRPr lang="en-US" sz="1050" dirty="0"/>
+              <a:t>Scale units, workspaces and full policy governance.</a:t>
+            </a:r>
+            <a:endParaRPr lang="en-US" sz="1050"/>
           </a:p>
         </p:txBody>
       </p:sp>
@@ -26754,8 +27014,8 @@
         </p:nvSpPr>
         <p:spPr>
           <a:xfrm>
-            <a:off x="6678514" y="4416552"/>
-            <a:ext cx="4424471" cy="539496"/>
+            <a:off x="4504944" y="4416552"/>
+            <a:ext cx="3179064" cy="539496"/>
           </a:xfrm>
           <a:prstGeom prst="roundRect">
             <a:avLst>
@@ -26788,8 +27048,8 @@
         </p:nvSpPr>
         <p:spPr>
           <a:xfrm>
-            <a:off x="6869406" y="4416552"/>
-            <a:ext cx="4042685" cy="658368"/>
+            <a:off x="4642104" y="4416552"/>
+            <a:ext cx="2904744" cy="658368"/>
           </a:xfrm>
           <a:prstGeom prst="rect">
             <a:avLst/>
@@ -26807,7 +27067,7 @@
               </a:lnSpc>
             </a:pPr>
             <a:r>
-              <a:rPr lang="en-GB" sz="1050" b="1" dirty="0">
+              <a:rPr lang="en-GB" sz="1050" b="1">
                 <a:solidFill>
                   <a:srgbClr val="1B2836"/>
                 </a:solidFill>
@@ -26815,9 +27075,1014 @@
                 <a:ea typeface="Calibri" pitchFamily="34" charset="-122"/>
                 <a:cs typeface="Calibri" pitchFamily="34" charset="-120"/>
               </a:rPr>
-              <a:t>Chosen: WAF plus Private Link origin gives a secure, private API edge.</a:t>
-            </a:r>
-            <a:endParaRPr lang="en-US" sz="1050" dirty="0"/>
+              <a:t>Chosen: the isolation, scale and governance a strategic platform needs.</a:t>
+            </a:r>
+            <a:endParaRPr lang="en-US" sz="1050"/>
+          </a:p>
+        </p:txBody>
+      </p:sp>
+      <p:sp>
+        <p:nvSpPr>
+          <p:cNvPr id="27" name="Shape 25"/>
+          <p:cNvSpPr/>
+          <p:nvPr/>
+        </p:nvSpPr>
+        <p:spPr>
+          <a:xfrm>
+            <a:off x="8141208" y="1417320"/>
+            <a:ext cx="3544824" cy="3657600"/>
+          </a:xfrm>
+          <a:prstGeom prst="roundRect">
+            <a:avLst>
+              <a:gd name="adj" fmla="val 1548"/>
+            </a:avLst>
+          </a:prstGeom>
+          <a:solidFill>
+            <a:srgbClr val="F7FAFC"/>
+          </a:solidFill>
+          <a:ln w="12700">
+            <a:solidFill>
+              <a:srgbClr val="3F6B8F"/>
+            </a:solidFill>
+            <a:prstDash val="solid"/>
+          </a:ln>
+        </p:spPr>
+        <p:txBody>
+          <a:bodyPr/>
+          <a:lstStyle/>
+          <a:p>
+            <a:endParaRPr lang="en-GB"/>
+          </a:p>
+        </p:txBody>
+      </p:sp>
+      <p:sp>
+        <p:nvSpPr>
+          <p:cNvPr id="28" name="Text 26"/>
+          <p:cNvSpPr txBox="1"/>
+          <p:nvPr/>
+        </p:nvSpPr>
+        <p:spPr>
+          <a:xfrm>
+            <a:off x="8324088" y="1581912"/>
+            <a:ext cx="1463040" cy="228600"/>
+          </a:xfrm>
+          <a:prstGeom prst="rect">
+            <a:avLst/>
+          </a:prstGeom>
+          <a:noFill/>
+          <a:ln/>
+        </p:spPr>
+        <p:txBody>
+          <a:bodyPr wrap="square" lIns="0" tIns="0" rIns="0" bIns="0" rtlCol="0" anchor="ctr"/>
+          <a:lstStyle/>
+          <a:p>
+            <a:pPr marL="0" indent="0" algn="l">
+              <a:buNone/>
+            </a:pPr>
+            <a:r>
+              <a:rPr lang="en-US" sz="900" b="1" kern="0" spc="120">
+                <a:solidFill>
+                  <a:srgbClr val="5A6B7D"/>
+                </a:solidFill>
+                <a:latin typeface="Calibri" pitchFamily="34" charset="0"/>
+                <a:ea typeface="Calibri" pitchFamily="34" charset="-122"/>
+                <a:cs typeface="Calibri" pitchFamily="34" charset="-120"/>
+              </a:rPr>
+              <a:t>ALTERNATIVE</a:t>
+            </a:r>
+            <a:endParaRPr lang="en-US" sz="900"/>
+          </a:p>
+        </p:txBody>
+      </p:sp>
+      <p:sp>
+        <p:nvSpPr>
+          <p:cNvPr id="29" name="Shape 27"/>
+          <p:cNvSpPr/>
+          <p:nvPr/>
+        </p:nvSpPr>
+        <p:spPr>
+          <a:xfrm>
+            <a:off x="10204704" y="1563624"/>
+            <a:ext cx="1298448" cy="237744"/>
+          </a:xfrm>
+          <a:prstGeom prst="roundRect">
+            <a:avLst>
+              <a:gd name="adj" fmla="val 50000"/>
+            </a:avLst>
+          </a:prstGeom>
+          <a:solidFill>
+            <a:srgbClr val="3F6B8F"/>
+          </a:solidFill>
+          <a:ln w="12700">
+            <a:solidFill>
+              <a:srgbClr val="002060"/>
+            </a:solidFill>
+            <a:prstDash val="solid"/>
+          </a:ln>
+        </p:spPr>
+        <p:txBody>
+          <a:bodyPr/>
+          <a:lstStyle/>
+          <a:p>
+            <a:endParaRPr lang="en-GB"/>
+          </a:p>
+        </p:txBody>
+      </p:sp>
+      <p:sp>
+        <p:nvSpPr>
+          <p:cNvPr id="30" name="Text 28"/>
+          <p:cNvSpPr txBox="1"/>
+          <p:nvPr/>
+        </p:nvSpPr>
+        <p:spPr>
+          <a:xfrm>
+            <a:off x="10204704" y="1563624"/>
+            <a:ext cx="1298448" cy="237744"/>
+          </a:xfrm>
+          <a:prstGeom prst="rect">
+            <a:avLst/>
+          </a:prstGeom>
+          <a:noFill/>
+          <a:ln/>
+        </p:spPr>
+        <p:txBody>
+          <a:bodyPr wrap="square" lIns="0" tIns="0" rIns="0" bIns="0" rtlCol="0" anchor="ctr"/>
+          <a:lstStyle/>
+          <a:p>
+            <a:pPr marL="0" indent="0" algn="ctr">
+              <a:buNone/>
+            </a:pPr>
+            <a:r>
+              <a:rPr lang="en-US" sz="850" b="1" kern="0" spc="80">
+                <a:solidFill>
+                  <a:srgbClr val="FFFFFF"/>
+                </a:solidFill>
+                <a:latin typeface="Calibri" pitchFamily="34" charset="0"/>
+                <a:ea typeface="Calibri" pitchFamily="34" charset="-122"/>
+                <a:cs typeface="Calibri" pitchFamily="34" charset="-120"/>
+              </a:rPr>
+              <a:t>IF MULTI-REGION</a:t>
+            </a:r>
+            <a:endParaRPr lang="en-US" sz="850"/>
+          </a:p>
+        </p:txBody>
+      </p:sp>
+      <p:sp>
+        <p:nvSpPr>
+          <p:cNvPr id="31" name="Text 29"/>
+          <p:cNvSpPr txBox="1"/>
+          <p:nvPr/>
+        </p:nvSpPr>
+        <p:spPr>
+          <a:xfrm>
+            <a:off x="8324088" y="1920240"/>
+            <a:ext cx="3179064" cy="457200"/>
+          </a:xfrm>
+          <a:prstGeom prst="rect">
+            <a:avLst/>
+          </a:prstGeom>
+          <a:noFill/>
+          <a:ln/>
+        </p:spPr>
+        <p:txBody>
+          <a:bodyPr wrap="square" lIns="0" tIns="0" rIns="0" bIns="0" rtlCol="0" anchor="t"/>
+          <a:lstStyle/>
+          <a:p>
+            <a:pPr marL="0" indent="0" algn="l">
+              <a:lnSpc>
+                <a:spcPts val="1900"/>
+              </a:lnSpc>
+              <a:buNone/>
+            </a:pPr>
+            <a:r>
+              <a:rPr lang="en-US" sz="1500" b="1">
+                <a:solidFill>
+                  <a:srgbClr val="0E3F6E"/>
+                </a:solidFill>
+                <a:latin typeface="Calibri" pitchFamily="34" charset="0"/>
+                <a:ea typeface="Calibri" pitchFamily="34" charset="-122"/>
+                <a:cs typeface="Calibri" pitchFamily="34" charset="-120"/>
+              </a:rPr>
+              <a:t>Classic Premium</a:t>
+            </a:r>
+            <a:endParaRPr lang="en-US" sz="1500"/>
+          </a:p>
+        </p:txBody>
+      </p:sp>
+      <p:sp>
+        <p:nvSpPr>
+          <p:cNvPr id="32" name="Text 30"/>
+          <p:cNvSpPr txBox="1"/>
+          <p:nvPr/>
+        </p:nvSpPr>
+        <p:spPr>
+          <a:xfrm>
+            <a:off x="8324088" y="2350008"/>
+            <a:ext cx="3179064" cy="228600"/>
+          </a:xfrm>
+          <a:prstGeom prst="rect">
+            <a:avLst/>
+          </a:prstGeom>
+          <a:noFill/>
+          <a:ln/>
+        </p:spPr>
+        <p:txBody>
+          <a:bodyPr wrap="square" lIns="0" tIns="0" rIns="0" bIns="0" rtlCol="0" anchor="ctr"/>
+          <a:lstStyle/>
+          <a:p>
+            <a:pPr marL="0" indent="0" algn="l">
+              <a:buNone/>
+            </a:pPr>
+            <a:r>
+              <a:rPr lang="en-US" sz="800" b="1" kern="0" spc="120">
+                <a:solidFill>
+                  <a:srgbClr val="5A6B7D"/>
+                </a:solidFill>
+                <a:latin typeface="Calibri" pitchFamily="34" charset="0"/>
+                <a:ea typeface="Calibri" pitchFamily="34" charset="-122"/>
+                <a:cs typeface="Calibri" pitchFamily="34" charset="-120"/>
+              </a:rPr>
+              <a:t>TIER PROFILE</a:t>
+            </a:r>
+            <a:endParaRPr lang="en-US" sz="800"/>
+          </a:p>
+        </p:txBody>
+      </p:sp>
+      <p:sp>
+        <p:nvSpPr>
+          <p:cNvPr id="33" name="Text 31"/>
+          <p:cNvSpPr txBox="1"/>
+          <p:nvPr/>
+        </p:nvSpPr>
+        <p:spPr>
+          <a:xfrm>
+            <a:off x="8324088" y="2551176"/>
+            <a:ext cx="3179064" cy="457200"/>
+          </a:xfrm>
+          <a:prstGeom prst="rect">
+            <a:avLst/>
+          </a:prstGeom>
+          <a:noFill/>
+          <a:ln/>
+        </p:spPr>
+        <p:txBody>
+          <a:bodyPr wrap="square" lIns="0" tIns="0" rIns="0" bIns="0" rtlCol="0" anchor="t"/>
+          <a:lstStyle/>
+          <a:p>
+            <a:pPr marL="0" indent="0" algn="l">
+              <a:lnSpc>
+                <a:spcPts val="1250"/>
+              </a:lnSpc>
+              <a:buNone/>
+            </a:pPr>
+            <a:r>
+              <a:rPr lang="en-US" sz="1000" i="1">
+                <a:solidFill>
+                  <a:srgbClr val="1B2836"/>
+                </a:solidFill>
+                <a:latin typeface="Calibri" pitchFamily="34" charset="0"/>
+                <a:ea typeface="Calibri" pitchFamily="34" charset="-122"/>
+                <a:cs typeface="Calibri" pitchFamily="34" charset="-120"/>
+              </a:rPr>
+              <a:t>established line · instance multi-region today</a:t>
+            </a:r>
+            <a:endParaRPr lang="en-US" sz="1000"/>
+          </a:p>
+        </p:txBody>
+      </p:sp>
+      <p:sp>
+        <p:nvSpPr>
+          <p:cNvPr id="34" name="Text 32"/>
+          <p:cNvSpPr txBox="1"/>
+          <p:nvPr/>
+        </p:nvSpPr>
+        <p:spPr>
+          <a:xfrm>
+            <a:off x="8324088" y="2891028"/>
+            <a:ext cx="3179064" cy="1342644"/>
+          </a:xfrm>
+          <a:prstGeom prst="rect">
+            <a:avLst/>
+          </a:prstGeom>
+          <a:noFill/>
+          <a:ln/>
+        </p:spPr>
+        <p:txBody>
+          <a:bodyPr wrap="square" lIns="0" tIns="0" rIns="0" bIns="0" rtlCol="0" anchor="t"/>
+          <a:lstStyle/>
+          <a:p>
+            <a:pPr marL="342900" indent="-342900">
+              <a:spcAft>
+                <a:spcPts val="600"/>
+              </a:spcAft>
+              <a:buSzPct val="100000"/>
+              <a:buChar char="•"/>
+            </a:pPr>
+            <a:r>
+              <a:rPr lang="en-US" sz="1050">
+                <a:solidFill>
+                  <a:srgbClr val="1B2836"/>
+                </a:solidFill>
+                <a:latin typeface="Calibri" pitchFamily="34" charset="0"/>
+                <a:ea typeface="Calibri" pitchFamily="34" charset="-122"/>
+                <a:cs typeface="Calibri" pitchFamily="34" charset="-120"/>
+              </a:rPr>
+              <a:t>The only tier with instance-level multi-region deployment today.</a:t>
+            </a:r>
+          </a:p>
+          <a:p>
+            <a:pPr marL="342900" indent="-342900">
+              <a:spcAft>
+                <a:spcPts val="600"/>
+              </a:spcAft>
+              <a:buSzPct val="100000"/>
+              <a:buChar char="•"/>
+            </a:pPr>
+            <a:r>
+              <a:rPr lang="en-US" sz="1050">
+                <a:solidFill>
+                  <a:srgbClr val="1B2836"/>
+                </a:solidFill>
+                <a:latin typeface="Calibri" pitchFamily="34" charset="0"/>
+                <a:ea typeface="Calibri" pitchFamily="34" charset="-122"/>
+                <a:cs typeface="Calibri" pitchFamily="34" charset="-120"/>
+              </a:rPr>
+              <a:t>VNet injection and workspaces; established and mature.</a:t>
+            </a:r>
+            <a:endParaRPr lang="en-US" sz="1050"/>
+          </a:p>
+          <a:p>
+            <a:pPr marL="342900" indent="-342900">
+              <a:spcAft>
+                <a:spcPts val="600"/>
+              </a:spcAft>
+              <a:buSzPct val="100000"/>
+              <a:buChar char="•"/>
+            </a:pPr>
+            <a:r>
+              <a:rPr lang="en-US" sz="1050">
+                <a:solidFill>
+                  <a:srgbClr val="1B2836"/>
+                </a:solidFill>
+                <a:latin typeface="Calibri" pitchFamily="34" charset="0"/>
+                <a:ea typeface="Calibri" pitchFamily="34" charset="-122"/>
+                <a:cs typeface="Calibri" pitchFamily="34" charset="-120"/>
+              </a:rPr>
+              <a:t>Needs the control-plane bypass route that v2 removes.</a:t>
+            </a:r>
+            <a:endParaRPr lang="en-US" sz="1050"/>
+          </a:p>
+          <a:p>
+            <a:pPr marL="342900" indent="-342900">
+              <a:spcAft>
+                <a:spcPts val="600"/>
+              </a:spcAft>
+              <a:buSzPct val="100000"/>
+              <a:buChar char="•"/>
+            </a:pPr>
+            <a:r>
+              <a:rPr lang="en-US" sz="1050">
+                <a:solidFill>
+                  <a:srgbClr val="1B2836"/>
+                </a:solidFill>
+                <a:latin typeface="Calibri" pitchFamily="34" charset="0"/>
+                <a:ea typeface="Calibri" pitchFamily="34" charset="-122"/>
+                <a:cs typeface="Calibri" pitchFamily="34" charset="-120"/>
+              </a:rPr>
+              <a:t>Use where multi-region is needed on day one.</a:t>
+            </a:r>
+            <a:endParaRPr lang="en-US" sz="1050"/>
+          </a:p>
+        </p:txBody>
+      </p:sp>
+      <p:sp>
+        <p:nvSpPr>
+          <p:cNvPr id="35" name="Shape 33"/>
+          <p:cNvSpPr/>
+          <p:nvPr/>
+        </p:nvSpPr>
+        <p:spPr>
+          <a:xfrm>
+            <a:off x="8324088" y="4297680"/>
+            <a:ext cx="3179064" cy="658368"/>
+          </a:xfrm>
+          <a:prstGeom prst="roundRect">
+            <a:avLst>
+              <a:gd name="adj" fmla="val 8333"/>
+            </a:avLst>
+          </a:prstGeom>
+          <a:solidFill>
+            <a:srgbClr val="EDF2F7"/>
+          </a:solidFill>
+          <a:ln w="12700">
+            <a:solidFill>
+              <a:srgbClr val="EDF2F7"/>
+            </a:solidFill>
+            <a:prstDash val="solid"/>
+          </a:ln>
+        </p:spPr>
+        <p:txBody>
+          <a:bodyPr/>
+          <a:lstStyle/>
+          <a:p>
+            <a:endParaRPr lang="en-GB"/>
+          </a:p>
+        </p:txBody>
+      </p:sp>
+      <p:sp>
+        <p:nvSpPr>
+          <p:cNvPr id="36" name="Text 34"/>
+          <p:cNvSpPr txBox="1"/>
+          <p:nvPr/>
+        </p:nvSpPr>
+        <p:spPr>
+          <a:xfrm>
+            <a:off x="8461248" y="4297680"/>
+            <a:ext cx="2904744" cy="658368"/>
+          </a:xfrm>
+          <a:prstGeom prst="rect">
+            <a:avLst/>
+          </a:prstGeom>
+          <a:noFill/>
+          <a:ln/>
+        </p:spPr>
+        <p:txBody>
+          <a:bodyPr wrap="square" lIns="0" tIns="0" rIns="0" bIns="0" rtlCol="0" anchor="ctr"/>
+          <a:lstStyle/>
+          <a:p>
+            <a:pPr fontAlgn="t">
+              <a:lnSpc>
+                <a:spcPct val="100000"/>
+              </a:lnSpc>
+              <a:buNone/>
+            </a:pPr>
+            <a:r>
+              <a:rPr lang="en-GB" sz="1050" b="1">
+                <a:latin typeface="Calibri" panose="020F0502020204030204" pitchFamily="34" charset="0"/>
+                <a:ea typeface="Calibri" panose="020F0502020204030204" pitchFamily="34" charset="0"/>
+                <a:cs typeface="Calibri" panose="020F0502020204030204" pitchFamily="34" charset="0"/>
+              </a:rPr>
+              <a:t>Alternative: use if instance multi-region is needed before v2 supports it.</a:t>
+            </a:r>
+          </a:p>
+        </p:txBody>
+      </p:sp>
+      <p:sp>
+        <p:nvSpPr>
+          <p:cNvPr id="300" name="envlabel"/>
+          <p:cNvSpPr txBox="1"/>
+          <p:nvPr/>
+        </p:nvSpPr>
+        <p:spPr>
+          <a:xfrm>
+            <a:off x="822960" y="5230368"/>
+            <a:ext cx="10515600" cy="274320"/>
+          </a:xfrm>
+          <a:prstGeom prst="rect">
+            <a:avLst/>
+          </a:prstGeom>
+          <a:noFill/>
+        </p:spPr>
+        <p:txBody>
+          <a:bodyPr wrap="square" anchor="ctr">
+            <a:normAutofit/>
+          </a:bodyPr>
+          <a:lstStyle/>
+          <a:p>
+            <a:pPr algn="l"/>
+            <a:r>
+              <a:rPr lang="en-US" sz="1100" b="1">
+                <a:solidFill>
+                  <a:srgbClr val="5A6B7D"/>
+                </a:solidFill>
+                <a:latin typeface="Calibri"/>
+              </a:rPr>
+              <a:t>ENVIRONMENT → TIER MAPPING</a:t>
+            </a:r>
+          </a:p>
+        </p:txBody>
+      </p:sp>
+      <p:sp>
+        <p:nvSpPr>
+          <p:cNvPr id="301" name="dev"/>
+          <p:cNvSpPr/>
+          <p:nvPr/>
+        </p:nvSpPr>
+        <p:spPr>
+          <a:xfrm>
+            <a:off x="868680" y="5596128"/>
+            <a:ext cx="1234440" cy="868680"/>
+          </a:xfrm>
+          <a:prstGeom prst="roundRect">
+            <a:avLst>
+              <a:gd name="adj" fmla="val 12000"/>
+            </a:avLst>
+          </a:prstGeom>
+          <a:solidFill>
+            <a:srgbClr val="E4ECF5"/>
+          </a:solidFill>
+          <a:ln w="12700">
+            <a:solidFill>
+              <a:srgbClr val="C9D4E0"/>
+            </a:solidFill>
+          </a:ln>
+        </p:spPr>
+        <p:txBody>
+          <a:bodyPr/>
+          <a:lstStyle/>
+          <a:p>
+            <a:endParaRPr/>
+          </a:p>
+        </p:txBody>
+      </p:sp>
+      <p:sp>
+        <p:nvSpPr>
+          <p:cNvPr id="302" name="devt"/>
+          <p:cNvSpPr txBox="1"/>
+          <p:nvPr/>
+        </p:nvSpPr>
+        <p:spPr>
+          <a:xfrm>
+            <a:off x="868680" y="5596128"/>
+            <a:ext cx="1234440" cy="868680"/>
+          </a:xfrm>
+          <a:prstGeom prst="rect">
+            <a:avLst/>
+          </a:prstGeom>
+          <a:noFill/>
+        </p:spPr>
+        <p:txBody>
+          <a:bodyPr wrap="square" anchor="ctr">
+            <a:normAutofit/>
+          </a:bodyPr>
+          <a:lstStyle/>
+          <a:p>
+            <a:pPr algn="ctr"/>
+            <a:r>
+              <a:rPr lang="en-US" sz="1500" b="1">
+                <a:solidFill>
+                  <a:srgbClr val="1B2836"/>
+                </a:solidFill>
+                <a:latin typeface="Calibri"/>
+              </a:rPr>
+              <a:t>DEV</a:t>
+            </a:r>
+          </a:p>
+          <a:p>
+            <a:pPr algn="ctr"/>
+            <a:r>
+              <a:rPr lang="en-US" sz="950" b="0">
+                <a:solidFill>
+                  <a:srgbClr val="5A6B7D"/>
+                </a:solidFill>
+                <a:latin typeface="Calibri"/>
+              </a:rPr>
+              <a:t>Non-prod</a:t>
+            </a:r>
+          </a:p>
+        </p:txBody>
+      </p:sp>
+      <p:sp>
+        <p:nvSpPr>
+          <p:cNvPr id="303" name="sit"/>
+          <p:cNvSpPr/>
+          <p:nvPr/>
+        </p:nvSpPr>
+        <p:spPr>
+          <a:xfrm>
+            <a:off x="2231136" y="5596128"/>
+            <a:ext cx="1234440" cy="868680"/>
+          </a:xfrm>
+          <a:prstGeom prst="roundRect">
+            <a:avLst>
+              <a:gd name="adj" fmla="val 12000"/>
+            </a:avLst>
+          </a:prstGeom>
+          <a:solidFill>
+            <a:srgbClr val="E4ECF5"/>
+          </a:solidFill>
+          <a:ln w="12700">
+            <a:solidFill>
+              <a:srgbClr val="C9D4E0"/>
+            </a:solidFill>
+          </a:ln>
+        </p:spPr>
+        <p:txBody>
+          <a:bodyPr/>
+          <a:lstStyle/>
+          <a:p>
+            <a:endParaRPr/>
+          </a:p>
+        </p:txBody>
+      </p:sp>
+      <p:sp>
+        <p:nvSpPr>
+          <p:cNvPr id="304" name="sitt"/>
+          <p:cNvSpPr txBox="1"/>
+          <p:nvPr/>
+        </p:nvSpPr>
+        <p:spPr>
+          <a:xfrm>
+            <a:off x="2231136" y="5596128"/>
+            <a:ext cx="1234440" cy="868680"/>
+          </a:xfrm>
+          <a:prstGeom prst="rect">
+            <a:avLst/>
+          </a:prstGeom>
+          <a:noFill/>
+        </p:spPr>
+        <p:txBody>
+          <a:bodyPr wrap="square" anchor="ctr">
+            <a:normAutofit/>
+          </a:bodyPr>
+          <a:lstStyle/>
+          <a:p>
+            <a:pPr algn="ctr"/>
+            <a:r>
+              <a:rPr lang="en-US" sz="1500" b="1">
+                <a:solidFill>
+                  <a:srgbClr val="1B2836"/>
+                </a:solidFill>
+                <a:latin typeface="Calibri"/>
+              </a:rPr>
+              <a:t>SIT</a:t>
+            </a:r>
+          </a:p>
+          <a:p>
+            <a:pPr algn="ctr"/>
+            <a:r>
+              <a:rPr lang="en-US" sz="950" b="0">
+                <a:solidFill>
+                  <a:srgbClr val="5A6B7D"/>
+                </a:solidFill>
+                <a:latin typeface="Calibri"/>
+              </a:rPr>
+              <a:t>Non-prod</a:t>
+            </a:r>
+          </a:p>
+        </p:txBody>
+      </p:sp>
+      <p:cxnSp>
+        <p:nvCxnSpPr>
+          <p:cNvPr id="305" name="arr1"/>
+          <p:cNvCxnSpPr/>
+          <p:nvPr/>
+        </p:nvCxnSpPr>
+        <p:spPr>
+          <a:xfrm>
+            <a:off x="3538728" y="6021324"/>
+            <a:ext cx="457200" cy="1"/>
+          </a:xfrm>
+          <a:prstGeom prst="straightConnector1">
+            <a:avLst/>
+          </a:prstGeom>
+          <a:ln w="19050">
+            <a:solidFill>
+              <a:srgbClr val="3F6B8F"/>
+            </a:solidFill>
+            <a:tailEnd type="triangle"/>
+          </a:ln>
+        </p:spPr>
+      </p:cxnSp>
+      <p:sp>
+        <p:nvSpPr>
+          <p:cNvPr id="306" name="devtier"/>
+          <p:cNvSpPr/>
+          <p:nvPr/>
+        </p:nvSpPr>
+        <p:spPr>
+          <a:xfrm>
+            <a:off x="4105656" y="5596128"/>
+            <a:ext cx="1828800" cy="868680"/>
+          </a:xfrm>
+          <a:prstGeom prst="roundRect">
+            <a:avLst>
+              <a:gd name="adj" fmla="val 12000"/>
+            </a:avLst>
+          </a:prstGeom>
+          <a:solidFill>
+            <a:srgbClr val="EDF2F7"/>
+          </a:solidFill>
+          <a:ln w="12700">
+            <a:solidFill>
+              <a:srgbClr val="3F6B8F"/>
+            </a:solidFill>
+          </a:ln>
+        </p:spPr>
+        <p:txBody>
+          <a:bodyPr/>
+          <a:lstStyle/>
+          <a:p>
+            <a:endParaRPr/>
+          </a:p>
+        </p:txBody>
+      </p:sp>
+      <p:sp>
+        <p:nvSpPr>
+          <p:cNvPr id="307" name="devtiert"/>
+          <p:cNvSpPr txBox="1"/>
+          <p:nvPr/>
+        </p:nvSpPr>
+        <p:spPr>
+          <a:xfrm>
+            <a:off x="4105656" y="5596128"/>
+            <a:ext cx="1828800" cy="868680"/>
+          </a:xfrm>
+          <a:prstGeom prst="rect">
+            <a:avLst/>
+          </a:prstGeom>
+          <a:noFill/>
+        </p:spPr>
+        <p:txBody>
+          <a:bodyPr wrap="square" anchor="ctr">
+            <a:normAutofit/>
+          </a:bodyPr>
+          <a:lstStyle/>
+          <a:p>
+            <a:pPr algn="ctr"/>
+            <a:r>
+              <a:rPr lang="en-US" sz="1300" b="1">
+                <a:solidFill>
+                  <a:srgbClr val="0E3F6E"/>
+                </a:solidFill>
+                <a:latin typeface="Calibri"/>
+              </a:rPr>
+              <a:t>Developer tier</a:t>
+            </a:r>
+          </a:p>
+          <a:p>
+            <a:pPr algn="ctr"/>
+            <a:r>
+              <a:rPr lang="en-US" sz="950" b="0">
+                <a:solidFill>
+                  <a:srgbClr val="5A6B7D"/>
+                </a:solidFill>
+                <a:latin typeface="Calibri"/>
+              </a:rPr>
+              <a:t>full features · no SLA</a:t>
+            </a:r>
+          </a:p>
+        </p:txBody>
+      </p:sp>
+      <p:sp>
+        <p:nvSpPr>
+          <p:cNvPr id="311" name="uat"/>
+          <p:cNvSpPr/>
+          <p:nvPr/>
+        </p:nvSpPr>
+        <p:spPr>
+          <a:xfrm>
+            <a:off x="6355080" y="5596128"/>
+            <a:ext cx="1234440" cy="868680"/>
+          </a:xfrm>
+          <a:prstGeom prst="roundRect">
+            <a:avLst>
+              <a:gd name="adj" fmla="val 12000"/>
+            </a:avLst>
+          </a:prstGeom>
+          <a:solidFill>
+            <a:srgbClr val="E4ECF5"/>
+          </a:solidFill>
+          <a:ln w="12700">
+            <a:solidFill>
+              <a:srgbClr val="C9D4E0"/>
+            </a:solidFill>
+          </a:ln>
+        </p:spPr>
+        <p:txBody>
+          <a:bodyPr/>
+          <a:lstStyle/>
+          <a:p>
+            <a:endParaRPr/>
+          </a:p>
+        </p:txBody>
+      </p:sp>
+      <p:sp>
+        <p:nvSpPr>
+          <p:cNvPr id="312" name="uatt"/>
+          <p:cNvSpPr txBox="1"/>
+          <p:nvPr/>
+        </p:nvSpPr>
+        <p:spPr>
+          <a:xfrm>
+            <a:off x="6355080" y="5596128"/>
+            <a:ext cx="1234440" cy="868680"/>
+          </a:xfrm>
+          <a:prstGeom prst="rect">
+            <a:avLst/>
+          </a:prstGeom>
+          <a:noFill/>
+        </p:spPr>
+        <p:txBody>
+          <a:bodyPr wrap="square" anchor="ctr">
+            <a:normAutofit/>
+          </a:bodyPr>
+          <a:lstStyle/>
+          <a:p>
+            <a:pPr algn="ctr"/>
+            <a:r>
+              <a:rPr lang="en-US" sz="1500" b="1">
+                <a:solidFill>
+                  <a:srgbClr val="1B2836"/>
+                </a:solidFill>
+                <a:latin typeface="Calibri"/>
+              </a:rPr>
+              <a:t>UAT</a:t>
+            </a:r>
+          </a:p>
+          <a:p>
+            <a:pPr algn="ctr"/>
+            <a:r>
+              <a:rPr lang="en-US" sz="950" b="0">
+                <a:solidFill>
+                  <a:srgbClr val="5A6B7D"/>
+                </a:solidFill>
+                <a:latin typeface="Calibri"/>
+              </a:rPr>
+              <a:t>Prod-like</a:t>
+            </a:r>
+          </a:p>
+        </p:txBody>
+      </p:sp>
+      <p:sp>
+        <p:nvSpPr>
+          <p:cNvPr id="313" name="prod"/>
+          <p:cNvSpPr/>
+          <p:nvPr/>
+        </p:nvSpPr>
+        <p:spPr>
+          <a:xfrm>
+            <a:off x="7717536" y="5596128"/>
+            <a:ext cx="1234440" cy="868680"/>
+          </a:xfrm>
+          <a:prstGeom prst="roundRect">
+            <a:avLst>
+              <a:gd name="adj" fmla="val 12000"/>
+            </a:avLst>
+          </a:prstGeom>
+          <a:solidFill>
+            <a:srgbClr val="E4ECF5"/>
+          </a:solidFill>
+          <a:ln w="12700">
+            <a:solidFill>
+              <a:srgbClr val="C9D4E0"/>
+            </a:solidFill>
+          </a:ln>
+        </p:spPr>
+        <p:txBody>
+          <a:bodyPr/>
+          <a:lstStyle/>
+          <a:p>
+            <a:endParaRPr/>
+          </a:p>
+        </p:txBody>
+      </p:sp>
+      <p:sp>
+        <p:nvSpPr>
+          <p:cNvPr id="314" name="prodt"/>
+          <p:cNvSpPr txBox="1"/>
+          <p:nvPr/>
+        </p:nvSpPr>
+        <p:spPr>
+          <a:xfrm>
+            <a:off x="7717536" y="5596128"/>
+            <a:ext cx="1234440" cy="868680"/>
+          </a:xfrm>
+          <a:prstGeom prst="rect">
+            <a:avLst/>
+          </a:prstGeom>
+          <a:noFill/>
+        </p:spPr>
+        <p:txBody>
+          <a:bodyPr wrap="square" anchor="ctr">
+            <a:normAutofit/>
+          </a:bodyPr>
+          <a:lstStyle/>
+          <a:p>
+            <a:pPr algn="ctr"/>
+            <a:r>
+              <a:rPr lang="en-US" sz="1500" b="1">
+                <a:solidFill>
+                  <a:srgbClr val="1B2836"/>
+                </a:solidFill>
+                <a:latin typeface="Calibri"/>
+              </a:rPr>
+              <a:t>PROD</a:t>
+            </a:r>
+          </a:p>
+          <a:p>
+            <a:pPr algn="ctr"/>
+            <a:r>
+              <a:rPr lang="en-US" sz="950" b="0">
+                <a:solidFill>
+                  <a:srgbClr val="5A6B7D"/>
+                </a:solidFill>
+                <a:latin typeface="Calibri"/>
+              </a:rPr>
+              <a:t>Production</a:t>
+            </a:r>
+          </a:p>
+        </p:txBody>
+      </p:sp>
+      <p:cxnSp>
+        <p:nvCxnSpPr>
+          <p:cNvPr id="315" name="arr2"/>
+          <p:cNvCxnSpPr/>
+          <p:nvPr/>
+        </p:nvCxnSpPr>
+        <p:spPr>
+          <a:xfrm>
+            <a:off x="9025128" y="6021324"/>
+            <a:ext cx="457200" cy="1"/>
+          </a:xfrm>
+          <a:prstGeom prst="straightConnector1">
+            <a:avLst/>
+          </a:prstGeom>
+          <a:ln w="19050">
+            <a:solidFill>
+              <a:srgbClr val="2E7D5B"/>
+            </a:solidFill>
+            <a:tailEnd type="triangle"/>
+          </a:ln>
+        </p:spPr>
+      </p:cxnSp>
+      <p:sp>
+        <p:nvSpPr>
+          <p:cNvPr id="316" name="premtier"/>
+          <p:cNvSpPr/>
+          <p:nvPr/>
+        </p:nvSpPr>
+        <p:spPr>
+          <a:xfrm>
+            <a:off x="9592056" y="5596128"/>
+            <a:ext cx="1828800" cy="868680"/>
+          </a:xfrm>
+          <a:prstGeom prst="roundRect">
+            <a:avLst>
+              <a:gd name="adj" fmla="val 12000"/>
+            </a:avLst>
+          </a:prstGeom>
+          <a:solidFill>
+            <a:srgbClr val="0E3F6E"/>
+          </a:solidFill>
+          <a:ln w="12700">
+            <a:solidFill>
+              <a:srgbClr val="0E3F6E"/>
+            </a:solidFill>
+          </a:ln>
+        </p:spPr>
+        <p:txBody>
+          <a:bodyPr/>
+          <a:lstStyle/>
+          <a:p>
+            <a:endParaRPr/>
+          </a:p>
+        </p:txBody>
+      </p:sp>
+      <p:sp>
+        <p:nvSpPr>
+          <p:cNvPr id="317" name="premtiert"/>
+          <p:cNvSpPr txBox="1"/>
+          <p:nvPr/>
+        </p:nvSpPr>
+        <p:spPr>
+          <a:xfrm>
+            <a:off x="9592056" y="5596128"/>
+            <a:ext cx="1828800" cy="868680"/>
+          </a:xfrm>
+          <a:prstGeom prst="rect">
+            <a:avLst/>
+          </a:prstGeom>
+          <a:noFill/>
+        </p:spPr>
+        <p:txBody>
+          <a:bodyPr wrap="square" anchor="ctr">
+            <a:normAutofit/>
+          </a:bodyPr>
+          <a:lstStyle/>
+          <a:p>
+            <a:pPr algn="ctr"/>
+            <a:r>
+              <a:rPr lang="en-US" sz="1300" b="1">
+                <a:solidFill>
+                  <a:srgbClr val="FFFFFF"/>
+                </a:solidFill>
+                <a:latin typeface="Calibri"/>
+              </a:rPr>
+              <a:t>Premium v2</a:t>
+            </a:r>
+          </a:p>
+          <a:p>
+            <a:pPr algn="ctr"/>
+            <a:r>
+              <a:rPr lang="en-US" sz="950" b="0">
+                <a:solidFill>
+                  <a:srgbClr val="CBD9EA"/>
+                </a:solidFill>
+                <a:latin typeface="Calibri"/>
+              </a:rPr>
+              <a:t>VNet · internal · SLA</a:t>
+            </a:r>
           </a:p>
         </p:txBody>
       </p:sp>
